--- a/slides/pptx/week-03.pptx
+++ b/slides/pptx/week-03.pptx
@@ -12,9 +12,10 @@
     <p:sldId id="260" r:id="rId6"/>
     <p:sldId id="261" r:id="rId7"/>
     <p:sldId id="262" r:id="rId8"/>
+    <p:sldId id="263" r:id="rId9"/>
   </p:sldIdLst>
   <p:notesMasterIdLst>
-    <p:notesMasterId r:id="rId9"/>
+    <p:notesMasterId r:id="rId10"/>
   </p:notesMasterIdLst>
   <p:sldSz cx="12191695" cy="6858000"/>
   <p:notesSz cx="6858000" cy="12191695"/>
@@ -1078,6 +1079,94 @@
 </p:notes>
 </file>
 
+<file path=ppt/notesSlides/notesSlide8.xml><?xml version="1.0" encoding="utf-8"?>
+<p:notes xmlns:a="http://schemas.openxmlformats.org/drawingml/2006/main" xmlns:r="http://schemas.openxmlformats.org/officeDocument/2006/relationships" xmlns:p="http://schemas.openxmlformats.org/presentationml/2006/main">
+  <p:cSld>
+    <p:spTree>
+      <p:nvGrpSpPr>
+        <p:cNvPr id="1" name=""/>
+        <p:cNvGrpSpPr/>
+        <p:nvPr/>
+      </p:nvGrpSpPr>
+      <p:grpSpPr>
+        <a:xfrm>
+          <a:off x="0" y="0"/>
+          <a:ext cx="0" cy="0"/>
+          <a:chOff x="0" y="0"/>
+          <a:chExt cx="0" cy="0"/>
+        </a:xfrm>
+      </p:grpSpPr>
+      <p:sp>
+        <p:nvSpPr>
+          <p:cNvPr id="2" name="Slide Image Placeholder 1"/>
+          <p:cNvSpPr>
+            <a:spLocks noGrp="1" noRot="1" noChangeAspect="1"/>
+          </p:cNvSpPr>
+          <p:nvPr>
+            <p:ph type="sldImg"/>
+          </p:nvPr>
+        </p:nvSpPr>
+        <p:spPr/>
+      </p:sp>
+      <p:sp>
+        <p:nvSpPr>
+          <p:cNvPr id="3" name="Notes Placeholder 2"/>
+          <p:cNvSpPr>
+            <a:spLocks noGrp="1"/>
+          </p:cNvSpPr>
+          <p:nvPr>
+            <p:ph type="body" idx="1"/>
+          </p:nvPr>
+        </p:nvSpPr>
+        <p:spPr/>
+        <p:txBody>
+          <a:bodyPr/>
+          <a:lstStyle/>
+          <a:p>
+            <a:r>
+              <a:rPr lang="en-US" dirty="0"/>
+              <a:t/>
+            </a:r>
+            <a:endParaRPr lang="en-US" dirty="0"/>
+          </a:p>
+        </p:txBody>
+      </p:sp>
+      <p:sp>
+        <p:nvSpPr>
+          <p:cNvPr id="4" name="Slide Number Placeholder 3"/>
+          <p:cNvSpPr>
+            <a:spLocks noGrp="1"/>
+          </p:cNvSpPr>
+          <p:nvPr>
+            <p:ph type="sldNum" sz="quarter" idx="10"/>
+          </p:nvPr>
+        </p:nvSpPr>
+        <p:spPr/>
+        <p:txBody>
+          <a:bodyPr/>
+          <a:lstStyle/>
+          <a:p>
+            <a:fld id="{F7021451-1387-4CA6-816F-3879F97B5CBC}" type="slidenum">
+              <a:rPr lang="en-US"/>
+              <a:t>8</a:t>
+            </a:fld>
+            <a:endParaRPr lang="en-US"/>
+          </a:p>
+        </p:txBody>
+      </p:sp>
+    </p:spTree>
+    <p:extLst>
+      <p:ext uri="{BB962C8B-B14F-4D97-AF65-F5344CB8AC3E}">
+        <p14:creationId xmlns:p14="http://schemas.microsoft.com/office/powerpoint/2010/main" val="1024086991"/>
+      </p:ext>
+    </p:extLst>
+  </p:cSld>
+  <p:clrMapOvr>
+    <a:masterClrMapping/>
+  </p:clrMapOvr>
+</p:notes>
+</file>
+
 <file path=ppt/slideLayouts/slideLayout1.xml><?xml version="1.0" encoding="utf-8"?>
 <p:sldLayout xmlns:a="http://schemas.openxmlformats.org/drawingml/2006/main" xmlns:r="http://schemas.openxmlformats.org/officeDocument/2006/relationships" xmlns:p="http://schemas.openxmlformats.org/presentationml/2006/main" preserve="1">
   <p:cSld name="DEFAULT">
@@ -4294,6 +4383,548 @@
 <file path=ppt/slides/slide7.xml><?xml version="1.0" encoding="utf-8"?>
 <p:sld xmlns:a="http://schemas.openxmlformats.org/drawingml/2006/main" xmlns:r="http://schemas.openxmlformats.org/officeDocument/2006/relationships" xmlns:p="http://schemas.openxmlformats.org/presentationml/2006/main">
   <p:cSld name="Slide 7">
+    <p:bg>
+      <p:bgPr>
+        <a:solidFill>
+          <a:srgbClr val="FFFFFF"/>
+        </a:solidFill>
+      </p:bgPr>
+    </p:bg>
+    <p:spTree>
+      <p:nvGrpSpPr>
+        <p:cNvPr id="1" name=""/>
+        <p:cNvGrpSpPr/>
+        <p:nvPr/>
+      </p:nvGrpSpPr>
+      <p:grpSpPr>
+        <a:xfrm>
+          <a:off x="0" y="0"/>
+          <a:ext cx="0" cy="0"/>
+          <a:chOff x="0" y="0"/>
+          <a:chExt cx="0" cy="0"/>
+        </a:xfrm>
+      </p:grpSpPr>
+      <p:sp>
+        <p:nvSpPr>
+          <p:cNvPr id="2" name="Text 0"/>
+          <p:cNvSpPr/>
+          <p:nvPr/>
+        </p:nvSpPr>
+        <p:spPr>
+          <a:xfrm>
+            <a:off x="640080" y="640080"/>
+            <a:ext cx="10058400" cy="320040"/>
+          </a:xfrm>
+          <a:prstGeom prst="rect">
+            <a:avLst/>
+          </a:prstGeom>
+          <a:noFill/>
+          <a:ln/>
+        </p:spPr>
+        <p:txBody>
+          <a:bodyPr wrap="square" rtlCol="0" anchor="ctr"/>
+          <a:lstStyle/>
+          <a:p>
+            <a:pPr indent="0" marL="0">
+              <a:buNone/>
+            </a:pPr>
+            <a:r>
+              <a:rPr lang="en-US" sz="1300" b="1" spc="300" kern="0" dirty="0">
+                <a:solidFill>
+                  <a:srgbClr val="7A3B2E"/>
+                </a:solidFill>
+                <a:latin typeface="Calibri" pitchFamily="34" charset="0"/>
+                <a:ea typeface="Calibri" pitchFamily="34" charset="-122"/>
+                <a:cs typeface="Calibri" pitchFamily="34" charset="-120"/>
+              </a:rPr>
+              <a:t>HOW THIS WEEK CONNECTS</a:t>
+            </a:r>
+            <a:endParaRPr lang="en-US" sz="1300" dirty="0"/>
+          </a:p>
+        </p:txBody>
+      </p:sp>
+      <p:sp>
+        <p:nvSpPr>
+          <p:cNvPr id="3" name="Text 1"/>
+          <p:cNvSpPr/>
+          <p:nvPr/>
+        </p:nvSpPr>
+        <p:spPr>
+          <a:xfrm>
+            <a:off x="640080" y="987552"/>
+            <a:ext cx="10058400" cy="640080"/>
+          </a:xfrm>
+          <a:prstGeom prst="rect">
+            <a:avLst/>
+          </a:prstGeom>
+          <a:noFill/>
+          <a:ln/>
+        </p:spPr>
+        <p:txBody>
+          <a:bodyPr wrap="square" rtlCol="0" anchor="ctr"/>
+          <a:lstStyle/>
+          <a:p>
+            <a:pPr indent="0" marL="0">
+              <a:buNone/>
+            </a:pPr>
+            <a:r>
+              <a:rPr lang="en-US" sz="2800" b="1" dirty="0">
+                <a:solidFill>
+                  <a:srgbClr val="1A1A1A"/>
+                </a:solidFill>
+                <a:latin typeface="Cambria" pitchFamily="34" charset="0"/>
+                <a:ea typeface="Cambria" pitchFamily="34" charset="-122"/>
+                <a:cs typeface="Cambria" pitchFamily="34" charset="-120"/>
+              </a:rPr>
+              <a:t>The course's through-lines</a:t>
+            </a:r>
+            <a:endParaRPr lang="en-US" sz="2800" dirty="0"/>
+          </a:p>
+        </p:txBody>
+      </p:sp>
+      <p:sp>
+        <p:nvSpPr>
+          <p:cNvPr id="4" name="Shape 2"/>
+          <p:cNvSpPr/>
+          <p:nvPr/>
+        </p:nvSpPr>
+        <p:spPr>
+          <a:xfrm>
+            <a:off x="640080" y="2057400"/>
+            <a:ext cx="457200" cy="457200"/>
+          </a:xfrm>
+          <a:prstGeom prst="roundRect">
+            <a:avLst>
+              <a:gd name="adj" fmla="val 16000"/>
+            </a:avLst>
+          </a:prstGeom>
+          <a:solidFill>
+            <a:srgbClr val="7A3B2E"/>
+          </a:solidFill>
+          <a:ln/>
+        </p:spPr>
+      </p:sp>
+      <p:sp>
+        <p:nvSpPr>
+          <p:cNvPr id="5" name="Text 3"/>
+          <p:cNvSpPr/>
+          <p:nvPr/>
+        </p:nvSpPr>
+        <p:spPr>
+          <a:xfrm>
+            <a:off x="640080" y="2057400"/>
+            <a:ext cx="457200" cy="457200"/>
+          </a:xfrm>
+          <a:prstGeom prst="rect">
+            <a:avLst/>
+          </a:prstGeom>
+          <a:noFill/>
+          <a:ln/>
+        </p:spPr>
+        <p:txBody>
+          <a:bodyPr wrap="square" rtlCol="0" anchor="ctr"/>
+          <a:lstStyle/>
+          <a:p>
+            <a:pPr algn="ctr" indent="0" marL="0">
+              <a:buNone/>
+            </a:pPr>
+            <a:r>
+              <a:rPr lang="en-US" sz="2000" b="1" dirty="0">
+                <a:solidFill>
+                  <a:srgbClr val="FFFFFF"/>
+                </a:solidFill>
+                <a:latin typeface="Cambria" pitchFamily="34" charset="0"/>
+                <a:ea typeface="Cambria" pitchFamily="34" charset="-122"/>
+                <a:cs typeface="Cambria" pitchFamily="34" charset="-120"/>
+              </a:rPr>
+              <a:t>1</a:t>
+            </a:r>
+            <a:endParaRPr lang="en-US" sz="2000" dirty="0"/>
+          </a:p>
+        </p:txBody>
+      </p:sp>
+      <p:sp>
+        <p:nvSpPr>
+          <p:cNvPr id="6" name="Text 4"/>
+          <p:cNvSpPr/>
+          <p:nvPr/>
+        </p:nvSpPr>
+        <p:spPr>
+          <a:xfrm>
+            <a:off x="1371600" y="2020824"/>
+            <a:ext cx="10332720" cy="411480"/>
+          </a:xfrm>
+          <a:prstGeom prst="rect">
+            <a:avLst/>
+          </a:prstGeom>
+          <a:noFill/>
+          <a:ln/>
+        </p:spPr>
+        <p:txBody>
+          <a:bodyPr wrap="square" rtlCol="0" anchor="ctr"/>
+          <a:lstStyle/>
+          <a:p>
+            <a:pPr indent="0" marL="0">
+              <a:buNone/>
+            </a:pPr>
+            <a:r>
+              <a:rPr lang="en-US" sz="1900" b="1" dirty="0">
+                <a:solidFill>
+                  <a:srgbClr val="7A3B2E"/>
+                </a:solidFill>
+                <a:latin typeface="Cambria" pitchFamily="34" charset="0"/>
+                <a:ea typeface="Cambria" pitchFamily="34" charset="-122"/>
+                <a:cs typeface="Cambria" pitchFamily="34" charset="-120"/>
+              </a:rPr>
+              <a:t>The reader you can see</a:t>
+            </a:r>
+            <a:endParaRPr lang="en-US" sz="1900" dirty="0"/>
+          </a:p>
+        </p:txBody>
+      </p:sp>
+      <p:sp>
+        <p:nvSpPr>
+          <p:cNvPr id="7" name="Text 5"/>
+          <p:cNvSpPr/>
+          <p:nvPr/>
+        </p:nvSpPr>
+        <p:spPr>
+          <a:xfrm>
+            <a:off x="1371600" y="2441448"/>
+            <a:ext cx="10332720" cy="914400"/>
+          </a:xfrm>
+          <a:prstGeom prst="rect">
+            <a:avLst/>
+          </a:prstGeom>
+          <a:noFill/>
+          <a:ln/>
+        </p:spPr>
+        <p:txBody>
+          <a:bodyPr wrap="square" rtlCol="0" anchor="t">
+            <a:spAutoFit/>
+          </a:bodyPr>
+          <a:lstStyle/>
+          <a:p>
+            <a:pPr indent="0" marL="0">
+              <a:lnSpc>
+                <a:spcPct val="112000"/>
+              </a:lnSpc>
+              <a:buNone/>
+            </a:pPr>
+            <a:r>
+              <a:rPr lang="en-US" sz="1450" dirty="0">
+                <a:solidFill>
+                  <a:srgbClr val="1A1A1A"/>
+                </a:solidFill>
+                <a:latin typeface="Calibri" pitchFamily="34" charset="0"/>
+                <a:ea typeface="Calibri" pitchFamily="34" charset="-122"/>
+                <a:cs typeface="Calibri" pitchFamily="34" charset="-120"/>
+              </a:rPr>
+              <a:t>The transparent classifier: read its signed weights, its mind on the table. Week 7 brings the opaque one.</a:t>
+            </a:r>
+            <a:endParaRPr lang="en-US" sz="1450" dirty="0"/>
+          </a:p>
+        </p:txBody>
+      </p:sp>
+      <p:sp>
+        <p:nvSpPr>
+          <p:cNvPr id="8" name="Shape 6"/>
+          <p:cNvSpPr/>
+          <p:nvPr/>
+        </p:nvSpPr>
+        <p:spPr>
+          <a:xfrm>
+            <a:off x="640080" y="3520440"/>
+            <a:ext cx="457200" cy="457200"/>
+          </a:xfrm>
+          <a:prstGeom prst="roundRect">
+            <a:avLst>
+              <a:gd name="adj" fmla="val 16000"/>
+            </a:avLst>
+          </a:prstGeom>
+          <a:solidFill>
+            <a:srgbClr val="3F6F5F"/>
+          </a:solidFill>
+          <a:ln/>
+        </p:spPr>
+      </p:sp>
+      <p:sp>
+        <p:nvSpPr>
+          <p:cNvPr id="9" name="Text 7"/>
+          <p:cNvSpPr/>
+          <p:nvPr/>
+        </p:nvSpPr>
+        <p:spPr>
+          <a:xfrm>
+            <a:off x="640080" y="3520440"/>
+            <a:ext cx="457200" cy="457200"/>
+          </a:xfrm>
+          <a:prstGeom prst="rect">
+            <a:avLst/>
+          </a:prstGeom>
+          <a:noFill/>
+          <a:ln/>
+        </p:spPr>
+        <p:txBody>
+          <a:bodyPr wrap="square" rtlCol="0" anchor="ctr"/>
+          <a:lstStyle/>
+          <a:p>
+            <a:pPr algn="ctr" indent="0" marL="0">
+              <a:buNone/>
+            </a:pPr>
+            <a:r>
+              <a:rPr lang="en-US" sz="2000" b="1" dirty="0">
+                <a:solidFill>
+                  <a:srgbClr val="FFFFFF"/>
+                </a:solidFill>
+                <a:latin typeface="Cambria" pitchFamily="34" charset="0"/>
+                <a:ea typeface="Cambria" pitchFamily="34" charset="-122"/>
+                <a:cs typeface="Cambria" pitchFamily="34" charset="-120"/>
+              </a:rPr>
+              <a:t>2</a:t>
+            </a:r>
+            <a:endParaRPr lang="en-US" sz="2000" dirty="0"/>
+          </a:p>
+        </p:txBody>
+      </p:sp>
+      <p:sp>
+        <p:nvSpPr>
+          <p:cNvPr id="10" name="Text 8"/>
+          <p:cNvSpPr/>
+          <p:nvPr/>
+        </p:nvSpPr>
+        <p:spPr>
+          <a:xfrm>
+            <a:off x="1371600" y="3483864"/>
+            <a:ext cx="10332720" cy="411480"/>
+          </a:xfrm>
+          <a:prstGeom prst="rect">
+            <a:avLst/>
+          </a:prstGeom>
+          <a:noFill/>
+          <a:ln/>
+        </p:spPr>
+        <p:txBody>
+          <a:bodyPr wrap="square" rtlCol="0" anchor="ctr"/>
+          <a:lstStyle/>
+          <a:p>
+            <a:pPr indent="0" marL="0">
+              <a:buNone/>
+            </a:pPr>
+            <a:r>
+              <a:rPr lang="en-US" sz="1900" b="1" dirty="0">
+                <a:solidFill>
+                  <a:srgbClr val="3F6F5F"/>
+                </a:solidFill>
+                <a:latin typeface="Cambria" pitchFamily="34" charset="0"/>
+                <a:ea typeface="Cambria" pitchFamily="34" charset="-122"/>
+                <a:cs typeface="Cambria" pitchFamily="34" charset="-120"/>
+              </a:rPr>
+              <a:t>You taught it the bias</a:t>
+            </a:r>
+            <a:endParaRPr lang="en-US" sz="1900" dirty="0"/>
+          </a:p>
+        </p:txBody>
+      </p:sp>
+      <p:sp>
+        <p:nvSpPr>
+          <p:cNvPr id="11" name="Text 9"/>
+          <p:cNvSpPr/>
+          <p:nvPr/>
+        </p:nvSpPr>
+        <p:spPr>
+          <a:xfrm>
+            <a:off x="1371600" y="3904488"/>
+            <a:ext cx="10332720" cy="914400"/>
+          </a:xfrm>
+          <a:prstGeom prst="rect">
+            <a:avLst/>
+          </a:prstGeom>
+          <a:noFill/>
+          <a:ln/>
+        </p:spPr>
+        <p:txBody>
+          <a:bodyPr wrap="square" rtlCol="0" anchor="t">
+            <a:spAutoFit/>
+          </a:bodyPr>
+          <a:lstStyle/>
+          <a:p>
+            <a:pPr indent="0" marL="0">
+              <a:lnSpc>
+                <a:spcPct val="112000"/>
+              </a:lnSpc>
+              <a:buNone/>
+            </a:pPr>
+            <a:r>
+              <a:rPr lang="en-US" sz="1450" dirty="0">
+                <a:solidFill>
+                  <a:srgbClr val="1A1A1A"/>
+                </a:solidFill>
+                <a:latin typeface="Calibri" pitchFamily="34" charset="0"/>
+                <a:ea typeface="Calibri" pitchFamily="34" charset="-122"/>
+                <a:cs typeface="Calibri" pitchFamily="34" charset="-120"/>
+              </a:rPr>
+              <a:t>The Teachable Machine reveal, a training set teaches a machine its prejudice.</a:t>
+            </a:r>
+            <a:endParaRPr lang="en-US" sz="1450" dirty="0"/>
+          </a:p>
+        </p:txBody>
+      </p:sp>
+      <p:sp>
+        <p:nvSpPr>
+          <p:cNvPr id="12" name="Shape 10"/>
+          <p:cNvSpPr/>
+          <p:nvPr/>
+        </p:nvSpPr>
+        <p:spPr>
+          <a:xfrm>
+            <a:off x="640080" y="4983480"/>
+            <a:ext cx="457200" cy="457200"/>
+          </a:xfrm>
+          <a:prstGeom prst="roundRect">
+            <a:avLst>
+              <a:gd name="adj" fmla="val 16000"/>
+            </a:avLst>
+          </a:prstGeom>
+          <a:solidFill>
+            <a:srgbClr val="B9852F"/>
+          </a:solidFill>
+          <a:ln/>
+        </p:spPr>
+      </p:sp>
+      <p:sp>
+        <p:nvSpPr>
+          <p:cNvPr id="13" name="Text 11"/>
+          <p:cNvSpPr/>
+          <p:nvPr/>
+        </p:nvSpPr>
+        <p:spPr>
+          <a:xfrm>
+            <a:off x="640080" y="4983480"/>
+            <a:ext cx="457200" cy="457200"/>
+          </a:xfrm>
+          <a:prstGeom prst="rect">
+            <a:avLst/>
+          </a:prstGeom>
+          <a:noFill/>
+          <a:ln/>
+        </p:spPr>
+        <p:txBody>
+          <a:bodyPr wrap="square" rtlCol="0" anchor="ctr"/>
+          <a:lstStyle/>
+          <a:p>
+            <a:pPr algn="ctr" indent="0" marL="0">
+              <a:buNone/>
+            </a:pPr>
+            <a:r>
+              <a:rPr lang="en-US" sz="2000" b="1" dirty="0">
+                <a:solidFill>
+                  <a:srgbClr val="FFFFFF"/>
+                </a:solidFill>
+                <a:latin typeface="Cambria" pitchFamily="34" charset="0"/>
+                <a:ea typeface="Cambria" pitchFamily="34" charset="-122"/>
+                <a:cs typeface="Cambria" pitchFamily="34" charset="-120"/>
+              </a:rPr>
+              <a:t>3</a:t>
+            </a:r>
+            <a:endParaRPr lang="en-US" sz="2000" dirty="0"/>
+          </a:p>
+        </p:txBody>
+      </p:sp>
+      <p:sp>
+        <p:nvSpPr>
+          <p:cNvPr id="14" name="Text 12"/>
+          <p:cNvSpPr/>
+          <p:nvPr/>
+        </p:nvSpPr>
+        <p:spPr>
+          <a:xfrm>
+            <a:off x="1371600" y="4946904"/>
+            <a:ext cx="10332720" cy="411480"/>
+          </a:xfrm>
+          <a:prstGeom prst="rect">
+            <a:avLst/>
+          </a:prstGeom>
+          <a:noFill/>
+          <a:ln/>
+        </p:spPr>
+        <p:txBody>
+          <a:bodyPr wrap="square" rtlCol="0" anchor="ctr"/>
+          <a:lstStyle/>
+          <a:p>
+            <a:pPr indent="0" marL="0">
+              <a:buNone/>
+            </a:pPr>
+            <a:r>
+              <a:rPr lang="en-US" sz="1900" b="1" dirty="0">
+                <a:solidFill>
+                  <a:srgbClr val="B9852F"/>
+                </a:solidFill>
+                <a:latin typeface="Cambria" pitchFamily="34" charset="0"/>
+                <a:ea typeface="Cambria" pitchFamily="34" charset="-122"/>
+                <a:cs typeface="Cambria" pitchFamily="34" charset="-120"/>
+              </a:rPr>
+              <a:t>Every choice is a choice</a:t>
+            </a:r>
+            <a:endParaRPr lang="en-US" sz="1900" dirty="0"/>
+          </a:p>
+        </p:txBody>
+      </p:sp>
+      <p:sp>
+        <p:nvSpPr>
+          <p:cNvPr id="15" name="Text 13"/>
+          <p:cNvSpPr/>
+          <p:nvPr/>
+        </p:nvSpPr>
+        <p:spPr>
+          <a:xfrm>
+            <a:off x="1371600" y="5367528"/>
+            <a:ext cx="10332720" cy="914400"/>
+          </a:xfrm>
+          <a:prstGeom prst="rect">
+            <a:avLst/>
+          </a:prstGeom>
+          <a:noFill/>
+          <a:ln/>
+        </p:spPr>
+        <p:txBody>
+          <a:bodyPr wrap="square" rtlCol="0" anchor="t">
+            <a:spAutoFit/>
+          </a:bodyPr>
+          <a:lstStyle/>
+          <a:p>
+            <a:pPr indent="0" marL="0">
+              <a:lnSpc>
+                <a:spcPct val="112000"/>
+              </a:lnSpc>
+              <a:buNone/>
+            </a:pPr>
+            <a:r>
+              <a:rPr lang="en-US" sz="1450" dirty="0">
+                <a:solidFill>
+                  <a:srgbClr val="1A1A1A"/>
+                </a:solidFill>
+                <a:latin typeface="Calibri" pitchFamily="34" charset="0"/>
+                <a:ea typeface="Calibri" pitchFamily="34" charset="-122"/>
+                <a:cs typeface="Calibri" pitchFamily="34" charset="-120"/>
+              </a:rPr>
+              <a:t>What counts as a label, and which words you hand it, decide what it learns.</a:t>
+            </a:r>
+            <a:endParaRPr lang="en-US" sz="1450" dirty="0"/>
+          </a:p>
+        </p:txBody>
+      </p:sp>
+    </p:spTree>
+  </p:cSld>
+  <p:clrMapOvr>
+    <a:masterClrMapping/>
+  </p:clrMapOvr>
+</p:sld>
+</file>
+
+<file path=ppt/slides/slide8.xml><?xml version="1.0" encoding="utf-8"?>
+<p:sld xmlns:a="http://schemas.openxmlformats.org/drawingml/2006/main" xmlns:r="http://schemas.openxmlformats.org/officeDocument/2006/relationships" xmlns:p="http://schemas.openxmlformats.org/presentationml/2006/main">
+  <p:cSld name="Slide 8">
     <p:bg>
       <p:bgPr>
         <a:solidFill>

--- a/slides/pptx/week-03.pptx
+++ b/slides/pptx/week-03.pptx
@@ -2245,7 +2245,7 @@
                 <a:ea typeface="Calibri" pitchFamily="34" charset="-122"/>
                 <a:cs typeface="Calibri" pitchFamily="34" charset="-120"/>
               </a:rPr>
-              <a:t>Lincoln Mullen, America's Public Bible (2023), a classifier that finds biblical quotations across millions of newspaper pages.</a:t>
+              <a:t>Ted Underwood's genre prediction (Distant Horizons, 2019): a logistic regression, the exact tool of today's lab, trained to recognize detective fiction and science fiction across a century of novels.</a:t>
             </a:r>
             <a:endParaRPr lang="en-US" sz="1900" dirty="0"/>
           </a:p>
@@ -2421,7 +2421,7 @@
                 <a:ea typeface="Calibri" pitchFamily="34" charset="-122"/>
                 <a:cs typeface="Calibri" pitchFamily="34" charset="-120"/>
               </a:rPr>
-              <a:t>What counts as a quotation, a four-word echo, a loose paraphrase?, is a definition the scholar chose, and it shapes every result. The model reads the same messy digitized text your own project will.</a:t>
+              <a:t>What counts as science fiction is a choice built into the training labels. And the model's most famous error, misreading Pynchon's The Crying of Lot 49, a detective-fiction spoof, shows genre boundaries are real but fuzzy. A classifier's mistakes teach as much as its successes; yours will too.</a:t>
             </a:r>
             <a:endParaRPr lang="en-US" sz="2000" dirty="0"/>
           </a:p>
@@ -3079,7 +3079,7 @@
                 <a:ea typeface="Calibri" pitchFamily="34" charset="-122"/>
                 <a:cs typeface="Calibri" pitchFamily="34" charset="-120"/>
               </a:rPr>
-              <a:t>Warm-up + Look at This: Mullen's America's Public Bible.</a:t>
+              <a:t>Warm-up + Look at This: Underwood's genre prediction.</a:t>
             </a:r>
             <a:endParaRPr lang="en-US" sz="1100" dirty="0"/>
           </a:p>

--- a/slides/pptx/week-03.pptx
+++ b/slides/pptx/week-03.pptx
@@ -13,9 +13,13 @@
     <p:sldId id="261" r:id="rId7"/>
     <p:sldId id="262" r:id="rId8"/>
     <p:sldId id="263" r:id="rId9"/>
+    <p:sldId id="264" r:id="rId10"/>
+    <p:sldId id="265" r:id="rId11"/>
+    <p:sldId id="266" r:id="rId12"/>
+    <p:sldId id="267" r:id="rId13"/>
   </p:sldIdLst>
   <p:notesMasterIdLst>
-    <p:notesMasterId r:id="rId10"/>
+    <p:notesMasterId r:id="rId14"/>
   </p:notesMasterIdLst>
   <p:sldSz cx="12191695" cy="6858000"/>
   <p:notesSz cx="6858000" cy="12191695"/>
@@ -551,6 +555,270 @@
 </p:notes>
 </file>
 
+<file path=ppt/notesSlides/notesSlide10.xml><?xml version="1.0" encoding="utf-8"?>
+<p:notes xmlns:a="http://schemas.openxmlformats.org/drawingml/2006/main" xmlns:r="http://schemas.openxmlformats.org/officeDocument/2006/relationships" xmlns:p="http://schemas.openxmlformats.org/presentationml/2006/main">
+  <p:cSld>
+    <p:spTree>
+      <p:nvGrpSpPr>
+        <p:cNvPr id="1" name=""/>
+        <p:cNvGrpSpPr/>
+        <p:nvPr/>
+      </p:nvGrpSpPr>
+      <p:grpSpPr>
+        <a:xfrm>
+          <a:off x="0" y="0"/>
+          <a:ext cx="0" cy="0"/>
+          <a:chOff x="0" y="0"/>
+          <a:chExt cx="0" cy="0"/>
+        </a:xfrm>
+      </p:grpSpPr>
+      <p:sp>
+        <p:nvSpPr>
+          <p:cNvPr id="2" name="Slide Image Placeholder 1"/>
+          <p:cNvSpPr>
+            <a:spLocks noGrp="1" noRot="1" noChangeAspect="1"/>
+          </p:cNvSpPr>
+          <p:nvPr>
+            <p:ph type="sldImg"/>
+          </p:nvPr>
+        </p:nvSpPr>
+        <p:spPr/>
+      </p:sp>
+      <p:sp>
+        <p:nvSpPr>
+          <p:cNvPr id="3" name="Notes Placeholder 2"/>
+          <p:cNvSpPr>
+            <a:spLocks noGrp="1"/>
+          </p:cNvSpPr>
+          <p:nvPr>
+            <p:ph type="body" idx="1"/>
+          </p:nvPr>
+        </p:nvSpPr>
+        <p:spPr/>
+        <p:txBody>
+          <a:bodyPr/>
+          <a:lstStyle/>
+          <a:p>
+            <a:r>
+              <a:rPr lang="en-US" dirty="0"/>
+              <a:t/>
+            </a:r>
+            <a:endParaRPr lang="en-US" dirty="0"/>
+          </a:p>
+        </p:txBody>
+      </p:sp>
+      <p:sp>
+        <p:nvSpPr>
+          <p:cNvPr id="4" name="Slide Number Placeholder 3"/>
+          <p:cNvSpPr>
+            <a:spLocks noGrp="1"/>
+          </p:cNvSpPr>
+          <p:nvPr>
+            <p:ph type="sldNum" sz="quarter" idx="10"/>
+          </p:nvPr>
+        </p:nvSpPr>
+        <p:spPr/>
+        <p:txBody>
+          <a:bodyPr/>
+          <a:lstStyle/>
+          <a:p>
+            <a:fld id="{F7021451-1387-4CA6-816F-3879F97B5CBC}" type="slidenum">
+              <a:rPr lang="en-US"/>
+              <a:t>10</a:t>
+            </a:fld>
+            <a:endParaRPr lang="en-US"/>
+          </a:p>
+        </p:txBody>
+      </p:sp>
+    </p:spTree>
+    <p:extLst>
+      <p:ext uri="{BB962C8B-B14F-4D97-AF65-F5344CB8AC3E}">
+        <p14:creationId xmlns:p14="http://schemas.microsoft.com/office/powerpoint/2010/main" val="1024086991"/>
+      </p:ext>
+    </p:extLst>
+  </p:cSld>
+  <p:clrMapOvr>
+    <a:masterClrMapping/>
+  </p:clrMapOvr>
+</p:notes>
+</file>
+
+<file path=ppt/notesSlides/notesSlide11.xml><?xml version="1.0" encoding="utf-8"?>
+<p:notes xmlns:a="http://schemas.openxmlformats.org/drawingml/2006/main" xmlns:r="http://schemas.openxmlformats.org/officeDocument/2006/relationships" xmlns:p="http://schemas.openxmlformats.org/presentationml/2006/main">
+  <p:cSld>
+    <p:spTree>
+      <p:nvGrpSpPr>
+        <p:cNvPr id="1" name=""/>
+        <p:cNvGrpSpPr/>
+        <p:nvPr/>
+      </p:nvGrpSpPr>
+      <p:grpSpPr>
+        <a:xfrm>
+          <a:off x="0" y="0"/>
+          <a:ext cx="0" cy="0"/>
+          <a:chOff x="0" y="0"/>
+          <a:chExt cx="0" cy="0"/>
+        </a:xfrm>
+      </p:grpSpPr>
+      <p:sp>
+        <p:nvSpPr>
+          <p:cNvPr id="2" name="Slide Image Placeholder 1"/>
+          <p:cNvSpPr>
+            <a:spLocks noGrp="1" noRot="1" noChangeAspect="1"/>
+          </p:cNvSpPr>
+          <p:nvPr>
+            <p:ph type="sldImg"/>
+          </p:nvPr>
+        </p:nvSpPr>
+        <p:spPr/>
+      </p:sp>
+      <p:sp>
+        <p:nvSpPr>
+          <p:cNvPr id="3" name="Notes Placeholder 2"/>
+          <p:cNvSpPr>
+            <a:spLocks noGrp="1"/>
+          </p:cNvSpPr>
+          <p:nvPr>
+            <p:ph type="body" idx="1"/>
+          </p:nvPr>
+        </p:nvSpPr>
+        <p:spPr/>
+        <p:txBody>
+          <a:bodyPr/>
+          <a:lstStyle/>
+          <a:p>
+            <a:r>
+              <a:rPr lang="en-US" dirty="0"/>
+              <a:t/>
+            </a:r>
+            <a:endParaRPr lang="en-US" dirty="0"/>
+          </a:p>
+        </p:txBody>
+      </p:sp>
+      <p:sp>
+        <p:nvSpPr>
+          <p:cNvPr id="4" name="Slide Number Placeholder 3"/>
+          <p:cNvSpPr>
+            <a:spLocks noGrp="1"/>
+          </p:cNvSpPr>
+          <p:nvPr>
+            <p:ph type="sldNum" sz="quarter" idx="10"/>
+          </p:nvPr>
+        </p:nvSpPr>
+        <p:spPr/>
+        <p:txBody>
+          <a:bodyPr/>
+          <a:lstStyle/>
+          <a:p>
+            <a:fld id="{F7021451-1387-4CA6-816F-3879F97B5CBC}" type="slidenum">
+              <a:rPr lang="en-US"/>
+              <a:t>11</a:t>
+            </a:fld>
+            <a:endParaRPr lang="en-US"/>
+          </a:p>
+        </p:txBody>
+      </p:sp>
+    </p:spTree>
+    <p:extLst>
+      <p:ext uri="{BB962C8B-B14F-4D97-AF65-F5344CB8AC3E}">
+        <p14:creationId xmlns:p14="http://schemas.microsoft.com/office/powerpoint/2010/main" val="1024086991"/>
+      </p:ext>
+    </p:extLst>
+  </p:cSld>
+  <p:clrMapOvr>
+    <a:masterClrMapping/>
+  </p:clrMapOvr>
+</p:notes>
+</file>
+
+<file path=ppt/notesSlides/notesSlide12.xml><?xml version="1.0" encoding="utf-8"?>
+<p:notes xmlns:a="http://schemas.openxmlformats.org/drawingml/2006/main" xmlns:r="http://schemas.openxmlformats.org/officeDocument/2006/relationships" xmlns:p="http://schemas.openxmlformats.org/presentationml/2006/main">
+  <p:cSld>
+    <p:spTree>
+      <p:nvGrpSpPr>
+        <p:cNvPr id="1" name=""/>
+        <p:cNvGrpSpPr/>
+        <p:nvPr/>
+      </p:nvGrpSpPr>
+      <p:grpSpPr>
+        <a:xfrm>
+          <a:off x="0" y="0"/>
+          <a:ext cx="0" cy="0"/>
+          <a:chOff x="0" y="0"/>
+          <a:chExt cx="0" cy="0"/>
+        </a:xfrm>
+      </p:grpSpPr>
+      <p:sp>
+        <p:nvSpPr>
+          <p:cNvPr id="2" name="Slide Image Placeholder 1"/>
+          <p:cNvSpPr>
+            <a:spLocks noGrp="1" noRot="1" noChangeAspect="1"/>
+          </p:cNvSpPr>
+          <p:nvPr>
+            <p:ph type="sldImg"/>
+          </p:nvPr>
+        </p:nvSpPr>
+        <p:spPr/>
+      </p:sp>
+      <p:sp>
+        <p:nvSpPr>
+          <p:cNvPr id="3" name="Notes Placeholder 2"/>
+          <p:cNvSpPr>
+            <a:spLocks noGrp="1"/>
+          </p:cNvSpPr>
+          <p:nvPr>
+            <p:ph type="body" idx="1"/>
+          </p:nvPr>
+        </p:nvSpPr>
+        <p:spPr/>
+        <p:txBody>
+          <a:bodyPr/>
+          <a:lstStyle/>
+          <a:p>
+            <a:r>
+              <a:rPr lang="en-US" dirty="0"/>
+              <a:t/>
+            </a:r>
+            <a:endParaRPr lang="en-US" dirty="0"/>
+          </a:p>
+        </p:txBody>
+      </p:sp>
+      <p:sp>
+        <p:nvSpPr>
+          <p:cNvPr id="4" name="Slide Number Placeholder 3"/>
+          <p:cNvSpPr>
+            <a:spLocks noGrp="1"/>
+          </p:cNvSpPr>
+          <p:nvPr>
+            <p:ph type="sldNum" sz="quarter" idx="10"/>
+          </p:nvPr>
+        </p:nvSpPr>
+        <p:spPr/>
+        <p:txBody>
+          <a:bodyPr/>
+          <a:lstStyle/>
+          <a:p>
+            <a:fld id="{F7021451-1387-4CA6-816F-3879F97B5CBC}" type="slidenum">
+              <a:rPr lang="en-US"/>
+              <a:t>12</a:t>
+            </a:fld>
+            <a:endParaRPr lang="en-US"/>
+          </a:p>
+        </p:txBody>
+      </p:sp>
+    </p:spTree>
+    <p:extLst>
+      <p:ext uri="{BB962C8B-B14F-4D97-AF65-F5344CB8AC3E}">
+        <p14:creationId xmlns:p14="http://schemas.microsoft.com/office/powerpoint/2010/main" val="1024086991"/>
+      </p:ext>
+    </p:extLst>
+  </p:cSld>
+  <p:clrMapOvr>
+    <a:masterClrMapping/>
+  </p:clrMapOvr>
+</p:notes>
+</file>
+
 <file path=ppt/notesSlides/notesSlide2.xml><?xml version="1.0" encoding="utf-8"?>
 <p:notes xmlns:a="http://schemas.openxmlformats.org/drawingml/2006/main" xmlns:r="http://schemas.openxmlformats.org/officeDocument/2006/relationships" xmlns:p="http://schemas.openxmlformats.org/presentationml/2006/main">
   <p:cSld>
@@ -1149,6 +1417,94 @@
             <a:fld id="{F7021451-1387-4CA6-816F-3879F97B5CBC}" type="slidenum">
               <a:rPr lang="en-US"/>
               <a:t>8</a:t>
+            </a:fld>
+            <a:endParaRPr lang="en-US"/>
+          </a:p>
+        </p:txBody>
+      </p:sp>
+    </p:spTree>
+    <p:extLst>
+      <p:ext uri="{BB962C8B-B14F-4D97-AF65-F5344CB8AC3E}">
+        <p14:creationId xmlns:p14="http://schemas.microsoft.com/office/powerpoint/2010/main" val="1024086991"/>
+      </p:ext>
+    </p:extLst>
+  </p:cSld>
+  <p:clrMapOvr>
+    <a:masterClrMapping/>
+  </p:clrMapOvr>
+</p:notes>
+</file>
+
+<file path=ppt/notesSlides/notesSlide9.xml><?xml version="1.0" encoding="utf-8"?>
+<p:notes xmlns:a="http://schemas.openxmlformats.org/drawingml/2006/main" xmlns:r="http://schemas.openxmlformats.org/officeDocument/2006/relationships" xmlns:p="http://schemas.openxmlformats.org/presentationml/2006/main">
+  <p:cSld>
+    <p:spTree>
+      <p:nvGrpSpPr>
+        <p:cNvPr id="1" name=""/>
+        <p:cNvGrpSpPr/>
+        <p:nvPr/>
+      </p:nvGrpSpPr>
+      <p:grpSpPr>
+        <a:xfrm>
+          <a:off x="0" y="0"/>
+          <a:ext cx="0" cy="0"/>
+          <a:chOff x="0" y="0"/>
+          <a:chExt cx="0" cy="0"/>
+        </a:xfrm>
+      </p:grpSpPr>
+      <p:sp>
+        <p:nvSpPr>
+          <p:cNvPr id="2" name="Slide Image Placeholder 1"/>
+          <p:cNvSpPr>
+            <a:spLocks noGrp="1" noRot="1" noChangeAspect="1"/>
+          </p:cNvSpPr>
+          <p:nvPr>
+            <p:ph type="sldImg"/>
+          </p:nvPr>
+        </p:nvSpPr>
+        <p:spPr/>
+      </p:sp>
+      <p:sp>
+        <p:nvSpPr>
+          <p:cNvPr id="3" name="Notes Placeholder 2"/>
+          <p:cNvSpPr>
+            <a:spLocks noGrp="1"/>
+          </p:cNvSpPr>
+          <p:nvPr>
+            <p:ph type="body" idx="1"/>
+          </p:nvPr>
+        </p:nvSpPr>
+        <p:spPr/>
+        <p:txBody>
+          <a:bodyPr/>
+          <a:lstStyle/>
+          <a:p>
+            <a:r>
+              <a:rPr lang="en-US" dirty="0"/>
+              <a:t/>
+            </a:r>
+            <a:endParaRPr lang="en-US" dirty="0"/>
+          </a:p>
+        </p:txBody>
+      </p:sp>
+      <p:sp>
+        <p:nvSpPr>
+          <p:cNvPr id="4" name="Slide Number Placeholder 3"/>
+          <p:cNvSpPr>
+            <a:spLocks noGrp="1"/>
+          </p:cNvSpPr>
+          <p:nvPr>
+            <p:ph type="sldNum" sz="quarter" idx="10"/>
+          </p:nvPr>
+        </p:nvSpPr>
+        <p:spPr/>
+        <p:txBody>
+          <a:bodyPr/>
+          <a:lstStyle/>
+          <a:p>
+            <a:fld id="{F7021451-1387-4CA6-816F-3879F97B5CBC}" type="slidenum">
+              <a:rPr lang="en-US"/>
+              <a:t>9</a:t>
             </a:fld>
             <a:endParaRPr lang="en-US"/>
           </a:p>
@@ -2025,6 +2381,1453 @@
 </p:sld>
 </file>
 
+<file path=ppt/slides/slide10.xml><?xml version="1.0" encoding="utf-8"?>
+<p:sld xmlns:a="http://schemas.openxmlformats.org/drawingml/2006/main" xmlns:r="http://schemas.openxmlformats.org/officeDocument/2006/relationships" xmlns:p="http://schemas.openxmlformats.org/presentationml/2006/main">
+  <p:cSld name="Slide 10">
+    <p:bg>
+      <p:bgPr>
+        <a:solidFill>
+          <a:srgbClr val="FFFFFF"/>
+        </a:solidFill>
+      </p:bgPr>
+    </p:bg>
+    <p:spTree>
+      <p:nvGrpSpPr>
+        <p:cNvPr id="1" name=""/>
+        <p:cNvGrpSpPr/>
+        <p:nvPr/>
+      </p:nvGrpSpPr>
+      <p:grpSpPr>
+        <a:xfrm>
+          <a:off x="0" y="0"/>
+          <a:ext cx="0" cy="0"/>
+          <a:chOff x="0" y="0"/>
+          <a:chExt cx="0" cy="0"/>
+        </a:xfrm>
+      </p:grpSpPr>
+      <p:sp>
+        <p:nvSpPr>
+          <p:cNvPr id="2" name="Text 0"/>
+          <p:cNvSpPr/>
+          <p:nvPr/>
+        </p:nvSpPr>
+        <p:spPr>
+          <a:xfrm>
+            <a:off x="640080" y="640080"/>
+            <a:ext cx="10058400" cy="731520"/>
+          </a:xfrm>
+          <a:prstGeom prst="rect">
+            <a:avLst/>
+          </a:prstGeom>
+          <a:noFill/>
+          <a:ln/>
+        </p:spPr>
+        <p:txBody>
+          <a:bodyPr wrap="square" rtlCol="0" anchor="ctr"/>
+          <a:lstStyle/>
+          <a:p>
+            <a:pPr indent="0" marL="0">
+              <a:buNone/>
+            </a:pPr>
+            <a:r>
+              <a:rPr lang="en-US" sz="3000" b="1" dirty="0">
+                <a:solidFill>
+                  <a:srgbClr val="1A1A1A"/>
+                </a:solidFill>
+                <a:latin typeface="Cambria" pitchFamily="34" charset="0"/>
+                <a:ea typeface="Cambria" pitchFamily="34" charset="-122"/>
+                <a:cs typeface="Cambria" pitchFamily="34" charset="-120"/>
+              </a:rPr>
+              <a:t>Reading &amp; homework</a:t>
+            </a:r>
+            <a:endParaRPr lang="en-US" sz="3000" dirty="0"/>
+          </a:p>
+        </p:txBody>
+      </p:sp>
+      <p:sp>
+        <p:nvSpPr>
+          <p:cNvPr id="3" name="Shape 1"/>
+          <p:cNvSpPr/>
+          <p:nvPr/>
+        </p:nvSpPr>
+        <p:spPr>
+          <a:xfrm>
+            <a:off x="640080" y="1810512"/>
+            <a:ext cx="219456" cy="219456"/>
+          </a:xfrm>
+          <a:prstGeom prst="ellipse">
+            <a:avLst/>
+          </a:prstGeom>
+          <a:solidFill>
+            <a:srgbClr val="7A3B2E"/>
+          </a:solidFill>
+          <a:ln/>
+        </p:spPr>
+      </p:sp>
+      <p:sp>
+        <p:nvSpPr>
+          <p:cNvPr id="4" name="Text 2"/>
+          <p:cNvSpPr/>
+          <p:nvPr/>
+        </p:nvSpPr>
+        <p:spPr>
+          <a:xfrm>
+            <a:off x="1051560" y="1737360"/>
+            <a:ext cx="10424160" cy="365760"/>
+          </a:xfrm>
+          <a:prstGeom prst="rect">
+            <a:avLst/>
+          </a:prstGeom>
+          <a:noFill/>
+          <a:ln/>
+        </p:spPr>
+        <p:txBody>
+          <a:bodyPr wrap="square" rtlCol="0" anchor="ctr"/>
+          <a:lstStyle/>
+          <a:p>
+            <a:pPr indent="0" marL="0">
+              <a:buNone/>
+            </a:pPr>
+            <a:r>
+              <a:rPr lang="en-US" sz="1500" b="1" dirty="0">
+                <a:solidFill>
+                  <a:srgbClr val="7A3B2E"/>
+                </a:solidFill>
+                <a:latin typeface="Calibri" pitchFamily="34" charset="0"/>
+                <a:ea typeface="Calibri" pitchFamily="34" charset="-122"/>
+                <a:cs typeface="Calibri" pitchFamily="34" charset="-120"/>
+              </a:rPr>
+              <a:t>Reading</a:t>
+            </a:r>
+            <a:endParaRPr lang="en-US" sz="1500" dirty="0"/>
+          </a:p>
+        </p:txBody>
+      </p:sp>
+      <p:sp>
+        <p:nvSpPr>
+          <p:cNvPr id="5" name="Text 3"/>
+          <p:cNvSpPr/>
+          <p:nvPr/>
+        </p:nvSpPr>
+        <p:spPr>
+          <a:xfrm>
+            <a:off x="1051560" y="2121408"/>
+            <a:ext cx="10424160" cy="731520"/>
+          </a:xfrm>
+          <a:prstGeom prst="rect">
+            <a:avLst/>
+          </a:prstGeom>
+          <a:noFill/>
+          <a:ln/>
+        </p:spPr>
+        <p:txBody>
+          <a:bodyPr wrap="square" rtlCol="0" anchor="t">
+            <a:spAutoFit/>
+          </a:bodyPr>
+          <a:lstStyle/>
+          <a:p>
+            <a:pPr indent="0" marL="0">
+              <a:buNone/>
+            </a:pPr>
+            <a:r>
+              <a:rPr lang="en-US" sz="1400" dirty="0">
+                <a:solidFill>
+                  <a:srgbClr val="1A1A1A"/>
+                </a:solidFill>
+                <a:latin typeface="Calibri" pitchFamily="34" charset="0"/>
+                <a:ea typeface="Calibri" pitchFamily="34" charset="-122"/>
+                <a:cs typeface="Calibri" pitchFamily="34" charset="-120"/>
+              </a:rPr>
+              <a:t>Mullen, America's Public Bible (intro + a verse)</a:t>
+            </a:r>
+            <a:endParaRPr lang="en-US" sz="1400" dirty="0"/>
+          </a:p>
+        </p:txBody>
+      </p:sp>
+      <p:sp>
+        <p:nvSpPr>
+          <p:cNvPr id="6" name="Shape 4"/>
+          <p:cNvSpPr/>
+          <p:nvPr/>
+        </p:nvSpPr>
+        <p:spPr>
+          <a:xfrm>
+            <a:off x="640080" y="2953512"/>
+            <a:ext cx="219456" cy="219456"/>
+          </a:xfrm>
+          <a:prstGeom prst="ellipse">
+            <a:avLst/>
+          </a:prstGeom>
+          <a:solidFill>
+            <a:srgbClr val="3F6F5F"/>
+          </a:solidFill>
+          <a:ln/>
+        </p:spPr>
+      </p:sp>
+      <p:sp>
+        <p:nvSpPr>
+          <p:cNvPr id="7" name="Text 5"/>
+          <p:cNvSpPr/>
+          <p:nvPr/>
+        </p:nvSpPr>
+        <p:spPr>
+          <a:xfrm>
+            <a:off x="1051560" y="2880360"/>
+            <a:ext cx="10424160" cy="365760"/>
+          </a:xfrm>
+          <a:prstGeom prst="rect">
+            <a:avLst/>
+          </a:prstGeom>
+          <a:noFill/>
+          <a:ln/>
+        </p:spPr>
+        <p:txBody>
+          <a:bodyPr wrap="square" rtlCol="0" anchor="ctr"/>
+          <a:lstStyle/>
+          <a:p>
+            <a:pPr indent="0" marL="0">
+              <a:buNone/>
+            </a:pPr>
+            <a:r>
+              <a:rPr lang="en-US" sz="1500" b="1" dirty="0">
+                <a:solidFill>
+                  <a:srgbClr val="3F6F5F"/>
+                </a:solidFill>
+                <a:latin typeface="Calibri" pitchFamily="34" charset="0"/>
+                <a:ea typeface="Calibri" pitchFamily="34" charset="-122"/>
+                <a:cs typeface="Calibri" pitchFamily="34" charset="-120"/>
+              </a:rPr>
+              <a:t>Supplement</a:t>
+            </a:r>
+            <a:endParaRPr lang="en-US" sz="1500" dirty="0"/>
+          </a:p>
+        </p:txBody>
+      </p:sp>
+      <p:sp>
+        <p:nvSpPr>
+          <p:cNvPr id="8" name="Text 6"/>
+          <p:cNvSpPr/>
+          <p:nvPr/>
+        </p:nvSpPr>
+        <p:spPr>
+          <a:xfrm>
+            <a:off x="1051560" y="3264408"/>
+            <a:ext cx="10424160" cy="731520"/>
+          </a:xfrm>
+          <a:prstGeom prst="rect">
+            <a:avLst/>
+          </a:prstGeom>
+          <a:noFill/>
+          <a:ln/>
+        </p:spPr>
+        <p:txBody>
+          <a:bodyPr wrap="square" rtlCol="0" anchor="t">
+            <a:spAutoFit/>
+          </a:bodyPr>
+          <a:lstStyle/>
+          <a:p>
+            <a:pPr indent="0" marL="0">
+              <a:buNone/>
+            </a:pPr>
+            <a:r>
+              <a:rPr lang="en-US" sz="1400" dirty="0">
+                <a:solidFill>
+                  <a:srgbClr val="1A1A1A"/>
+                </a:solidFill>
+                <a:latin typeface="Calibri" pitchFamily="34" charset="0"/>
+                <a:ea typeface="Calibri" pitchFamily="34" charset="-122"/>
+                <a:cs typeface="Calibri" pitchFamily="34" charset="-120"/>
+              </a:rPr>
+              <a:t>Underwood on GPT-4 and fictional time; Juola's Rowling unmasking</a:t>
+            </a:r>
+            <a:endParaRPr lang="en-US" sz="1400" dirty="0"/>
+          </a:p>
+        </p:txBody>
+      </p:sp>
+      <p:sp>
+        <p:nvSpPr>
+          <p:cNvPr id="9" name="Shape 7"/>
+          <p:cNvSpPr/>
+          <p:nvPr/>
+        </p:nvSpPr>
+        <p:spPr>
+          <a:xfrm>
+            <a:off x="640080" y="4096512"/>
+            <a:ext cx="219456" cy="219456"/>
+          </a:xfrm>
+          <a:prstGeom prst="ellipse">
+            <a:avLst/>
+          </a:prstGeom>
+          <a:solidFill>
+            <a:srgbClr val="B9852F"/>
+          </a:solidFill>
+          <a:ln/>
+        </p:spPr>
+      </p:sp>
+      <p:sp>
+        <p:nvSpPr>
+          <p:cNvPr id="10" name="Text 8"/>
+          <p:cNvSpPr/>
+          <p:nvPr/>
+        </p:nvSpPr>
+        <p:spPr>
+          <a:xfrm>
+            <a:off x="1051560" y="4023360"/>
+            <a:ext cx="10424160" cy="365760"/>
+          </a:xfrm>
+          <a:prstGeom prst="rect">
+            <a:avLst/>
+          </a:prstGeom>
+          <a:noFill/>
+          <a:ln/>
+        </p:spPr>
+        <p:txBody>
+          <a:bodyPr wrap="square" rtlCol="0" anchor="ctr"/>
+          <a:lstStyle/>
+          <a:p>
+            <a:pPr indent="0" marL="0">
+              <a:buNone/>
+            </a:pPr>
+            <a:r>
+              <a:rPr lang="en-US" sz="1500" b="1" dirty="0">
+                <a:solidFill>
+                  <a:srgbClr val="B9852F"/>
+                </a:solidFill>
+                <a:latin typeface="Calibri" pitchFamily="34" charset="0"/>
+                <a:ea typeface="Calibri" pitchFamily="34" charset="-122"/>
+                <a:cs typeface="Calibri" pitchFamily="34" charset="-120"/>
+              </a:rPr>
+              <a:t>Sketch</a:t>
+            </a:r>
+            <a:endParaRPr lang="en-US" sz="1500" dirty="0"/>
+          </a:p>
+        </p:txBody>
+      </p:sp>
+      <p:sp>
+        <p:nvSpPr>
+          <p:cNvPr id="11" name="Text 9"/>
+          <p:cNvSpPr/>
+          <p:nvPr/>
+        </p:nvSpPr>
+        <p:spPr>
+          <a:xfrm>
+            <a:off x="1051560" y="4407408"/>
+            <a:ext cx="10424160" cy="731520"/>
+          </a:xfrm>
+          <a:prstGeom prst="rect">
+            <a:avLst/>
+          </a:prstGeom>
+          <a:noFill/>
+          <a:ln/>
+        </p:spPr>
+        <p:txBody>
+          <a:bodyPr wrap="square" rtlCol="0" anchor="t">
+            <a:spAutoFit/>
+          </a:bodyPr>
+          <a:lstStyle/>
+          <a:p>
+            <a:pPr indent="0" marL="0">
+              <a:buNone/>
+            </a:pPr>
+            <a:r>
+              <a:rPr lang="en-US" sz="1400" dirty="0">
+                <a:solidFill>
+                  <a:srgbClr val="1A1A1A"/>
+                </a:solidFill>
+                <a:latin typeface="Calibri" pitchFamily="34" charset="0"/>
+                <a:ea typeface="Calibri" pitchFamily="34" charset="-122"/>
+                <a:cs typeface="Calibri" pitchFamily="34" charset="-120"/>
+              </a:rPr>
+              <a:t>Train a quick logistic regression on a labeled set; screenshot its five most positive and negative words.</a:t>
+            </a:r>
+            <a:endParaRPr lang="en-US" sz="1400" dirty="0"/>
+          </a:p>
+        </p:txBody>
+      </p:sp>
+      <p:sp>
+        <p:nvSpPr>
+          <p:cNvPr id="12" name="Shape 10"/>
+          <p:cNvSpPr/>
+          <p:nvPr/>
+        </p:nvSpPr>
+        <p:spPr>
+          <a:xfrm>
+            <a:off x="640080" y="5239512"/>
+            <a:ext cx="219456" cy="219456"/>
+          </a:xfrm>
+          <a:prstGeom prst="ellipse">
+            <a:avLst/>
+          </a:prstGeom>
+          <a:solidFill>
+            <a:srgbClr val="7A3B2E"/>
+          </a:solidFill>
+          <a:ln/>
+        </p:spPr>
+      </p:sp>
+      <p:sp>
+        <p:nvSpPr>
+          <p:cNvPr id="13" name="Text 11"/>
+          <p:cNvSpPr/>
+          <p:nvPr/>
+        </p:nvSpPr>
+        <p:spPr>
+          <a:xfrm>
+            <a:off x="1051560" y="5166360"/>
+            <a:ext cx="10424160" cy="365760"/>
+          </a:xfrm>
+          <a:prstGeom prst="rect">
+            <a:avLst/>
+          </a:prstGeom>
+          <a:noFill/>
+          <a:ln/>
+        </p:spPr>
+        <p:txBody>
+          <a:bodyPr wrap="square" rtlCol="0" anchor="ctr"/>
+          <a:lstStyle/>
+          <a:p>
+            <a:pPr indent="0" marL="0">
+              <a:buNone/>
+            </a:pPr>
+            <a:r>
+              <a:rPr lang="en-US" sz="1500" b="1" dirty="0">
+                <a:solidFill>
+                  <a:srgbClr val="7A3B2E"/>
+                </a:solidFill>
+                <a:latin typeface="Calibri" pitchFamily="34" charset="0"/>
+                <a:ea typeface="Calibri" pitchFamily="34" charset="-122"/>
+                <a:cs typeface="Calibri" pitchFamily="34" charset="-120"/>
+              </a:rPr>
+              <a:t>Check (AI closed)</a:t>
+            </a:r>
+            <a:endParaRPr lang="en-US" sz="1500" dirty="0"/>
+          </a:p>
+        </p:txBody>
+      </p:sp>
+      <p:sp>
+        <p:nvSpPr>
+          <p:cNvPr id="14" name="Text 12"/>
+          <p:cNvSpPr/>
+          <p:nvPr/>
+        </p:nvSpPr>
+        <p:spPr>
+          <a:xfrm>
+            <a:off x="1051560" y="5550408"/>
+            <a:ext cx="10424160" cy="731520"/>
+          </a:xfrm>
+          <a:prstGeom prst="rect">
+            <a:avLst/>
+          </a:prstGeom>
+          <a:noFill/>
+          <a:ln/>
+        </p:spPr>
+        <p:txBody>
+          <a:bodyPr wrap="square" rtlCol="0" anchor="t">
+            <a:spAutoFit/>
+          </a:bodyPr>
+          <a:lstStyle/>
+          <a:p>
+            <a:pPr indent="0" marL="0">
+              <a:buNone/>
+            </a:pPr>
+            <a:r>
+              <a:rPr lang="en-US" sz="1400" dirty="0">
+                <a:solidFill>
+                  <a:srgbClr val="1A1A1A"/>
+                </a:solidFill>
+                <a:latin typeface="Calibri" pitchFamily="34" charset="0"/>
+                <a:ea typeface="Calibri" pitchFamily="34" charset="-122"/>
+                <a:cs typeface="Calibri" pitchFamily="34" charset="-120"/>
+              </a:rPr>
+              <a:t>Explain it: read your classifier's top weights aloud, and name one input where it would fail and why. (Competencies 4, 5.)</a:t>
+            </a:r>
+            <a:endParaRPr lang="en-US" sz="1400" dirty="0"/>
+          </a:p>
+        </p:txBody>
+      </p:sp>
+    </p:spTree>
+  </p:cSld>
+  <p:clrMapOvr>
+    <a:masterClrMapping/>
+  </p:clrMapOvr>
+</p:sld>
+</file>
+
+<file path=ppt/slides/slide11.xml><?xml version="1.0" encoding="utf-8"?>
+<p:sld xmlns:a="http://schemas.openxmlformats.org/drawingml/2006/main" xmlns:r="http://schemas.openxmlformats.org/officeDocument/2006/relationships" xmlns:p="http://schemas.openxmlformats.org/presentationml/2006/main">
+  <p:cSld name="Slide 11">
+    <p:bg>
+      <p:bgPr>
+        <a:solidFill>
+          <a:srgbClr val="FFFFFF"/>
+        </a:solidFill>
+      </p:bgPr>
+    </p:bg>
+    <p:spTree>
+      <p:nvGrpSpPr>
+        <p:cNvPr id="1" name=""/>
+        <p:cNvGrpSpPr/>
+        <p:nvPr/>
+      </p:nvGrpSpPr>
+      <p:grpSpPr>
+        <a:xfrm>
+          <a:off x="0" y="0"/>
+          <a:ext cx="0" cy="0"/>
+          <a:chOff x="0" y="0"/>
+          <a:chExt cx="0" cy="0"/>
+        </a:xfrm>
+      </p:grpSpPr>
+      <p:sp>
+        <p:nvSpPr>
+          <p:cNvPr id="2" name="Text 0"/>
+          <p:cNvSpPr/>
+          <p:nvPr/>
+        </p:nvSpPr>
+        <p:spPr>
+          <a:xfrm>
+            <a:off x="640080" y="640080"/>
+            <a:ext cx="10058400" cy="320040"/>
+          </a:xfrm>
+          <a:prstGeom prst="rect">
+            <a:avLst/>
+          </a:prstGeom>
+          <a:noFill/>
+          <a:ln/>
+        </p:spPr>
+        <p:txBody>
+          <a:bodyPr wrap="square" rtlCol="0" anchor="ctr"/>
+          <a:lstStyle/>
+          <a:p>
+            <a:pPr indent="0" marL="0">
+              <a:buNone/>
+            </a:pPr>
+            <a:r>
+              <a:rPr lang="en-US" sz="1300" b="1" spc="300" kern="0" dirty="0">
+                <a:solidFill>
+                  <a:srgbClr val="7A3B2E"/>
+                </a:solidFill>
+                <a:latin typeface="Calibri" pitchFamily="34" charset="0"/>
+                <a:ea typeface="Calibri" pitchFamily="34" charset="-122"/>
+                <a:cs typeface="Calibri" pitchFamily="34" charset="-120"/>
+              </a:rPr>
+              <a:t>HOW THIS WEEK CONNECTS</a:t>
+            </a:r>
+            <a:endParaRPr lang="en-US" sz="1300" dirty="0"/>
+          </a:p>
+        </p:txBody>
+      </p:sp>
+      <p:sp>
+        <p:nvSpPr>
+          <p:cNvPr id="3" name="Text 1"/>
+          <p:cNvSpPr/>
+          <p:nvPr/>
+        </p:nvSpPr>
+        <p:spPr>
+          <a:xfrm>
+            <a:off x="640080" y="987552"/>
+            <a:ext cx="10058400" cy="640080"/>
+          </a:xfrm>
+          <a:prstGeom prst="rect">
+            <a:avLst/>
+          </a:prstGeom>
+          <a:noFill/>
+          <a:ln/>
+        </p:spPr>
+        <p:txBody>
+          <a:bodyPr wrap="square" rtlCol="0" anchor="ctr"/>
+          <a:lstStyle/>
+          <a:p>
+            <a:pPr indent="0" marL="0">
+              <a:buNone/>
+            </a:pPr>
+            <a:r>
+              <a:rPr lang="en-US" sz="2800" b="1" dirty="0">
+                <a:solidFill>
+                  <a:srgbClr val="1A1A1A"/>
+                </a:solidFill>
+                <a:latin typeface="Cambria" pitchFamily="34" charset="0"/>
+                <a:ea typeface="Cambria" pitchFamily="34" charset="-122"/>
+                <a:cs typeface="Cambria" pitchFamily="34" charset="-120"/>
+              </a:rPr>
+              <a:t>The course's through-lines</a:t>
+            </a:r>
+            <a:endParaRPr lang="en-US" sz="2800" dirty="0"/>
+          </a:p>
+        </p:txBody>
+      </p:sp>
+      <p:sp>
+        <p:nvSpPr>
+          <p:cNvPr id="4" name="Shape 2"/>
+          <p:cNvSpPr/>
+          <p:nvPr/>
+        </p:nvSpPr>
+        <p:spPr>
+          <a:xfrm>
+            <a:off x="640080" y="2057400"/>
+            <a:ext cx="457200" cy="457200"/>
+          </a:xfrm>
+          <a:prstGeom prst="roundRect">
+            <a:avLst>
+              <a:gd name="adj" fmla="val 16000"/>
+            </a:avLst>
+          </a:prstGeom>
+          <a:solidFill>
+            <a:srgbClr val="7A3B2E"/>
+          </a:solidFill>
+          <a:ln/>
+        </p:spPr>
+      </p:sp>
+      <p:sp>
+        <p:nvSpPr>
+          <p:cNvPr id="5" name="Text 3"/>
+          <p:cNvSpPr/>
+          <p:nvPr/>
+        </p:nvSpPr>
+        <p:spPr>
+          <a:xfrm>
+            <a:off x="640080" y="2057400"/>
+            <a:ext cx="457200" cy="457200"/>
+          </a:xfrm>
+          <a:prstGeom prst="rect">
+            <a:avLst/>
+          </a:prstGeom>
+          <a:noFill/>
+          <a:ln/>
+        </p:spPr>
+        <p:txBody>
+          <a:bodyPr wrap="square" rtlCol="0" anchor="ctr"/>
+          <a:lstStyle/>
+          <a:p>
+            <a:pPr algn="ctr" indent="0" marL="0">
+              <a:buNone/>
+            </a:pPr>
+            <a:r>
+              <a:rPr lang="en-US" sz="2000" b="1" dirty="0">
+                <a:solidFill>
+                  <a:srgbClr val="FFFFFF"/>
+                </a:solidFill>
+                <a:latin typeface="Cambria" pitchFamily="34" charset="0"/>
+                <a:ea typeface="Cambria" pitchFamily="34" charset="-122"/>
+                <a:cs typeface="Cambria" pitchFamily="34" charset="-120"/>
+              </a:rPr>
+              <a:t>1</a:t>
+            </a:r>
+            <a:endParaRPr lang="en-US" sz="2000" dirty="0"/>
+          </a:p>
+        </p:txBody>
+      </p:sp>
+      <p:sp>
+        <p:nvSpPr>
+          <p:cNvPr id="6" name="Text 4"/>
+          <p:cNvSpPr/>
+          <p:nvPr/>
+        </p:nvSpPr>
+        <p:spPr>
+          <a:xfrm>
+            <a:off x="1371600" y="2020824"/>
+            <a:ext cx="10332720" cy="411480"/>
+          </a:xfrm>
+          <a:prstGeom prst="rect">
+            <a:avLst/>
+          </a:prstGeom>
+          <a:noFill/>
+          <a:ln/>
+        </p:spPr>
+        <p:txBody>
+          <a:bodyPr wrap="square" rtlCol="0" anchor="ctr"/>
+          <a:lstStyle/>
+          <a:p>
+            <a:pPr indent="0" marL="0">
+              <a:buNone/>
+            </a:pPr>
+            <a:r>
+              <a:rPr lang="en-US" sz="1900" b="1" dirty="0">
+                <a:solidFill>
+                  <a:srgbClr val="7A3B2E"/>
+                </a:solidFill>
+                <a:latin typeface="Cambria" pitchFamily="34" charset="0"/>
+                <a:ea typeface="Cambria" pitchFamily="34" charset="-122"/>
+                <a:cs typeface="Cambria" pitchFamily="34" charset="-120"/>
+              </a:rPr>
+              <a:t>The reader you can see</a:t>
+            </a:r>
+            <a:endParaRPr lang="en-US" sz="1900" dirty="0"/>
+          </a:p>
+        </p:txBody>
+      </p:sp>
+      <p:sp>
+        <p:nvSpPr>
+          <p:cNvPr id="7" name="Text 5"/>
+          <p:cNvSpPr/>
+          <p:nvPr/>
+        </p:nvSpPr>
+        <p:spPr>
+          <a:xfrm>
+            <a:off x="1371600" y="2441448"/>
+            <a:ext cx="10332720" cy="914400"/>
+          </a:xfrm>
+          <a:prstGeom prst="rect">
+            <a:avLst/>
+          </a:prstGeom>
+          <a:noFill/>
+          <a:ln/>
+        </p:spPr>
+        <p:txBody>
+          <a:bodyPr wrap="square" rtlCol="0" anchor="t">
+            <a:spAutoFit/>
+          </a:bodyPr>
+          <a:lstStyle/>
+          <a:p>
+            <a:pPr indent="0" marL="0">
+              <a:lnSpc>
+                <a:spcPct val="112000"/>
+              </a:lnSpc>
+              <a:buNone/>
+            </a:pPr>
+            <a:r>
+              <a:rPr lang="en-US" sz="1450" dirty="0">
+                <a:solidFill>
+                  <a:srgbClr val="1A1A1A"/>
+                </a:solidFill>
+                <a:latin typeface="Calibri" pitchFamily="34" charset="0"/>
+                <a:ea typeface="Calibri" pitchFamily="34" charset="-122"/>
+                <a:cs typeface="Calibri" pitchFamily="34" charset="-120"/>
+              </a:rPr>
+              <a:t>The transparent classifier: read its signed weights, its mind on the table. Week 7 brings the opaque one.</a:t>
+            </a:r>
+            <a:endParaRPr lang="en-US" sz="1450" dirty="0"/>
+          </a:p>
+        </p:txBody>
+      </p:sp>
+      <p:sp>
+        <p:nvSpPr>
+          <p:cNvPr id="8" name="Shape 6"/>
+          <p:cNvSpPr/>
+          <p:nvPr/>
+        </p:nvSpPr>
+        <p:spPr>
+          <a:xfrm>
+            <a:off x="640080" y="3520440"/>
+            <a:ext cx="457200" cy="457200"/>
+          </a:xfrm>
+          <a:prstGeom prst="roundRect">
+            <a:avLst>
+              <a:gd name="adj" fmla="val 16000"/>
+            </a:avLst>
+          </a:prstGeom>
+          <a:solidFill>
+            <a:srgbClr val="3F6F5F"/>
+          </a:solidFill>
+          <a:ln/>
+        </p:spPr>
+      </p:sp>
+      <p:sp>
+        <p:nvSpPr>
+          <p:cNvPr id="9" name="Text 7"/>
+          <p:cNvSpPr/>
+          <p:nvPr/>
+        </p:nvSpPr>
+        <p:spPr>
+          <a:xfrm>
+            <a:off x="640080" y="3520440"/>
+            <a:ext cx="457200" cy="457200"/>
+          </a:xfrm>
+          <a:prstGeom prst="rect">
+            <a:avLst/>
+          </a:prstGeom>
+          <a:noFill/>
+          <a:ln/>
+        </p:spPr>
+        <p:txBody>
+          <a:bodyPr wrap="square" rtlCol="0" anchor="ctr"/>
+          <a:lstStyle/>
+          <a:p>
+            <a:pPr algn="ctr" indent="0" marL="0">
+              <a:buNone/>
+            </a:pPr>
+            <a:r>
+              <a:rPr lang="en-US" sz="2000" b="1" dirty="0">
+                <a:solidFill>
+                  <a:srgbClr val="FFFFFF"/>
+                </a:solidFill>
+                <a:latin typeface="Cambria" pitchFamily="34" charset="0"/>
+                <a:ea typeface="Cambria" pitchFamily="34" charset="-122"/>
+                <a:cs typeface="Cambria" pitchFamily="34" charset="-120"/>
+              </a:rPr>
+              <a:t>2</a:t>
+            </a:r>
+            <a:endParaRPr lang="en-US" sz="2000" dirty="0"/>
+          </a:p>
+        </p:txBody>
+      </p:sp>
+      <p:sp>
+        <p:nvSpPr>
+          <p:cNvPr id="10" name="Text 8"/>
+          <p:cNvSpPr/>
+          <p:nvPr/>
+        </p:nvSpPr>
+        <p:spPr>
+          <a:xfrm>
+            <a:off x="1371600" y="3483864"/>
+            <a:ext cx="10332720" cy="411480"/>
+          </a:xfrm>
+          <a:prstGeom prst="rect">
+            <a:avLst/>
+          </a:prstGeom>
+          <a:noFill/>
+          <a:ln/>
+        </p:spPr>
+        <p:txBody>
+          <a:bodyPr wrap="square" rtlCol="0" anchor="ctr"/>
+          <a:lstStyle/>
+          <a:p>
+            <a:pPr indent="0" marL="0">
+              <a:buNone/>
+            </a:pPr>
+            <a:r>
+              <a:rPr lang="en-US" sz="1900" b="1" dirty="0">
+                <a:solidFill>
+                  <a:srgbClr val="3F6F5F"/>
+                </a:solidFill>
+                <a:latin typeface="Cambria" pitchFamily="34" charset="0"/>
+                <a:ea typeface="Cambria" pitchFamily="34" charset="-122"/>
+                <a:cs typeface="Cambria" pitchFamily="34" charset="-120"/>
+              </a:rPr>
+              <a:t>You taught it the bias</a:t>
+            </a:r>
+            <a:endParaRPr lang="en-US" sz="1900" dirty="0"/>
+          </a:p>
+        </p:txBody>
+      </p:sp>
+      <p:sp>
+        <p:nvSpPr>
+          <p:cNvPr id="11" name="Text 9"/>
+          <p:cNvSpPr/>
+          <p:nvPr/>
+        </p:nvSpPr>
+        <p:spPr>
+          <a:xfrm>
+            <a:off x="1371600" y="3904488"/>
+            <a:ext cx="10332720" cy="914400"/>
+          </a:xfrm>
+          <a:prstGeom prst="rect">
+            <a:avLst/>
+          </a:prstGeom>
+          <a:noFill/>
+          <a:ln/>
+        </p:spPr>
+        <p:txBody>
+          <a:bodyPr wrap="square" rtlCol="0" anchor="t">
+            <a:spAutoFit/>
+          </a:bodyPr>
+          <a:lstStyle/>
+          <a:p>
+            <a:pPr indent="0" marL="0">
+              <a:lnSpc>
+                <a:spcPct val="112000"/>
+              </a:lnSpc>
+              <a:buNone/>
+            </a:pPr>
+            <a:r>
+              <a:rPr lang="en-US" sz="1450" dirty="0">
+                <a:solidFill>
+                  <a:srgbClr val="1A1A1A"/>
+                </a:solidFill>
+                <a:latin typeface="Calibri" pitchFamily="34" charset="0"/>
+                <a:ea typeface="Calibri" pitchFamily="34" charset="-122"/>
+                <a:cs typeface="Calibri" pitchFamily="34" charset="-120"/>
+              </a:rPr>
+              <a:t>The Teachable Machine reveal, a training set teaches a machine its prejudice.</a:t>
+            </a:r>
+            <a:endParaRPr lang="en-US" sz="1450" dirty="0"/>
+          </a:p>
+        </p:txBody>
+      </p:sp>
+      <p:sp>
+        <p:nvSpPr>
+          <p:cNvPr id="12" name="Shape 10"/>
+          <p:cNvSpPr/>
+          <p:nvPr/>
+        </p:nvSpPr>
+        <p:spPr>
+          <a:xfrm>
+            <a:off x="640080" y="4983480"/>
+            <a:ext cx="457200" cy="457200"/>
+          </a:xfrm>
+          <a:prstGeom prst="roundRect">
+            <a:avLst>
+              <a:gd name="adj" fmla="val 16000"/>
+            </a:avLst>
+          </a:prstGeom>
+          <a:solidFill>
+            <a:srgbClr val="B9852F"/>
+          </a:solidFill>
+          <a:ln/>
+        </p:spPr>
+      </p:sp>
+      <p:sp>
+        <p:nvSpPr>
+          <p:cNvPr id="13" name="Text 11"/>
+          <p:cNvSpPr/>
+          <p:nvPr/>
+        </p:nvSpPr>
+        <p:spPr>
+          <a:xfrm>
+            <a:off x="640080" y="4983480"/>
+            <a:ext cx="457200" cy="457200"/>
+          </a:xfrm>
+          <a:prstGeom prst="rect">
+            <a:avLst/>
+          </a:prstGeom>
+          <a:noFill/>
+          <a:ln/>
+        </p:spPr>
+        <p:txBody>
+          <a:bodyPr wrap="square" rtlCol="0" anchor="ctr"/>
+          <a:lstStyle/>
+          <a:p>
+            <a:pPr algn="ctr" indent="0" marL="0">
+              <a:buNone/>
+            </a:pPr>
+            <a:r>
+              <a:rPr lang="en-US" sz="2000" b="1" dirty="0">
+                <a:solidFill>
+                  <a:srgbClr val="FFFFFF"/>
+                </a:solidFill>
+                <a:latin typeface="Cambria" pitchFamily="34" charset="0"/>
+                <a:ea typeface="Cambria" pitchFamily="34" charset="-122"/>
+                <a:cs typeface="Cambria" pitchFamily="34" charset="-120"/>
+              </a:rPr>
+              <a:t>3</a:t>
+            </a:r>
+            <a:endParaRPr lang="en-US" sz="2000" dirty="0"/>
+          </a:p>
+        </p:txBody>
+      </p:sp>
+      <p:sp>
+        <p:nvSpPr>
+          <p:cNvPr id="14" name="Text 12"/>
+          <p:cNvSpPr/>
+          <p:nvPr/>
+        </p:nvSpPr>
+        <p:spPr>
+          <a:xfrm>
+            <a:off x="1371600" y="4946904"/>
+            <a:ext cx="10332720" cy="411480"/>
+          </a:xfrm>
+          <a:prstGeom prst="rect">
+            <a:avLst/>
+          </a:prstGeom>
+          <a:noFill/>
+          <a:ln/>
+        </p:spPr>
+        <p:txBody>
+          <a:bodyPr wrap="square" rtlCol="0" anchor="ctr"/>
+          <a:lstStyle/>
+          <a:p>
+            <a:pPr indent="0" marL="0">
+              <a:buNone/>
+            </a:pPr>
+            <a:r>
+              <a:rPr lang="en-US" sz="1900" b="1" dirty="0">
+                <a:solidFill>
+                  <a:srgbClr val="B9852F"/>
+                </a:solidFill>
+                <a:latin typeface="Cambria" pitchFamily="34" charset="0"/>
+                <a:ea typeface="Cambria" pitchFamily="34" charset="-122"/>
+                <a:cs typeface="Cambria" pitchFamily="34" charset="-120"/>
+              </a:rPr>
+              <a:t>Every choice is a choice</a:t>
+            </a:r>
+            <a:endParaRPr lang="en-US" sz="1900" dirty="0"/>
+          </a:p>
+        </p:txBody>
+      </p:sp>
+      <p:sp>
+        <p:nvSpPr>
+          <p:cNvPr id="15" name="Text 13"/>
+          <p:cNvSpPr/>
+          <p:nvPr/>
+        </p:nvSpPr>
+        <p:spPr>
+          <a:xfrm>
+            <a:off x="1371600" y="5367528"/>
+            <a:ext cx="10332720" cy="914400"/>
+          </a:xfrm>
+          <a:prstGeom prst="rect">
+            <a:avLst/>
+          </a:prstGeom>
+          <a:noFill/>
+          <a:ln/>
+        </p:spPr>
+        <p:txBody>
+          <a:bodyPr wrap="square" rtlCol="0" anchor="t">
+            <a:spAutoFit/>
+          </a:bodyPr>
+          <a:lstStyle/>
+          <a:p>
+            <a:pPr indent="0" marL="0">
+              <a:lnSpc>
+                <a:spcPct val="112000"/>
+              </a:lnSpc>
+              <a:buNone/>
+            </a:pPr>
+            <a:r>
+              <a:rPr lang="en-US" sz="1450" dirty="0">
+                <a:solidFill>
+                  <a:srgbClr val="1A1A1A"/>
+                </a:solidFill>
+                <a:latin typeface="Calibri" pitchFamily="34" charset="0"/>
+                <a:ea typeface="Calibri" pitchFamily="34" charset="-122"/>
+                <a:cs typeface="Calibri" pitchFamily="34" charset="-120"/>
+              </a:rPr>
+              <a:t>What counts as a label, and which words you hand it, decide what it learns.</a:t>
+            </a:r>
+            <a:endParaRPr lang="en-US" sz="1450" dirty="0"/>
+          </a:p>
+        </p:txBody>
+      </p:sp>
+    </p:spTree>
+  </p:cSld>
+  <p:clrMapOvr>
+    <a:masterClrMapping/>
+  </p:clrMapOvr>
+</p:sld>
+</file>
+
+<file path=ppt/slides/slide12.xml><?xml version="1.0" encoding="utf-8"?>
+<p:sld xmlns:a="http://schemas.openxmlformats.org/drawingml/2006/main" xmlns:r="http://schemas.openxmlformats.org/officeDocument/2006/relationships" xmlns:p="http://schemas.openxmlformats.org/presentationml/2006/main">
+  <p:cSld name="Slide 12">
+    <p:bg>
+      <p:bgPr>
+        <a:solidFill>
+          <a:srgbClr val="4E261D"/>
+        </a:solidFill>
+      </p:bgPr>
+    </p:bg>
+    <p:spTree>
+      <p:nvGrpSpPr>
+        <p:cNvPr id="1" name=""/>
+        <p:cNvGrpSpPr/>
+        <p:nvPr/>
+      </p:nvGrpSpPr>
+      <p:grpSpPr>
+        <a:xfrm>
+          <a:off x="0" y="0"/>
+          <a:ext cx="0" cy="0"/>
+          <a:chOff x="0" y="0"/>
+          <a:chExt cx="0" cy="0"/>
+        </a:xfrm>
+      </p:grpSpPr>
+      <p:sp>
+        <p:nvSpPr>
+          <p:cNvPr id="2" name="Text 0"/>
+          <p:cNvSpPr/>
+          <p:nvPr/>
+        </p:nvSpPr>
+        <p:spPr>
+          <a:xfrm>
+            <a:off x="640080" y="1005840"/>
+            <a:ext cx="8229600" cy="320040"/>
+          </a:xfrm>
+          <a:prstGeom prst="rect">
+            <a:avLst/>
+          </a:prstGeom>
+          <a:noFill/>
+          <a:ln/>
+        </p:spPr>
+        <p:txBody>
+          <a:bodyPr wrap="square" rtlCol="0" anchor="ctr"/>
+          <a:lstStyle/>
+          <a:p>
+            <a:pPr indent="0" marL="0">
+              <a:buNone/>
+            </a:pPr>
+            <a:r>
+              <a:rPr lang="en-US" sz="1300" b="1" spc="300" kern="0" dirty="0">
+                <a:solidFill>
+                  <a:srgbClr val="B9852F"/>
+                </a:solidFill>
+                <a:latin typeface="Calibri" pitchFamily="34" charset="0"/>
+                <a:ea typeface="Calibri" pitchFamily="34" charset="-122"/>
+                <a:cs typeface="Calibri" pitchFamily="34" charset="-120"/>
+              </a:rPr>
+              <a:t>THE CHECK, AI CLOSED</a:t>
+            </a:r>
+            <a:endParaRPr lang="en-US" sz="1300" dirty="0"/>
+          </a:p>
+        </p:txBody>
+      </p:sp>
+      <p:sp>
+        <p:nvSpPr>
+          <p:cNvPr id="3" name="Text 1"/>
+          <p:cNvSpPr/>
+          <p:nvPr/>
+        </p:nvSpPr>
+        <p:spPr>
+          <a:xfrm>
+            <a:off x="640080" y="1645920"/>
+            <a:ext cx="8686800" cy="3108960"/>
+          </a:xfrm>
+          <a:prstGeom prst="rect">
+            <a:avLst/>
+          </a:prstGeom>
+          <a:noFill/>
+          <a:ln/>
+        </p:spPr>
+        <p:txBody>
+          <a:bodyPr wrap="square" rtlCol="0" anchor="t">
+            <a:spAutoFit/>
+          </a:bodyPr>
+          <a:lstStyle/>
+          <a:p>
+            <a:pPr indent="0" marL="0">
+              <a:lnSpc>
+                <a:spcPct val="115000"/>
+              </a:lnSpc>
+              <a:buNone/>
+            </a:pPr>
+            <a:r>
+              <a:rPr lang="en-US" sz="2600" dirty="0">
+                <a:solidFill>
+                  <a:srgbClr val="FFFFFF"/>
+                </a:solidFill>
+                <a:latin typeface="Cambria" pitchFamily="34" charset="0"/>
+                <a:ea typeface="Cambria" pitchFamily="34" charset="-122"/>
+                <a:cs typeface="Cambria" pitchFamily="34" charset="-120"/>
+              </a:rPr>
+              <a:t>Explain it: read your classifier's top weights aloud, and name one input where it would fail and why. (Competencies 4, 5.)</a:t>
+            </a:r>
+            <a:endParaRPr lang="en-US" sz="2600" dirty="0"/>
+          </a:p>
+        </p:txBody>
+      </p:sp>
+      <p:sp>
+        <p:nvSpPr>
+          <p:cNvPr id="4" name="Text 2"/>
+          <p:cNvSpPr/>
+          <p:nvPr/>
+        </p:nvSpPr>
+        <p:spPr>
+          <a:xfrm>
+            <a:off x="640080" y="6126480"/>
+            <a:ext cx="7315200" cy="365760"/>
+          </a:xfrm>
+          <a:prstGeom prst="rect">
+            <a:avLst/>
+          </a:prstGeom>
+          <a:noFill/>
+          <a:ln/>
+        </p:spPr>
+        <p:txBody>
+          <a:bodyPr wrap="square" rtlCol="0" anchor="ctr"/>
+          <a:lstStyle/>
+          <a:p>
+            <a:pPr indent="0" marL="0">
+              <a:buNone/>
+            </a:pPr>
+            <a:r>
+              <a:rPr lang="en-US" sz="1200" dirty="0">
+                <a:solidFill>
+                  <a:srgbClr val="E8DCD6"/>
+                </a:solidFill>
+                <a:latin typeface="Calibri" pitchFamily="34" charset="0"/>
+                <a:ea typeface="Calibri" pitchFamily="34" charset="-122"/>
+                <a:cs typeface="Calibri" pitchFamily="34" charset="-120"/>
+              </a:rPr>
+              <a:t>Culture as Data  ·  Week 3</a:t>
+            </a:r>
+            <a:endParaRPr lang="en-US" sz="1200" dirty="0"/>
+          </a:p>
+        </p:txBody>
+      </p:sp>
+      <p:sp>
+        <p:nvSpPr>
+          <p:cNvPr id="5" name="Shape 3"/>
+          <p:cNvSpPr/>
+          <p:nvPr/>
+        </p:nvSpPr>
+        <p:spPr>
+          <a:xfrm>
+            <a:off x="11585519" y="5894876"/>
+            <a:ext cx="88881" cy="88881"/>
+          </a:xfrm>
+          <a:prstGeom prst="ellipse">
+            <a:avLst/>
+          </a:prstGeom>
+          <a:solidFill>
+            <a:srgbClr val="7A3B2E"/>
+          </a:solidFill>
+          <a:ln/>
+        </p:spPr>
+      </p:sp>
+      <p:sp>
+        <p:nvSpPr>
+          <p:cNvPr id="6" name="Shape 4"/>
+          <p:cNvSpPr/>
+          <p:nvPr/>
+        </p:nvSpPr>
+        <p:spPr>
+          <a:xfrm>
+            <a:off x="9802810" y="5665127"/>
+            <a:ext cx="90728" cy="90728"/>
+          </a:xfrm>
+          <a:prstGeom prst="ellipse">
+            <a:avLst/>
+          </a:prstGeom>
+          <a:solidFill>
+            <a:srgbClr val="3F6F5F"/>
+          </a:solidFill>
+          <a:ln/>
+        </p:spPr>
+      </p:sp>
+      <p:sp>
+        <p:nvSpPr>
+          <p:cNvPr id="7" name="Shape 5"/>
+          <p:cNvSpPr/>
+          <p:nvPr/>
+        </p:nvSpPr>
+        <p:spPr>
+          <a:xfrm>
+            <a:off x="9863295" y="5190056"/>
+            <a:ext cx="74159" cy="74159"/>
+          </a:xfrm>
+          <a:prstGeom prst="ellipse">
+            <a:avLst/>
+          </a:prstGeom>
+          <a:solidFill>
+            <a:srgbClr val="B9852F"/>
+          </a:solidFill>
+          <a:ln/>
+        </p:spPr>
+      </p:sp>
+      <p:sp>
+        <p:nvSpPr>
+          <p:cNvPr id="8" name="Shape 6"/>
+          <p:cNvSpPr/>
+          <p:nvPr/>
+        </p:nvSpPr>
+        <p:spPr>
+          <a:xfrm>
+            <a:off x="10273453" y="5193564"/>
+            <a:ext cx="62036" cy="62036"/>
+          </a:xfrm>
+          <a:prstGeom prst="ellipse">
+            <a:avLst/>
+          </a:prstGeom>
+          <a:solidFill>
+            <a:srgbClr val="7A3B2E"/>
+          </a:solidFill>
+          <a:ln/>
+        </p:spPr>
+      </p:sp>
+      <p:sp>
+        <p:nvSpPr>
+          <p:cNvPr id="9" name="Shape 7"/>
+          <p:cNvSpPr/>
+          <p:nvPr/>
+        </p:nvSpPr>
+        <p:spPr>
+          <a:xfrm>
+            <a:off x="9539765" y="4662190"/>
+            <a:ext cx="77217" cy="77217"/>
+          </a:xfrm>
+          <a:prstGeom prst="ellipse">
+            <a:avLst/>
+          </a:prstGeom>
+          <a:solidFill>
+            <a:srgbClr val="3F6F5F"/>
+          </a:solidFill>
+          <a:ln/>
+        </p:spPr>
+      </p:sp>
+      <p:sp>
+        <p:nvSpPr>
+          <p:cNvPr id="10" name="Shape 8"/>
+          <p:cNvSpPr/>
+          <p:nvPr/>
+        </p:nvSpPr>
+        <p:spPr>
+          <a:xfrm>
+            <a:off x="11289350" y="6057195"/>
+            <a:ext cx="87700" cy="87700"/>
+          </a:xfrm>
+          <a:prstGeom prst="ellipse">
+            <a:avLst/>
+          </a:prstGeom>
+          <a:solidFill>
+            <a:srgbClr val="B9852F"/>
+          </a:solidFill>
+          <a:ln/>
+        </p:spPr>
+      </p:sp>
+      <p:sp>
+        <p:nvSpPr>
+          <p:cNvPr id="11" name="Shape 9"/>
+          <p:cNvSpPr/>
+          <p:nvPr/>
+        </p:nvSpPr>
+        <p:spPr>
+          <a:xfrm>
+            <a:off x="11468368" y="4890398"/>
+            <a:ext cx="61479" cy="61479"/>
+          </a:xfrm>
+          <a:prstGeom prst="ellipse">
+            <a:avLst/>
+          </a:prstGeom>
+          <a:solidFill>
+            <a:srgbClr val="7A3B2E"/>
+          </a:solidFill>
+          <a:ln/>
+        </p:spPr>
+      </p:sp>
+      <p:sp>
+        <p:nvSpPr>
+          <p:cNvPr id="12" name="Shape 10"/>
+          <p:cNvSpPr/>
+          <p:nvPr/>
+        </p:nvSpPr>
+        <p:spPr>
+          <a:xfrm>
+            <a:off x="11143620" y="5360419"/>
+            <a:ext cx="76279" cy="76279"/>
+          </a:xfrm>
+          <a:prstGeom prst="ellipse">
+            <a:avLst/>
+          </a:prstGeom>
+          <a:solidFill>
+            <a:srgbClr val="3F6F5F"/>
+          </a:solidFill>
+          <a:ln/>
+        </p:spPr>
+      </p:sp>
+      <p:sp>
+        <p:nvSpPr>
+          <p:cNvPr id="13" name="Shape 11"/>
+          <p:cNvSpPr/>
+          <p:nvPr/>
+        </p:nvSpPr>
+        <p:spPr>
+          <a:xfrm>
+            <a:off x="11381905" y="4716438"/>
+            <a:ext cx="100097" cy="100097"/>
+          </a:xfrm>
+          <a:prstGeom prst="ellipse">
+            <a:avLst/>
+          </a:prstGeom>
+          <a:solidFill>
+            <a:srgbClr val="B9852F"/>
+          </a:solidFill>
+          <a:ln/>
+        </p:spPr>
+      </p:sp>
+      <p:sp>
+        <p:nvSpPr>
+          <p:cNvPr id="14" name="Shape 12"/>
+          <p:cNvSpPr/>
+          <p:nvPr/>
+        </p:nvSpPr>
+        <p:spPr>
+          <a:xfrm>
+            <a:off x="10689703" y="5419716"/>
+            <a:ext cx="46063" cy="46063"/>
+          </a:xfrm>
+          <a:prstGeom prst="ellipse">
+            <a:avLst/>
+          </a:prstGeom>
+          <a:solidFill>
+            <a:srgbClr val="7A3B2E"/>
+          </a:solidFill>
+          <a:ln/>
+        </p:spPr>
+      </p:sp>
+      <p:sp>
+        <p:nvSpPr>
+          <p:cNvPr id="15" name="Shape 13"/>
+          <p:cNvSpPr/>
+          <p:nvPr/>
+        </p:nvSpPr>
+        <p:spPr>
+          <a:xfrm>
+            <a:off x="10133814" y="4719432"/>
+            <a:ext cx="46767" cy="46767"/>
+          </a:xfrm>
+          <a:prstGeom prst="ellipse">
+            <a:avLst/>
+          </a:prstGeom>
+          <a:solidFill>
+            <a:srgbClr val="3F6F5F"/>
+          </a:solidFill>
+          <a:ln/>
+        </p:spPr>
+      </p:sp>
+      <p:sp>
+        <p:nvSpPr>
+          <p:cNvPr id="16" name="Shape 14"/>
+          <p:cNvSpPr/>
+          <p:nvPr/>
+        </p:nvSpPr>
+        <p:spPr>
+          <a:xfrm>
+            <a:off x="10781039" y="5076847"/>
+            <a:ext cx="70203" cy="70203"/>
+          </a:xfrm>
+          <a:prstGeom prst="ellipse">
+            <a:avLst/>
+          </a:prstGeom>
+          <a:solidFill>
+            <a:srgbClr val="B9852F"/>
+          </a:solidFill>
+          <a:ln/>
+        </p:spPr>
+      </p:sp>
+      <p:sp>
+        <p:nvSpPr>
+          <p:cNvPr id="17" name="Shape 15"/>
+          <p:cNvSpPr/>
+          <p:nvPr/>
+        </p:nvSpPr>
+        <p:spPr>
+          <a:xfrm>
+            <a:off x="11137858" y="5478499"/>
+            <a:ext cx="84369" cy="84369"/>
+          </a:xfrm>
+          <a:prstGeom prst="ellipse">
+            <a:avLst/>
+          </a:prstGeom>
+          <a:solidFill>
+            <a:srgbClr val="7A3B2E"/>
+          </a:solidFill>
+          <a:ln/>
+        </p:spPr>
+      </p:sp>
+      <p:sp>
+        <p:nvSpPr>
+          <p:cNvPr id="18" name="Shape 16"/>
+          <p:cNvSpPr/>
+          <p:nvPr/>
+        </p:nvSpPr>
+        <p:spPr>
+          <a:xfrm>
+            <a:off x="9710749" y="4910930"/>
+            <a:ext cx="57259" cy="57259"/>
+          </a:xfrm>
+          <a:prstGeom prst="ellipse">
+            <a:avLst/>
+          </a:prstGeom>
+          <a:solidFill>
+            <a:srgbClr val="3F6F5F"/>
+          </a:solidFill>
+          <a:ln/>
+        </p:spPr>
+      </p:sp>
+    </p:spTree>
+  </p:cSld>
+  <p:clrMapOvr>
+    <a:masterClrMapping/>
+  </p:clrMapOvr>
+</p:sld>
+</file>
+
 <file path=ppt/slides/slide2.xml><?xml version="1.0" encoding="utf-8"?>
 <p:sld xmlns:a="http://schemas.openxmlformats.org/drawingml/2006/main" xmlns:r="http://schemas.openxmlformats.org/officeDocument/2006/relationships" xmlns:p="http://schemas.openxmlformats.org/presentationml/2006/main">
   <p:cSld name="Slide 2">
@@ -2461,14 +4264,34 @@
       </p:grpSpPr>
       <p:sp>
         <p:nvSpPr>
-          <p:cNvPr id="2" name="Text 0"/>
-          <p:cNvSpPr/>
-          <p:nvPr/>
-        </p:nvSpPr>
-        <p:spPr>
-          <a:xfrm>
-            <a:off x="640080" y="731520"/>
-            <a:ext cx="10058400" cy="731520"/>
+          <p:cNvPr id="2" name="Shape 0"/>
+          <p:cNvSpPr/>
+          <p:nvPr/>
+        </p:nvSpPr>
+        <p:spPr>
+          <a:xfrm>
+            <a:off x="0" y="0"/>
+            <a:ext cx="164592" cy="6858000"/>
+          </a:xfrm>
+          <a:prstGeom prst="rect">
+            <a:avLst/>
+          </a:prstGeom>
+          <a:solidFill>
+            <a:srgbClr val="7A3B2E"/>
+          </a:solidFill>
+          <a:ln/>
+        </p:spPr>
+      </p:sp>
+      <p:sp>
+        <p:nvSpPr>
+          <p:cNvPr id="3" name="Text 1"/>
+          <p:cNvSpPr/>
+          <p:nvPr/>
+        </p:nvSpPr>
+        <p:spPr>
+          <a:xfrm>
+            <a:off x="640080" y="640080"/>
+            <a:ext cx="10058400" cy="320040"/>
           </a:xfrm>
           <a:prstGeom prst="rect">
             <a:avLst/>
@@ -2478,6 +4301,47 @@
         </p:spPr>
         <p:txBody>
           <a:bodyPr wrap="square" rtlCol="0" anchor="ctr"/>
+          <a:lstStyle/>
+          <a:p>
+            <a:pPr indent="0" marL="0">
+              <a:buNone/>
+            </a:pPr>
+            <a:r>
+              <a:rPr lang="en-US" sz="1200" b="1" spc="300" kern="0" dirty="0">
+                <a:solidFill>
+                  <a:srgbClr val="7A3B2E"/>
+                </a:solidFill>
+                <a:latin typeface="Calibri" pitchFamily="34" charset="0"/>
+                <a:ea typeface="Calibri" pitchFamily="34" charset="-122"/>
+                <a:cs typeface="Calibri" pitchFamily="34" charset="-120"/>
+              </a:rPr>
+              <a:t>WEEK 3 · THE MATERIAL</a:t>
+            </a:r>
+            <a:endParaRPr lang="en-US" sz="1200" dirty="0"/>
+          </a:p>
+        </p:txBody>
+      </p:sp>
+      <p:sp>
+        <p:nvSpPr>
+          <p:cNvPr id="4" name="Text 2"/>
+          <p:cNvSpPr/>
+          <p:nvPr/>
+        </p:nvSpPr>
+        <p:spPr>
+          <a:xfrm>
+            <a:off x="640080" y="1005840"/>
+            <a:ext cx="10881360" cy="914400"/>
+          </a:xfrm>
+          <a:prstGeom prst="rect">
+            <a:avLst/>
+          </a:prstGeom>
+          <a:noFill/>
+          <a:ln/>
+        </p:spPr>
+        <p:txBody>
+          <a:bodyPr wrap="square" rtlCol="0" anchor="t">
+            <a:spAutoFit/>
+          </a:bodyPr>
           <a:lstStyle/>
           <a:p>
             <a:pPr indent="0" marL="0">
@@ -2492,7 +4356,7 @@
                 <a:ea typeface="Cambria" pitchFamily="34" charset="-122"/>
                 <a:cs typeface="Cambria" pitchFamily="34" charset="-120"/>
               </a:rPr>
-              <a:t>Three modes today</a:t>
+              <a:t>Underwood's classifier, in particulars</a:t>
             </a:r>
             <a:endParaRPr lang="en-US" sz="3000" dirty="0"/>
           </a:p>
@@ -2500,134 +4364,98 @@
       </p:sp>
       <p:sp>
         <p:nvSpPr>
-          <p:cNvPr id="3" name="Text 1"/>
-          <p:cNvSpPr/>
-          <p:nvPr/>
-        </p:nvSpPr>
-        <p:spPr>
-          <a:xfrm>
-            <a:off x="640080" y="1417320"/>
-            <a:ext cx="10058400" cy="365760"/>
-          </a:xfrm>
-          <a:prstGeom prst="rect">
-            <a:avLst/>
-          </a:prstGeom>
-          <a:noFill/>
-          <a:ln/>
-        </p:spPr>
-        <p:txBody>
-          <a:bodyPr wrap="square" rtlCol="0" anchor="ctr"/>
+          <p:cNvPr id="5" name="Shape 3"/>
+          <p:cNvSpPr/>
+          <p:nvPr/>
+        </p:nvSpPr>
+        <p:spPr>
+          <a:xfrm>
+            <a:off x="640080" y="2331720"/>
+            <a:ext cx="201168" cy="201168"/>
+          </a:xfrm>
+          <a:prstGeom prst="ellipse">
+            <a:avLst/>
+          </a:prstGeom>
+          <a:solidFill>
+            <a:srgbClr val="7A3B2E"/>
+          </a:solidFill>
+          <a:ln/>
+        </p:spPr>
+      </p:sp>
+      <p:sp>
+        <p:nvSpPr>
+          <p:cNvPr id="6" name="Text 4"/>
+          <p:cNvSpPr/>
+          <p:nvPr/>
+        </p:nvSpPr>
+        <p:spPr>
+          <a:xfrm>
+            <a:off x="1097280" y="2240280"/>
+            <a:ext cx="10607040" cy="1017270"/>
+          </a:xfrm>
+          <a:prstGeom prst="rect">
+            <a:avLst/>
+          </a:prstGeom>
+          <a:noFill/>
+          <a:ln/>
+        </p:spPr>
+        <p:txBody>
+          <a:bodyPr wrap="square" rtlCol="0" anchor="t">
+            <a:spAutoFit/>
+          </a:bodyPr>
           <a:lstStyle/>
           <a:p>
             <a:pPr indent="0" marL="0">
-              <a:buNone/>
-            </a:pPr>
-            <a:r>
-              <a:rPr lang="en-US" sz="1400" i="1" dirty="0">
-                <a:solidFill>
-                  <a:srgbClr val="6B6B63"/>
+              <a:lnSpc>
+                <a:spcPct val="112000"/>
+              </a:lnSpc>
+              <a:buNone/>
+            </a:pPr>
+            <a:r>
+              <a:rPr lang="en-US" sz="1650" dirty="0">
+                <a:solidFill>
+                  <a:srgbClr val="1A1A1A"/>
                 </a:solidFill>
                 <a:latin typeface="Calibri" pitchFamily="34" charset="0"/>
                 <a:ea typeface="Calibri" pitchFamily="34" charset="-122"/>
                 <a:cs typeface="Calibri" pitchFamily="34" charset="-120"/>
               </a:rPr>
-              <a:t>about a third of the session each</a:t>
-            </a:r>
-            <a:endParaRPr lang="en-US" sz="1400" dirty="0"/>
-          </a:p>
-        </p:txBody>
-      </p:sp>
-      <p:sp>
-        <p:nvSpPr>
-          <p:cNvPr id="4" name="Shape 2"/>
-          <p:cNvSpPr/>
-          <p:nvPr/>
-        </p:nvSpPr>
-        <p:spPr>
-          <a:xfrm>
-            <a:off x="640080" y="2194560"/>
-            <a:ext cx="3383280" cy="3291840"/>
-          </a:xfrm>
-          <a:prstGeom prst="roundRect">
-            <a:avLst>
-              <a:gd name="adj" fmla="val 3333"/>
-            </a:avLst>
-          </a:prstGeom>
-          <a:solidFill>
-            <a:srgbClr val="F4EEE8"/>
-          </a:solidFill>
-          <a:ln/>
-        </p:spPr>
-      </p:sp>
-      <p:sp>
-        <p:nvSpPr>
-          <p:cNvPr id="5" name="Shape 3"/>
-          <p:cNvSpPr/>
-          <p:nvPr/>
-        </p:nvSpPr>
-        <p:spPr>
-          <a:xfrm>
-            <a:off x="1051560" y="2606040"/>
-            <a:ext cx="548640" cy="548640"/>
+              <a:t>A logistic regression, the exact tool of today's lab, trained on a century of novels to recognize detective fiction and science fiction.</a:t>
+            </a:r>
+            <a:endParaRPr lang="en-US" sz="1650" dirty="0"/>
+          </a:p>
+        </p:txBody>
+      </p:sp>
+      <p:sp>
+        <p:nvSpPr>
+          <p:cNvPr id="7" name="Shape 5"/>
+          <p:cNvSpPr/>
+          <p:nvPr/>
+        </p:nvSpPr>
+        <p:spPr>
+          <a:xfrm>
+            <a:off x="640080" y="3348990"/>
+            <a:ext cx="201168" cy="201168"/>
           </a:xfrm>
           <a:prstGeom prst="ellipse">
             <a:avLst/>
           </a:prstGeom>
           <a:solidFill>
-            <a:srgbClr val="7A3B2E"/>
-          </a:solidFill>
-          <a:ln/>
-        </p:spPr>
-      </p:sp>
-      <p:sp>
-        <p:nvSpPr>
-          <p:cNvPr id="6" name="Text 4"/>
-          <p:cNvSpPr/>
-          <p:nvPr/>
-        </p:nvSpPr>
-        <p:spPr>
-          <a:xfrm>
-            <a:off x="1005840" y="3383280"/>
-            <a:ext cx="2651760" cy="548640"/>
-          </a:xfrm>
-          <a:prstGeom prst="rect">
-            <a:avLst/>
-          </a:prstGeom>
-          <a:noFill/>
-          <a:ln/>
-        </p:spPr>
-        <p:txBody>
-          <a:bodyPr wrap="square" rtlCol="0" anchor="ctr"/>
-          <a:lstStyle/>
-          <a:p>
-            <a:pPr indent="0" marL="0">
-              <a:buNone/>
-            </a:pPr>
-            <a:r>
-              <a:rPr lang="en-US" sz="2100" b="1" dirty="0">
-                <a:solidFill>
-                  <a:srgbClr val="1A1A1A"/>
-                </a:solidFill>
-                <a:latin typeface="Cambria" pitchFamily="34" charset="0"/>
-                <a:ea typeface="Cambria" pitchFamily="34" charset="-122"/>
-                <a:cs typeface="Cambria" pitchFamily="34" charset="-120"/>
-              </a:rPr>
-              <a:t>Lecture / demo</a:t>
-            </a:r>
-            <a:endParaRPr lang="en-US" sz="2100" dirty="0"/>
-          </a:p>
-        </p:txBody>
-      </p:sp>
-      <p:sp>
-        <p:nvSpPr>
-          <p:cNvPr id="7" name="Text 5"/>
-          <p:cNvSpPr/>
-          <p:nvPr/>
-        </p:nvSpPr>
-        <p:spPr>
-          <a:xfrm>
-            <a:off x="1005840" y="3977640"/>
-            <a:ext cx="2651760" cy="1371600"/>
+            <a:srgbClr val="3F6F5F"/>
+          </a:solidFill>
+          <a:ln/>
+        </p:spPr>
+      </p:sp>
+      <p:sp>
+        <p:nvSpPr>
+          <p:cNvPr id="8" name="Text 6"/>
+          <p:cNvSpPr/>
+          <p:nvPr/>
+        </p:nvSpPr>
+        <p:spPr>
+          <a:xfrm>
+            <a:off x="1097280" y="3257550"/>
+            <a:ext cx="10607040" cy="1017270"/>
           </a:xfrm>
           <a:prstGeom prst="rect">
             <a:avLst/>
@@ -2643,12 +4471,12 @@
           <a:p>
             <a:pPr indent="0" marL="0">
               <a:lnSpc>
-                <a:spcPct val="115000"/>
+                <a:spcPct val="112000"/>
               </a:lnSpc>
               <a:buNone/>
             </a:pPr>
             <a:r>
-              <a:rPr lang="en-US" sz="1500" dirty="0">
+              <a:rPr lang="en-US" sz="1650" dirty="0">
                 <a:solidFill>
                   <a:srgbClr val="1A1A1A"/>
                 </a:solidFill>
@@ -2656,33 +4484,11 @@
                 <a:ea typeface="Calibri" pitchFamily="34" charset="-122"/>
                 <a:cs typeface="Calibri" pitchFamily="34" charset="-120"/>
               </a:rPr>
-              <a:t>Classification. Train a reader and read what it learned</a:t>
-            </a:r>
-            <a:endParaRPr lang="en-US" sz="1500" dirty="0"/>
-          </a:p>
-        </p:txBody>
-      </p:sp>
-      <p:sp>
-        <p:nvSpPr>
-          <p:cNvPr id="8" name="Shape 6"/>
-          <p:cNvSpPr/>
-          <p:nvPr/>
-        </p:nvSpPr>
-        <p:spPr>
-          <a:xfrm>
-            <a:off x="4526280" y="2194560"/>
-            <a:ext cx="3383280" cy="3291840"/>
-          </a:xfrm>
-          <a:prstGeom prst="roundRect">
-            <a:avLst>
-              <a:gd name="adj" fmla="val 3333"/>
-            </a:avLst>
-          </a:prstGeom>
-          <a:solidFill>
-            <a:srgbClr val="F4EEE8"/>
-          </a:solidFill>
-          <a:ln/>
-        </p:spPr>
+              <a:t>Its most famous error is the lesson: it misreads Pynchon's The Crying of Lot 49, a novel critics call a detective-fiction spoof.</a:t>
+            </a:r>
+            <a:endParaRPr lang="en-US" sz="1650" dirty="0"/>
+          </a:p>
+        </p:txBody>
       </p:sp>
       <p:sp>
         <p:nvSpPr>
@@ -2692,14 +4498,14 @@
         </p:nvSpPr>
         <p:spPr>
           <a:xfrm>
-            <a:off x="4937760" y="2606040"/>
-            <a:ext cx="548640" cy="548640"/>
+            <a:off x="640080" y="4366260"/>
+            <a:ext cx="201168" cy="201168"/>
           </a:xfrm>
           <a:prstGeom prst="ellipse">
             <a:avLst/>
           </a:prstGeom>
           <a:solidFill>
-            <a:srgbClr val="3F6F5F"/>
+            <a:srgbClr val="B9852F"/>
           </a:solidFill>
           <a:ln/>
         </p:spPr>
@@ -2712,47 +4518,8 @@
         </p:nvSpPr>
         <p:spPr>
           <a:xfrm>
-            <a:off x="4892040" y="3383280"/>
-            <a:ext cx="2651760" cy="548640"/>
-          </a:xfrm>
-          <a:prstGeom prst="rect">
-            <a:avLst/>
-          </a:prstGeom>
-          <a:noFill/>
-          <a:ln/>
-        </p:spPr>
-        <p:txBody>
-          <a:bodyPr wrap="square" rtlCol="0" anchor="ctr"/>
-          <a:lstStyle/>
-          <a:p>
-            <a:pPr indent="0" marL="0">
-              <a:buNone/>
-            </a:pPr>
-            <a:r>
-              <a:rPr lang="en-US" sz="2100" b="1" dirty="0">
-                <a:solidFill>
-                  <a:srgbClr val="1A1A1A"/>
-                </a:solidFill>
-                <a:latin typeface="Cambria" pitchFamily="34" charset="0"/>
-                <a:ea typeface="Cambria" pitchFamily="34" charset="-122"/>
-                <a:cs typeface="Cambria" pitchFamily="34" charset="-120"/>
-              </a:rPr>
-              <a:t>Workshop</a:t>
-            </a:r>
-            <a:endParaRPr lang="en-US" sz="2100" dirty="0"/>
-          </a:p>
-        </p:txBody>
-      </p:sp>
-      <p:sp>
-        <p:nvSpPr>
-          <p:cNvPr id="11" name="Text 9"/>
-          <p:cNvSpPr/>
-          <p:nvPr/>
-        </p:nvSpPr>
-        <p:spPr>
-          <a:xfrm>
-            <a:off x="4892040" y="3977640"/>
-            <a:ext cx="2651760" cy="1371600"/>
+            <a:off x="1097280" y="4274820"/>
+            <a:ext cx="10607040" cy="1017270"/>
           </a:xfrm>
           <a:prstGeom prst="rect">
             <a:avLst/>
@@ -2768,12 +4535,12 @@
           <a:p>
             <a:pPr indent="0" marL="0">
               <a:lnSpc>
-                <a:spcPct val="115000"/>
+                <a:spcPct val="112000"/>
               </a:lnSpc>
               <a:buNone/>
             </a:pPr>
             <a:r>
-              <a:rPr lang="en-US" sz="1500" dirty="0">
+              <a:rPr lang="en-US" sz="1650" dirty="0">
                 <a:solidFill>
                   <a:srgbClr val="1A1A1A"/>
                 </a:solidFill>
@@ -2781,103 +4548,42 @@
                 <a:ea typeface="Calibri" pitchFamily="34" charset="-122"/>
                 <a:cs typeface="Calibri" pitchFamily="34" charset="-120"/>
               </a:rPr>
-              <a:t>Build hands-on on your own data.</a:t>
-            </a:r>
-            <a:endParaRPr lang="en-US" sz="1500" dirty="0"/>
-          </a:p>
-        </p:txBody>
-      </p:sp>
-      <p:sp>
-        <p:nvSpPr>
-          <p:cNvPr id="12" name="Shape 10"/>
-          <p:cNvSpPr/>
-          <p:nvPr/>
-        </p:nvSpPr>
-        <p:spPr>
-          <a:xfrm>
-            <a:off x="8412480" y="2194560"/>
-            <a:ext cx="3383280" cy="3291840"/>
-          </a:xfrm>
-          <a:prstGeom prst="roundRect">
-            <a:avLst>
-              <a:gd name="adj" fmla="val 3333"/>
-            </a:avLst>
-          </a:prstGeom>
-          <a:solidFill>
-            <a:srgbClr val="F4EEE8"/>
-          </a:solidFill>
-          <a:ln/>
-        </p:spPr>
-      </p:sp>
-      <p:sp>
-        <p:nvSpPr>
-          <p:cNvPr id="13" name="Shape 11"/>
-          <p:cNvSpPr/>
-          <p:nvPr/>
-        </p:nvSpPr>
-        <p:spPr>
-          <a:xfrm>
-            <a:off x="8823960" y="2606040"/>
-            <a:ext cx="548640" cy="548640"/>
+              <a:t>Genre boundaries are real but fuzzy, and the classifier's mistake is what shows it.</a:t>
+            </a:r>
+            <a:endParaRPr lang="en-US" sz="1650" dirty="0"/>
+          </a:p>
+        </p:txBody>
+      </p:sp>
+      <p:sp>
+        <p:nvSpPr>
+          <p:cNvPr id="11" name="Shape 9"/>
+          <p:cNvSpPr/>
+          <p:nvPr/>
+        </p:nvSpPr>
+        <p:spPr>
+          <a:xfrm>
+            <a:off x="640080" y="5383530"/>
+            <a:ext cx="201168" cy="201168"/>
           </a:xfrm>
           <a:prstGeom prst="ellipse">
             <a:avLst/>
           </a:prstGeom>
           <a:solidFill>
-            <a:srgbClr val="B9852F"/>
-          </a:solidFill>
-          <a:ln/>
-        </p:spPr>
-      </p:sp>
-      <p:sp>
-        <p:nvSpPr>
-          <p:cNvPr id="14" name="Text 12"/>
-          <p:cNvSpPr/>
-          <p:nvPr/>
-        </p:nvSpPr>
-        <p:spPr>
-          <a:xfrm>
-            <a:off x="8778240" y="3383280"/>
-            <a:ext cx="2651760" cy="548640"/>
-          </a:xfrm>
-          <a:prstGeom prst="rect">
-            <a:avLst/>
-          </a:prstGeom>
-          <a:noFill/>
-          <a:ln/>
-        </p:spPr>
-        <p:txBody>
-          <a:bodyPr wrap="square" rtlCol="0" anchor="ctr"/>
-          <a:lstStyle/>
-          <a:p>
-            <a:pPr indent="0" marL="0">
-              <a:buNone/>
-            </a:pPr>
-            <a:r>
-              <a:rPr lang="en-US" sz="2100" b="1" dirty="0">
-                <a:solidFill>
-                  <a:srgbClr val="1A1A1A"/>
-                </a:solidFill>
-                <a:latin typeface="Cambria" pitchFamily="34" charset="0"/>
-                <a:ea typeface="Cambria" pitchFamily="34" charset="-122"/>
-                <a:cs typeface="Cambria" pitchFamily="34" charset="-120"/>
-              </a:rPr>
-              <a:t>Discussion</a:t>
-            </a:r>
-            <a:endParaRPr lang="en-US" sz="2100" dirty="0"/>
-          </a:p>
-        </p:txBody>
-      </p:sp>
-      <p:sp>
-        <p:nvSpPr>
-          <p:cNvPr id="15" name="Text 13"/>
-          <p:cNvSpPr/>
-          <p:nvPr/>
-        </p:nvSpPr>
-        <p:spPr>
-          <a:xfrm>
-            <a:off x="8778240" y="3977640"/>
-            <a:ext cx="2651760" cy="1371600"/>
+            <a:srgbClr val="7A3B2E"/>
+          </a:solidFill>
+          <a:ln/>
+        </p:spPr>
+      </p:sp>
+      <p:sp>
+        <p:nvSpPr>
+          <p:cNvPr id="12" name="Text 10"/>
+          <p:cNvSpPr/>
+          <p:nvPr/>
+        </p:nvSpPr>
+        <p:spPr>
+          <a:xfrm>
+            <a:off x="1097280" y="5292090"/>
+            <a:ext cx="10607040" cy="1017270"/>
           </a:xfrm>
           <a:prstGeom prst="rect">
             <a:avLst/>
@@ -2893,12 +4599,12 @@
           <a:p>
             <a:pPr indent="0" marL="0">
               <a:lnSpc>
-                <a:spcPct val="115000"/>
+                <a:spcPct val="112000"/>
               </a:lnSpc>
               <a:buNone/>
             </a:pPr>
             <a:r>
-              <a:rPr lang="en-US" sz="1500" dirty="0">
+              <a:rPr lang="en-US" sz="1650" dirty="0">
                 <a:solidFill>
                   <a:srgbClr val="1A1A1A"/>
                 </a:solidFill>
@@ -2906,9 +4612,9 @@
                 <a:ea typeface="Calibri" pitchFamily="34" charset="-122"/>
                 <a:cs typeface="Calibri" pitchFamily="34" charset="-120"/>
               </a:rPr>
-              <a:t>Interrogate the study, debate it, or critique each other's work.</a:t>
-            </a:r>
-            <a:endParaRPr lang="en-US" sz="1500" dirty="0"/>
+              <a:t>Ask of every classifier, including yours: where does it fail, and what does the failure teach?</a:t>
+            </a:r>
+            <a:endParaRPr lang="en-US" sz="1650" dirty="0"/>
           </a:p>
         </p:txBody>
       </p:sp>
@@ -2946,14 +4652,34 @@
       </p:grpSpPr>
       <p:sp>
         <p:nvSpPr>
-          <p:cNvPr id="2" name="Text 0"/>
+          <p:cNvPr id="2" name="Shape 0"/>
+          <p:cNvSpPr/>
+          <p:nvPr/>
+        </p:nvSpPr>
+        <p:spPr>
+          <a:xfrm>
+            <a:off x="0" y="0"/>
+            <a:ext cx="164592" cy="6858000"/>
+          </a:xfrm>
+          <a:prstGeom prst="rect">
+            <a:avLst/>
+          </a:prstGeom>
+          <a:solidFill>
+            <a:srgbClr val="3F6F5F"/>
+          </a:solidFill>
+          <a:ln/>
+        </p:spPr>
+      </p:sp>
+      <p:sp>
+        <p:nvSpPr>
+          <p:cNvPr id="3" name="Text 1"/>
           <p:cNvSpPr/>
           <p:nvPr/>
         </p:nvSpPr>
         <p:spPr>
           <a:xfrm>
             <a:off x="640080" y="640080"/>
-            <a:ext cx="10058400" cy="731520"/>
+            <a:ext cx="10058400" cy="320040"/>
           </a:xfrm>
           <a:prstGeom prst="rect">
             <a:avLst/>
@@ -2963,6 +4689,47 @@
         </p:spPr>
         <p:txBody>
           <a:bodyPr wrap="square" rtlCol="0" anchor="ctr"/>
+          <a:lstStyle/>
+          <a:p>
+            <a:pPr indent="0" marL="0">
+              <a:buNone/>
+            </a:pPr>
+            <a:r>
+              <a:rPr lang="en-US" sz="1200" b="1" spc="300" kern="0" dirty="0">
+                <a:solidFill>
+                  <a:srgbClr val="3F6F5F"/>
+                </a:solidFill>
+                <a:latin typeface="Calibri" pitchFamily="34" charset="0"/>
+                <a:ea typeface="Calibri" pitchFamily="34" charset="-122"/>
+                <a:cs typeface="Calibri" pitchFamily="34" charset="-120"/>
+              </a:rPr>
+              <a:t>WEEK 3 · THE MATERIAL</a:t>
+            </a:r>
+            <a:endParaRPr lang="en-US" sz="1200" dirty="0"/>
+          </a:p>
+        </p:txBody>
+      </p:sp>
+      <p:sp>
+        <p:nvSpPr>
+          <p:cNvPr id="4" name="Text 2"/>
+          <p:cNvSpPr/>
+          <p:nvPr/>
+        </p:nvSpPr>
+        <p:spPr>
+          <a:xfrm>
+            <a:off x="640080" y="1005840"/>
+            <a:ext cx="10881360" cy="914400"/>
+          </a:xfrm>
+          <a:prstGeom prst="rect">
+            <a:avLst/>
+          </a:prstGeom>
+          <a:noFill/>
+          <a:ln/>
+        </p:spPr>
+        <p:txBody>
+          <a:bodyPr wrap="square" rtlCol="0" anchor="t">
+            <a:spAutoFit/>
+          </a:bodyPr>
           <a:lstStyle/>
           <a:p>
             <a:pPr indent="0" marL="0">
@@ -2977,7 +4744,7 @@
                 <a:ea typeface="Cambria" pitchFamily="34" charset="-122"/>
                 <a:cs typeface="Cambria" pitchFamily="34" charset="-120"/>
               </a:rPr>
-              <a:t>The session</a:t>
+              <a:t>A classifier is counting with weights</a:t>
             </a:r>
             <a:endParaRPr lang="en-US" sz="3000" dirty="0"/>
           </a:p>
@@ -2985,19 +4752,17 @@
       </p:sp>
       <p:sp>
         <p:nvSpPr>
-          <p:cNvPr id="3" name="Shape 1"/>
-          <p:cNvSpPr/>
-          <p:nvPr/>
-        </p:nvSpPr>
-        <p:spPr>
-          <a:xfrm>
-            <a:off x="640080" y="1572768"/>
-            <a:ext cx="868680" cy="388112"/>
-          </a:xfrm>
-          <a:prstGeom prst="roundRect">
-            <a:avLst>
-              <a:gd name="adj" fmla="val 14136"/>
-            </a:avLst>
+          <p:cNvPr id="5" name="Shape 3"/>
+          <p:cNvSpPr/>
+          <p:nvPr/>
+        </p:nvSpPr>
+        <p:spPr>
+          <a:xfrm>
+            <a:off x="640080" y="2331720"/>
+            <a:ext cx="201168" cy="201168"/>
+          </a:xfrm>
+          <a:prstGeom prst="ellipse">
+            <a:avLst/>
           </a:prstGeom>
           <a:solidFill>
             <a:srgbClr val="7A3B2E"/>
@@ -3007,71 +4772,99 @@
       </p:sp>
       <p:sp>
         <p:nvSpPr>
-          <p:cNvPr id="4" name="Text 2"/>
-          <p:cNvSpPr/>
-          <p:nvPr/>
-        </p:nvSpPr>
-        <p:spPr>
-          <a:xfrm>
-            <a:off x="640080" y="1572768"/>
-            <a:ext cx="868680" cy="388112"/>
-          </a:xfrm>
-          <a:prstGeom prst="rect">
-            <a:avLst/>
-          </a:prstGeom>
-          <a:noFill/>
-          <a:ln/>
-        </p:spPr>
-        <p:txBody>
-          <a:bodyPr wrap="square" rtlCol="0" anchor="ctr"/>
-          <a:lstStyle/>
-          <a:p>
-            <a:pPr algn="ctr" indent="0" marL="0">
-              <a:buNone/>
-            </a:pPr>
-            <a:r>
-              <a:rPr lang="en-US" sz="1100" b="1" dirty="0">
-                <a:solidFill>
-                  <a:srgbClr val="FFFFFF"/>
+          <p:cNvPr id="6" name="Text 4"/>
+          <p:cNvSpPr/>
+          <p:nvPr/>
+        </p:nvSpPr>
+        <p:spPr>
+          <a:xfrm>
+            <a:off x="1097280" y="2240280"/>
+            <a:ext cx="10607040" cy="1017270"/>
+          </a:xfrm>
+          <a:prstGeom prst="rect">
+            <a:avLst/>
+          </a:prstGeom>
+          <a:noFill/>
+          <a:ln/>
+        </p:spPr>
+        <p:txBody>
+          <a:bodyPr wrap="square" rtlCol="0" anchor="t">
+            <a:spAutoFit/>
+          </a:bodyPr>
+          <a:lstStyle/>
+          <a:p>
+            <a:pPr indent="0" marL="0">
+              <a:lnSpc>
+                <a:spcPct val="112000"/>
+              </a:lnSpc>
+              <a:buNone/>
+            </a:pPr>
+            <a:r>
+              <a:rPr lang="en-US" sz="1650" dirty="0">
+                <a:solidFill>
+                  <a:srgbClr val="1A1A1A"/>
                 </a:solidFill>
                 <a:latin typeface="Calibri" pitchFamily="34" charset="0"/>
                 <a:ea typeface="Calibri" pitchFamily="34" charset="-122"/>
                 <a:cs typeface="Calibri" pitchFamily="34" charset="-120"/>
               </a:rPr>
-              <a:t>0:00</a:t>
-            </a:r>
-            <a:endParaRPr lang="en-US" sz="1100" dirty="0"/>
-          </a:p>
-        </p:txBody>
-      </p:sp>
-      <p:sp>
-        <p:nvSpPr>
-          <p:cNvPr id="5" name="Text 3"/>
-          <p:cNvSpPr/>
-          <p:nvPr/>
-        </p:nvSpPr>
-        <p:spPr>
-          <a:xfrm>
-            <a:off x="1691640" y="1554480"/>
-            <a:ext cx="9646920" cy="497840"/>
-          </a:xfrm>
-          <a:prstGeom prst="rect">
-            <a:avLst/>
-          </a:prstGeom>
-          <a:noFill/>
-          <a:ln/>
-        </p:spPr>
-        <p:txBody>
-          <a:bodyPr wrap="square" rtlCol="0" anchor="ctr">
+              <a:t>Every word casts a vote, for or against. The model adds the votes.</a:t>
+            </a:r>
+            <a:endParaRPr lang="en-US" sz="1650" dirty="0"/>
+          </a:p>
+        </p:txBody>
+      </p:sp>
+      <p:sp>
+        <p:nvSpPr>
+          <p:cNvPr id="7" name="Shape 5"/>
+          <p:cNvSpPr/>
+          <p:nvPr/>
+        </p:nvSpPr>
+        <p:spPr>
+          <a:xfrm>
+            <a:off x="640080" y="3348990"/>
+            <a:ext cx="201168" cy="201168"/>
+          </a:xfrm>
+          <a:prstGeom prst="ellipse">
+            <a:avLst/>
+          </a:prstGeom>
+          <a:solidFill>
+            <a:srgbClr val="3F6F5F"/>
+          </a:solidFill>
+          <a:ln/>
+        </p:spPr>
+      </p:sp>
+      <p:sp>
+        <p:nvSpPr>
+          <p:cNvPr id="8" name="Text 6"/>
+          <p:cNvSpPr/>
+          <p:nvPr/>
+        </p:nvSpPr>
+        <p:spPr>
+          <a:xfrm>
+            <a:off x="1097280" y="3257550"/>
+            <a:ext cx="10607040" cy="1017270"/>
+          </a:xfrm>
+          <a:prstGeom prst="rect">
+            <a:avLst/>
+          </a:prstGeom>
+          <a:noFill/>
+          <a:ln/>
+        </p:spPr>
+        <p:txBody>
+          <a:bodyPr wrap="square" rtlCol="0" anchor="t">
             <a:spAutoFit/>
           </a:bodyPr>
           <a:lstStyle/>
           <a:p>
             <a:pPr indent="0" marL="0">
-              <a:buNone/>
-            </a:pPr>
-            <a:r>
-              <a:rPr lang="en-US" sz="1100" dirty="0">
+              <a:lnSpc>
+                <a:spcPct val="112000"/>
+              </a:lnSpc>
+              <a:buNone/>
+            </a:pPr>
+            <a:r>
+              <a:rPr lang="en-US" sz="1650" dirty="0">
                 <a:solidFill>
                   <a:srgbClr val="1A1A1A"/>
                 </a:solidFill>
@@ -3079,101 +4872,127 @@
                 <a:ea typeface="Calibri" pitchFamily="34" charset="-122"/>
                 <a:cs typeface="Calibri" pitchFamily="34" charset="-120"/>
               </a:rPr>
-              <a:t>Warm-up + Look at This: Underwood's genre prediction.</a:t>
-            </a:r>
-            <a:endParaRPr lang="en-US" sz="1100" dirty="0"/>
-          </a:p>
-        </p:txBody>
-      </p:sp>
-      <p:sp>
-        <p:nvSpPr>
-          <p:cNvPr id="6" name="Shape 4"/>
-          <p:cNvSpPr/>
-          <p:nvPr/>
-        </p:nvSpPr>
-        <p:spPr>
-          <a:xfrm>
-            <a:off x="640080" y="2070608"/>
-            <a:ext cx="868680" cy="388112"/>
-          </a:xfrm>
-          <a:prstGeom prst="roundRect">
-            <a:avLst>
-              <a:gd name="adj" fmla="val 14136"/>
-            </a:avLst>
-          </a:prstGeom>
-          <a:solidFill>
-            <a:srgbClr val="7A3B2E"/>
-          </a:solidFill>
-          <a:ln/>
-        </p:spPr>
-      </p:sp>
-      <p:sp>
-        <p:nvSpPr>
-          <p:cNvPr id="7" name="Text 5"/>
-          <p:cNvSpPr/>
-          <p:nvPr/>
-        </p:nvSpPr>
-        <p:spPr>
-          <a:xfrm>
-            <a:off x="640080" y="2070608"/>
-            <a:ext cx="868680" cy="388112"/>
-          </a:xfrm>
-          <a:prstGeom prst="rect">
-            <a:avLst/>
-          </a:prstGeom>
-          <a:noFill/>
-          <a:ln/>
-        </p:spPr>
-        <p:txBody>
-          <a:bodyPr wrap="square" rtlCol="0" anchor="ctr"/>
-          <a:lstStyle/>
-          <a:p>
-            <a:pPr algn="ctr" indent="0" marL="0">
-              <a:buNone/>
-            </a:pPr>
-            <a:r>
-              <a:rPr lang="en-US" sz="1100" b="1" dirty="0">
-                <a:solidFill>
-                  <a:srgbClr val="FFFFFF"/>
+              <a:t>Training means learning the weights from labeled examples. Nothing more mystical than that.</a:t>
+            </a:r>
+            <a:endParaRPr lang="en-US" sz="1650" dirty="0"/>
+          </a:p>
+        </p:txBody>
+      </p:sp>
+      <p:sp>
+        <p:nvSpPr>
+          <p:cNvPr id="9" name="Shape 7"/>
+          <p:cNvSpPr/>
+          <p:nvPr/>
+        </p:nvSpPr>
+        <p:spPr>
+          <a:xfrm>
+            <a:off x="640080" y="4366260"/>
+            <a:ext cx="201168" cy="201168"/>
+          </a:xfrm>
+          <a:prstGeom prst="ellipse">
+            <a:avLst/>
+          </a:prstGeom>
+          <a:solidFill>
+            <a:srgbClr val="B9852F"/>
+          </a:solidFill>
+          <a:ln/>
+        </p:spPr>
+      </p:sp>
+      <p:sp>
+        <p:nvSpPr>
+          <p:cNvPr id="10" name="Text 8"/>
+          <p:cNvSpPr/>
+          <p:nvPr/>
+        </p:nvSpPr>
+        <p:spPr>
+          <a:xfrm>
+            <a:off x="1097280" y="4274820"/>
+            <a:ext cx="10607040" cy="1017270"/>
+          </a:xfrm>
+          <a:prstGeom prst="rect">
+            <a:avLst/>
+          </a:prstGeom>
+          <a:noFill/>
+          <a:ln/>
+        </p:spPr>
+        <p:txBody>
+          <a:bodyPr wrap="square" rtlCol="0" anchor="t">
+            <a:spAutoFit/>
+          </a:bodyPr>
+          <a:lstStyle/>
+          <a:p>
+            <a:pPr indent="0" marL="0">
+              <a:lnSpc>
+                <a:spcPct val="112000"/>
+              </a:lnSpc>
+              <a:buNone/>
+            </a:pPr>
+            <a:r>
+              <a:rPr lang="en-US" sz="1650" dirty="0">
+                <a:solidFill>
+                  <a:srgbClr val="1A1A1A"/>
                 </a:solidFill>
                 <a:latin typeface="Calibri" pitchFamily="34" charset="0"/>
                 <a:ea typeface="Calibri" pitchFamily="34" charset="-122"/>
                 <a:cs typeface="Calibri" pitchFamily="34" charset="-120"/>
               </a:rPr>
-              <a:t>0:10</a:t>
-            </a:r>
-            <a:endParaRPr lang="en-US" sz="1100" dirty="0"/>
-          </a:p>
-        </p:txBody>
-      </p:sp>
-      <p:sp>
-        <p:nvSpPr>
-          <p:cNvPr id="8" name="Text 6"/>
-          <p:cNvSpPr/>
-          <p:nvPr/>
-        </p:nvSpPr>
-        <p:spPr>
-          <a:xfrm>
-            <a:off x="1691640" y="2052320"/>
-            <a:ext cx="9646920" cy="497840"/>
-          </a:xfrm>
-          <a:prstGeom prst="rect">
-            <a:avLst/>
-          </a:prstGeom>
-          <a:noFill/>
-          <a:ln/>
-        </p:spPr>
-        <p:txBody>
-          <a:bodyPr wrap="square" rtlCol="0" anchor="ctr">
+              <a:t>Read the signed weights: the most positive and most negative words are the model's mind on the table.</a:t>
+            </a:r>
+            <a:endParaRPr lang="en-US" sz="1650" dirty="0"/>
+          </a:p>
+        </p:txBody>
+      </p:sp>
+      <p:sp>
+        <p:nvSpPr>
+          <p:cNvPr id="11" name="Shape 9"/>
+          <p:cNvSpPr/>
+          <p:nvPr/>
+        </p:nvSpPr>
+        <p:spPr>
+          <a:xfrm>
+            <a:off x="640080" y="5383530"/>
+            <a:ext cx="201168" cy="201168"/>
+          </a:xfrm>
+          <a:prstGeom prst="ellipse">
+            <a:avLst/>
+          </a:prstGeom>
+          <a:solidFill>
+            <a:srgbClr val="7A3B2E"/>
+          </a:solidFill>
+          <a:ln/>
+        </p:spPr>
+      </p:sp>
+      <p:sp>
+        <p:nvSpPr>
+          <p:cNvPr id="12" name="Text 10"/>
+          <p:cNvSpPr/>
+          <p:nvPr/>
+        </p:nvSpPr>
+        <p:spPr>
+          <a:xfrm>
+            <a:off x="1097280" y="5292090"/>
+            <a:ext cx="10607040" cy="1017270"/>
+          </a:xfrm>
+          <a:prstGeom prst="rect">
+            <a:avLst/>
+          </a:prstGeom>
+          <a:noFill/>
+          <a:ln/>
+        </p:spPr>
+        <p:txBody>
+          <a:bodyPr wrap="square" rtlCol="0" anchor="t">
             <a:spAutoFit/>
           </a:bodyPr>
           <a:lstStyle/>
           <a:p>
             <a:pPr indent="0" marL="0">
-              <a:buNone/>
-            </a:pPr>
-            <a:r>
-              <a:rPr lang="en-US" sz="1100" dirty="0">
+              <a:lnSpc>
+                <a:spcPct val="112000"/>
+              </a:lnSpc>
+              <a:buNone/>
+            </a:pPr>
+            <a:r>
+              <a:rPr lang="en-US" sz="1650" dirty="0">
                 <a:solidFill>
                   <a:srgbClr val="1A1A1A"/>
                 </a:solidFill>
@@ -3181,723 +5000,9 @@
                 <a:ea typeface="Calibri" pitchFamily="34" charset="-122"/>
                 <a:cs typeface="Calibri" pitchFamily="34" charset="-120"/>
               </a:rPr>
-              <a:t>Teachable Machine, instructor demo: a two-class image model trained live, then the reveal that it learned from only orange cats and brown dogs. The room predicts what a black cat will do, then sees it.</a:t>
-            </a:r>
-            <a:endParaRPr lang="en-US" sz="1100" dirty="0"/>
-          </a:p>
-        </p:txBody>
-      </p:sp>
-      <p:sp>
-        <p:nvSpPr>
-          <p:cNvPr id="9" name="Shape 7"/>
-          <p:cNvSpPr/>
-          <p:nvPr/>
-        </p:nvSpPr>
-        <p:spPr>
-          <a:xfrm>
-            <a:off x="640080" y="2568448"/>
-            <a:ext cx="868680" cy="388112"/>
-          </a:xfrm>
-          <a:prstGeom prst="roundRect">
-            <a:avLst>
-              <a:gd name="adj" fmla="val 14136"/>
-            </a:avLst>
-          </a:prstGeom>
-          <a:solidFill>
-            <a:srgbClr val="7A3B2E"/>
-          </a:solidFill>
-          <a:ln/>
-        </p:spPr>
-      </p:sp>
-      <p:sp>
-        <p:nvSpPr>
-          <p:cNvPr id="10" name="Text 8"/>
-          <p:cNvSpPr/>
-          <p:nvPr/>
-        </p:nvSpPr>
-        <p:spPr>
-          <a:xfrm>
-            <a:off x="640080" y="2568448"/>
-            <a:ext cx="868680" cy="388112"/>
-          </a:xfrm>
-          <a:prstGeom prst="rect">
-            <a:avLst/>
-          </a:prstGeom>
-          <a:noFill/>
-          <a:ln/>
-        </p:spPr>
-        <p:txBody>
-          <a:bodyPr wrap="square" rtlCol="0" anchor="ctr"/>
-          <a:lstStyle/>
-          <a:p>
-            <a:pPr algn="ctr" indent="0" marL="0">
-              <a:buNone/>
-            </a:pPr>
-            <a:r>
-              <a:rPr lang="en-US" sz="1100" b="1" dirty="0">
-                <a:solidFill>
-                  <a:srgbClr val="FFFFFF"/>
-                </a:solidFill>
-                <a:latin typeface="Calibri" pitchFamily="34" charset="0"/>
-                <a:ea typeface="Calibri" pitchFamily="34" charset="-122"/>
-                <a:cs typeface="Calibri" pitchFamily="34" charset="-120"/>
-              </a:rPr>
-              <a:t>0:22</a:t>
-            </a:r>
-            <a:endParaRPr lang="en-US" sz="1100" dirty="0"/>
-          </a:p>
-        </p:txBody>
-      </p:sp>
-      <p:sp>
-        <p:nvSpPr>
-          <p:cNvPr id="11" name="Text 9"/>
-          <p:cNvSpPr/>
-          <p:nvPr/>
-        </p:nvSpPr>
-        <p:spPr>
-          <a:xfrm>
-            <a:off x="1691640" y="2550160"/>
-            <a:ext cx="9646920" cy="497840"/>
-          </a:xfrm>
-          <a:prstGeom prst="rect">
-            <a:avLst/>
-          </a:prstGeom>
-          <a:noFill/>
-          <a:ln/>
-        </p:spPr>
-        <p:txBody>
-          <a:bodyPr wrap="square" rtlCol="0" anchor="ctr">
-            <a:spAutoFit/>
-          </a:bodyPr>
-          <a:lstStyle/>
-          <a:p>
-            <a:pPr indent="0" marL="0">
-              <a:buNone/>
-            </a:pPr>
-            <a:r>
-              <a:rPr lang="en-US" sz="1100" dirty="0">
-                <a:solidFill>
-                  <a:srgbClr val="1A1A1A"/>
-                </a:solidFill>
-                <a:latin typeface="Calibri" pitchFamily="34" charset="0"/>
-                <a:ea typeface="Calibri" pitchFamily="34" charset="-122"/>
-                <a:cs typeface="Calibri" pitchFamily="34" charset="-120"/>
-              </a:rPr>
-              <a:t>Counting with weights, the lab: each word casts a weighted vote; a logistic regression adds them up. Train it on a pop corpus, then read the signed coefficients, its mind on the table.</a:t>
-            </a:r>
-            <a:endParaRPr lang="en-US" sz="1100" dirty="0"/>
-          </a:p>
-        </p:txBody>
-      </p:sp>
-      <p:sp>
-        <p:nvSpPr>
-          <p:cNvPr id="12" name="Shape 10"/>
-          <p:cNvSpPr/>
-          <p:nvPr/>
-        </p:nvSpPr>
-        <p:spPr>
-          <a:xfrm>
-            <a:off x="640080" y="3066288"/>
-            <a:ext cx="868680" cy="388112"/>
-          </a:xfrm>
-          <a:prstGeom prst="roundRect">
-            <a:avLst>
-              <a:gd name="adj" fmla="val 14136"/>
-            </a:avLst>
-          </a:prstGeom>
-          <a:solidFill>
-            <a:srgbClr val="7A3B2E"/>
-          </a:solidFill>
-          <a:ln/>
-        </p:spPr>
-      </p:sp>
-      <p:sp>
-        <p:nvSpPr>
-          <p:cNvPr id="13" name="Text 11"/>
-          <p:cNvSpPr/>
-          <p:nvPr/>
-        </p:nvSpPr>
-        <p:spPr>
-          <a:xfrm>
-            <a:off x="640080" y="3066288"/>
-            <a:ext cx="868680" cy="388112"/>
-          </a:xfrm>
-          <a:prstGeom prst="rect">
-            <a:avLst/>
-          </a:prstGeom>
-          <a:noFill/>
-          <a:ln/>
-        </p:spPr>
-        <p:txBody>
-          <a:bodyPr wrap="square" rtlCol="0" anchor="ctr"/>
-          <a:lstStyle/>
-          <a:p>
-            <a:pPr algn="ctr" indent="0" marL="0">
-              <a:buNone/>
-            </a:pPr>
-            <a:r>
-              <a:rPr lang="en-US" sz="1100" b="1" dirty="0">
-                <a:solidFill>
-                  <a:srgbClr val="FFFFFF"/>
-                </a:solidFill>
-                <a:latin typeface="Calibri" pitchFamily="34" charset="0"/>
-                <a:ea typeface="Calibri" pitchFamily="34" charset="-122"/>
-                <a:cs typeface="Calibri" pitchFamily="34" charset="-120"/>
-              </a:rPr>
-              <a:t>0:52</a:t>
-            </a:r>
-            <a:endParaRPr lang="en-US" sz="1100" dirty="0"/>
-          </a:p>
-        </p:txBody>
-      </p:sp>
-      <p:sp>
-        <p:nvSpPr>
-          <p:cNvPr id="14" name="Text 12"/>
-          <p:cNvSpPr/>
-          <p:nvPr/>
-        </p:nvSpPr>
-        <p:spPr>
-          <a:xfrm>
-            <a:off x="1691640" y="3048000"/>
-            <a:ext cx="9646920" cy="497840"/>
-          </a:xfrm>
-          <a:prstGeom prst="rect">
-            <a:avLst/>
-          </a:prstGeom>
-          <a:noFill/>
-          <a:ln/>
-        </p:spPr>
-        <p:txBody>
-          <a:bodyPr wrap="square" rtlCol="0" anchor="ctr">
-            <a:spAutoFit/>
-          </a:bodyPr>
-          <a:lstStyle/>
-          <a:p>
-            <a:pPr indent="0" marL="0">
-              <a:buNone/>
-            </a:pPr>
-            <a:r>
-              <a:rPr lang="en-US" sz="1100" dirty="0">
-                <a:solidFill>
-                  <a:srgbClr val="1A1A1A"/>
-                </a:solidFill>
-                <a:latin typeface="Calibri" pitchFamily="34" charset="0"/>
-                <a:ea typeface="Calibri" pitchFamily="34" charset="-122"/>
-                <a:cs typeface="Calibri" pitchFamily="34" charset="-120"/>
-              </a:rPr>
-              <a:t>Delight beat: the words that most predict "breakup song" or "this reviewer hated it."</a:t>
-            </a:r>
-            <a:endParaRPr lang="en-US" sz="1100" dirty="0"/>
-          </a:p>
-        </p:txBody>
-      </p:sp>
-      <p:sp>
-        <p:nvSpPr>
-          <p:cNvPr id="15" name="Shape 13"/>
-          <p:cNvSpPr/>
-          <p:nvPr/>
-        </p:nvSpPr>
-        <p:spPr>
-          <a:xfrm>
-            <a:off x="640080" y="3564128"/>
-            <a:ext cx="868680" cy="388112"/>
-          </a:xfrm>
-          <a:prstGeom prst="roundRect">
-            <a:avLst>
-              <a:gd name="adj" fmla="val 14136"/>
-            </a:avLst>
-          </a:prstGeom>
-          <a:solidFill>
-            <a:srgbClr val="7A3B2E"/>
-          </a:solidFill>
-          <a:ln/>
-        </p:spPr>
-      </p:sp>
-      <p:sp>
-        <p:nvSpPr>
-          <p:cNvPr id="16" name="Text 14"/>
-          <p:cNvSpPr/>
-          <p:nvPr/>
-        </p:nvSpPr>
-        <p:spPr>
-          <a:xfrm>
-            <a:off x="640080" y="3564128"/>
-            <a:ext cx="868680" cy="388112"/>
-          </a:xfrm>
-          <a:prstGeom prst="rect">
-            <a:avLst/>
-          </a:prstGeom>
-          <a:noFill/>
-          <a:ln/>
-        </p:spPr>
-        <p:txBody>
-          <a:bodyPr wrap="square" rtlCol="0" anchor="ctr"/>
-          <a:lstStyle/>
-          <a:p>
-            <a:pPr algn="ctr" indent="0" marL="0">
-              <a:buNone/>
-            </a:pPr>
-            <a:r>
-              <a:rPr lang="en-US" sz="1100" b="1" dirty="0">
-                <a:solidFill>
-                  <a:srgbClr val="FFFFFF"/>
-                </a:solidFill>
-                <a:latin typeface="Calibri" pitchFamily="34" charset="0"/>
-                <a:ea typeface="Calibri" pitchFamily="34" charset="-122"/>
-                <a:cs typeface="Calibri" pitchFamily="34" charset="-120"/>
-              </a:rPr>
-              <a:t>0:57</a:t>
-            </a:r>
-            <a:endParaRPr lang="en-US" sz="1100" dirty="0"/>
-          </a:p>
-        </p:txBody>
-      </p:sp>
-      <p:sp>
-        <p:nvSpPr>
-          <p:cNvPr id="17" name="Text 15"/>
-          <p:cNvSpPr/>
-          <p:nvPr/>
-        </p:nvSpPr>
-        <p:spPr>
-          <a:xfrm>
-            <a:off x="1691640" y="3545840"/>
-            <a:ext cx="9646920" cy="497840"/>
-          </a:xfrm>
-          <a:prstGeom prst="rect">
-            <a:avLst/>
-          </a:prstGeom>
-          <a:noFill/>
-          <a:ln/>
-        </p:spPr>
-        <p:txBody>
-          <a:bodyPr wrap="square" rtlCol="0" anchor="ctr">
-            <a:spAutoFit/>
-          </a:bodyPr>
-          <a:lstStyle/>
-          <a:p>
-            <a:pPr indent="0" marL="0">
-              <a:buNone/>
-            </a:pPr>
-            <a:r>
-              <a:rPr lang="en-US" sz="1100" dirty="0">
-                <a:solidFill>
-                  <a:srgbClr val="1A1A1A"/>
-                </a:solidFill>
-                <a:latin typeface="Calibri" pitchFamily="34" charset="0"/>
-                <a:ea typeface="Calibri" pitchFamily="34" charset="-122"/>
-                <a:cs typeface="Calibri" pitchFamily="34" charset="-120"/>
-              </a:rPr>
-              <a:t>One-line bridge: that classifier is a neuron; stack many for a neural net, which is what's inside the Week 7 model. A quick TensorFlow Playground glance.</a:t>
-            </a:r>
-            <a:endParaRPr lang="en-US" sz="1100" dirty="0"/>
-          </a:p>
-        </p:txBody>
-      </p:sp>
-      <p:sp>
-        <p:nvSpPr>
-          <p:cNvPr id="18" name="Shape 16"/>
-          <p:cNvSpPr/>
-          <p:nvPr/>
-        </p:nvSpPr>
-        <p:spPr>
-          <a:xfrm>
-            <a:off x="640080" y="4061968"/>
-            <a:ext cx="868680" cy="388112"/>
-          </a:xfrm>
-          <a:prstGeom prst="roundRect">
-            <a:avLst>
-              <a:gd name="adj" fmla="val 14136"/>
-            </a:avLst>
-          </a:prstGeom>
-          <a:solidFill>
-            <a:srgbClr val="7A3B2E"/>
-          </a:solidFill>
-          <a:ln/>
-        </p:spPr>
-      </p:sp>
-      <p:sp>
-        <p:nvSpPr>
-          <p:cNvPr id="19" name="Text 17"/>
-          <p:cNvSpPr/>
-          <p:nvPr/>
-        </p:nvSpPr>
-        <p:spPr>
-          <a:xfrm>
-            <a:off x="640080" y="4061968"/>
-            <a:ext cx="868680" cy="388112"/>
-          </a:xfrm>
-          <a:prstGeom prst="rect">
-            <a:avLst/>
-          </a:prstGeom>
-          <a:noFill/>
-          <a:ln/>
-        </p:spPr>
-        <p:txBody>
-          <a:bodyPr wrap="square" rtlCol="0" anchor="ctr"/>
-          <a:lstStyle/>
-          <a:p>
-            <a:pPr algn="ctr" indent="0" marL="0">
-              <a:buNone/>
-            </a:pPr>
-            <a:r>
-              <a:rPr lang="en-US" sz="1100" b="1" dirty="0">
-                <a:solidFill>
-                  <a:srgbClr val="FFFFFF"/>
-                </a:solidFill>
-                <a:latin typeface="Calibri" pitchFamily="34" charset="0"/>
-                <a:ea typeface="Calibri" pitchFamily="34" charset="-122"/>
-                <a:cs typeface="Calibri" pitchFamily="34" charset="-120"/>
-              </a:rPr>
-              <a:t>1:00</a:t>
-            </a:r>
-            <a:endParaRPr lang="en-US" sz="1100" dirty="0"/>
-          </a:p>
-        </p:txBody>
-      </p:sp>
-      <p:sp>
-        <p:nvSpPr>
-          <p:cNvPr id="20" name="Text 18"/>
-          <p:cNvSpPr/>
-          <p:nvPr/>
-        </p:nvSpPr>
-        <p:spPr>
-          <a:xfrm>
-            <a:off x="1691640" y="4043680"/>
-            <a:ext cx="9646920" cy="497840"/>
-          </a:xfrm>
-          <a:prstGeom prst="rect">
-            <a:avLst/>
-          </a:prstGeom>
-          <a:noFill/>
-          <a:ln/>
-        </p:spPr>
-        <p:txBody>
-          <a:bodyPr wrap="square" rtlCol="0" anchor="ctr">
-            <a:spAutoFit/>
-          </a:bodyPr>
-          <a:lstStyle/>
-          <a:p>
-            <a:pPr indent="0" marL="0">
-              <a:buNone/>
-            </a:pPr>
-            <a:r>
-              <a:rPr lang="en-US" sz="1100" dirty="0">
-                <a:solidFill>
-                  <a:srgbClr val="1A1A1A"/>
-                </a:solidFill>
-                <a:latin typeface="Calibri" pitchFamily="34" charset="0"/>
-                <a:ea typeface="Calibri" pitchFamily="34" charset="-122"/>
-                <a:cs typeface="Calibri" pitchFamily="34" charset="-120"/>
-              </a:rPr>
-              <a:t>Break</a:t>
-            </a:r>
-            <a:endParaRPr lang="en-US" sz="1100" dirty="0"/>
-          </a:p>
-        </p:txBody>
-      </p:sp>
-      <p:sp>
-        <p:nvSpPr>
-          <p:cNvPr id="21" name="Shape 19"/>
-          <p:cNvSpPr/>
-          <p:nvPr/>
-        </p:nvSpPr>
-        <p:spPr>
-          <a:xfrm>
-            <a:off x="640080" y="4559808"/>
-            <a:ext cx="868680" cy="388112"/>
-          </a:xfrm>
-          <a:prstGeom prst="roundRect">
-            <a:avLst>
-              <a:gd name="adj" fmla="val 14136"/>
-            </a:avLst>
-          </a:prstGeom>
-          <a:solidFill>
-            <a:srgbClr val="7A3B2E"/>
-          </a:solidFill>
-          <a:ln/>
-        </p:spPr>
-      </p:sp>
-      <p:sp>
-        <p:nvSpPr>
-          <p:cNvPr id="22" name="Text 20"/>
-          <p:cNvSpPr/>
-          <p:nvPr/>
-        </p:nvSpPr>
-        <p:spPr>
-          <a:xfrm>
-            <a:off x="640080" y="4559808"/>
-            <a:ext cx="868680" cy="388112"/>
-          </a:xfrm>
-          <a:prstGeom prst="rect">
-            <a:avLst/>
-          </a:prstGeom>
-          <a:noFill/>
-          <a:ln/>
-        </p:spPr>
-        <p:txBody>
-          <a:bodyPr wrap="square" rtlCol="0" anchor="ctr"/>
-          <a:lstStyle/>
-          <a:p>
-            <a:pPr algn="ctr" indent="0" marL="0">
-              <a:buNone/>
-            </a:pPr>
-            <a:r>
-              <a:rPr lang="en-US" sz="1100" b="1" dirty="0">
-                <a:solidFill>
-                  <a:srgbClr val="FFFFFF"/>
-                </a:solidFill>
-                <a:latin typeface="Calibri" pitchFamily="34" charset="0"/>
-                <a:ea typeface="Calibri" pitchFamily="34" charset="-122"/>
-                <a:cs typeface="Calibri" pitchFamily="34" charset="-120"/>
-              </a:rPr>
-              <a:t>1:10</a:t>
-            </a:r>
-            <a:endParaRPr lang="en-US" sz="1100" dirty="0"/>
-          </a:p>
-        </p:txBody>
-      </p:sp>
-      <p:sp>
-        <p:nvSpPr>
-          <p:cNvPr id="23" name="Text 21"/>
-          <p:cNvSpPr/>
-          <p:nvPr/>
-        </p:nvSpPr>
-        <p:spPr>
-          <a:xfrm>
-            <a:off x="1691640" y="4541520"/>
-            <a:ext cx="9646920" cy="497840"/>
-          </a:xfrm>
-          <a:prstGeom prst="rect">
-            <a:avLst/>
-          </a:prstGeom>
-          <a:noFill/>
-          <a:ln/>
-        </p:spPr>
-        <p:txBody>
-          <a:bodyPr wrap="square" rtlCol="0" anchor="ctr">
-            <a:spAutoFit/>
-          </a:bodyPr>
-          <a:lstStyle/>
-          <a:p>
-            <a:pPr indent="0" marL="0">
-              <a:buNone/>
-            </a:pPr>
-            <a:r>
-              <a:rPr lang="en-US" sz="1100" dirty="0">
-                <a:solidFill>
-                  <a:srgbClr val="1A1A1A"/>
-                </a:solidFill>
-                <a:latin typeface="Calibri" pitchFamily="34" charset="0"/>
-                <a:ea typeface="Calibri" pitchFamily="34" charset="-122"/>
-                <a:cs typeface="Calibri" pitchFamily="34" charset="-120"/>
-              </a:rPr>
-              <a:t>Methods menu preview, so Week 4's choice is informed: counting, classification, embeddings (Week 5), and optional approaches (character networks for fiction; sentiment arcs for story projects, Jockers's Syuzhet reproducible in Python, whose own smoothing controversy is the built-in lesson to doubt the shape; CLIP image search for visual projects; and, for the technically comfortable, fine-tuning a small open model, ModernBERT, on your own labels).</a:t>
-            </a:r>
-            <a:endParaRPr lang="en-US" sz="1100" dirty="0"/>
-          </a:p>
-        </p:txBody>
-      </p:sp>
-      <p:sp>
-        <p:nvSpPr>
-          <p:cNvPr id="24" name="Shape 22"/>
-          <p:cNvSpPr/>
-          <p:nvPr/>
-        </p:nvSpPr>
-        <p:spPr>
-          <a:xfrm>
-            <a:off x="640080" y="5057648"/>
-            <a:ext cx="868680" cy="388112"/>
-          </a:xfrm>
-          <a:prstGeom prst="roundRect">
-            <a:avLst>
-              <a:gd name="adj" fmla="val 14136"/>
-            </a:avLst>
-          </a:prstGeom>
-          <a:solidFill>
-            <a:srgbClr val="7A3B2E"/>
-          </a:solidFill>
-          <a:ln/>
-        </p:spPr>
-      </p:sp>
-      <p:sp>
-        <p:nvSpPr>
-          <p:cNvPr id="25" name="Text 23"/>
-          <p:cNvSpPr/>
-          <p:nvPr/>
-        </p:nvSpPr>
-        <p:spPr>
-          <a:xfrm>
-            <a:off x="640080" y="5057648"/>
-            <a:ext cx="868680" cy="388112"/>
-          </a:xfrm>
-          <a:prstGeom prst="rect">
-            <a:avLst/>
-          </a:prstGeom>
-          <a:noFill/>
-          <a:ln/>
-        </p:spPr>
-        <p:txBody>
-          <a:bodyPr wrap="square" rtlCol="0" anchor="ctr"/>
-          <a:lstStyle/>
-          <a:p>
-            <a:pPr algn="ctr" indent="0" marL="0">
-              <a:buNone/>
-            </a:pPr>
-            <a:r>
-              <a:rPr lang="en-US" sz="1100" b="1" dirty="0">
-                <a:solidFill>
-                  <a:srgbClr val="FFFFFF"/>
-                </a:solidFill>
-                <a:latin typeface="Calibri" pitchFamily="34" charset="0"/>
-                <a:ea typeface="Calibri" pitchFamily="34" charset="-122"/>
-                <a:cs typeface="Calibri" pitchFamily="34" charset="-120"/>
-              </a:rPr>
-              <a:t>1:25</a:t>
-            </a:r>
-            <a:endParaRPr lang="en-US" sz="1100" dirty="0"/>
-          </a:p>
-        </p:txBody>
-      </p:sp>
-      <p:sp>
-        <p:nvSpPr>
-          <p:cNvPr id="26" name="Text 24"/>
-          <p:cNvSpPr/>
-          <p:nvPr/>
-        </p:nvSpPr>
-        <p:spPr>
-          <a:xfrm>
-            <a:off x="1691640" y="5039360"/>
-            <a:ext cx="9646920" cy="497840"/>
-          </a:xfrm>
-          <a:prstGeom prst="rect">
-            <a:avLst/>
-          </a:prstGeom>
-          <a:noFill/>
-          <a:ln/>
-        </p:spPr>
-        <p:txBody>
-          <a:bodyPr wrap="square" rtlCol="0" anchor="ctr">
-            <a:spAutoFit/>
-          </a:bodyPr>
-          <a:lstStyle/>
-          <a:p>
-            <a:pPr indent="0" marL="0">
-              <a:buNone/>
-            </a:pPr>
-            <a:r>
-              <a:rPr lang="en-US" sz="1100" dirty="0">
-                <a:solidFill>
-                  <a:srgbClr val="1A1A1A"/>
-                </a:solidFill>
-                <a:latin typeface="Calibri" pitchFamily="34" charset="0"/>
-                <a:ea typeface="Calibri" pitchFamily="34" charset="-122"/>
-                <a:cs typeface="Calibri" pitchFamily="34" charset="-120"/>
-              </a:rPr>
-              <a:t>Pitch prep: what makes a tractable question, and the corpus-existence rule.</a:t>
-            </a:r>
-            <a:endParaRPr lang="en-US" sz="1100" dirty="0"/>
-          </a:p>
-        </p:txBody>
-      </p:sp>
-      <p:sp>
-        <p:nvSpPr>
-          <p:cNvPr id="27" name="Shape 25"/>
-          <p:cNvSpPr/>
-          <p:nvPr/>
-        </p:nvSpPr>
-        <p:spPr>
-          <a:xfrm>
-            <a:off x="640080" y="5555488"/>
-            <a:ext cx="868680" cy="388112"/>
-          </a:xfrm>
-          <a:prstGeom prst="roundRect">
-            <a:avLst>
-              <a:gd name="adj" fmla="val 14136"/>
-            </a:avLst>
-          </a:prstGeom>
-          <a:solidFill>
-            <a:srgbClr val="7A3B2E"/>
-          </a:solidFill>
-          <a:ln/>
-        </p:spPr>
-      </p:sp>
-      <p:sp>
-        <p:nvSpPr>
-          <p:cNvPr id="28" name="Text 26"/>
-          <p:cNvSpPr/>
-          <p:nvPr/>
-        </p:nvSpPr>
-        <p:spPr>
-          <a:xfrm>
-            <a:off x="640080" y="5555488"/>
-            <a:ext cx="868680" cy="388112"/>
-          </a:xfrm>
-          <a:prstGeom prst="rect">
-            <a:avLst/>
-          </a:prstGeom>
-          <a:noFill/>
-          <a:ln/>
-        </p:spPr>
-        <p:txBody>
-          <a:bodyPr wrap="square" rtlCol="0" anchor="ctr"/>
-          <a:lstStyle/>
-          <a:p>
-            <a:pPr algn="ctr" indent="0" marL="0">
-              <a:buNone/>
-            </a:pPr>
-            <a:r>
-              <a:rPr lang="en-US" sz="1100" b="1" dirty="0">
-                <a:solidFill>
-                  <a:srgbClr val="FFFFFF"/>
-                </a:solidFill>
-                <a:latin typeface="Calibri" pitchFamily="34" charset="0"/>
-                <a:ea typeface="Calibri" pitchFamily="34" charset="-122"/>
-                <a:cs typeface="Calibri" pitchFamily="34" charset="-120"/>
-              </a:rPr>
-              <a:t>1:45</a:t>
-            </a:r>
-            <a:endParaRPr lang="en-US" sz="1100" dirty="0"/>
-          </a:p>
-        </p:txBody>
-      </p:sp>
-      <p:sp>
-        <p:nvSpPr>
-          <p:cNvPr id="29" name="Text 27"/>
-          <p:cNvSpPr/>
-          <p:nvPr/>
-        </p:nvSpPr>
-        <p:spPr>
-          <a:xfrm>
-            <a:off x="1691640" y="5537200"/>
-            <a:ext cx="9646920" cy="497840"/>
-          </a:xfrm>
-          <a:prstGeom prst="rect">
-            <a:avLst/>
-          </a:prstGeom>
-          <a:noFill/>
-          <a:ln/>
-        </p:spPr>
-        <p:txBody>
-          <a:bodyPr wrap="square" rtlCol="0" anchor="ctr">
-            <a:spAutoFit/>
-          </a:bodyPr>
-          <a:lstStyle/>
-          <a:p>
-            <a:pPr indent="0" marL="0">
-              <a:buNone/>
-            </a:pPr>
-            <a:r>
-              <a:rPr lang="en-US" sz="1100" dirty="0">
-                <a:solidFill>
-                  <a:srgbClr val="1A1A1A"/>
-                </a:solidFill>
-                <a:latin typeface="Calibri" pitchFamily="34" charset="0"/>
-                <a:ea typeface="Calibri" pitchFamily="34" charset="-122"/>
-                <a:cs typeface="Calibri" pitchFamily="34" charset="-120"/>
-              </a:rPr>
-              <a:t>Gemini-free check and check-out.</a:t>
-            </a:r>
-            <a:endParaRPr lang="en-US" sz="1100" dirty="0"/>
+              <a:t>Spam filters have worked exactly this way for twenty years.</a:t>
+            </a:r>
+            <a:endParaRPr lang="en-US" sz="1650" dirty="0"/>
           </a:p>
         </p:txBody>
       </p:sp>
@@ -3935,14 +5040,34 @@
       </p:grpSpPr>
       <p:sp>
         <p:nvSpPr>
-          <p:cNvPr id="2" name="Text 0"/>
+          <p:cNvPr id="2" name="Shape 0"/>
+          <p:cNvSpPr/>
+          <p:nvPr/>
+        </p:nvSpPr>
+        <p:spPr>
+          <a:xfrm>
+            <a:off x="0" y="0"/>
+            <a:ext cx="164592" cy="6858000"/>
+          </a:xfrm>
+          <a:prstGeom prst="rect">
+            <a:avLst/>
+          </a:prstGeom>
+          <a:solidFill>
+            <a:srgbClr val="B9852F"/>
+          </a:solidFill>
+          <a:ln/>
+        </p:spPr>
+      </p:sp>
+      <p:sp>
+        <p:nvSpPr>
+          <p:cNvPr id="3" name="Text 1"/>
           <p:cNvSpPr/>
           <p:nvPr/>
         </p:nvSpPr>
         <p:spPr>
           <a:xfrm>
             <a:off x="640080" y="640080"/>
-            <a:ext cx="10058400" cy="731520"/>
+            <a:ext cx="10058400" cy="320040"/>
           </a:xfrm>
           <a:prstGeom prst="rect">
             <a:avLst/>
@@ -3952,6 +5077,47 @@
         </p:spPr>
         <p:txBody>
           <a:bodyPr wrap="square" rtlCol="0" anchor="ctr"/>
+          <a:lstStyle/>
+          <a:p>
+            <a:pPr indent="0" marL="0">
+              <a:buNone/>
+            </a:pPr>
+            <a:r>
+              <a:rPr lang="en-US" sz="1200" b="1" spc="300" kern="0" dirty="0">
+                <a:solidFill>
+                  <a:srgbClr val="B9852F"/>
+                </a:solidFill>
+                <a:latin typeface="Calibri" pitchFamily="34" charset="0"/>
+                <a:ea typeface="Calibri" pitchFamily="34" charset="-122"/>
+                <a:cs typeface="Calibri" pitchFamily="34" charset="-120"/>
+              </a:rPr>
+              <a:t>WEEK 3 · THE MATERIAL</a:t>
+            </a:r>
+            <a:endParaRPr lang="en-US" sz="1200" dirty="0"/>
+          </a:p>
+        </p:txBody>
+      </p:sp>
+      <p:sp>
+        <p:nvSpPr>
+          <p:cNvPr id="4" name="Text 2"/>
+          <p:cNvSpPr/>
+          <p:nvPr/>
+        </p:nvSpPr>
+        <p:spPr>
+          <a:xfrm>
+            <a:off x="640080" y="1005840"/>
+            <a:ext cx="10881360" cy="914400"/>
+          </a:xfrm>
+          <a:prstGeom prst="rect">
+            <a:avLst/>
+          </a:prstGeom>
+          <a:noFill/>
+          <a:ln/>
+        </p:spPr>
+        <p:txBody>
+          <a:bodyPr wrap="square" rtlCol="0" anchor="t">
+            <a:spAutoFit/>
+          </a:bodyPr>
           <a:lstStyle/>
           <a:p>
             <a:pPr indent="0" marL="0">
@@ -3966,7 +5132,7 @@
                 <a:ea typeface="Cambria" pitchFamily="34" charset="-122"/>
                 <a:cs typeface="Cambria" pitchFamily="34" charset="-120"/>
               </a:rPr>
-              <a:t>Reading &amp; homework</a:t>
+              <a:t>You taught it that</a:t>
             </a:r>
             <a:endParaRPr lang="en-US" sz="3000" dirty="0"/>
           </a:p>
@@ -3974,14 +5140,14 @@
       </p:sp>
       <p:sp>
         <p:nvSpPr>
-          <p:cNvPr id="3" name="Shape 1"/>
-          <p:cNvSpPr/>
-          <p:nvPr/>
-        </p:nvSpPr>
-        <p:spPr>
-          <a:xfrm>
-            <a:off x="640080" y="1810512"/>
-            <a:ext cx="219456" cy="219456"/>
+          <p:cNvPr id="5" name="Shape 3"/>
+          <p:cNvSpPr/>
+          <p:nvPr/>
+        </p:nvSpPr>
+        <p:spPr>
+          <a:xfrm>
+            <a:off x="640080" y="2331720"/>
+            <a:ext cx="201168" cy="201168"/>
           </a:xfrm>
           <a:prstGeom prst="ellipse">
             <a:avLst/>
@@ -3994,53 +5160,78 @@
       </p:sp>
       <p:sp>
         <p:nvSpPr>
-          <p:cNvPr id="4" name="Text 2"/>
-          <p:cNvSpPr/>
-          <p:nvPr/>
-        </p:nvSpPr>
-        <p:spPr>
-          <a:xfrm>
-            <a:off x="1051560" y="1737360"/>
-            <a:ext cx="10424160" cy="365760"/>
-          </a:xfrm>
-          <a:prstGeom prst="rect">
-            <a:avLst/>
-          </a:prstGeom>
-          <a:noFill/>
-          <a:ln/>
-        </p:spPr>
-        <p:txBody>
-          <a:bodyPr wrap="square" rtlCol="0" anchor="ctr"/>
+          <p:cNvPr id="6" name="Text 4"/>
+          <p:cNvSpPr/>
+          <p:nvPr/>
+        </p:nvSpPr>
+        <p:spPr>
+          <a:xfrm>
+            <a:off x="1097280" y="2240280"/>
+            <a:ext cx="10607040" cy="1017270"/>
+          </a:xfrm>
+          <a:prstGeom prst="rect">
+            <a:avLst/>
+          </a:prstGeom>
+          <a:noFill/>
+          <a:ln/>
+        </p:spPr>
+        <p:txBody>
+          <a:bodyPr wrap="square" rtlCol="0" anchor="t">
+            <a:spAutoFit/>
+          </a:bodyPr>
           <a:lstStyle/>
           <a:p>
             <a:pPr indent="0" marL="0">
-              <a:buNone/>
-            </a:pPr>
-            <a:r>
-              <a:rPr lang="en-US" sz="1500" b="1" dirty="0">
-                <a:solidFill>
-                  <a:srgbClr val="7A3B2E"/>
+              <a:lnSpc>
+                <a:spcPct val="112000"/>
+              </a:lnSpc>
+              <a:buNone/>
+            </a:pPr>
+            <a:r>
+              <a:rPr lang="en-US" sz="1650" dirty="0">
+                <a:solidFill>
+                  <a:srgbClr val="1A1A1A"/>
                 </a:solidFill>
                 <a:latin typeface="Calibri" pitchFamily="34" charset="0"/>
                 <a:ea typeface="Calibri" pitchFamily="34" charset="-122"/>
                 <a:cs typeface="Calibri" pitchFamily="34" charset="-120"/>
               </a:rPr>
-              <a:t>Reading</a:t>
-            </a:r>
-            <a:endParaRPr lang="en-US" sz="1500" dirty="0"/>
-          </a:p>
-        </p:txBody>
-      </p:sp>
-      <p:sp>
-        <p:nvSpPr>
-          <p:cNvPr id="5" name="Text 3"/>
-          <p:cNvSpPr/>
-          <p:nvPr/>
-        </p:nvSpPr>
-        <p:spPr>
-          <a:xfrm>
-            <a:off x="1051560" y="2121408"/>
-            <a:ext cx="10424160" cy="731520"/>
+              <a:t>Teachable Machine, live: a cat/dog model trained only on orange cats and brown dogs.</a:t>
+            </a:r>
+            <a:endParaRPr lang="en-US" sz="1650" dirty="0"/>
+          </a:p>
+        </p:txBody>
+      </p:sp>
+      <p:sp>
+        <p:nvSpPr>
+          <p:cNvPr id="7" name="Shape 5"/>
+          <p:cNvSpPr/>
+          <p:nvPr/>
+        </p:nvSpPr>
+        <p:spPr>
+          <a:xfrm>
+            <a:off x="640080" y="3348990"/>
+            <a:ext cx="201168" cy="201168"/>
+          </a:xfrm>
+          <a:prstGeom prst="ellipse">
+            <a:avLst/>
+          </a:prstGeom>
+          <a:solidFill>
+            <a:srgbClr val="3F6F5F"/>
+          </a:solidFill>
+          <a:ln/>
+        </p:spPr>
+      </p:sp>
+      <p:sp>
+        <p:nvSpPr>
+          <p:cNvPr id="8" name="Text 6"/>
+          <p:cNvSpPr/>
+          <p:nvPr/>
+        </p:nvSpPr>
+        <p:spPr>
+          <a:xfrm>
+            <a:off x="1097280" y="3257550"/>
+            <a:ext cx="10607040" cy="1017270"/>
           </a:xfrm>
           <a:prstGeom prst="rect">
             <a:avLst/>
@@ -4055,10 +5246,13 @@
           <a:lstStyle/>
           <a:p>
             <a:pPr indent="0" marL="0">
-              <a:buNone/>
-            </a:pPr>
-            <a:r>
-              <a:rPr lang="en-US" sz="1400" dirty="0">
+              <a:lnSpc>
+                <a:spcPct val="112000"/>
+              </a:lnSpc>
+              <a:buNone/>
+            </a:pPr>
+            <a:r>
+              <a:rPr lang="en-US" sz="1650" dirty="0">
                 <a:solidFill>
                   <a:srgbClr val="1A1A1A"/>
                 </a:solidFill>
@@ -4066,81 +5260,106 @@
                 <a:ea typeface="Calibri" pitchFamily="34" charset="-122"/>
                 <a:cs typeface="Calibri" pitchFamily="34" charset="-120"/>
               </a:rPr>
-              <a:t>Mullen, America's Public Bible (intro + a verse)</a:t>
-            </a:r>
-            <a:endParaRPr lang="en-US" sz="1400" dirty="0"/>
-          </a:p>
-        </p:txBody>
-      </p:sp>
-      <p:sp>
-        <p:nvSpPr>
-          <p:cNvPr id="6" name="Shape 4"/>
-          <p:cNvSpPr/>
-          <p:nvPr/>
-        </p:nvSpPr>
-        <p:spPr>
-          <a:xfrm>
-            <a:off x="640080" y="2953512"/>
-            <a:ext cx="219456" cy="219456"/>
+              <a:t>The room predicts what a black cat will do. Then watches it happen.</a:t>
+            </a:r>
+            <a:endParaRPr lang="en-US" sz="1650" dirty="0"/>
+          </a:p>
+        </p:txBody>
+      </p:sp>
+      <p:sp>
+        <p:nvSpPr>
+          <p:cNvPr id="9" name="Shape 7"/>
+          <p:cNvSpPr/>
+          <p:nvPr/>
+        </p:nvSpPr>
+        <p:spPr>
+          <a:xfrm>
+            <a:off x="640080" y="4366260"/>
+            <a:ext cx="201168" cy="201168"/>
           </a:xfrm>
           <a:prstGeom prst="ellipse">
             <a:avLst/>
           </a:prstGeom>
           <a:solidFill>
-            <a:srgbClr val="3F6F5F"/>
-          </a:solidFill>
-          <a:ln/>
-        </p:spPr>
-      </p:sp>
-      <p:sp>
-        <p:nvSpPr>
-          <p:cNvPr id="7" name="Text 5"/>
-          <p:cNvSpPr/>
-          <p:nvPr/>
-        </p:nvSpPr>
-        <p:spPr>
-          <a:xfrm>
-            <a:off x="1051560" y="2880360"/>
-            <a:ext cx="10424160" cy="365760"/>
-          </a:xfrm>
-          <a:prstGeom prst="rect">
-            <a:avLst/>
-          </a:prstGeom>
-          <a:noFill/>
-          <a:ln/>
-        </p:spPr>
-        <p:txBody>
-          <a:bodyPr wrap="square" rtlCol="0" anchor="ctr"/>
+            <a:srgbClr val="B9852F"/>
+          </a:solidFill>
+          <a:ln/>
+        </p:spPr>
+      </p:sp>
+      <p:sp>
+        <p:nvSpPr>
+          <p:cNvPr id="10" name="Text 8"/>
+          <p:cNvSpPr/>
+          <p:nvPr/>
+        </p:nvSpPr>
+        <p:spPr>
+          <a:xfrm>
+            <a:off x="1097280" y="4274820"/>
+            <a:ext cx="10607040" cy="1017270"/>
+          </a:xfrm>
+          <a:prstGeom prst="rect">
+            <a:avLst/>
+          </a:prstGeom>
+          <a:noFill/>
+          <a:ln/>
+        </p:spPr>
+        <p:txBody>
+          <a:bodyPr wrap="square" rtlCol="0" anchor="t">
+            <a:spAutoFit/>
+          </a:bodyPr>
           <a:lstStyle/>
           <a:p>
             <a:pPr indent="0" marL="0">
-              <a:buNone/>
-            </a:pPr>
-            <a:r>
-              <a:rPr lang="en-US" sz="1500" b="1" dirty="0">
-                <a:solidFill>
-                  <a:srgbClr val="3F6F5F"/>
+              <a:lnSpc>
+                <a:spcPct val="112000"/>
+              </a:lnSpc>
+              <a:buNone/>
+            </a:pPr>
+            <a:r>
+              <a:rPr lang="en-US" sz="1650" dirty="0">
+                <a:solidFill>
+                  <a:srgbClr val="1A1A1A"/>
                 </a:solidFill>
                 <a:latin typeface="Calibri" pitchFamily="34" charset="0"/>
                 <a:ea typeface="Calibri" pitchFamily="34" charset="-122"/>
                 <a:cs typeface="Calibri" pitchFamily="34" charset="-120"/>
               </a:rPr>
-              <a:t>Supplement</a:t>
-            </a:r>
-            <a:endParaRPr lang="en-US" sz="1500" dirty="0"/>
-          </a:p>
-        </p:txBody>
-      </p:sp>
-      <p:sp>
-        <p:nvSpPr>
-          <p:cNvPr id="8" name="Text 6"/>
-          <p:cNvSpPr/>
-          <p:nvPr/>
-        </p:nvSpPr>
-        <p:spPr>
-          <a:xfrm>
-            <a:off x="1051560" y="3264408"/>
-            <a:ext cx="10424160" cy="731520"/>
+              <a:t>Bias is not a ghost in the machine. It is the training set, and you assembled it.</a:t>
+            </a:r>
+            <a:endParaRPr lang="en-US" sz="1650" dirty="0"/>
+          </a:p>
+        </p:txBody>
+      </p:sp>
+      <p:sp>
+        <p:nvSpPr>
+          <p:cNvPr id="11" name="Shape 9"/>
+          <p:cNvSpPr/>
+          <p:nvPr/>
+        </p:nvSpPr>
+        <p:spPr>
+          <a:xfrm>
+            <a:off x="640080" y="5383530"/>
+            <a:ext cx="201168" cy="201168"/>
+          </a:xfrm>
+          <a:prstGeom prst="ellipse">
+            <a:avLst/>
+          </a:prstGeom>
+          <a:solidFill>
+            <a:srgbClr val="7A3B2E"/>
+          </a:solidFill>
+          <a:ln/>
+        </p:spPr>
+      </p:sp>
+      <p:sp>
+        <p:nvSpPr>
+          <p:cNvPr id="12" name="Text 10"/>
+          <p:cNvSpPr/>
+          <p:nvPr/>
+        </p:nvSpPr>
+        <p:spPr>
+          <a:xfrm>
+            <a:off x="1097280" y="5292090"/>
+            <a:ext cx="10607040" cy="1017270"/>
           </a:xfrm>
           <a:prstGeom prst="rect">
             <a:avLst/>
@@ -4155,10 +5374,13 @@
           <a:lstStyle/>
           <a:p>
             <a:pPr indent="0" marL="0">
-              <a:buNone/>
-            </a:pPr>
-            <a:r>
-              <a:rPr lang="en-US" sz="1400" dirty="0">
+              <a:lnSpc>
+                <a:spcPct val="112000"/>
+              </a:lnSpc>
+              <a:buNone/>
+            </a:pPr>
+            <a:r>
+              <a:rPr lang="en-US" sz="1650" dirty="0">
                 <a:solidFill>
                   <a:srgbClr val="1A1A1A"/>
                 </a:solidFill>
@@ -4166,209 +5388,9 @@
                 <a:ea typeface="Calibri" pitchFamily="34" charset="-122"/>
                 <a:cs typeface="Calibri" pitchFamily="34" charset="-120"/>
               </a:rPr>
-              <a:t>Underwood on GPT-4 and fictional time; Juola's Rowling unmasking</a:t>
-            </a:r>
-            <a:endParaRPr lang="en-US" sz="1400" dirty="0"/>
-          </a:p>
-        </p:txBody>
-      </p:sp>
-      <p:sp>
-        <p:nvSpPr>
-          <p:cNvPr id="9" name="Shape 7"/>
-          <p:cNvSpPr/>
-          <p:nvPr/>
-        </p:nvSpPr>
-        <p:spPr>
-          <a:xfrm>
-            <a:off x="640080" y="4096512"/>
-            <a:ext cx="219456" cy="219456"/>
-          </a:xfrm>
-          <a:prstGeom prst="ellipse">
-            <a:avLst/>
-          </a:prstGeom>
-          <a:solidFill>
-            <a:srgbClr val="B9852F"/>
-          </a:solidFill>
-          <a:ln/>
-        </p:spPr>
-      </p:sp>
-      <p:sp>
-        <p:nvSpPr>
-          <p:cNvPr id="10" name="Text 8"/>
-          <p:cNvSpPr/>
-          <p:nvPr/>
-        </p:nvSpPr>
-        <p:spPr>
-          <a:xfrm>
-            <a:off x="1051560" y="4023360"/>
-            <a:ext cx="10424160" cy="365760"/>
-          </a:xfrm>
-          <a:prstGeom prst="rect">
-            <a:avLst/>
-          </a:prstGeom>
-          <a:noFill/>
-          <a:ln/>
-        </p:spPr>
-        <p:txBody>
-          <a:bodyPr wrap="square" rtlCol="0" anchor="ctr"/>
-          <a:lstStyle/>
-          <a:p>
-            <a:pPr indent="0" marL="0">
-              <a:buNone/>
-            </a:pPr>
-            <a:r>
-              <a:rPr lang="en-US" sz="1500" b="1" dirty="0">
-                <a:solidFill>
-                  <a:srgbClr val="B9852F"/>
-                </a:solidFill>
-                <a:latin typeface="Calibri" pitchFamily="34" charset="0"/>
-                <a:ea typeface="Calibri" pitchFamily="34" charset="-122"/>
-                <a:cs typeface="Calibri" pitchFamily="34" charset="-120"/>
-              </a:rPr>
-              <a:t>Sketch</a:t>
-            </a:r>
-            <a:endParaRPr lang="en-US" sz="1500" dirty="0"/>
-          </a:p>
-        </p:txBody>
-      </p:sp>
-      <p:sp>
-        <p:nvSpPr>
-          <p:cNvPr id="11" name="Text 9"/>
-          <p:cNvSpPr/>
-          <p:nvPr/>
-        </p:nvSpPr>
-        <p:spPr>
-          <a:xfrm>
-            <a:off x="1051560" y="4407408"/>
-            <a:ext cx="10424160" cy="731520"/>
-          </a:xfrm>
-          <a:prstGeom prst="rect">
-            <a:avLst/>
-          </a:prstGeom>
-          <a:noFill/>
-          <a:ln/>
-        </p:spPr>
-        <p:txBody>
-          <a:bodyPr wrap="square" rtlCol="0" anchor="t">
-            <a:spAutoFit/>
-          </a:bodyPr>
-          <a:lstStyle/>
-          <a:p>
-            <a:pPr indent="0" marL="0">
-              <a:buNone/>
-            </a:pPr>
-            <a:r>
-              <a:rPr lang="en-US" sz="1400" dirty="0">
-                <a:solidFill>
-                  <a:srgbClr val="1A1A1A"/>
-                </a:solidFill>
-                <a:latin typeface="Calibri" pitchFamily="34" charset="0"/>
-                <a:ea typeface="Calibri" pitchFamily="34" charset="-122"/>
-                <a:cs typeface="Calibri" pitchFamily="34" charset="-120"/>
-              </a:rPr>
-              <a:t>Train a quick logistic regression on a labeled set; screenshot its five most positive and negative words.</a:t>
-            </a:r>
-            <a:endParaRPr lang="en-US" sz="1400" dirty="0"/>
-          </a:p>
-        </p:txBody>
-      </p:sp>
-      <p:sp>
-        <p:nvSpPr>
-          <p:cNvPr id="12" name="Shape 10"/>
-          <p:cNvSpPr/>
-          <p:nvPr/>
-        </p:nvSpPr>
-        <p:spPr>
-          <a:xfrm>
-            <a:off x="640080" y="5239512"/>
-            <a:ext cx="219456" cy="219456"/>
-          </a:xfrm>
-          <a:prstGeom prst="ellipse">
-            <a:avLst/>
-          </a:prstGeom>
-          <a:solidFill>
-            <a:srgbClr val="7A3B2E"/>
-          </a:solidFill>
-          <a:ln/>
-        </p:spPr>
-      </p:sp>
-      <p:sp>
-        <p:nvSpPr>
-          <p:cNvPr id="13" name="Text 11"/>
-          <p:cNvSpPr/>
-          <p:nvPr/>
-        </p:nvSpPr>
-        <p:spPr>
-          <a:xfrm>
-            <a:off x="1051560" y="5166360"/>
-            <a:ext cx="10424160" cy="365760"/>
-          </a:xfrm>
-          <a:prstGeom prst="rect">
-            <a:avLst/>
-          </a:prstGeom>
-          <a:noFill/>
-          <a:ln/>
-        </p:spPr>
-        <p:txBody>
-          <a:bodyPr wrap="square" rtlCol="0" anchor="ctr"/>
-          <a:lstStyle/>
-          <a:p>
-            <a:pPr indent="0" marL="0">
-              <a:buNone/>
-            </a:pPr>
-            <a:r>
-              <a:rPr lang="en-US" sz="1500" b="1" dirty="0">
-                <a:solidFill>
-                  <a:srgbClr val="7A3B2E"/>
-                </a:solidFill>
-                <a:latin typeface="Calibri" pitchFamily="34" charset="0"/>
-                <a:ea typeface="Calibri" pitchFamily="34" charset="-122"/>
-                <a:cs typeface="Calibri" pitchFamily="34" charset="-120"/>
-              </a:rPr>
-              <a:t>Check (AI closed)</a:t>
-            </a:r>
-            <a:endParaRPr lang="en-US" sz="1500" dirty="0"/>
-          </a:p>
-        </p:txBody>
-      </p:sp>
-      <p:sp>
-        <p:nvSpPr>
-          <p:cNvPr id="14" name="Text 12"/>
-          <p:cNvSpPr/>
-          <p:nvPr/>
-        </p:nvSpPr>
-        <p:spPr>
-          <a:xfrm>
-            <a:off x="1051560" y="5550408"/>
-            <a:ext cx="10424160" cy="731520"/>
-          </a:xfrm>
-          <a:prstGeom prst="rect">
-            <a:avLst/>
-          </a:prstGeom>
-          <a:noFill/>
-          <a:ln/>
-        </p:spPr>
-        <p:txBody>
-          <a:bodyPr wrap="square" rtlCol="0" anchor="t">
-            <a:spAutoFit/>
-          </a:bodyPr>
-          <a:lstStyle/>
-          <a:p>
-            <a:pPr indent="0" marL="0">
-              <a:buNone/>
-            </a:pPr>
-            <a:r>
-              <a:rPr lang="en-US" sz="1400" dirty="0">
-                <a:solidFill>
-                  <a:srgbClr val="1A1A1A"/>
-                </a:solidFill>
-                <a:latin typeface="Calibri" pitchFamily="34" charset="0"/>
-                <a:ea typeface="Calibri" pitchFamily="34" charset="-122"/>
-                <a:cs typeface="Calibri" pitchFamily="34" charset="-120"/>
-              </a:rPr>
-              <a:t>Explain it: read your classifier's top weights aloud, and name one input where it would fail and why. (Competencies 4, 5.)</a:t>
-            </a:r>
-            <a:endParaRPr lang="en-US" sz="1400" dirty="0"/>
+              <a:t>One line to carry out: today's classifier is one neuron; stack many and you have Week 7's model.</a:t>
+            </a:r>
+            <a:endParaRPr lang="en-US" sz="1650" dirty="0"/>
           </a:p>
         </p:txBody>
       </p:sp>
@@ -4406,7 +5428,27 @@
       </p:grpSpPr>
       <p:sp>
         <p:nvSpPr>
-          <p:cNvPr id="2" name="Text 0"/>
+          <p:cNvPr id="2" name="Shape 0"/>
+          <p:cNvSpPr/>
+          <p:nvPr/>
+        </p:nvSpPr>
+        <p:spPr>
+          <a:xfrm>
+            <a:off x="0" y="0"/>
+            <a:ext cx="164592" cy="6858000"/>
+          </a:xfrm>
+          <a:prstGeom prst="rect">
+            <a:avLst/>
+          </a:prstGeom>
+          <a:solidFill>
+            <a:srgbClr val="7A3B2E"/>
+          </a:solidFill>
+          <a:ln/>
+        </p:spPr>
+      </p:sp>
+      <p:sp>
+        <p:nvSpPr>
+          <p:cNvPr id="3" name="Text 1"/>
           <p:cNvSpPr/>
           <p:nvPr/>
         </p:nvSpPr>
@@ -4429,7 +5471,7 @@
               <a:buNone/>
             </a:pPr>
             <a:r>
-              <a:rPr lang="en-US" sz="1300" b="1" spc="300" kern="0" dirty="0">
+              <a:rPr lang="en-US" sz="1200" b="1" spc="300" kern="0" dirty="0">
                 <a:solidFill>
                   <a:srgbClr val="7A3B2E"/>
                 </a:solidFill>
@@ -4437,38 +5479,40 @@
                 <a:ea typeface="Calibri" pitchFamily="34" charset="-122"/>
                 <a:cs typeface="Calibri" pitchFamily="34" charset="-120"/>
               </a:rPr>
-              <a:t>HOW THIS WEEK CONNECTS</a:t>
-            </a:r>
-            <a:endParaRPr lang="en-US" sz="1300" dirty="0"/>
-          </a:p>
-        </p:txBody>
-      </p:sp>
-      <p:sp>
-        <p:nvSpPr>
-          <p:cNvPr id="3" name="Text 1"/>
-          <p:cNvSpPr/>
-          <p:nvPr/>
-        </p:nvSpPr>
-        <p:spPr>
-          <a:xfrm>
-            <a:off x="640080" y="987552"/>
-            <a:ext cx="10058400" cy="640080"/>
-          </a:xfrm>
-          <a:prstGeom prst="rect">
-            <a:avLst/>
-          </a:prstGeom>
-          <a:noFill/>
-          <a:ln/>
-        </p:spPr>
-        <p:txBody>
-          <a:bodyPr wrap="square" rtlCol="0" anchor="ctr"/>
+              <a:t>WEEK 3 · THE MATERIAL</a:t>
+            </a:r>
+            <a:endParaRPr lang="en-US" sz="1200" dirty="0"/>
+          </a:p>
+        </p:txBody>
+      </p:sp>
+      <p:sp>
+        <p:nvSpPr>
+          <p:cNvPr id="4" name="Text 2"/>
+          <p:cNvSpPr/>
+          <p:nvPr/>
+        </p:nvSpPr>
+        <p:spPr>
+          <a:xfrm>
+            <a:off x="640080" y="1005840"/>
+            <a:ext cx="10881360" cy="914400"/>
+          </a:xfrm>
+          <a:prstGeom prst="rect">
+            <a:avLst/>
+          </a:prstGeom>
+          <a:noFill/>
+          <a:ln/>
+        </p:spPr>
+        <p:txBody>
+          <a:bodyPr wrap="square" rtlCol="0" anchor="t">
+            <a:spAutoFit/>
+          </a:bodyPr>
           <a:lstStyle/>
           <a:p>
             <a:pPr indent="0" marL="0">
               <a:buNone/>
             </a:pPr>
             <a:r>
-              <a:rPr lang="en-US" sz="2800" b="1" dirty="0">
+              <a:rPr lang="en-US" sz="3000" b="1" dirty="0">
                 <a:solidFill>
                   <a:srgbClr val="1A1A1A"/>
                 </a:solidFill>
@@ -4476,27 +5520,25 @@
                 <a:ea typeface="Cambria" pitchFamily="34" charset="-122"/>
                 <a:cs typeface="Cambria" pitchFamily="34" charset="-120"/>
               </a:rPr>
-              <a:t>The course's through-lines</a:t>
-            </a:r>
-            <a:endParaRPr lang="en-US" sz="2800" dirty="0"/>
-          </a:p>
-        </p:txBody>
-      </p:sp>
-      <p:sp>
-        <p:nvSpPr>
-          <p:cNvPr id="4" name="Shape 2"/>
-          <p:cNvSpPr/>
-          <p:nvPr/>
-        </p:nvSpPr>
-        <p:spPr>
-          <a:xfrm>
-            <a:off x="640080" y="2057400"/>
-            <a:ext cx="457200" cy="457200"/>
-          </a:xfrm>
-          <a:prstGeom prst="roundRect">
-            <a:avLst>
-              <a:gd name="adj" fmla="val 16000"/>
-            </a:avLst>
+              <a:t>The methods menu (before you commit)</a:t>
+            </a:r>
+            <a:endParaRPr lang="en-US" sz="3000" dirty="0"/>
+          </a:p>
+        </p:txBody>
+      </p:sp>
+      <p:sp>
+        <p:nvSpPr>
+          <p:cNvPr id="5" name="Shape 3"/>
+          <p:cNvSpPr/>
+          <p:nvPr/>
+        </p:nvSpPr>
+        <p:spPr>
+          <a:xfrm>
+            <a:off x="640080" y="2331720"/>
+            <a:ext cx="201168" cy="201168"/>
+          </a:xfrm>
+          <a:prstGeom prst="ellipse">
+            <a:avLst/>
           </a:prstGeom>
           <a:solidFill>
             <a:srgbClr val="7A3B2E"/>
@@ -4506,92 +5548,14 @@
       </p:sp>
       <p:sp>
         <p:nvSpPr>
-          <p:cNvPr id="5" name="Text 3"/>
-          <p:cNvSpPr/>
-          <p:nvPr/>
-        </p:nvSpPr>
-        <p:spPr>
-          <a:xfrm>
-            <a:off x="640080" y="2057400"/>
-            <a:ext cx="457200" cy="457200"/>
-          </a:xfrm>
-          <a:prstGeom prst="rect">
-            <a:avLst/>
-          </a:prstGeom>
-          <a:noFill/>
-          <a:ln/>
-        </p:spPr>
-        <p:txBody>
-          <a:bodyPr wrap="square" rtlCol="0" anchor="ctr"/>
-          <a:lstStyle/>
-          <a:p>
-            <a:pPr algn="ctr" indent="0" marL="0">
-              <a:buNone/>
-            </a:pPr>
-            <a:r>
-              <a:rPr lang="en-US" sz="2000" b="1" dirty="0">
-                <a:solidFill>
-                  <a:srgbClr val="FFFFFF"/>
-                </a:solidFill>
-                <a:latin typeface="Cambria" pitchFamily="34" charset="0"/>
-                <a:ea typeface="Cambria" pitchFamily="34" charset="-122"/>
-                <a:cs typeface="Cambria" pitchFamily="34" charset="-120"/>
-              </a:rPr>
-              <a:t>1</a:t>
-            </a:r>
-            <a:endParaRPr lang="en-US" sz="2000" dirty="0"/>
-          </a:p>
-        </p:txBody>
-      </p:sp>
-      <p:sp>
-        <p:nvSpPr>
           <p:cNvPr id="6" name="Text 4"/>
           <p:cNvSpPr/>
           <p:nvPr/>
         </p:nvSpPr>
         <p:spPr>
           <a:xfrm>
-            <a:off x="1371600" y="2020824"/>
-            <a:ext cx="10332720" cy="411480"/>
-          </a:xfrm>
-          <a:prstGeom prst="rect">
-            <a:avLst/>
-          </a:prstGeom>
-          <a:noFill/>
-          <a:ln/>
-        </p:spPr>
-        <p:txBody>
-          <a:bodyPr wrap="square" rtlCol="0" anchor="ctr"/>
-          <a:lstStyle/>
-          <a:p>
-            <a:pPr indent="0" marL="0">
-              <a:buNone/>
-            </a:pPr>
-            <a:r>
-              <a:rPr lang="en-US" sz="1900" b="1" dirty="0">
-                <a:solidFill>
-                  <a:srgbClr val="7A3B2E"/>
-                </a:solidFill>
-                <a:latin typeface="Cambria" pitchFamily="34" charset="0"/>
-                <a:ea typeface="Cambria" pitchFamily="34" charset="-122"/>
-                <a:cs typeface="Cambria" pitchFamily="34" charset="-120"/>
-              </a:rPr>
-              <a:t>The reader you can see</a:t>
-            </a:r>
-            <a:endParaRPr lang="en-US" sz="1900" dirty="0"/>
-          </a:p>
-        </p:txBody>
-      </p:sp>
-      <p:sp>
-        <p:nvSpPr>
-          <p:cNvPr id="7" name="Text 5"/>
-          <p:cNvSpPr/>
-          <p:nvPr/>
-        </p:nvSpPr>
-        <p:spPr>
-          <a:xfrm>
-            <a:off x="1371600" y="2441448"/>
-            <a:ext cx="10332720" cy="914400"/>
+            <a:off x="1097280" y="2240280"/>
+            <a:ext cx="10607040" cy="1051560"/>
           </a:xfrm>
           <a:prstGeom prst="rect">
             <a:avLst/>
@@ -4612,7 +5576,7 @@
               <a:buNone/>
             </a:pPr>
             <a:r>
-              <a:rPr lang="en-US" sz="1450" dirty="0">
+              <a:rPr lang="en-US" sz="1650" dirty="0">
                 <a:solidFill>
                   <a:srgbClr val="1A1A1A"/>
                 </a:solidFill>
@@ -4620,27 +5584,25 @@
                 <a:ea typeface="Calibri" pitchFamily="34" charset="-122"/>
                 <a:cs typeface="Calibri" pitchFamily="34" charset="-120"/>
               </a:rPr>
-              <a:t>The transparent classifier: read its signed weights, its mind on the table. Week 7 brings the opaque one.</a:t>
-            </a:r>
-            <a:endParaRPr lang="en-US" sz="1450" dirty="0"/>
-          </a:p>
-        </p:txBody>
-      </p:sp>
-      <p:sp>
-        <p:nvSpPr>
-          <p:cNvPr id="8" name="Shape 6"/>
-          <p:cNvSpPr/>
-          <p:nvPr/>
-        </p:nvSpPr>
-        <p:spPr>
-          <a:xfrm>
-            <a:off x="640080" y="3520440"/>
-            <a:ext cx="457200" cy="457200"/>
-          </a:xfrm>
-          <a:prstGeom prst="roundRect">
-            <a:avLst>
-              <a:gd name="adj" fmla="val 16000"/>
-            </a:avLst>
+              <a:t>Counting and keyness: differences and trends. Classification: sort and label at scale. Embeddings (W5): a map of meaning. Annotation (W7): the AI reads for you.</a:t>
+            </a:r>
+            <a:endParaRPr lang="en-US" sz="1650" dirty="0"/>
+          </a:p>
+        </p:txBody>
+      </p:sp>
+      <p:sp>
+        <p:nvSpPr>
+          <p:cNvPr id="7" name="Shape 5"/>
+          <p:cNvSpPr/>
+          <p:nvPr/>
+        </p:nvSpPr>
+        <p:spPr>
+          <a:xfrm>
+            <a:off x="640080" y="3383280"/>
+            <a:ext cx="201168" cy="201168"/>
+          </a:xfrm>
+          <a:prstGeom prst="ellipse">
+            <a:avLst/>
           </a:prstGeom>
           <a:solidFill>
             <a:srgbClr val="3F6F5F"/>
@@ -4650,92 +5612,14 @@
       </p:sp>
       <p:sp>
         <p:nvSpPr>
-          <p:cNvPr id="9" name="Text 7"/>
-          <p:cNvSpPr/>
-          <p:nvPr/>
-        </p:nvSpPr>
-        <p:spPr>
-          <a:xfrm>
-            <a:off x="640080" y="3520440"/>
-            <a:ext cx="457200" cy="457200"/>
-          </a:xfrm>
-          <a:prstGeom prst="rect">
-            <a:avLst/>
-          </a:prstGeom>
-          <a:noFill/>
-          <a:ln/>
-        </p:spPr>
-        <p:txBody>
-          <a:bodyPr wrap="square" rtlCol="0" anchor="ctr"/>
-          <a:lstStyle/>
-          <a:p>
-            <a:pPr algn="ctr" indent="0" marL="0">
-              <a:buNone/>
-            </a:pPr>
-            <a:r>
-              <a:rPr lang="en-US" sz="2000" b="1" dirty="0">
-                <a:solidFill>
-                  <a:srgbClr val="FFFFFF"/>
-                </a:solidFill>
-                <a:latin typeface="Cambria" pitchFamily="34" charset="0"/>
-                <a:ea typeface="Cambria" pitchFamily="34" charset="-122"/>
-                <a:cs typeface="Cambria" pitchFamily="34" charset="-120"/>
-              </a:rPr>
-              <a:t>2</a:t>
-            </a:r>
-            <a:endParaRPr lang="en-US" sz="2000" dirty="0"/>
-          </a:p>
-        </p:txBody>
-      </p:sp>
-      <p:sp>
-        <p:nvSpPr>
-          <p:cNvPr id="10" name="Text 8"/>
-          <p:cNvSpPr/>
-          <p:nvPr/>
-        </p:nvSpPr>
-        <p:spPr>
-          <a:xfrm>
-            <a:off x="1371600" y="3483864"/>
-            <a:ext cx="10332720" cy="411480"/>
-          </a:xfrm>
-          <a:prstGeom prst="rect">
-            <a:avLst/>
-          </a:prstGeom>
-          <a:noFill/>
-          <a:ln/>
-        </p:spPr>
-        <p:txBody>
-          <a:bodyPr wrap="square" rtlCol="0" anchor="ctr"/>
-          <a:lstStyle/>
-          <a:p>
-            <a:pPr indent="0" marL="0">
-              <a:buNone/>
-            </a:pPr>
-            <a:r>
-              <a:rPr lang="en-US" sz="1900" b="1" dirty="0">
-                <a:solidFill>
-                  <a:srgbClr val="3F6F5F"/>
-                </a:solidFill>
-                <a:latin typeface="Cambria" pitchFamily="34" charset="0"/>
-                <a:ea typeface="Cambria" pitchFamily="34" charset="-122"/>
-                <a:cs typeface="Cambria" pitchFamily="34" charset="-120"/>
-              </a:rPr>
-              <a:t>You taught it the bias</a:t>
-            </a:r>
-            <a:endParaRPr lang="en-US" sz="1900" dirty="0"/>
-          </a:p>
-        </p:txBody>
-      </p:sp>
-      <p:sp>
-        <p:nvSpPr>
-          <p:cNvPr id="11" name="Text 9"/>
-          <p:cNvSpPr/>
-          <p:nvPr/>
-        </p:nvSpPr>
-        <p:spPr>
-          <a:xfrm>
-            <a:off x="1371600" y="3904488"/>
-            <a:ext cx="10332720" cy="914400"/>
+          <p:cNvPr id="8" name="Text 6"/>
+          <p:cNvSpPr/>
+          <p:nvPr/>
+        </p:nvSpPr>
+        <p:spPr>
+          <a:xfrm>
+            <a:off x="1097280" y="3291840"/>
+            <a:ext cx="10607040" cy="1051560"/>
           </a:xfrm>
           <a:prstGeom prst="rect">
             <a:avLst/>
@@ -4756,7 +5640,7 @@
               <a:buNone/>
             </a:pPr>
             <a:r>
-              <a:rPr lang="en-US" sz="1450" dirty="0">
+              <a:rPr lang="en-US" sz="1650" dirty="0">
                 <a:solidFill>
                   <a:srgbClr val="1A1A1A"/>
                 </a:solidFill>
@@ -4764,27 +5648,25 @@
                 <a:ea typeface="Calibri" pitchFamily="34" charset="-122"/>
                 <a:cs typeface="Calibri" pitchFamily="34" charset="-120"/>
               </a:rPr>
-              <a:t>The Teachable Machine reveal, a training set teaches a machine its prejudice.</a:t>
-            </a:r>
-            <a:endParaRPr lang="en-US" sz="1450" dirty="0"/>
-          </a:p>
-        </p:txBody>
-      </p:sp>
-      <p:sp>
-        <p:nvSpPr>
-          <p:cNvPr id="12" name="Shape 10"/>
-          <p:cNvSpPr/>
-          <p:nvPr/>
-        </p:nvSpPr>
-        <p:spPr>
-          <a:xfrm>
-            <a:off x="640080" y="4983480"/>
-            <a:ext cx="457200" cy="457200"/>
-          </a:xfrm>
-          <a:prstGeom prst="roundRect">
-            <a:avLst>
-              <a:gd name="adj" fmla="val 16000"/>
-            </a:avLst>
+              <a:t>Optional add-ons where they fit: character networks, sentiment arcs, CLIP image search, a fine-tuned ModernBERT.</a:t>
+            </a:r>
+            <a:endParaRPr lang="en-US" sz="1650" dirty="0"/>
+          </a:p>
+        </p:txBody>
+      </p:sp>
+      <p:sp>
+        <p:nvSpPr>
+          <p:cNvPr id="9" name="Shape 7"/>
+          <p:cNvSpPr/>
+          <p:nvPr/>
+        </p:nvSpPr>
+        <p:spPr>
+          <a:xfrm>
+            <a:off x="640080" y="4434840"/>
+            <a:ext cx="201168" cy="201168"/>
+          </a:xfrm>
+          <a:prstGeom prst="ellipse">
+            <a:avLst/>
           </a:prstGeom>
           <a:solidFill>
             <a:srgbClr val="B9852F"/>
@@ -4794,92 +5676,14 @@
       </p:sp>
       <p:sp>
         <p:nvSpPr>
-          <p:cNvPr id="13" name="Text 11"/>
-          <p:cNvSpPr/>
-          <p:nvPr/>
-        </p:nvSpPr>
-        <p:spPr>
-          <a:xfrm>
-            <a:off x="640080" y="4983480"/>
-            <a:ext cx="457200" cy="457200"/>
-          </a:xfrm>
-          <a:prstGeom prst="rect">
-            <a:avLst/>
-          </a:prstGeom>
-          <a:noFill/>
-          <a:ln/>
-        </p:spPr>
-        <p:txBody>
-          <a:bodyPr wrap="square" rtlCol="0" anchor="ctr"/>
-          <a:lstStyle/>
-          <a:p>
-            <a:pPr algn="ctr" indent="0" marL="0">
-              <a:buNone/>
-            </a:pPr>
-            <a:r>
-              <a:rPr lang="en-US" sz="2000" b="1" dirty="0">
-                <a:solidFill>
-                  <a:srgbClr val="FFFFFF"/>
-                </a:solidFill>
-                <a:latin typeface="Cambria" pitchFamily="34" charset="0"/>
-                <a:ea typeface="Cambria" pitchFamily="34" charset="-122"/>
-                <a:cs typeface="Cambria" pitchFamily="34" charset="-120"/>
-              </a:rPr>
-              <a:t>3</a:t>
-            </a:r>
-            <a:endParaRPr lang="en-US" sz="2000" dirty="0"/>
-          </a:p>
-        </p:txBody>
-      </p:sp>
-      <p:sp>
-        <p:nvSpPr>
-          <p:cNvPr id="14" name="Text 12"/>
-          <p:cNvSpPr/>
-          <p:nvPr/>
-        </p:nvSpPr>
-        <p:spPr>
-          <a:xfrm>
-            <a:off x="1371600" y="4946904"/>
-            <a:ext cx="10332720" cy="411480"/>
-          </a:xfrm>
-          <a:prstGeom prst="rect">
-            <a:avLst/>
-          </a:prstGeom>
-          <a:noFill/>
-          <a:ln/>
-        </p:spPr>
-        <p:txBody>
-          <a:bodyPr wrap="square" rtlCol="0" anchor="ctr"/>
-          <a:lstStyle/>
-          <a:p>
-            <a:pPr indent="0" marL="0">
-              <a:buNone/>
-            </a:pPr>
-            <a:r>
-              <a:rPr lang="en-US" sz="1900" b="1" dirty="0">
-                <a:solidFill>
-                  <a:srgbClr val="B9852F"/>
-                </a:solidFill>
-                <a:latin typeface="Cambria" pitchFamily="34" charset="0"/>
-                <a:ea typeface="Cambria" pitchFamily="34" charset="-122"/>
-                <a:cs typeface="Cambria" pitchFamily="34" charset="-120"/>
-              </a:rPr>
-              <a:t>Every choice is a choice</a:t>
-            </a:r>
-            <a:endParaRPr lang="en-US" sz="1900" dirty="0"/>
-          </a:p>
-        </p:txBody>
-      </p:sp>
-      <p:sp>
-        <p:nvSpPr>
-          <p:cNvPr id="15" name="Text 13"/>
-          <p:cNvSpPr/>
-          <p:nvPr/>
-        </p:nvSpPr>
-        <p:spPr>
-          <a:xfrm>
-            <a:off x="1371600" y="5367528"/>
-            <a:ext cx="10332720" cy="914400"/>
+          <p:cNvPr id="10" name="Text 8"/>
+          <p:cNvSpPr/>
+          <p:nvPr/>
+        </p:nvSpPr>
+        <p:spPr>
+          <a:xfrm>
+            <a:off x="1097280" y="4343400"/>
+            <a:ext cx="10607040" cy="1051560"/>
           </a:xfrm>
           <a:prstGeom prst="rect">
             <a:avLst/>
@@ -4900,7 +5704,7 @@
               <a:buNone/>
             </a:pPr>
             <a:r>
-              <a:rPr lang="en-US" sz="1450" dirty="0">
+              <a:rPr lang="en-US" sz="1650" dirty="0">
                 <a:solidFill>
                   <a:srgbClr val="1A1A1A"/>
                 </a:solidFill>
@@ -4908,9 +5712,9 @@
                 <a:ea typeface="Calibri" pitchFamily="34" charset="-122"/>
                 <a:cs typeface="Calibri" pitchFamily="34" charset="-120"/>
               </a:rPr>
-              <a:t>What counts as a label, and which words you hand it, decide what it learns.</a:t>
-            </a:r>
-            <a:endParaRPr lang="en-US" sz="1450" dirty="0"/>
+              <a:t>The corpus-existence rule: bring a screenshot of 50 loadable rows of your data to Week 4. No proof, no pitch.</a:t>
+            </a:r>
+            <a:endParaRPr lang="en-US" sz="1650" dirty="0"/>
           </a:p>
         </p:txBody>
       </p:sp>
@@ -4928,7 +5732,7 @@
     <p:bg>
       <p:bgPr>
         <a:solidFill>
-          <a:srgbClr val="4E261D"/>
+          <a:srgbClr val="FFFFFF"/>
         </a:solidFill>
       </p:bgPr>
     </p:bg>
@@ -4954,8 +5758,8 @@
         </p:nvSpPr>
         <p:spPr>
           <a:xfrm>
-            <a:off x="640080" y="1005840"/>
-            <a:ext cx="8229600" cy="320040"/>
+            <a:off x="640080" y="731520"/>
+            <a:ext cx="10058400" cy="731520"/>
           </a:xfrm>
           <a:prstGeom prst="rect">
             <a:avLst/>
@@ -4971,30 +5775,150 @@
               <a:buNone/>
             </a:pPr>
             <a:r>
-              <a:rPr lang="en-US" sz="1300" b="1" spc="300" kern="0" dirty="0">
-                <a:solidFill>
-                  <a:srgbClr val="B9852F"/>
+              <a:rPr lang="en-US" sz="3000" b="1" dirty="0">
+                <a:solidFill>
+                  <a:srgbClr val="1A1A1A"/>
+                </a:solidFill>
+                <a:latin typeface="Cambria" pitchFamily="34" charset="0"/>
+                <a:ea typeface="Cambria" pitchFamily="34" charset="-122"/>
+                <a:cs typeface="Cambria" pitchFamily="34" charset="-120"/>
+              </a:rPr>
+              <a:t>Three modes today</a:t>
+            </a:r>
+            <a:endParaRPr lang="en-US" sz="3000" dirty="0"/>
+          </a:p>
+        </p:txBody>
+      </p:sp>
+      <p:sp>
+        <p:nvSpPr>
+          <p:cNvPr id="3" name="Text 1"/>
+          <p:cNvSpPr/>
+          <p:nvPr/>
+        </p:nvSpPr>
+        <p:spPr>
+          <a:xfrm>
+            <a:off x="640080" y="1417320"/>
+            <a:ext cx="10058400" cy="365760"/>
+          </a:xfrm>
+          <a:prstGeom prst="rect">
+            <a:avLst/>
+          </a:prstGeom>
+          <a:noFill/>
+          <a:ln/>
+        </p:spPr>
+        <p:txBody>
+          <a:bodyPr wrap="square" rtlCol="0" anchor="ctr"/>
+          <a:lstStyle/>
+          <a:p>
+            <a:pPr indent="0" marL="0">
+              <a:buNone/>
+            </a:pPr>
+            <a:r>
+              <a:rPr lang="en-US" sz="1400" i="1" dirty="0">
+                <a:solidFill>
+                  <a:srgbClr val="6B6B63"/>
                 </a:solidFill>
                 <a:latin typeface="Calibri" pitchFamily="34" charset="0"/>
                 <a:ea typeface="Calibri" pitchFamily="34" charset="-122"/>
                 <a:cs typeface="Calibri" pitchFamily="34" charset="-120"/>
               </a:rPr>
-              <a:t>THE CHECK, AI CLOSED</a:t>
-            </a:r>
-            <a:endParaRPr lang="en-US" sz="1300" dirty="0"/>
-          </a:p>
-        </p:txBody>
-      </p:sp>
-      <p:sp>
-        <p:nvSpPr>
-          <p:cNvPr id="3" name="Text 1"/>
-          <p:cNvSpPr/>
-          <p:nvPr/>
-        </p:nvSpPr>
-        <p:spPr>
-          <a:xfrm>
-            <a:off x="640080" y="1645920"/>
-            <a:ext cx="8686800" cy="3108960"/>
+              <a:t>about a third of the session each</a:t>
+            </a:r>
+            <a:endParaRPr lang="en-US" sz="1400" dirty="0"/>
+          </a:p>
+        </p:txBody>
+      </p:sp>
+      <p:sp>
+        <p:nvSpPr>
+          <p:cNvPr id="4" name="Shape 2"/>
+          <p:cNvSpPr/>
+          <p:nvPr/>
+        </p:nvSpPr>
+        <p:spPr>
+          <a:xfrm>
+            <a:off x="640080" y="2194560"/>
+            <a:ext cx="3383280" cy="3291840"/>
+          </a:xfrm>
+          <a:prstGeom prst="roundRect">
+            <a:avLst>
+              <a:gd name="adj" fmla="val 3333"/>
+            </a:avLst>
+          </a:prstGeom>
+          <a:solidFill>
+            <a:srgbClr val="F4EEE8"/>
+          </a:solidFill>
+          <a:ln/>
+        </p:spPr>
+      </p:sp>
+      <p:sp>
+        <p:nvSpPr>
+          <p:cNvPr id="5" name="Shape 3"/>
+          <p:cNvSpPr/>
+          <p:nvPr/>
+        </p:nvSpPr>
+        <p:spPr>
+          <a:xfrm>
+            <a:off x="1051560" y="2606040"/>
+            <a:ext cx="548640" cy="548640"/>
+          </a:xfrm>
+          <a:prstGeom prst="ellipse">
+            <a:avLst/>
+          </a:prstGeom>
+          <a:solidFill>
+            <a:srgbClr val="7A3B2E"/>
+          </a:solidFill>
+          <a:ln/>
+        </p:spPr>
+      </p:sp>
+      <p:sp>
+        <p:nvSpPr>
+          <p:cNvPr id="6" name="Text 4"/>
+          <p:cNvSpPr/>
+          <p:nvPr/>
+        </p:nvSpPr>
+        <p:spPr>
+          <a:xfrm>
+            <a:off x="1005840" y="3383280"/>
+            <a:ext cx="2651760" cy="548640"/>
+          </a:xfrm>
+          <a:prstGeom prst="rect">
+            <a:avLst/>
+          </a:prstGeom>
+          <a:noFill/>
+          <a:ln/>
+        </p:spPr>
+        <p:txBody>
+          <a:bodyPr wrap="square" rtlCol="0" anchor="ctr"/>
+          <a:lstStyle/>
+          <a:p>
+            <a:pPr indent="0" marL="0">
+              <a:buNone/>
+            </a:pPr>
+            <a:r>
+              <a:rPr lang="en-US" sz="2100" b="1" dirty="0">
+                <a:solidFill>
+                  <a:srgbClr val="1A1A1A"/>
+                </a:solidFill>
+                <a:latin typeface="Cambria" pitchFamily="34" charset="0"/>
+                <a:ea typeface="Cambria" pitchFamily="34" charset="-122"/>
+                <a:cs typeface="Cambria" pitchFamily="34" charset="-120"/>
+              </a:rPr>
+              <a:t>Lecture / demo</a:t>
+            </a:r>
+            <a:endParaRPr lang="en-US" sz="2100" dirty="0"/>
+          </a:p>
+        </p:txBody>
+      </p:sp>
+      <p:sp>
+        <p:nvSpPr>
+          <p:cNvPr id="7" name="Text 5"/>
+          <p:cNvSpPr/>
+          <p:nvPr/>
+        </p:nvSpPr>
+        <p:spPr>
+          <a:xfrm>
+            <a:off x="1005840" y="3977640"/>
+            <a:ext cx="2651760" cy="1371600"/>
           </a:xfrm>
           <a:prstGeom prst="rect">
             <a:avLst/>
@@ -5015,74 +5939,358 @@
               <a:buNone/>
             </a:pPr>
             <a:r>
-              <a:rPr lang="en-US" sz="2600" dirty="0">
-                <a:solidFill>
-                  <a:srgbClr val="FFFFFF"/>
+              <a:rPr lang="en-US" sz="1500" dirty="0">
+                <a:solidFill>
+                  <a:srgbClr val="1A1A1A"/>
+                </a:solidFill>
+                <a:latin typeface="Calibri" pitchFamily="34" charset="0"/>
+                <a:ea typeface="Calibri" pitchFamily="34" charset="-122"/>
+                <a:cs typeface="Calibri" pitchFamily="34" charset="-120"/>
+              </a:rPr>
+              <a:t>Classification. Train a reader and read what it learned</a:t>
+            </a:r>
+            <a:endParaRPr lang="en-US" sz="1500" dirty="0"/>
+          </a:p>
+        </p:txBody>
+      </p:sp>
+      <p:sp>
+        <p:nvSpPr>
+          <p:cNvPr id="8" name="Shape 6"/>
+          <p:cNvSpPr/>
+          <p:nvPr/>
+        </p:nvSpPr>
+        <p:spPr>
+          <a:xfrm>
+            <a:off x="4526280" y="2194560"/>
+            <a:ext cx="3383280" cy="3291840"/>
+          </a:xfrm>
+          <a:prstGeom prst="roundRect">
+            <a:avLst>
+              <a:gd name="adj" fmla="val 3333"/>
+            </a:avLst>
+          </a:prstGeom>
+          <a:solidFill>
+            <a:srgbClr val="F4EEE8"/>
+          </a:solidFill>
+          <a:ln/>
+        </p:spPr>
+      </p:sp>
+      <p:sp>
+        <p:nvSpPr>
+          <p:cNvPr id="9" name="Shape 7"/>
+          <p:cNvSpPr/>
+          <p:nvPr/>
+        </p:nvSpPr>
+        <p:spPr>
+          <a:xfrm>
+            <a:off x="4937760" y="2606040"/>
+            <a:ext cx="548640" cy="548640"/>
+          </a:xfrm>
+          <a:prstGeom prst="ellipse">
+            <a:avLst/>
+          </a:prstGeom>
+          <a:solidFill>
+            <a:srgbClr val="3F6F5F"/>
+          </a:solidFill>
+          <a:ln/>
+        </p:spPr>
+      </p:sp>
+      <p:sp>
+        <p:nvSpPr>
+          <p:cNvPr id="10" name="Text 8"/>
+          <p:cNvSpPr/>
+          <p:nvPr/>
+        </p:nvSpPr>
+        <p:spPr>
+          <a:xfrm>
+            <a:off x="4892040" y="3383280"/>
+            <a:ext cx="2651760" cy="548640"/>
+          </a:xfrm>
+          <a:prstGeom prst="rect">
+            <a:avLst/>
+          </a:prstGeom>
+          <a:noFill/>
+          <a:ln/>
+        </p:spPr>
+        <p:txBody>
+          <a:bodyPr wrap="square" rtlCol="0" anchor="ctr"/>
+          <a:lstStyle/>
+          <a:p>
+            <a:pPr indent="0" marL="0">
+              <a:buNone/>
+            </a:pPr>
+            <a:r>
+              <a:rPr lang="en-US" sz="2100" b="1" dirty="0">
+                <a:solidFill>
+                  <a:srgbClr val="1A1A1A"/>
                 </a:solidFill>
                 <a:latin typeface="Cambria" pitchFamily="34" charset="0"/>
                 <a:ea typeface="Cambria" pitchFamily="34" charset="-122"/>
                 <a:cs typeface="Cambria" pitchFamily="34" charset="-120"/>
               </a:rPr>
-              <a:t>Explain it: read your classifier's top weights aloud, and name one input where it would fail and why. (Competencies 4, 5.)</a:t>
-            </a:r>
-            <a:endParaRPr lang="en-US" sz="2600" dirty="0"/>
-          </a:p>
-        </p:txBody>
-      </p:sp>
-      <p:sp>
-        <p:nvSpPr>
-          <p:cNvPr id="4" name="Text 2"/>
-          <p:cNvSpPr/>
-          <p:nvPr/>
-        </p:nvSpPr>
-        <p:spPr>
-          <a:xfrm>
-            <a:off x="640080" y="6126480"/>
-            <a:ext cx="7315200" cy="365760"/>
-          </a:xfrm>
-          <a:prstGeom prst="rect">
-            <a:avLst/>
-          </a:prstGeom>
-          <a:noFill/>
-          <a:ln/>
-        </p:spPr>
-        <p:txBody>
-          <a:bodyPr wrap="square" rtlCol="0" anchor="ctr"/>
+              <a:t>Workshop</a:t>
+            </a:r>
+            <a:endParaRPr lang="en-US" sz="2100" dirty="0"/>
+          </a:p>
+        </p:txBody>
+      </p:sp>
+      <p:sp>
+        <p:nvSpPr>
+          <p:cNvPr id="11" name="Text 9"/>
+          <p:cNvSpPr/>
+          <p:nvPr/>
+        </p:nvSpPr>
+        <p:spPr>
+          <a:xfrm>
+            <a:off x="4892040" y="3977640"/>
+            <a:ext cx="2651760" cy="1371600"/>
+          </a:xfrm>
+          <a:prstGeom prst="rect">
+            <a:avLst/>
+          </a:prstGeom>
+          <a:noFill/>
+          <a:ln/>
+        </p:spPr>
+        <p:txBody>
+          <a:bodyPr wrap="square" rtlCol="0" anchor="t">
+            <a:spAutoFit/>
+          </a:bodyPr>
           <a:lstStyle/>
           <a:p>
             <a:pPr indent="0" marL="0">
-              <a:buNone/>
-            </a:pPr>
-            <a:r>
-              <a:rPr lang="en-US" sz="1200" dirty="0">
-                <a:solidFill>
-                  <a:srgbClr val="E8DCD6"/>
+              <a:lnSpc>
+                <a:spcPct val="115000"/>
+              </a:lnSpc>
+              <a:buNone/>
+            </a:pPr>
+            <a:r>
+              <a:rPr lang="en-US" sz="1500" dirty="0">
+                <a:solidFill>
+                  <a:srgbClr val="1A1A1A"/>
                 </a:solidFill>
                 <a:latin typeface="Calibri" pitchFamily="34" charset="0"/>
                 <a:ea typeface="Calibri" pitchFamily="34" charset="-122"/>
                 <a:cs typeface="Calibri" pitchFamily="34" charset="-120"/>
               </a:rPr>
-              <a:t>Culture as Data  ·  Week 3</a:t>
-            </a:r>
-            <a:endParaRPr lang="en-US" sz="1200" dirty="0"/>
-          </a:p>
-        </p:txBody>
-      </p:sp>
-      <p:sp>
-        <p:nvSpPr>
-          <p:cNvPr id="5" name="Shape 3"/>
-          <p:cNvSpPr/>
-          <p:nvPr/>
-        </p:nvSpPr>
-        <p:spPr>
-          <a:xfrm>
-            <a:off x="11585519" y="5894876"/>
-            <a:ext cx="88881" cy="88881"/>
+              <a:t>Build hands-on on your own data.</a:t>
+            </a:r>
+            <a:endParaRPr lang="en-US" sz="1500" dirty="0"/>
+          </a:p>
+        </p:txBody>
+      </p:sp>
+      <p:sp>
+        <p:nvSpPr>
+          <p:cNvPr id="12" name="Shape 10"/>
+          <p:cNvSpPr/>
+          <p:nvPr/>
+        </p:nvSpPr>
+        <p:spPr>
+          <a:xfrm>
+            <a:off x="8412480" y="2194560"/>
+            <a:ext cx="3383280" cy="3291840"/>
+          </a:xfrm>
+          <a:prstGeom prst="roundRect">
+            <a:avLst>
+              <a:gd name="adj" fmla="val 3333"/>
+            </a:avLst>
+          </a:prstGeom>
+          <a:solidFill>
+            <a:srgbClr val="F4EEE8"/>
+          </a:solidFill>
+          <a:ln/>
+        </p:spPr>
+      </p:sp>
+      <p:sp>
+        <p:nvSpPr>
+          <p:cNvPr id="13" name="Shape 11"/>
+          <p:cNvSpPr/>
+          <p:nvPr/>
+        </p:nvSpPr>
+        <p:spPr>
+          <a:xfrm>
+            <a:off x="8823960" y="2606040"/>
+            <a:ext cx="548640" cy="548640"/>
           </a:xfrm>
           <a:prstGeom prst="ellipse">
             <a:avLst/>
           </a:prstGeom>
           <a:solidFill>
+            <a:srgbClr val="B9852F"/>
+          </a:solidFill>
+          <a:ln/>
+        </p:spPr>
+      </p:sp>
+      <p:sp>
+        <p:nvSpPr>
+          <p:cNvPr id="14" name="Text 12"/>
+          <p:cNvSpPr/>
+          <p:nvPr/>
+        </p:nvSpPr>
+        <p:spPr>
+          <a:xfrm>
+            <a:off x="8778240" y="3383280"/>
+            <a:ext cx="2651760" cy="548640"/>
+          </a:xfrm>
+          <a:prstGeom prst="rect">
+            <a:avLst/>
+          </a:prstGeom>
+          <a:noFill/>
+          <a:ln/>
+        </p:spPr>
+        <p:txBody>
+          <a:bodyPr wrap="square" rtlCol="0" anchor="ctr"/>
+          <a:lstStyle/>
+          <a:p>
+            <a:pPr indent="0" marL="0">
+              <a:buNone/>
+            </a:pPr>
+            <a:r>
+              <a:rPr lang="en-US" sz="2100" b="1" dirty="0">
+                <a:solidFill>
+                  <a:srgbClr val="1A1A1A"/>
+                </a:solidFill>
+                <a:latin typeface="Cambria" pitchFamily="34" charset="0"/>
+                <a:ea typeface="Cambria" pitchFamily="34" charset="-122"/>
+                <a:cs typeface="Cambria" pitchFamily="34" charset="-120"/>
+              </a:rPr>
+              <a:t>Discussion</a:t>
+            </a:r>
+            <a:endParaRPr lang="en-US" sz="2100" dirty="0"/>
+          </a:p>
+        </p:txBody>
+      </p:sp>
+      <p:sp>
+        <p:nvSpPr>
+          <p:cNvPr id="15" name="Text 13"/>
+          <p:cNvSpPr/>
+          <p:nvPr/>
+        </p:nvSpPr>
+        <p:spPr>
+          <a:xfrm>
+            <a:off x="8778240" y="3977640"/>
+            <a:ext cx="2651760" cy="1371600"/>
+          </a:xfrm>
+          <a:prstGeom prst="rect">
+            <a:avLst/>
+          </a:prstGeom>
+          <a:noFill/>
+          <a:ln/>
+        </p:spPr>
+        <p:txBody>
+          <a:bodyPr wrap="square" rtlCol="0" anchor="t">
+            <a:spAutoFit/>
+          </a:bodyPr>
+          <a:lstStyle/>
+          <a:p>
+            <a:pPr indent="0" marL="0">
+              <a:lnSpc>
+                <a:spcPct val="115000"/>
+              </a:lnSpc>
+              <a:buNone/>
+            </a:pPr>
+            <a:r>
+              <a:rPr lang="en-US" sz="1500" dirty="0">
+                <a:solidFill>
+                  <a:srgbClr val="1A1A1A"/>
+                </a:solidFill>
+                <a:latin typeface="Calibri" pitchFamily="34" charset="0"/>
+                <a:ea typeface="Calibri" pitchFamily="34" charset="-122"/>
+                <a:cs typeface="Calibri" pitchFamily="34" charset="-120"/>
+              </a:rPr>
+              <a:t>Interrogate the study, debate it, or critique each other's work.</a:t>
+            </a:r>
+            <a:endParaRPr lang="en-US" sz="1500" dirty="0"/>
+          </a:p>
+        </p:txBody>
+      </p:sp>
+    </p:spTree>
+  </p:cSld>
+  <p:clrMapOvr>
+    <a:masterClrMapping/>
+  </p:clrMapOvr>
+</p:sld>
+</file>
+
+<file path=ppt/slides/slide9.xml><?xml version="1.0" encoding="utf-8"?>
+<p:sld xmlns:a="http://schemas.openxmlformats.org/drawingml/2006/main" xmlns:r="http://schemas.openxmlformats.org/officeDocument/2006/relationships" xmlns:p="http://schemas.openxmlformats.org/presentationml/2006/main">
+  <p:cSld name="Slide 9">
+    <p:bg>
+      <p:bgPr>
+        <a:solidFill>
+          <a:srgbClr val="FFFFFF"/>
+        </a:solidFill>
+      </p:bgPr>
+    </p:bg>
+    <p:spTree>
+      <p:nvGrpSpPr>
+        <p:cNvPr id="1" name=""/>
+        <p:cNvGrpSpPr/>
+        <p:nvPr/>
+      </p:nvGrpSpPr>
+      <p:grpSpPr>
+        <a:xfrm>
+          <a:off x="0" y="0"/>
+          <a:ext cx="0" cy="0"/>
+          <a:chOff x="0" y="0"/>
+          <a:chExt cx="0" cy="0"/>
+        </a:xfrm>
+      </p:grpSpPr>
+      <p:sp>
+        <p:nvSpPr>
+          <p:cNvPr id="2" name="Text 0"/>
+          <p:cNvSpPr/>
+          <p:nvPr/>
+        </p:nvSpPr>
+        <p:spPr>
+          <a:xfrm>
+            <a:off x="640080" y="640080"/>
+            <a:ext cx="10058400" cy="731520"/>
+          </a:xfrm>
+          <a:prstGeom prst="rect">
+            <a:avLst/>
+          </a:prstGeom>
+          <a:noFill/>
+          <a:ln/>
+        </p:spPr>
+        <p:txBody>
+          <a:bodyPr wrap="square" rtlCol="0" anchor="ctr"/>
+          <a:lstStyle/>
+          <a:p>
+            <a:pPr indent="0" marL="0">
+              <a:buNone/>
+            </a:pPr>
+            <a:r>
+              <a:rPr lang="en-US" sz="3000" b="1" dirty="0">
+                <a:solidFill>
+                  <a:srgbClr val="1A1A1A"/>
+                </a:solidFill>
+                <a:latin typeface="Cambria" pitchFamily="34" charset="0"/>
+                <a:ea typeface="Cambria" pitchFamily="34" charset="-122"/>
+                <a:cs typeface="Cambria" pitchFamily="34" charset="-120"/>
+              </a:rPr>
+              <a:t>The session</a:t>
+            </a:r>
+            <a:endParaRPr lang="en-US" sz="3000" dirty="0"/>
+          </a:p>
+        </p:txBody>
+      </p:sp>
+      <p:sp>
+        <p:nvSpPr>
+          <p:cNvPr id="3" name="Shape 1"/>
+          <p:cNvSpPr/>
+          <p:nvPr/>
+        </p:nvSpPr>
+        <p:spPr>
+          <a:xfrm>
+            <a:off x="640080" y="1572768"/>
+            <a:ext cx="868680" cy="388112"/>
+          </a:xfrm>
+          <a:prstGeom prst="roundRect">
+            <a:avLst>
+              <a:gd name="adj" fmla="val 14136"/>
+            </a:avLst>
+          </a:prstGeom>
+          <a:solidFill>
             <a:srgbClr val="7A3B2E"/>
           </a:solidFill>
           <a:ln/>
@@ -5090,57 +6298,99 @@
       </p:sp>
       <p:sp>
         <p:nvSpPr>
+          <p:cNvPr id="4" name="Text 2"/>
+          <p:cNvSpPr/>
+          <p:nvPr/>
+        </p:nvSpPr>
+        <p:spPr>
+          <a:xfrm>
+            <a:off x="640080" y="1572768"/>
+            <a:ext cx="868680" cy="388112"/>
+          </a:xfrm>
+          <a:prstGeom prst="rect">
+            <a:avLst/>
+          </a:prstGeom>
+          <a:noFill/>
+          <a:ln/>
+        </p:spPr>
+        <p:txBody>
+          <a:bodyPr wrap="square" rtlCol="0" anchor="ctr"/>
+          <a:lstStyle/>
+          <a:p>
+            <a:pPr algn="ctr" indent="0" marL="0">
+              <a:buNone/>
+            </a:pPr>
+            <a:r>
+              <a:rPr lang="en-US" sz="1100" b="1" dirty="0">
+                <a:solidFill>
+                  <a:srgbClr val="FFFFFF"/>
+                </a:solidFill>
+                <a:latin typeface="Calibri" pitchFamily="34" charset="0"/>
+                <a:ea typeface="Calibri" pitchFamily="34" charset="-122"/>
+                <a:cs typeface="Calibri" pitchFamily="34" charset="-120"/>
+              </a:rPr>
+              <a:t>0:00</a:t>
+            </a:r>
+            <a:endParaRPr lang="en-US" sz="1100" dirty="0"/>
+          </a:p>
+        </p:txBody>
+      </p:sp>
+      <p:sp>
+        <p:nvSpPr>
+          <p:cNvPr id="5" name="Text 3"/>
+          <p:cNvSpPr/>
+          <p:nvPr/>
+        </p:nvSpPr>
+        <p:spPr>
+          <a:xfrm>
+            <a:off x="1691640" y="1554480"/>
+            <a:ext cx="9646920" cy="497840"/>
+          </a:xfrm>
+          <a:prstGeom prst="rect">
+            <a:avLst/>
+          </a:prstGeom>
+          <a:noFill/>
+          <a:ln/>
+        </p:spPr>
+        <p:txBody>
+          <a:bodyPr wrap="square" rtlCol="0" anchor="ctr">
+            <a:spAutoFit/>
+          </a:bodyPr>
+          <a:lstStyle/>
+          <a:p>
+            <a:pPr indent="0" marL="0">
+              <a:buNone/>
+            </a:pPr>
+            <a:r>
+              <a:rPr lang="en-US" sz="1100" dirty="0">
+                <a:solidFill>
+                  <a:srgbClr val="1A1A1A"/>
+                </a:solidFill>
+                <a:latin typeface="Calibri" pitchFamily="34" charset="0"/>
+                <a:ea typeface="Calibri" pitchFamily="34" charset="-122"/>
+                <a:cs typeface="Calibri" pitchFamily="34" charset="-120"/>
+              </a:rPr>
+              <a:t>Warm-up + Look at This: Underwood's genre prediction.</a:t>
+            </a:r>
+            <a:endParaRPr lang="en-US" sz="1100" dirty="0"/>
+          </a:p>
+        </p:txBody>
+      </p:sp>
+      <p:sp>
+        <p:nvSpPr>
           <p:cNvPr id="6" name="Shape 4"/>
           <p:cNvSpPr/>
           <p:nvPr/>
         </p:nvSpPr>
         <p:spPr>
           <a:xfrm>
-            <a:off x="9802810" y="5665127"/>
-            <a:ext cx="90728" cy="90728"/>
-          </a:xfrm>
-          <a:prstGeom prst="ellipse">
-            <a:avLst/>
-          </a:prstGeom>
-          <a:solidFill>
-            <a:srgbClr val="3F6F5F"/>
-          </a:solidFill>
-          <a:ln/>
-        </p:spPr>
-      </p:sp>
-      <p:sp>
-        <p:nvSpPr>
-          <p:cNvPr id="7" name="Shape 5"/>
-          <p:cNvSpPr/>
-          <p:nvPr/>
-        </p:nvSpPr>
-        <p:spPr>
-          <a:xfrm>
-            <a:off x="9863295" y="5190056"/>
-            <a:ext cx="74159" cy="74159"/>
-          </a:xfrm>
-          <a:prstGeom prst="ellipse">
-            <a:avLst/>
-          </a:prstGeom>
-          <a:solidFill>
-            <a:srgbClr val="B9852F"/>
-          </a:solidFill>
-          <a:ln/>
-        </p:spPr>
-      </p:sp>
-      <p:sp>
-        <p:nvSpPr>
-          <p:cNvPr id="8" name="Shape 6"/>
-          <p:cNvSpPr/>
-          <p:nvPr/>
-        </p:nvSpPr>
-        <p:spPr>
-          <a:xfrm>
-            <a:off x="10273453" y="5193564"/>
-            <a:ext cx="62036" cy="62036"/>
-          </a:xfrm>
-          <a:prstGeom prst="ellipse">
-            <a:avLst/>
+            <a:off x="640080" y="2070608"/>
+            <a:ext cx="868680" cy="388112"/>
+          </a:xfrm>
+          <a:prstGeom prst="roundRect">
+            <a:avLst>
+              <a:gd name="adj" fmla="val 14136"/>
+            </a:avLst>
           </a:prstGeom>
           <a:solidFill>
             <a:srgbClr val="7A3B2E"/>
@@ -5150,57 +6400,99 @@
       </p:sp>
       <p:sp>
         <p:nvSpPr>
+          <p:cNvPr id="7" name="Text 5"/>
+          <p:cNvSpPr/>
+          <p:nvPr/>
+        </p:nvSpPr>
+        <p:spPr>
+          <a:xfrm>
+            <a:off x="640080" y="2070608"/>
+            <a:ext cx="868680" cy="388112"/>
+          </a:xfrm>
+          <a:prstGeom prst="rect">
+            <a:avLst/>
+          </a:prstGeom>
+          <a:noFill/>
+          <a:ln/>
+        </p:spPr>
+        <p:txBody>
+          <a:bodyPr wrap="square" rtlCol="0" anchor="ctr"/>
+          <a:lstStyle/>
+          <a:p>
+            <a:pPr algn="ctr" indent="0" marL="0">
+              <a:buNone/>
+            </a:pPr>
+            <a:r>
+              <a:rPr lang="en-US" sz="1100" b="1" dirty="0">
+                <a:solidFill>
+                  <a:srgbClr val="FFFFFF"/>
+                </a:solidFill>
+                <a:latin typeface="Calibri" pitchFamily="34" charset="0"/>
+                <a:ea typeface="Calibri" pitchFamily="34" charset="-122"/>
+                <a:cs typeface="Calibri" pitchFamily="34" charset="-120"/>
+              </a:rPr>
+              <a:t>0:10</a:t>
+            </a:r>
+            <a:endParaRPr lang="en-US" sz="1100" dirty="0"/>
+          </a:p>
+        </p:txBody>
+      </p:sp>
+      <p:sp>
+        <p:nvSpPr>
+          <p:cNvPr id="8" name="Text 6"/>
+          <p:cNvSpPr/>
+          <p:nvPr/>
+        </p:nvSpPr>
+        <p:spPr>
+          <a:xfrm>
+            <a:off x="1691640" y="2052320"/>
+            <a:ext cx="9646920" cy="497840"/>
+          </a:xfrm>
+          <a:prstGeom prst="rect">
+            <a:avLst/>
+          </a:prstGeom>
+          <a:noFill/>
+          <a:ln/>
+        </p:spPr>
+        <p:txBody>
+          <a:bodyPr wrap="square" rtlCol="0" anchor="ctr">
+            <a:spAutoFit/>
+          </a:bodyPr>
+          <a:lstStyle/>
+          <a:p>
+            <a:pPr indent="0" marL="0">
+              <a:buNone/>
+            </a:pPr>
+            <a:r>
+              <a:rPr lang="en-US" sz="1100" dirty="0">
+                <a:solidFill>
+                  <a:srgbClr val="1A1A1A"/>
+                </a:solidFill>
+                <a:latin typeface="Calibri" pitchFamily="34" charset="0"/>
+                <a:ea typeface="Calibri" pitchFamily="34" charset="-122"/>
+                <a:cs typeface="Calibri" pitchFamily="34" charset="-120"/>
+              </a:rPr>
+              <a:t>Teachable Machine, instructor demo: a two-class image model trained live, then the reveal that it learned from only orange cats and brown dogs. The room predicts what a black cat will do, then sees it.</a:t>
+            </a:r>
+            <a:endParaRPr lang="en-US" sz="1100" dirty="0"/>
+          </a:p>
+        </p:txBody>
+      </p:sp>
+      <p:sp>
+        <p:nvSpPr>
           <p:cNvPr id="9" name="Shape 7"/>
           <p:cNvSpPr/>
           <p:nvPr/>
         </p:nvSpPr>
         <p:spPr>
           <a:xfrm>
-            <a:off x="9539765" y="4662190"/>
-            <a:ext cx="77217" cy="77217"/>
-          </a:xfrm>
-          <a:prstGeom prst="ellipse">
-            <a:avLst/>
-          </a:prstGeom>
-          <a:solidFill>
-            <a:srgbClr val="3F6F5F"/>
-          </a:solidFill>
-          <a:ln/>
-        </p:spPr>
-      </p:sp>
-      <p:sp>
-        <p:nvSpPr>
-          <p:cNvPr id="10" name="Shape 8"/>
-          <p:cNvSpPr/>
-          <p:nvPr/>
-        </p:nvSpPr>
-        <p:spPr>
-          <a:xfrm>
-            <a:off x="11289350" y="6057195"/>
-            <a:ext cx="87700" cy="87700"/>
-          </a:xfrm>
-          <a:prstGeom prst="ellipse">
-            <a:avLst/>
-          </a:prstGeom>
-          <a:solidFill>
-            <a:srgbClr val="B9852F"/>
-          </a:solidFill>
-          <a:ln/>
-        </p:spPr>
-      </p:sp>
-      <p:sp>
-        <p:nvSpPr>
-          <p:cNvPr id="11" name="Shape 9"/>
-          <p:cNvSpPr/>
-          <p:nvPr/>
-        </p:nvSpPr>
-        <p:spPr>
-          <a:xfrm>
-            <a:off x="11468368" y="4890398"/>
-            <a:ext cx="61479" cy="61479"/>
-          </a:xfrm>
-          <a:prstGeom prst="ellipse">
-            <a:avLst/>
+            <a:off x="640080" y="2568448"/>
+            <a:ext cx="868680" cy="388112"/>
+          </a:xfrm>
+          <a:prstGeom prst="roundRect">
+            <a:avLst>
+              <a:gd name="adj" fmla="val 14136"/>
+            </a:avLst>
           </a:prstGeom>
           <a:solidFill>
             <a:srgbClr val="7A3B2E"/>
@@ -5210,57 +6502,99 @@
       </p:sp>
       <p:sp>
         <p:nvSpPr>
+          <p:cNvPr id="10" name="Text 8"/>
+          <p:cNvSpPr/>
+          <p:nvPr/>
+        </p:nvSpPr>
+        <p:spPr>
+          <a:xfrm>
+            <a:off x="640080" y="2568448"/>
+            <a:ext cx="868680" cy="388112"/>
+          </a:xfrm>
+          <a:prstGeom prst="rect">
+            <a:avLst/>
+          </a:prstGeom>
+          <a:noFill/>
+          <a:ln/>
+        </p:spPr>
+        <p:txBody>
+          <a:bodyPr wrap="square" rtlCol="0" anchor="ctr"/>
+          <a:lstStyle/>
+          <a:p>
+            <a:pPr algn="ctr" indent="0" marL="0">
+              <a:buNone/>
+            </a:pPr>
+            <a:r>
+              <a:rPr lang="en-US" sz="1100" b="1" dirty="0">
+                <a:solidFill>
+                  <a:srgbClr val="FFFFFF"/>
+                </a:solidFill>
+                <a:latin typeface="Calibri" pitchFamily="34" charset="0"/>
+                <a:ea typeface="Calibri" pitchFamily="34" charset="-122"/>
+                <a:cs typeface="Calibri" pitchFamily="34" charset="-120"/>
+              </a:rPr>
+              <a:t>0:22</a:t>
+            </a:r>
+            <a:endParaRPr lang="en-US" sz="1100" dirty="0"/>
+          </a:p>
+        </p:txBody>
+      </p:sp>
+      <p:sp>
+        <p:nvSpPr>
+          <p:cNvPr id="11" name="Text 9"/>
+          <p:cNvSpPr/>
+          <p:nvPr/>
+        </p:nvSpPr>
+        <p:spPr>
+          <a:xfrm>
+            <a:off x="1691640" y="2550160"/>
+            <a:ext cx="9646920" cy="497840"/>
+          </a:xfrm>
+          <a:prstGeom prst="rect">
+            <a:avLst/>
+          </a:prstGeom>
+          <a:noFill/>
+          <a:ln/>
+        </p:spPr>
+        <p:txBody>
+          <a:bodyPr wrap="square" rtlCol="0" anchor="ctr">
+            <a:spAutoFit/>
+          </a:bodyPr>
+          <a:lstStyle/>
+          <a:p>
+            <a:pPr indent="0" marL="0">
+              <a:buNone/>
+            </a:pPr>
+            <a:r>
+              <a:rPr lang="en-US" sz="1100" dirty="0">
+                <a:solidFill>
+                  <a:srgbClr val="1A1A1A"/>
+                </a:solidFill>
+                <a:latin typeface="Calibri" pitchFamily="34" charset="0"/>
+                <a:ea typeface="Calibri" pitchFamily="34" charset="-122"/>
+                <a:cs typeface="Calibri" pitchFamily="34" charset="-120"/>
+              </a:rPr>
+              <a:t>Counting with weights, the lab: each word casts a weighted vote; a logistic regression adds them up. Train it on a pop corpus, then read the signed coefficients, its mind on the table.</a:t>
+            </a:r>
+            <a:endParaRPr lang="en-US" sz="1100" dirty="0"/>
+          </a:p>
+        </p:txBody>
+      </p:sp>
+      <p:sp>
+        <p:nvSpPr>
           <p:cNvPr id="12" name="Shape 10"/>
           <p:cNvSpPr/>
           <p:nvPr/>
         </p:nvSpPr>
         <p:spPr>
           <a:xfrm>
-            <a:off x="11143620" y="5360419"/>
-            <a:ext cx="76279" cy="76279"/>
-          </a:xfrm>
-          <a:prstGeom prst="ellipse">
-            <a:avLst/>
-          </a:prstGeom>
-          <a:solidFill>
-            <a:srgbClr val="3F6F5F"/>
-          </a:solidFill>
-          <a:ln/>
-        </p:spPr>
-      </p:sp>
-      <p:sp>
-        <p:nvSpPr>
-          <p:cNvPr id="13" name="Shape 11"/>
-          <p:cNvSpPr/>
-          <p:nvPr/>
-        </p:nvSpPr>
-        <p:spPr>
-          <a:xfrm>
-            <a:off x="11381905" y="4716438"/>
-            <a:ext cx="100097" cy="100097"/>
-          </a:xfrm>
-          <a:prstGeom prst="ellipse">
-            <a:avLst/>
-          </a:prstGeom>
-          <a:solidFill>
-            <a:srgbClr val="B9852F"/>
-          </a:solidFill>
-          <a:ln/>
-        </p:spPr>
-      </p:sp>
-      <p:sp>
-        <p:nvSpPr>
-          <p:cNvPr id="14" name="Shape 12"/>
-          <p:cNvSpPr/>
-          <p:nvPr/>
-        </p:nvSpPr>
-        <p:spPr>
-          <a:xfrm>
-            <a:off x="10689703" y="5419716"/>
-            <a:ext cx="46063" cy="46063"/>
-          </a:xfrm>
-          <a:prstGeom prst="ellipse">
-            <a:avLst/>
+            <a:off x="640080" y="3066288"/>
+            <a:ext cx="868680" cy="388112"/>
+          </a:xfrm>
+          <a:prstGeom prst="roundRect">
+            <a:avLst>
+              <a:gd name="adj" fmla="val 14136"/>
+            </a:avLst>
           </a:prstGeom>
           <a:solidFill>
             <a:srgbClr val="7A3B2E"/>
@@ -5270,57 +6604,99 @@
       </p:sp>
       <p:sp>
         <p:nvSpPr>
+          <p:cNvPr id="13" name="Text 11"/>
+          <p:cNvSpPr/>
+          <p:nvPr/>
+        </p:nvSpPr>
+        <p:spPr>
+          <a:xfrm>
+            <a:off x="640080" y="3066288"/>
+            <a:ext cx="868680" cy="388112"/>
+          </a:xfrm>
+          <a:prstGeom prst="rect">
+            <a:avLst/>
+          </a:prstGeom>
+          <a:noFill/>
+          <a:ln/>
+        </p:spPr>
+        <p:txBody>
+          <a:bodyPr wrap="square" rtlCol="0" anchor="ctr"/>
+          <a:lstStyle/>
+          <a:p>
+            <a:pPr algn="ctr" indent="0" marL="0">
+              <a:buNone/>
+            </a:pPr>
+            <a:r>
+              <a:rPr lang="en-US" sz="1100" b="1" dirty="0">
+                <a:solidFill>
+                  <a:srgbClr val="FFFFFF"/>
+                </a:solidFill>
+                <a:latin typeface="Calibri" pitchFamily="34" charset="0"/>
+                <a:ea typeface="Calibri" pitchFamily="34" charset="-122"/>
+                <a:cs typeface="Calibri" pitchFamily="34" charset="-120"/>
+              </a:rPr>
+              <a:t>0:52</a:t>
+            </a:r>
+            <a:endParaRPr lang="en-US" sz="1100" dirty="0"/>
+          </a:p>
+        </p:txBody>
+      </p:sp>
+      <p:sp>
+        <p:nvSpPr>
+          <p:cNvPr id="14" name="Text 12"/>
+          <p:cNvSpPr/>
+          <p:nvPr/>
+        </p:nvSpPr>
+        <p:spPr>
+          <a:xfrm>
+            <a:off x="1691640" y="3048000"/>
+            <a:ext cx="9646920" cy="497840"/>
+          </a:xfrm>
+          <a:prstGeom prst="rect">
+            <a:avLst/>
+          </a:prstGeom>
+          <a:noFill/>
+          <a:ln/>
+        </p:spPr>
+        <p:txBody>
+          <a:bodyPr wrap="square" rtlCol="0" anchor="ctr">
+            <a:spAutoFit/>
+          </a:bodyPr>
+          <a:lstStyle/>
+          <a:p>
+            <a:pPr indent="0" marL="0">
+              <a:buNone/>
+            </a:pPr>
+            <a:r>
+              <a:rPr lang="en-US" sz="1100" dirty="0">
+                <a:solidFill>
+                  <a:srgbClr val="1A1A1A"/>
+                </a:solidFill>
+                <a:latin typeface="Calibri" pitchFamily="34" charset="0"/>
+                <a:ea typeface="Calibri" pitchFamily="34" charset="-122"/>
+                <a:cs typeface="Calibri" pitchFamily="34" charset="-120"/>
+              </a:rPr>
+              <a:t>Delight beat: the words that most predict "breakup song" or "this reviewer hated it."</a:t>
+            </a:r>
+            <a:endParaRPr lang="en-US" sz="1100" dirty="0"/>
+          </a:p>
+        </p:txBody>
+      </p:sp>
+      <p:sp>
+        <p:nvSpPr>
           <p:cNvPr id="15" name="Shape 13"/>
           <p:cNvSpPr/>
           <p:nvPr/>
         </p:nvSpPr>
         <p:spPr>
           <a:xfrm>
-            <a:off x="10133814" y="4719432"/>
-            <a:ext cx="46767" cy="46767"/>
-          </a:xfrm>
-          <a:prstGeom prst="ellipse">
-            <a:avLst/>
-          </a:prstGeom>
-          <a:solidFill>
-            <a:srgbClr val="3F6F5F"/>
-          </a:solidFill>
-          <a:ln/>
-        </p:spPr>
-      </p:sp>
-      <p:sp>
-        <p:nvSpPr>
-          <p:cNvPr id="16" name="Shape 14"/>
-          <p:cNvSpPr/>
-          <p:nvPr/>
-        </p:nvSpPr>
-        <p:spPr>
-          <a:xfrm>
-            <a:off x="10781039" y="5076847"/>
-            <a:ext cx="70203" cy="70203"/>
-          </a:xfrm>
-          <a:prstGeom prst="ellipse">
-            <a:avLst/>
-          </a:prstGeom>
-          <a:solidFill>
-            <a:srgbClr val="B9852F"/>
-          </a:solidFill>
-          <a:ln/>
-        </p:spPr>
-      </p:sp>
-      <p:sp>
-        <p:nvSpPr>
-          <p:cNvPr id="17" name="Shape 15"/>
-          <p:cNvSpPr/>
-          <p:nvPr/>
-        </p:nvSpPr>
-        <p:spPr>
-          <a:xfrm>
-            <a:off x="11137858" y="5478499"/>
-            <a:ext cx="84369" cy="84369"/>
-          </a:xfrm>
-          <a:prstGeom prst="ellipse">
-            <a:avLst/>
+            <a:off x="640080" y="3564128"/>
+            <a:ext cx="868680" cy="388112"/>
+          </a:xfrm>
+          <a:prstGeom prst="roundRect">
+            <a:avLst>
+              <a:gd name="adj" fmla="val 14136"/>
+            </a:avLst>
           </a:prstGeom>
           <a:solidFill>
             <a:srgbClr val="7A3B2E"/>
@@ -5330,23 +6706,491 @@
       </p:sp>
       <p:sp>
         <p:nvSpPr>
+          <p:cNvPr id="16" name="Text 14"/>
+          <p:cNvSpPr/>
+          <p:nvPr/>
+        </p:nvSpPr>
+        <p:spPr>
+          <a:xfrm>
+            <a:off x="640080" y="3564128"/>
+            <a:ext cx="868680" cy="388112"/>
+          </a:xfrm>
+          <a:prstGeom prst="rect">
+            <a:avLst/>
+          </a:prstGeom>
+          <a:noFill/>
+          <a:ln/>
+        </p:spPr>
+        <p:txBody>
+          <a:bodyPr wrap="square" rtlCol="0" anchor="ctr"/>
+          <a:lstStyle/>
+          <a:p>
+            <a:pPr algn="ctr" indent="0" marL="0">
+              <a:buNone/>
+            </a:pPr>
+            <a:r>
+              <a:rPr lang="en-US" sz="1100" b="1" dirty="0">
+                <a:solidFill>
+                  <a:srgbClr val="FFFFFF"/>
+                </a:solidFill>
+                <a:latin typeface="Calibri" pitchFamily="34" charset="0"/>
+                <a:ea typeface="Calibri" pitchFamily="34" charset="-122"/>
+                <a:cs typeface="Calibri" pitchFamily="34" charset="-120"/>
+              </a:rPr>
+              <a:t>0:57</a:t>
+            </a:r>
+            <a:endParaRPr lang="en-US" sz="1100" dirty="0"/>
+          </a:p>
+        </p:txBody>
+      </p:sp>
+      <p:sp>
+        <p:nvSpPr>
+          <p:cNvPr id="17" name="Text 15"/>
+          <p:cNvSpPr/>
+          <p:nvPr/>
+        </p:nvSpPr>
+        <p:spPr>
+          <a:xfrm>
+            <a:off x="1691640" y="3545840"/>
+            <a:ext cx="9646920" cy="497840"/>
+          </a:xfrm>
+          <a:prstGeom prst="rect">
+            <a:avLst/>
+          </a:prstGeom>
+          <a:noFill/>
+          <a:ln/>
+        </p:spPr>
+        <p:txBody>
+          <a:bodyPr wrap="square" rtlCol="0" anchor="ctr">
+            <a:spAutoFit/>
+          </a:bodyPr>
+          <a:lstStyle/>
+          <a:p>
+            <a:pPr indent="0" marL="0">
+              <a:buNone/>
+            </a:pPr>
+            <a:r>
+              <a:rPr lang="en-US" sz="1100" dirty="0">
+                <a:solidFill>
+                  <a:srgbClr val="1A1A1A"/>
+                </a:solidFill>
+                <a:latin typeface="Calibri" pitchFamily="34" charset="0"/>
+                <a:ea typeface="Calibri" pitchFamily="34" charset="-122"/>
+                <a:cs typeface="Calibri" pitchFamily="34" charset="-120"/>
+              </a:rPr>
+              <a:t>One-line bridge: that classifier is a neuron; stack many for a neural net, which is what's inside the Week 7 model. A quick TensorFlow Playground glance.</a:t>
+            </a:r>
+            <a:endParaRPr lang="en-US" sz="1100" dirty="0"/>
+          </a:p>
+        </p:txBody>
+      </p:sp>
+      <p:sp>
+        <p:nvSpPr>
           <p:cNvPr id="18" name="Shape 16"/>
           <p:cNvSpPr/>
           <p:nvPr/>
         </p:nvSpPr>
         <p:spPr>
           <a:xfrm>
-            <a:off x="9710749" y="4910930"/>
-            <a:ext cx="57259" cy="57259"/>
-          </a:xfrm>
-          <a:prstGeom prst="ellipse">
-            <a:avLst/>
-          </a:prstGeom>
-          <a:solidFill>
-            <a:srgbClr val="3F6F5F"/>
-          </a:solidFill>
-          <a:ln/>
-        </p:spPr>
+            <a:off x="640080" y="4061968"/>
+            <a:ext cx="868680" cy="388112"/>
+          </a:xfrm>
+          <a:prstGeom prst="roundRect">
+            <a:avLst>
+              <a:gd name="adj" fmla="val 14136"/>
+            </a:avLst>
+          </a:prstGeom>
+          <a:solidFill>
+            <a:srgbClr val="7A3B2E"/>
+          </a:solidFill>
+          <a:ln/>
+        </p:spPr>
+      </p:sp>
+      <p:sp>
+        <p:nvSpPr>
+          <p:cNvPr id="19" name="Text 17"/>
+          <p:cNvSpPr/>
+          <p:nvPr/>
+        </p:nvSpPr>
+        <p:spPr>
+          <a:xfrm>
+            <a:off x="640080" y="4061968"/>
+            <a:ext cx="868680" cy="388112"/>
+          </a:xfrm>
+          <a:prstGeom prst="rect">
+            <a:avLst/>
+          </a:prstGeom>
+          <a:noFill/>
+          <a:ln/>
+        </p:spPr>
+        <p:txBody>
+          <a:bodyPr wrap="square" rtlCol="0" anchor="ctr"/>
+          <a:lstStyle/>
+          <a:p>
+            <a:pPr algn="ctr" indent="0" marL="0">
+              <a:buNone/>
+            </a:pPr>
+            <a:r>
+              <a:rPr lang="en-US" sz="1100" b="1" dirty="0">
+                <a:solidFill>
+                  <a:srgbClr val="FFFFFF"/>
+                </a:solidFill>
+                <a:latin typeface="Calibri" pitchFamily="34" charset="0"/>
+                <a:ea typeface="Calibri" pitchFamily="34" charset="-122"/>
+                <a:cs typeface="Calibri" pitchFamily="34" charset="-120"/>
+              </a:rPr>
+              <a:t>1:00</a:t>
+            </a:r>
+            <a:endParaRPr lang="en-US" sz="1100" dirty="0"/>
+          </a:p>
+        </p:txBody>
+      </p:sp>
+      <p:sp>
+        <p:nvSpPr>
+          <p:cNvPr id="20" name="Text 18"/>
+          <p:cNvSpPr/>
+          <p:nvPr/>
+        </p:nvSpPr>
+        <p:spPr>
+          <a:xfrm>
+            <a:off x="1691640" y="4043680"/>
+            <a:ext cx="9646920" cy="497840"/>
+          </a:xfrm>
+          <a:prstGeom prst="rect">
+            <a:avLst/>
+          </a:prstGeom>
+          <a:noFill/>
+          <a:ln/>
+        </p:spPr>
+        <p:txBody>
+          <a:bodyPr wrap="square" rtlCol="0" anchor="ctr">
+            <a:spAutoFit/>
+          </a:bodyPr>
+          <a:lstStyle/>
+          <a:p>
+            <a:pPr indent="0" marL="0">
+              <a:buNone/>
+            </a:pPr>
+            <a:r>
+              <a:rPr lang="en-US" sz="1100" dirty="0">
+                <a:solidFill>
+                  <a:srgbClr val="1A1A1A"/>
+                </a:solidFill>
+                <a:latin typeface="Calibri" pitchFamily="34" charset="0"/>
+                <a:ea typeface="Calibri" pitchFamily="34" charset="-122"/>
+                <a:cs typeface="Calibri" pitchFamily="34" charset="-120"/>
+              </a:rPr>
+              <a:t>Break</a:t>
+            </a:r>
+            <a:endParaRPr lang="en-US" sz="1100" dirty="0"/>
+          </a:p>
+        </p:txBody>
+      </p:sp>
+      <p:sp>
+        <p:nvSpPr>
+          <p:cNvPr id="21" name="Shape 19"/>
+          <p:cNvSpPr/>
+          <p:nvPr/>
+        </p:nvSpPr>
+        <p:spPr>
+          <a:xfrm>
+            <a:off x="640080" y="4559808"/>
+            <a:ext cx="868680" cy="388112"/>
+          </a:xfrm>
+          <a:prstGeom prst="roundRect">
+            <a:avLst>
+              <a:gd name="adj" fmla="val 14136"/>
+            </a:avLst>
+          </a:prstGeom>
+          <a:solidFill>
+            <a:srgbClr val="7A3B2E"/>
+          </a:solidFill>
+          <a:ln/>
+        </p:spPr>
+      </p:sp>
+      <p:sp>
+        <p:nvSpPr>
+          <p:cNvPr id="22" name="Text 20"/>
+          <p:cNvSpPr/>
+          <p:nvPr/>
+        </p:nvSpPr>
+        <p:spPr>
+          <a:xfrm>
+            <a:off x="640080" y="4559808"/>
+            <a:ext cx="868680" cy="388112"/>
+          </a:xfrm>
+          <a:prstGeom prst="rect">
+            <a:avLst/>
+          </a:prstGeom>
+          <a:noFill/>
+          <a:ln/>
+        </p:spPr>
+        <p:txBody>
+          <a:bodyPr wrap="square" rtlCol="0" anchor="ctr"/>
+          <a:lstStyle/>
+          <a:p>
+            <a:pPr algn="ctr" indent="0" marL="0">
+              <a:buNone/>
+            </a:pPr>
+            <a:r>
+              <a:rPr lang="en-US" sz="1100" b="1" dirty="0">
+                <a:solidFill>
+                  <a:srgbClr val="FFFFFF"/>
+                </a:solidFill>
+                <a:latin typeface="Calibri" pitchFamily="34" charset="0"/>
+                <a:ea typeface="Calibri" pitchFamily="34" charset="-122"/>
+                <a:cs typeface="Calibri" pitchFamily="34" charset="-120"/>
+              </a:rPr>
+              <a:t>1:10</a:t>
+            </a:r>
+            <a:endParaRPr lang="en-US" sz="1100" dirty="0"/>
+          </a:p>
+        </p:txBody>
+      </p:sp>
+      <p:sp>
+        <p:nvSpPr>
+          <p:cNvPr id="23" name="Text 21"/>
+          <p:cNvSpPr/>
+          <p:nvPr/>
+        </p:nvSpPr>
+        <p:spPr>
+          <a:xfrm>
+            <a:off x="1691640" y="4541520"/>
+            <a:ext cx="9646920" cy="497840"/>
+          </a:xfrm>
+          <a:prstGeom prst="rect">
+            <a:avLst/>
+          </a:prstGeom>
+          <a:noFill/>
+          <a:ln/>
+        </p:spPr>
+        <p:txBody>
+          <a:bodyPr wrap="square" rtlCol="0" anchor="ctr">
+            <a:spAutoFit/>
+          </a:bodyPr>
+          <a:lstStyle/>
+          <a:p>
+            <a:pPr indent="0" marL="0">
+              <a:buNone/>
+            </a:pPr>
+            <a:r>
+              <a:rPr lang="en-US" sz="1100" dirty="0">
+                <a:solidFill>
+                  <a:srgbClr val="1A1A1A"/>
+                </a:solidFill>
+                <a:latin typeface="Calibri" pitchFamily="34" charset="0"/>
+                <a:ea typeface="Calibri" pitchFamily="34" charset="-122"/>
+                <a:cs typeface="Calibri" pitchFamily="34" charset="-120"/>
+              </a:rPr>
+              <a:t>Methods menu preview, so Week 4's choice is informed: counting, classification, embeddings (Week 5), and optional approaches (character networks for fiction; sentiment arcs for story projects, Jockers's Syuzhet reproducible in Python, whose own smoothing controversy is the built-in lesson to doubt the shape; CLIP image search for visual projects; and, for the technically comfortable, fine-tuning a small open model, ModernBERT, on your own labels).</a:t>
+            </a:r>
+            <a:endParaRPr lang="en-US" sz="1100" dirty="0"/>
+          </a:p>
+        </p:txBody>
+      </p:sp>
+      <p:sp>
+        <p:nvSpPr>
+          <p:cNvPr id="24" name="Shape 22"/>
+          <p:cNvSpPr/>
+          <p:nvPr/>
+        </p:nvSpPr>
+        <p:spPr>
+          <a:xfrm>
+            <a:off x="640080" y="5057648"/>
+            <a:ext cx="868680" cy="388112"/>
+          </a:xfrm>
+          <a:prstGeom prst="roundRect">
+            <a:avLst>
+              <a:gd name="adj" fmla="val 14136"/>
+            </a:avLst>
+          </a:prstGeom>
+          <a:solidFill>
+            <a:srgbClr val="7A3B2E"/>
+          </a:solidFill>
+          <a:ln/>
+        </p:spPr>
+      </p:sp>
+      <p:sp>
+        <p:nvSpPr>
+          <p:cNvPr id="25" name="Text 23"/>
+          <p:cNvSpPr/>
+          <p:nvPr/>
+        </p:nvSpPr>
+        <p:spPr>
+          <a:xfrm>
+            <a:off x="640080" y="5057648"/>
+            <a:ext cx="868680" cy="388112"/>
+          </a:xfrm>
+          <a:prstGeom prst="rect">
+            <a:avLst/>
+          </a:prstGeom>
+          <a:noFill/>
+          <a:ln/>
+        </p:spPr>
+        <p:txBody>
+          <a:bodyPr wrap="square" rtlCol="0" anchor="ctr"/>
+          <a:lstStyle/>
+          <a:p>
+            <a:pPr algn="ctr" indent="0" marL="0">
+              <a:buNone/>
+            </a:pPr>
+            <a:r>
+              <a:rPr lang="en-US" sz="1100" b="1" dirty="0">
+                <a:solidFill>
+                  <a:srgbClr val="FFFFFF"/>
+                </a:solidFill>
+                <a:latin typeface="Calibri" pitchFamily="34" charset="0"/>
+                <a:ea typeface="Calibri" pitchFamily="34" charset="-122"/>
+                <a:cs typeface="Calibri" pitchFamily="34" charset="-120"/>
+              </a:rPr>
+              <a:t>1:25</a:t>
+            </a:r>
+            <a:endParaRPr lang="en-US" sz="1100" dirty="0"/>
+          </a:p>
+        </p:txBody>
+      </p:sp>
+      <p:sp>
+        <p:nvSpPr>
+          <p:cNvPr id="26" name="Text 24"/>
+          <p:cNvSpPr/>
+          <p:nvPr/>
+        </p:nvSpPr>
+        <p:spPr>
+          <a:xfrm>
+            <a:off x="1691640" y="5039360"/>
+            <a:ext cx="9646920" cy="497840"/>
+          </a:xfrm>
+          <a:prstGeom prst="rect">
+            <a:avLst/>
+          </a:prstGeom>
+          <a:noFill/>
+          <a:ln/>
+        </p:spPr>
+        <p:txBody>
+          <a:bodyPr wrap="square" rtlCol="0" anchor="ctr">
+            <a:spAutoFit/>
+          </a:bodyPr>
+          <a:lstStyle/>
+          <a:p>
+            <a:pPr indent="0" marL="0">
+              <a:buNone/>
+            </a:pPr>
+            <a:r>
+              <a:rPr lang="en-US" sz="1100" dirty="0">
+                <a:solidFill>
+                  <a:srgbClr val="1A1A1A"/>
+                </a:solidFill>
+                <a:latin typeface="Calibri" pitchFamily="34" charset="0"/>
+                <a:ea typeface="Calibri" pitchFamily="34" charset="-122"/>
+                <a:cs typeface="Calibri" pitchFamily="34" charset="-120"/>
+              </a:rPr>
+              <a:t>Pitch prep: what makes a tractable question, and the corpus-existence rule.</a:t>
+            </a:r>
+            <a:endParaRPr lang="en-US" sz="1100" dirty="0"/>
+          </a:p>
+        </p:txBody>
+      </p:sp>
+      <p:sp>
+        <p:nvSpPr>
+          <p:cNvPr id="27" name="Shape 25"/>
+          <p:cNvSpPr/>
+          <p:nvPr/>
+        </p:nvSpPr>
+        <p:spPr>
+          <a:xfrm>
+            <a:off x="640080" y="5555488"/>
+            <a:ext cx="868680" cy="388112"/>
+          </a:xfrm>
+          <a:prstGeom prst="roundRect">
+            <a:avLst>
+              <a:gd name="adj" fmla="val 14136"/>
+            </a:avLst>
+          </a:prstGeom>
+          <a:solidFill>
+            <a:srgbClr val="7A3B2E"/>
+          </a:solidFill>
+          <a:ln/>
+        </p:spPr>
+      </p:sp>
+      <p:sp>
+        <p:nvSpPr>
+          <p:cNvPr id="28" name="Text 26"/>
+          <p:cNvSpPr/>
+          <p:nvPr/>
+        </p:nvSpPr>
+        <p:spPr>
+          <a:xfrm>
+            <a:off x="640080" y="5555488"/>
+            <a:ext cx="868680" cy="388112"/>
+          </a:xfrm>
+          <a:prstGeom prst="rect">
+            <a:avLst/>
+          </a:prstGeom>
+          <a:noFill/>
+          <a:ln/>
+        </p:spPr>
+        <p:txBody>
+          <a:bodyPr wrap="square" rtlCol="0" anchor="ctr"/>
+          <a:lstStyle/>
+          <a:p>
+            <a:pPr algn="ctr" indent="0" marL="0">
+              <a:buNone/>
+            </a:pPr>
+            <a:r>
+              <a:rPr lang="en-US" sz="1100" b="1" dirty="0">
+                <a:solidFill>
+                  <a:srgbClr val="FFFFFF"/>
+                </a:solidFill>
+                <a:latin typeface="Calibri" pitchFamily="34" charset="0"/>
+                <a:ea typeface="Calibri" pitchFamily="34" charset="-122"/>
+                <a:cs typeface="Calibri" pitchFamily="34" charset="-120"/>
+              </a:rPr>
+              <a:t>1:45</a:t>
+            </a:r>
+            <a:endParaRPr lang="en-US" sz="1100" dirty="0"/>
+          </a:p>
+        </p:txBody>
+      </p:sp>
+      <p:sp>
+        <p:nvSpPr>
+          <p:cNvPr id="29" name="Text 27"/>
+          <p:cNvSpPr/>
+          <p:nvPr/>
+        </p:nvSpPr>
+        <p:spPr>
+          <a:xfrm>
+            <a:off x="1691640" y="5537200"/>
+            <a:ext cx="9646920" cy="497840"/>
+          </a:xfrm>
+          <a:prstGeom prst="rect">
+            <a:avLst/>
+          </a:prstGeom>
+          <a:noFill/>
+          <a:ln/>
+        </p:spPr>
+        <p:txBody>
+          <a:bodyPr wrap="square" rtlCol="0" anchor="ctr">
+            <a:spAutoFit/>
+          </a:bodyPr>
+          <a:lstStyle/>
+          <a:p>
+            <a:pPr indent="0" marL="0">
+              <a:buNone/>
+            </a:pPr>
+            <a:r>
+              <a:rPr lang="en-US" sz="1100" dirty="0">
+                <a:solidFill>
+                  <a:srgbClr val="1A1A1A"/>
+                </a:solidFill>
+                <a:latin typeface="Calibri" pitchFamily="34" charset="0"/>
+                <a:ea typeface="Calibri" pitchFamily="34" charset="-122"/>
+                <a:cs typeface="Calibri" pitchFamily="34" charset="-120"/>
+              </a:rPr>
+              <a:t>Gemini-free check and check-out.</a:t>
+            </a:r>
+            <a:endParaRPr lang="en-US" sz="1100" dirty="0"/>
+          </a:p>
+        </p:txBody>
       </p:sp>
     </p:spTree>
   </p:cSld>

--- a/slides/pptx/week-03.pptx
+++ b/slides/pptx/week-03.pptx
@@ -4315,7 +4315,7 @@
                 <a:ea typeface="Calibri" pitchFamily="34" charset="-122"/>
                 <a:cs typeface="Calibri" pitchFamily="34" charset="-120"/>
               </a:rPr>
-              <a:t>WEEK 3 · THE MATERIAL</a:t>
+              <a:t>WEEK 3 · KEY POINTS</a:t>
             </a:r>
             <a:endParaRPr lang="en-US" sz="1200" dirty="0"/>
           </a:p>
@@ -4703,7 +4703,7 @@
                 <a:ea typeface="Calibri" pitchFamily="34" charset="-122"/>
                 <a:cs typeface="Calibri" pitchFamily="34" charset="-120"/>
               </a:rPr>
-              <a:t>WEEK 3 · THE MATERIAL</a:t>
+              <a:t>WEEK 3 · KEY POINTS</a:t>
             </a:r>
             <a:endParaRPr lang="en-US" sz="1200" dirty="0"/>
           </a:p>
@@ -4872,7 +4872,7 @@
                 <a:ea typeface="Calibri" pitchFamily="34" charset="-122"/>
                 <a:cs typeface="Calibri" pitchFamily="34" charset="-120"/>
               </a:rPr>
-              <a:t>Training means learning the weights from labeled examples. Nothing more mystical than that.</a:t>
+              <a:t>Training means learning the weights from labeled examples.</a:t>
             </a:r>
             <a:endParaRPr lang="en-US" sz="1650" dirty="0"/>
           </a:p>
@@ -5091,7 +5091,7 @@
                 <a:ea typeface="Calibri" pitchFamily="34" charset="-122"/>
                 <a:cs typeface="Calibri" pitchFamily="34" charset="-120"/>
               </a:rPr>
-              <a:t>WEEK 3 · THE MATERIAL</a:t>
+              <a:t>WEEK 3 · KEY POINTS</a:t>
             </a:r>
             <a:endParaRPr lang="en-US" sz="1200" dirty="0"/>
           </a:p>
@@ -5479,7 +5479,7 @@
                 <a:ea typeface="Calibri" pitchFamily="34" charset="-122"/>
                 <a:cs typeface="Calibri" pitchFamily="34" charset="-120"/>
               </a:rPr>
-              <a:t>WEEK 3 · THE MATERIAL</a:t>
+              <a:t>WEEK 3 · KEY POINTS</a:t>
             </a:r>
             <a:endParaRPr lang="en-US" sz="1200" dirty="0"/>
           </a:p>
@@ -6676,7 +6676,7 @@
                 <a:ea typeface="Calibri" pitchFamily="34" charset="-122"/>
                 <a:cs typeface="Calibri" pitchFamily="34" charset="-120"/>
               </a:rPr>
-              <a:t>Delight beat: the words that most predict "breakup song" or "this reviewer hated it."</a:t>
+              <a:t>For fun: the words that most predict "breakup song" or "this reviewer hated it."</a:t>
             </a:r>
             <a:endParaRPr lang="en-US" sz="1100" dirty="0"/>
           </a:p>

--- a/slides/pptx/week-03.pptx
+++ b/slides/pptx/week-03.pptx
@@ -2008,7 +2008,7 @@
                 <a:ea typeface="Calibri" pitchFamily="34" charset="-122"/>
                 <a:cs typeface="Calibri" pitchFamily="34" charset="-120"/>
               </a:rPr>
-              <a:t>Teach a machine a bias in ten minutes, build a classifier and read its mind, and preview the full methods menu before next week's commitment.</a:t>
+              <a:t>Teach a machine a bias in ten minutes, build a classifier and read the weights it learned, and preview the full menu of methods before next week's commitment.</a:t>
             </a:r>
             <a:endParaRPr lang="en-US" sz="1600" dirty="0"/>
           </a:p>
@@ -3092,7 +3092,7 @@
                 <a:ea typeface="Calibri" pitchFamily="34" charset="-122"/>
                 <a:cs typeface="Calibri" pitchFamily="34" charset="-120"/>
               </a:rPr>
-              <a:t>The transparent classifier: read its signed weights, its mind on the table. Week 7 brings the opaque one.</a:t>
+              <a:t>The transparent classifier: read its signed weights and see exactly what it learned. Week 7 introduces the opaque counterpart.</a:t>
             </a:r>
             <a:endParaRPr lang="en-US" sz="1450" dirty="0"/>
           </a:p>
@@ -3192,7 +3192,7 @@
                 <a:ea typeface="Cambria" pitchFamily="34" charset="-122"/>
                 <a:cs typeface="Cambria" pitchFamily="34" charset="-120"/>
               </a:rPr>
-              <a:t>You taught it the bias</a:t>
+              <a:t>Bias comes from the training set</a:t>
             </a:r>
             <a:endParaRPr lang="en-US" sz="1900" dirty="0"/>
           </a:p>
@@ -3236,7 +3236,7 @@
                 <a:ea typeface="Calibri" pitchFamily="34" charset="-122"/>
                 <a:cs typeface="Calibri" pitchFamily="34" charset="-120"/>
               </a:rPr>
-              <a:t>The Teachable Machine reveal, a training set teaches a machine its prejudice.</a:t>
+              <a:t>The Teachable Machine demonstration: a machine learns the prejudice of the data it is given.</a:t>
             </a:r>
             <a:endParaRPr lang="en-US" sz="1450" dirty="0"/>
           </a:p>
@@ -4356,7 +4356,7 @@
                 <a:ea typeface="Cambria" pitchFamily="34" charset="-122"/>
                 <a:cs typeface="Cambria" pitchFamily="34" charset="-120"/>
               </a:rPr>
-              <a:t>Underwood's classifier, in particulars</a:t>
+              <a:t>Underwood's classifier, in detail</a:t>
             </a:r>
             <a:endParaRPr lang="en-US" sz="3000" dirty="0"/>
           </a:p>
@@ -5132,7 +5132,7 @@
                 <a:ea typeface="Cambria" pitchFamily="34" charset="-122"/>
                 <a:cs typeface="Cambria" pitchFamily="34" charset="-120"/>
               </a:rPr>
-              <a:t>You taught it that</a:t>
+              <a:t>The training set is the lesson</a:t>
             </a:r>
             <a:endParaRPr lang="en-US" sz="3000" dirty="0"/>
           </a:p>
@@ -5388,7 +5388,7 @@
                 <a:ea typeface="Calibri" pitchFamily="34" charset="-122"/>
                 <a:cs typeface="Calibri" pitchFamily="34" charset="-120"/>
               </a:rPr>
-              <a:t>One line to carry out: today's classifier is one neuron; stack many and you have Week 7's model.</a:t>
+              <a:t>One connection to remember: today's classifier is one neuron; stack many and you have Week 7's model.</a:t>
             </a:r>
             <a:endParaRPr lang="en-US" sz="1650" dirty="0"/>
           </a:p>
@@ -6574,7 +6574,7 @@
                 <a:ea typeface="Calibri" pitchFamily="34" charset="-122"/>
                 <a:cs typeface="Calibri" pitchFamily="34" charset="-120"/>
               </a:rPr>
-              <a:t>Counting with weights, the lab: each word casts a weighted vote; a logistic regression adds them up. Train it on a pop corpus, then read the signed coefficients, its mind on the table.</a:t>
+              <a:t>Counting with weights, the lab: each word casts a weighted vote; a logistic regression adds them up. Train it on a pop corpus, then read the signed coefficients: the model's reasoning, laid out in full.</a:t>
             </a:r>
             <a:endParaRPr lang="en-US" sz="1100" dirty="0"/>
           </a:p>
@@ -6676,7 +6676,7 @@
                 <a:ea typeface="Calibri" pitchFamily="34" charset="-122"/>
                 <a:cs typeface="Calibri" pitchFamily="34" charset="-120"/>
               </a:rPr>
-              <a:t>For fun: the words that most predict "breakup song" or "this reviewer hated it."</a:t>
+              <a:t>A short demonstration: the words that most predict "breakup song" or "this reviewer hated it."</a:t>
             </a:r>
             <a:endParaRPr lang="en-US" sz="1100" dirty="0"/>
           </a:p>

--- a/slides/pptx/week-03.pptx
+++ b/slides/pptx/week-03.pptx
@@ -2452,7 +2452,7 @@
         </p:nvSpPr>
         <p:spPr>
           <a:xfrm>
-            <a:off x="640080" y="1810512"/>
+            <a:off x="640080" y="1673352"/>
             <a:ext cx="219456" cy="219456"/>
           </a:xfrm>
           <a:prstGeom prst="ellipse">
@@ -2472,7 +2472,7 @@
         </p:nvSpPr>
         <p:spPr>
           <a:xfrm>
-            <a:off x="1051560" y="1737360"/>
+            <a:off x="1051560" y="1600200"/>
             <a:ext cx="10424160" cy="365760"/>
           </a:xfrm>
           <a:prstGeom prst="rect">
@@ -2511,7 +2511,7 @@
         </p:nvSpPr>
         <p:spPr>
           <a:xfrm>
-            <a:off x="1051560" y="2121408"/>
+            <a:off x="1051560" y="1984248"/>
             <a:ext cx="10424160" cy="731520"/>
           </a:xfrm>
           <a:prstGeom prst="rect">
@@ -2552,7 +2552,7 @@
         </p:nvSpPr>
         <p:spPr>
           <a:xfrm>
-            <a:off x="640080" y="2953512"/>
+            <a:off x="640080" y="2633472"/>
             <a:ext cx="219456" cy="219456"/>
           </a:xfrm>
           <a:prstGeom prst="ellipse">
@@ -2572,7 +2572,7 @@
         </p:nvSpPr>
         <p:spPr>
           <a:xfrm>
-            <a:off x="1051560" y="2880360"/>
+            <a:off x="1051560" y="2560320"/>
             <a:ext cx="10424160" cy="365760"/>
           </a:xfrm>
           <a:prstGeom prst="rect">
@@ -2611,7 +2611,7 @@
         </p:nvSpPr>
         <p:spPr>
           <a:xfrm>
-            <a:off x="1051560" y="3264408"/>
+            <a:off x="1051560" y="2944368"/>
             <a:ext cx="10424160" cy="731520"/>
           </a:xfrm>
           <a:prstGeom prst="rect">
@@ -2652,7 +2652,7 @@
         </p:nvSpPr>
         <p:spPr>
           <a:xfrm>
-            <a:off x="640080" y="4096512"/>
+            <a:off x="640080" y="3593592"/>
             <a:ext cx="219456" cy="219456"/>
           </a:xfrm>
           <a:prstGeom prst="ellipse">
@@ -2672,7 +2672,7 @@
         </p:nvSpPr>
         <p:spPr>
           <a:xfrm>
-            <a:off x="1051560" y="4023360"/>
+            <a:off x="1051560" y="3520440"/>
             <a:ext cx="10424160" cy="365760"/>
           </a:xfrm>
           <a:prstGeom prst="rect">
@@ -2697,7 +2697,7 @@
                 <a:ea typeface="Calibri" pitchFamily="34" charset="-122"/>
                 <a:cs typeface="Calibri" pitchFamily="34" charset="-120"/>
               </a:rPr>
-              <a:t>Sketch</a:t>
+              <a:t>Deeper (optional)</a:t>
             </a:r>
             <a:endParaRPr lang="en-US" sz="1500" dirty="0"/>
           </a:p>
@@ -2711,7 +2711,7 @@
         </p:nvSpPr>
         <p:spPr>
           <a:xfrm>
-            <a:off x="1051560" y="4407408"/>
+            <a:off x="1051560" y="3904488"/>
             <a:ext cx="10424160" cy="731520"/>
           </a:xfrm>
           <a:prstGeom prst="rect">
@@ -2738,7 +2738,7 @@
                 <a:ea typeface="Calibri" pitchFamily="34" charset="-122"/>
                 <a:cs typeface="Calibri" pitchFamily="34" charset="-120"/>
               </a:rPr>
-              <a:t>Train a quick logistic regression on a labeled set; screenshot its five most positive and negative words.</a:t>
+              <a:t>Underwood, The Life Cycles of Genres (2016), the full paper behind today's featured study</a:t>
             </a:r>
             <a:endParaRPr lang="en-US" sz="1400" dirty="0"/>
           </a:p>
@@ -2752,14 +2752,14 @@
         </p:nvSpPr>
         <p:spPr>
           <a:xfrm>
-            <a:off x="640080" y="5239512"/>
+            <a:off x="640080" y="4553712"/>
             <a:ext cx="219456" cy="219456"/>
           </a:xfrm>
           <a:prstGeom prst="ellipse">
             <a:avLst/>
           </a:prstGeom>
           <a:solidFill>
-            <a:srgbClr val="7A3B2E"/>
+            <a:srgbClr val="3F6F5F"/>
           </a:solidFill>
           <a:ln/>
         </p:spPr>
@@ -2772,7 +2772,7 @@
         </p:nvSpPr>
         <p:spPr>
           <a:xfrm>
-            <a:off x="1051560" y="5166360"/>
+            <a:off x="1051560" y="4480560"/>
             <a:ext cx="10424160" cy="365760"/>
           </a:xfrm>
           <a:prstGeom prst="rect">
@@ -2791,12 +2791,112 @@
             <a:r>
               <a:rPr lang="en-US" sz="1500" b="1" dirty="0">
                 <a:solidFill>
-                  <a:srgbClr val="7A3B2E"/>
+                  <a:srgbClr val="3F6F5F"/>
                 </a:solidFill>
                 <a:latin typeface="Calibri" pitchFamily="34" charset="0"/>
                 <a:ea typeface="Calibri" pitchFamily="34" charset="-122"/>
                 <a:cs typeface="Calibri" pitchFamily="34" charset="-120"/>
               </a:rPr>
+              <a:t>Sketch</a:t>
+            </a:r>
+            <a:endParaRPr lang="en-US" sz="1500" dirty="0"/>
+          </a:p>
+        </p:txBody>
+      </p:sp>
+      <p:sp>
+        <p:nvSpPr>
+          <p:cNvPr id="14" name="Text 12"/>
+          <p:cNvSpPr/>
+          <p:nvPr/>
+        </p:nvSpPr>
+        <p:spPr>
+          <a:xfrm>
+            <a:off x="1051560" y="4864608"/>
+            <a:ext cx="10424160" cy="731520"/>
+          </a:xfrm>
+          <a:prstGeom prst="rect">
+            <a:avLst/>
+          </a:prstGeom>
+          <a:noFill/>
+          <a:ln/>
+        </p:spPr>
+        <p:txBody>
+          <a:bodyPr wrap="square" rtlCol="0" anchor="t">
+            <a:spAutoFit/>
+          </a:bodyPr>
+          <a:lstStyle/>
+          <a:p>
+            <a:pPr indent="0" marL="0">
+              <a:buNone/>
+            </a:pPr>
+            <a:r>
+              <a:rPr lang="en-US" sz="1400" dirty="0">
+                <a:solidFill>
+                  <a:srgbClr val="1A1A1A"/>
+                </a:solidFill>
+                <a:latin typeface="Calibri" pitchFamily="34" charset="0"/>
+                <a:ea typeface="Calibri" pitchFamily="34" charset="-122"/>
+                <a:cs typeface="Calibri" pitchFamily="34" charset="-120"/>
+              </a:rPr>
+              <a:t>Train a quick logistic regression on a labeled set; screenshot its five most positive and negative words.</a:t>
+            </a:r>
+            <a:endParaRPr lang="en-US" sz="1400" dirty="0"/>
+          </a:p>
+        </p:txBody>
+      </p:sp>
+      <p:sp>
+        <p:nvSpPr>
+          <p:cNvPr id="15" name="Shape 13"/>
+          <p:cNvSpPr/>
+          <p:nvPr/>
+        </p:nvSpPr>
+        <p:spPr>
+          <a:xfrm>
+            <a:off x="640080" y="5513832"/>
+            <a:ext cx="219456" cy="219456"/>
+          </a:xfrm>
+          <a:prstGeom prst="ellipse">
+            <a:avLst/>
+          </a:prstGeom>
+          <a:solidFill>
+            <a:srgbClr val="7A3B2E"/>
+          </a:solidFill>
+          <a:ln/>
+        </p:spPr>
+      </p:sp>
+      <p:sp>
+        <p:nvSpPr>
+          <p:cNvPr id="16" name="Text 14"/>
+          <p:cNvSpPr/>
+          <p:nvPr/>
+        </p:nvSpPr>
+        <p:spPr>
+          <a:xfrm>
+            <a:off x="1051560" y="5440680"/>
+            <a:ext cx="10424160" cy="365760"/>
+          </a:xfrm>
+          <a:prstGeom prst="rect">
+            <a:avLst/>
+          </a:prstGeom>
+          <a:noFill/>
+          <a:ln/>
+        </p:spPr>
+        <p:txBody>
+          <a:bodyPr wrap="square" rtlCol="0" anchor="ctr"/>
+          <a:lstStyle/>
+          <a:p>
+            <a:pPr indent="0" marL="0">
+              <a:buNone/>
+            </a:pPr>
+            <a:r>
+              <a:rPr lang="en-US" sz="1500" b="1" dirty="0">
+                <a:solidFill>
+                  <a:srgbClr val="7A3B2E"/>
+                </a:solidFill>
+                <a:latin typeface="Calibri" pitchFamily="34" charset="0"/>
+                <a:ea typeface="Calibri" pitchFamily="34" charset="-122"/>
+                <a:cs typeface="Calibri" pitchFamily="34" charset="-120"/>
+              </a:rPr>
               <a:t>Check (AI closed)</a:t>
             </a:r>
             <a:endParaRPr lang="en-US" sz="1500" dirty="0"/>
@@ -2805,13 +2905,13 @@
       </p:sp>
       <p:sp>
         <p:nvSpPr>
-          <p:cNvPr id="14" name="Text 12"/>
-          <p:cNvSpPr/>
-          <p:nvPr/>
-        </p:nvSpPr>
-        <p:spPr>
-          <a:xfrm>
-            <a:off x="1051560" y="5550408"/>
+          <p:cNvPr id="17" name="Text 15"/>
+          <p:cNvSpPr/>
+          <p:nvPr/>
+        </p:nvSpPr>
+        <p:spPr>
+          <a:xfrm>
+            <a:off x="1051560" y="5824728"/>
             <a:ext cx="10424160" cy="731520"/>
           </a:xfrm>
           <a:prstGeom prst="rect">

--- a/slides/pptx/week-03.pptx
+++ b/slides/pptx/week-03.pptx
@@ -6674,7 +6674,7 @@
                 <a:ea typeface="Calibri" pitchFamily="34" charset="-122"/>
                 <a:cs typeface="Calibri" pitchFamily="34" charset="-120"/>
               </a:rPr>
-              <a:t>Counting with weights, the lab: each word casts a weighted vote; a logistic regression adds them up. Train it on a pop corpus, then read the signed coefficients: the model's reasoning, laid out in full.</a:t>
+              <a:t>Counting with weights, the lab: each word casts a weighted vote; a logistic regression adds them up. Train it live on a hard pair, r/sandiego against r/SanDiegan, one city, two communities, then read the signed coefficients: the model's reasoning, laid out in full. Accuracy sits near 60 percent, and the words earning it are the discussion.</a:t>
             </a:r>
             <a:endParaRPr lang="en-US" sz="1100" dirty="0"/>
           </a:p>

--- a/slides/pptx/week-03.pptx
+++ b/slides/pptx/week-03.pptx
@@ -2638,7 +2638,7 @@
                 <a:ea typeface="Calibri" pitchFamily="34" charset="-122"/>
                 <a:cs typeface="Calibri" pitchFamily="34" charset="-120"/>
               </a:rPr>
-              <a:t>Underwood on GPT-4 and fictional time; Juola's Rowling unmasking</a:t>
+              <a:t>Robinson, Trump's tweets: the Android/iPhone split (2016), distinctive words unmasking who typed; Juola's Rowling unmasking</a:t>
             </a:r>
             <a:endParaRPr lang="en-US" sz="1400" dirty="0"/>
           </a:p>

--- a/slides/pptx/week-03.pptx
+++ b/slides/pptx/week-03.pptx
@@ -17,9 +17,10 @@
     <p:sldId id="265" r:id="rId11"/>
     <p:sldId id="266" r:id="rId12"/>
     <p:sldId id="267" r:id="rId13"/>
+    <p:sldId id="268" r:id="rId14"/>
   </p:sldIdLst>
   <p:notesMasterIdLst>
-    <p:notesMasterId r:id="rId14"/>
+    <p:notesMasterId r:id="rId15"/>
   </p:notesMasterIdLst>
   <p:sldSz cx="12191695" cy="6858000"/>
   <p:notesSz cx="6858000" cy="12191695"/>
@@ -819,6 +820,94 @@
 </p:notes>
 </file>
 
+<file path=ppt/notesSlides/notesSlide13.xml><?xml version="1.0" encoding="utf-8"?>
+<p:notes xmlns:a="http://schemas.openxmlformats.org/drawingml/2006/main" xmlns:r="http://schemas.openxmlformats.org/officeDocument/2006/relationships" xmlns:p="http://schemas.openxmlformats.org/presentationml/2006/main">
+  <p:cSld>
+    <p:spTree>
+      <p:nvGrpSpPr>
+        <p:cNvPr id="1" name=""/>
+        <p:cNvGrpSpPr/>
+        <p:nvPr/>
+      </p:nvGrpSpPr>
+      <p:grpSpPr>
+        <a:xfrm>
+          <a:off x="0" y="0"/>
+          <a:ext cx="0" cy="0"/>
+          <a:chOff x="0" y="0"/>
+          <a:chExt cx="0" cy="0"/>
+        </a:xfrm>
+      </p:grpSpPr>
+      <p:sp>
+        <p:nvSpPr>
+          <p:cNvPr id="2" name="Slide Image Placeholder 1"/>
+          <p:cNvSpPr>
+            <a:spLocks noGrp="1" noRot="1" noChangeAspect="1"/>
+          </p:cNvSpPr>
+          <p:nvPr>
+            <p:ph type="sldImg"/>
+          </p:nvPr>
+        </p:nvSpPr>
+        <p:spPr/>
+      </p:sp>
+      <p:sp>
+        <p:nvSpPr>
+          <p:cNvPr id="3" name="Notes Placeholder 2"/>
+          <p:cNvSpPr>
+            <a:spLocks noGrp="1"/>
+          </p:cNvSpPr>
+          <p:nvPr>
+            <p:ph type="body" idx="1"/>
+          </p:nvPr>
+        </p:nvSpPr>
+        <p:spPr/>
+        <p:txBody>
+          <a:bodyPr/>
+          <a:lstStyle/>
+          <a:p>
+            <a:r>
+              <a:rPr lang="en-US" dirty="0"/>
+              <a:t/>
+            </a:r>
+            <a:endParaRPr lang="en-US" dirty="0"/>
+          </a:p>
+        </p:txBody>
+      </p:sp>
+      <p:sp>
+        <p:nvSpPr>
+          <p:cNvPr id="4" name="Slide Number Placeholder 3"/>
+          <p:cNvSpPr>
+            <a:spLocks noGrp="1"/>
+          </p:cNvSpPr>
+          <p:nvPr>
+            <p:ph type="sldNum" sz="quarter" idx="10"/>
+          </p:nvPr>
+        </p:nvSpPr>
+        <p:spPr/>
+        <p:txBody>
+          <a:bodyPr/>
+          <a:lstStyle/>
+          <a:p>
+            <a:fld id="{F7021451-1387-4CA6-816F-3879F97B5CBC}" type="slidenum">
+              <a:rPr lang="en-US"/>
+              <a:t>13</a:t>
+            </a:fld>
+            <a:endParaRPr lang="en-US"/>
+          </a:p>
+        </p:txBody>
+      </p:sp>
+    </p:spTree>
+    <p:extLst>
+      <p:ext uri="{BB962C8B-B14F-4D97-AF65-F5344CB8AC3E}">
+        <p14:creationId xmlns:p14="http://schemas.microsoft.com/office/powerpoint/2010/main" val="1024086991"/>
+      </p:ext>
+    </p:extLst>
+  </p:cSld>
+  <p:clrMapOvr>
+    <a:masterClrMapping/>
+  </p:clrMapOvr>
+</p:notes>
+</file>
+
 <file path=ppt/notesSlides/notesSlide2.xml><?xml version="1.0" encoding="utf-8"?>
 <p:notes xmlns:a="http://schemas.openxmlformats.org/drawingml/2006/main" xmlns:r="http://schemas.openxmlformats.org/officeDocument/2006/relationships" xmlns:p="http://schemas.openxmlformats.org/presentationml/2006/main">
   <p:cSld>
@@ -2008,7 +2097,7 @@
                 <a:ea typeface="Calibri" pitchFamily="34" charset="-122"/>
                 <a:cs typeface="Calibri" pitchFamily="34" charset="-120"/>
               </a:rPr>
-              <a:t>Teach a machine a bias in ten minutes, build a classifier and read the weights it learned, and preview the full menu of methods before next week's commitment.</a:t>
+              <a:t>Argue out the genre article that made this method famous, watch a model get built in practice (and mis-built), then build your own in a group: a logistic regression you can read, doubt, and defend.</a:t>
             </a:r>
             <a:endParaRPr lang="en-US" sz="1600" dirty="0"/>
           </a:p>
@@ -2047,7 +2136,7 @@
                 <a:ea typeface="Calibri" pitchFamily="34" charset="-122"/>
                 <a:cs typeface="Calibri" pitchFamily="34" charset="-120"/>
               </a:rPr>
-              <a:t>Tool / method:  Classification. Train a reader and read what it learned</a:t>
+              <a:t>Tool / method:  Modelling in practice. Fit a logistic regression, read it, break it</a:t>
             </a:r>
             <a:endParaRPr lang="en-US" sz="1200" dirty="0"/>
           </a:p>
@@ -2438,7 +2527,7 @@
                 <a:ea typeface="Cambria" pitchFamily="34" charset="-122"/>
                 <a:cs typeface="Cambria" pitchFamily="34" charset="-120"/>
               </a:rPr>
-              <a:t>Reading &amp; homework</a:t>
+              <a:t>The session</a:t>
             </a:r>
             <a:endParaRPr lang="en-US" sz="3000" dirty="0"/>
           </a:p>
@@ -2452,11 +2541,13 @@
         </p:nvSpPr>
         <p:spPr>
           <a:xfrm>
-            <a:off x="640080" y="1673352"/>
-            <a:ext cx="219456" cy="219456"/>
-          </a:xfrm>
-          <a:prstGeom prst="ellipse">
-            <a:avLst/>
+            <a:off x="640080" y="1572768"/>
+            <a:ext cx="868680" cy="457200"/>
+          </a:xfrm>
+          <a:prstGeom prst="roundRect">
+            <a:avLst>
+              <a:gd name="adj" fmla="val 12000"/>
+            </a:avLst>
           </a:prstGeom>
           <a:solidFill>
             <a:srgbClr val="7A3B2E"/>
@@ -2472,8 +2563,8 @@
         </p:nvSpPr>
         <p:spPr>
           <a:xfrm>
-            <a:off x="1051560" y="1600200"/>
-            <a:ext cx="10424160" cy="365760"/>
+            <a:off x="640080" y="1572768"/>
+            <a:ext cx="868680" cy="457200"/>
           </a:xfrm>
           <a:prstGeom prst="rect">
             <a:avLst/>
@@ -2485,21 +2576,21 @@
           <a:bodyPr wrap="square" rtlCol="0" anchor="ctr"/>
           <a:lstStyle/>
           <a:p>
-            <a:pPr indent="0" marL="0">
-              <a:buNone/>
-            </a:pPr>
-            <a:r>
-              <a:rPr lang="en-US" sz="1500" b="1" dirty="0">
-                <a:solidFill>
-                  <a:srgbClr val="7A3B2E"/>
+            <a:pPr algn="ctr" indent="0" marL="0">
+              <a:buNone/>
+            </a:pPr>
+            <a:r>
+              <a:rPr lang="en-US" sz="1100" b="1" dirty="0">
+                <a:solidFill>
+                  <a:srgbClr val="FFFFFF"/>
                 </a:solidFill>
                 <a:latin typeface="Calibri" pitchFamily="34" charset="0"/>
                 <a:ea typeface="Calibri" pitchFamily="34" charset="-122"/>
                 <a:cs typeface="Calibri" pitchFamily="34" charset="-120"/>
               </a:rPr>
-              <a:t>Reading</a:t>
-            </a:r>
-            <a:endParaRPr lang="en-US" sz="1500" dirty="0"/>
+              <a:t>0:00</a:t>
+            </a:r>
+            <a:endParaRPr lang="en-US" sz="1100" dirty="0"/>
           </a:p>
         </p:txBody>
       </p:sp>
@@ -2511,17 +2602,17 @@
         </p:nvSpPr>
         <p:spPr>
           <a:xfrm>
-            <a:off x="1051560" y="1984248"/>
-            <a:ext cx="10424160" cy="731520"/>
-          </a:xfrm>
-          <a:prstGeom prst="rect">
-            <a:avLst/>
-          </a:prstGeom>
-          <a:noFill/>
-          <a:ln/>
-        </p:spPr>
-        <p:txBody>
-          <a:bodyPr wrap="square" rtlCol="0" anchor="t">
+            <a:off x="1691640" y="1554480"/>
+            <a:ext cx="9646920" cy="566928"/>
+          </a:xfrm>
+          <a:prstGeom prst="rect">
+            <a:avLst/>
+          </a:prstGeom>
+          <a:noFill/>
+          <a:ln/>
+        </p:spPr>
+        <p:txBody>
+          <a:bodyPr wrap="square" rtlCol="0" anchor="ctr">
             <a:spAutoFit/>
           </a:bodyPr>
           <a:lstStyle/>
@@ -2530,7 +2621,7 @@
               <a:buNone/>
             </a:pPr>
             <a:r>
-              <a:rPr lang="en-US" sz="1400" dirty="0">
+              <a:rPr lang="en-US" sz="1250" dirty="0">
                 <a:solidFill>
                   <a:srgbClr val="1A1A1A"/>
                 </a:solidFill>
@@ -2538,9 +2629,9 @@
                 <a:ea typeface="Calibri" pitchFamily="34" charset="-122"/>
                 <a:cs typeface="Calibri" pitchFamily="34" charset="-120"/>
               </a:rPr>
-              <a:t>Mullen, America's Public Bible (intro + a verse)</a:t>
-            </a:r>
-            <a:endParaRPr lang="en-US" sz="1400" dirty="0"/>
+              <a:t>Warm-up and retrieval: last week's shuffle test in one sentence, and one thing you still don't trust about it.</a:t>
+            </a:r>
+            <a:endParaRPr lang="en-US" sz="1250" dirty="0"/>
           </a:p>
         </p:txBody>
       </p:sp>
@@ -2552,14 +2643,16 @@
         </p:nvSpPr>
         <p:spPr>
           <a:xfrm>
-            <a:off x="640080" y="2633472"/>
-            <a:ext cx="219456" cy="219456"/>
-          </a:xfrm>
-          <a:prstGeom prst="ellipse">
-            <a:avLst/>
-          </a:prstGeom>
-          <a:solidFill>
-            <a:srgbClr val="3F6F5F"/>
+            <a:off x="640080" y="2139696"/>
+            <a:ext cx="868680" cy="457200"/>
+          </a:xfrm>
+          <a:prstGeom prst="roundRect">
+            <a:avLst>
+              <a:gd name="adj" fmla="val 12000"/>
+            </a:avLst>
+          </a:prstGeom>
+          <a:solidFill>
+            <a:srgbClr val="7A3B2E"/>
           </a:solidFill>
           <a:ln/>
         </p:spPr>
@@ -2572,8 +2665,8 @@
         </p:nvSpPr>
         <p:spPr>
           <a:xfrm>
-            <a:off x="1051560" y="2560320"/>
-            <a:ext cx="10424160" cy="365760"/>
+            <a:off x="640080" y="2139696"/>
+            <a:ext cx="868680" cy="457200"/>
           </a:xfrm>
           <a:prstGeom prst="rect">
             <a:avLst/>
@@ -2585,21 +2678,21 @@
           <a:bodyPr wrap="square" rtlCol="0" anchor="ctr"/>
           <a:lstStyle/>
           <a:p>
-            <a:pPr indent="0" marL="0">
-              <a:buNone/>
-            </a:pPr>
-            <a:r>
-              <a:rPr lang="en-US" sz="1500" b="1" dirty="0">
-                <a:solidFill>
-                  <a:srgbClr val="3F6F5F"/>
+            <a:pPr algn="ctr" indent="0" marL="0">
+              <a:buNone/>
+            </a:pPr>
+            <a:r>
+              <a:rPr lang="en-US" sz="1100" b="1" dirty="0">
+                <a:solidFill>
+                  <a:srgbClr val="FFFFFF"/>
                 </a:solidFill>
                 <a:latin typeface="Calibri" pitchFamily="34" charset="0"/>
                 <a:ea typeface="Calibri" pitchFamily="34" charset="-122"/>
                 <a:cs typeface="Calibri" pitchFamily="34" charset="-120"/>
               </a:rPr>
-              <a:t>Supplement</a:t>
-            </a:r>
-            <a:endParaRPr lang="en-US" sz="1500" dirty="0"/>
+              <a:t>0:05</a:t>
+            </a:r>
+            <a:endParaRPr lang="en-US" sz="1100" dirty="0"/>
           </a:p>
         </p:txBody>
       </p:sp>
@@ -2611,17 +2704,17 @@
         </p:nvSpPr>
         <p:spPr>
           <a:xfrm>
-            <a:off x="1051560" y="2944368"/>
-            <a:ext cx="10424160" cy="731520"/>
-          </a:xfrm>
-          <a:prstGeom prst="rect">
-            <a:avLst/>
-          </a:prstGeom>
-          <a:noFill/>
-          <a:ln/>
-        </p:spPr>
-        <p:txBody>
-          <a:bodyPr wrap="square" rtlCol="0" anchor="t">
+            <a:off x="1691640" y="2121408"/>
+            <a:ext cx="9646920" cy="566928"/>
+          </a:xfrm>
+          <a:prstGeom prst="rect">
+            <a:avLst/>
+          </a:prstGeom>
+          <a:noFill/>
+          <a:ln/>
+        </p:spPr>
+        <p:txBody>
+          <a:bodyPr wrap="square" rtlCol="0" anchor="ctr">
             <a:spAutoFit/>
           </a:bodyPr>
           <a:lstStyle/>
@@ -2630,7 +2723,7 @@
               <a:buNone/>
             </a:pPr>
             <a:r>
-              <a:rPr lang="en-US" sz="1400" dirty="0">
+              <a:rPr lang="en-US" sz="1250" dirty="0">
                 <a:solidFill>
                   <a:srgbClr val="1A1A1A"/>
                 </a:solidFill>
@@ -2638,9 +2731,9 @@
                 <a:ea typeface="Calibri" pitchFamily="34" charset="-122"/>
                 <a:cs typeface="Calibri" pitchFamily="34" charset="-120"/>
               </a:rPr>
-              <a:t>Robinson, Trump's tweets: the Android/iPhone split (2016), distinctive words unmasking who typed; Juola's Rowling unmasking</a:t>
-            </a:r>
-            <a:endParaRPr lang="en-US" sz="1400" dirty="0"/>
+              <a:t>Discussion, Underwood's "The Life Cycles of Genres," read for today. The room argues it out, not the instructor: what exactly did he count, who decided which novels were detective fiction, and what does the model's misread of Pynchon's The Crying of Lot 49 show about genre boundaries? Then the transfer question every group carries into the second hour: where would YOUR classifier fail, and what would that failure teach?</a:t>
+            </a:r>
+            <a:endParaRPr lang="en-US" sz="1250" dirty="0"/>
           </a:p>
         </p:txBody>
       </p:sp>
@@ -2652,14 +2745,16 @@
         </p:nvSpPr>
         <p:spPr>
           <a:xfrm>
-            <a:off x="640080" y="3593592"/>
-            <a:ext cx="219456" cy="219456"/>
-          </a:xfrm>
-          <a:prstGeom prst="ellipse">
-            <a:avLst/>
-          </a:prstGeom>
-          <a:solidFill>
-            <a:srgbClr val="B9852F"/>
+            <a:off x="640080" y="2706624"/>
+            <a:ext cx="868680" cy="457200"/>
+          </a:xfrm>
+          <a:prstGeom prst="roundRect">
+            <a:avLst>
+              <a:gd name="adj" fmla="val 12000"/>
+            </a:avLst>
+          </a:prstGeom>
+          <a:solidFill>
+            <a:srgbClr val="7A3B2E"/>
           </a:solidFill>
           <a:ln/>
         </p:spPr>
@@ -2672,8 +2767,8 @@
         </p:nvSpPr>
         <p:spPr>
           <a:xfrm>
-            <a:off x="1051560" y="3520440"/>
-            <a:ext cx="10424160" cy="365760"/>
+            <a:off x="640080" y="2706624"/>
+            <a:ext cx="868680" cy="457200"/>
           </a:xfrm>
           <a:prstGeom prst="rect">
             <a:avLst/>
@@ -2685,21 +2780,21 @@
           <a:bodyPr wrap="square" rtlCol="0" anchor="ctr"/>
           <a:lstStyle/>
           <a:p>
-            <a:pPr indent="0" marL="0">
-              <a:buNone/>
-            </a:pPr>
-            <a:r>
-              <a:rPr lang="en-US" sz="1500" b="1" dirty="0">
-                <a:solidFill>
-                  <a:srgbClr val="B9852F"/>
+            <a:pPr algn="ctr" indent="0" marL="0">
+              <a:buNone/>
+            </a:pPr>
+            <a:r>
+              <a:rPr lang="en-US" sz="1100" b="1" dirty="0">
+                <a:solidFill>
+                  <a:srgbClr val="FFFFFF"/>
                 </a:solidFill>
                 <a:latin typeface="Calibri" pitchFamily="34" charset="0"/>
                 <a:ea typeface="Calibri" pitchFamily="34" charset="-122"/>
                 <a:cs typeface="Calibri" pitchFamily="34" charset="-120"/>
               </a:rPr>
-              <a:t>Deeper (optional)</a:t>
-            </a:r>
-            <a:endParaRPr lang="en-US" sz="1500" dirty="0"/>
+              <a:t>0:40</a:t>
+            </a:r>
+            <a:endParaRPr lang="en-US" sz="1100" dirty="0"/>
           </a:p>
         </p:txBody>
       </p:sp>
@@ -2711,17 +2806,17 @@
         </p:nvSpPr>
         <p:spPr>
           <a:xfrm>
-            <a:off x="1051560" y="3904488"/>
-            <a:ext cx="10424160" cy="731520"/>
-          </a:xfrm>
-          <a:prstGeom prst="rect">
-            <a:avLst/>
-          </a:prstGeom>
-          <a:noFill/>
-          <a:ln/>
-        </p:spPr>
-        <p:txBody>
-          <a:bodyPr wrap="square" rtlCol="0" anchor="t">
+            <a:off x="1691640" y="2688336"/>
+            <a:ext cx="9646920" cy="566928"/>
+          </a:xfrm>
+          <a:prstGeom prst="rect">
+            <a:avLst/>
+          </a:prstGeom>
+          <a:noFill/>
+          <a:ln/>
+        </p:spPr>
+        <p:txBody>
+          <a:bodyPr wrap="square" rtlCol="0" anchor="ctr">
             <a:spAutoFit/>
           </a:bodyPr>
           <a:lstStyle/>
@@ -2730,7 +2825,7 @@
               <a:buNone/>
             </a:pPr>
             <a:r>
-              <a:rPr lang="en-US" sz="1400" dirty="0">
+              <a:rPr lang="en-US" sz="1250" dirty="0">
                 <a:solidFill>
                   <a:srgbClr val="1A1A1A"/>
                 </a:solidFill>
@@ -2738,9 +2833,9 @@
                 <a:ea typeface="Calibri" pitchFamily="34" charset="-122"/>
                 <a:cs typeface="Calibri" pitchFamily="34" charset="-120"/>
               </a:rPr>
-              <a:t>Underwood, The Life Cycles of Genres (2016), the full paper behind today's featured study</a:t>
-            </a:r>
-            <a:endParaRPr lang="en-US" sz="1400" dirty="0"/>
+              <a:t>Lecture, modelling in practice: a model is features, weights, a fit, and a score you would believe. Built live on screen, mistakes included, in this order, turn text into a matrix, split off data the model never sees, fit it, compare the score against a baseline that always guesses the bigger pile, then read the signed weights. Then what goes wrong in practice: scoring on the training rows, an imbalanced pair flattering itself, a leaked giveaway feature, and the model with no "neither" box. Teachable Machine's orange cats and brown dogs is the sixty-second version of all of it; the bias is the training set, and you assembled it.</a:t>
+            </a:r>
+            <a:endParaRPr lang="en-US" sz="1250" dirty="0"/>
           </a:p>
         </p:txBody>
       </p:sp>
@@ -2752,14 +2847,16 @@
         </p:nvSpPr>
         <p:spPr>
           <a:xfrm>
-            <a:off x="640080" y="4553712"/>
-            <a:ext cx="219456" cy="219456"/>
-          </a:xfrm>
-          <a:prstGeom prst="ellipse">
-            <a:avLst/>
-          </a:prstGeom>
-          <a:solidFill>
-            <a:srgbClr val="3F6F5F"/>
+            <a:off x="640080" y="3273552"/>
+            <a:ext cx="868680" cy="457200"/>
+          </a:xfrm>
+          <a:prstGeom prst="roundRect">
+            <a:avLst>
+              <a:gd name="adj" fmla="val 12000"/>
+            </a:avLst>
+          </a:prstGeom>
+          <a:solidFill>
+            <a:srgbClr val="7A3B2E"/>
           </a:solidFill>
           <a:ln/>
         </p:spPr>
@@ -2772,8 +2869,8 @@
         </p:nvSpPr>
         <p:spPr>
           <a:xfrm>
-            <a:off x="1051560" y="4480560"/>
-            <a:ext cx="10424160" cy="365760"/>
+            <a:off x="640080" y="3273552"/>
+            <a:ext cx="868680" cy="457200"/>
           </a:xfrm>
           <a:prstGeom prst="rect">
             <a:avLst/>
@@ -2785,21 +2882,21 @@
           <a:bodyPr wrap="square" rtlCol="0" anchor="ctr"/>
           <a:lstStyle/>
           <a:p>
-            <a:pPr indent="0" marL="0">
-              <a:buNone/>
-            </a:pPr>
-            <a:r>
-              <a:rPr lang="en-US" sz="1500" b="1" dirty="0">
-                <a:solidFill>
-                  <a:srgbClr val="3F6F5F"/>
+            <a:pPr algn="ctr" indent="0" marL="0">
+              <a:buNone/>
+            </a:pPr>
+            <a:r>
+              <a:rPr lang="en-US" sz="1100" b="1" dirty="0">
+                <a:solidFill>
+                  <a:srgbClr val="FFFFFF"/>
                 </a:solidFill>
                 <a:latin typeface="Calibri" pitchFamily="34" charset="0"/>
                 <a:ea typeface="Calibri" pitchFamily="34" charset="-122"/>
                 <a:cs typeface="Calibri" pitchFamily="34" charset="-120"/>
               </a:rPr>
-              <a:t>Sketch</a:t>
-            </a:r>
-            <a:endParaRPr lang="en-US" sz="1500" dirty="0"/>
+              <a:t>1:05</a:t>
+            </a:r>
+            <a:endParaRPr lang="en-US" sz="1100" dirty="0"/>
           </a:p>
         </p:txBody>
       </p:sp>
@@ -2811,17 +2908,17 @@
         </p:nvSpPr>
         <p:spPr>
           <a:xfrm>
-            <a:off x="1051560" y="4864608"/>
-            <a:ext cx="10424160" cy="731520"/>
-          </a:xfrm>
-          <a:prstGeom prst="rect">
-            <a:avLst/>
-          </a:prstGeom>
-          <a:noFill/>
-          <a:ln/>
-        </p:spPr>
-        <p:txBody>
-          <a:bodyPr wrap="square" rtlCol="0" anchor="t">
+            <a:off x="1691640" y="3255264"/>
+            <a:ext cx="9646920" cy="566928"/>
+          </a:xfrm>
+          <a:prstGeom prst="rect">
+            <a:avLst/>
+          </a:prstGeom>
+          <a:noFill/>
+          <a:ln/>
+        </p:spPr>
+        <p:txBody>
+          <a:bodyPr wrap="square" rtlCol="0" anchor="ctr">
             <a:spAutoFit/>
           </a:bodyPr>
           <a:lstStyle/>
@@ -2830,7 +2927,7 @@
               <a:buNone/>
             </a:pPr>
             <a:r>
-              <a:rPr lang="en-US" sz="1400" dirty="0">
+              <a:rPr lang="en-US" sz="1250" dirty="0">
                 <a:solidFill>
                   <a:srgbClr val="1A1A1A"/>
                 </a:solidFill>
@@ -2838,9 +2935,9 @@
                 <a:ea typeface="Calibri" pitchFamily="34" charset="-122"/>
                 <a:cs typeface="Calibri" pitchFamily="34" charset="-120"/>
               </a:rPr>
-              <a:t>Train a quick logistic regression on a labeled set; screenshot its five most positive and negative words.</a:t>
-            </a:r>
-            <a:endParaRPr lang="en-US" sz="1400" dirty="0"/>
+              <a:t>Break</a:t>
+            </a:r>
+            <a:endParaRPr lang="en-US" sz="1250" dirty="0"/>
           </a:p>
         </p:txBody>
       </p:sp>
@@ -2852,11 +2949,13 @@
         </p:nvSpPr>
         <p:spPr>
           <a:xfrm>
-            <a:off x="640080" y="5513832"/>
-            <a:ext cx="219456" cy="219456"/>
-          </a:xfrm>
-          <a:prstGeom prst="ellipse">
-            <a:avLst/>
+            <a:off x="640080" y="3840480"/>
+            <a:ext cx="868680" cy="457200"/>
+          </a:xfrm>
+          <a:prstGeom prst="roundRect">
+            <a:avLst>
+              <a:gd name="adj" fmla="val 12000"/>
+            </a:avLst>
           </a:prstGeom>
           <a:solidFill>
             <a:srgbClr val="7A3B2E"/>
@@ -2872,8 +2971,8 @@
         </p:nvSpPr>
         <p:spPr>
           <a:xfrm>
-            <a:off x="1051560" y="5440680"/>
-            <a:ext cx="10424160" cy="365760"/>
+            <a:off x="640080" y="3840480"/>
+            <a:ext cx="868680" cy="457200"/>
           </a:xfrm>
           <a:prstGeom prst="rect">
             <a:avLst/>
@@ -2885,21 +2984,21 @@
           <a:bodyPr wrap="square" rtlCol="0" anchor="ctr"/>
           <a:lstStyle/>
           <a:p>
-            <a:pPr indent="0" marL="0">
-              <a:buNone/>
-            </a:pPr>
-            <a:r>
-              <a:rPr lang="en-US" sz="1500" b="1" dirty="0">
-                <a:solidFill>
-                  <a:srgbClr val="7A3B2E"/>
+            <a:pPr algn="ctr" indent="0" marL="0">
+              <a:buNone/>
+            </a:pPr>
+            <a:r>
+              <a:rPr lang="en-US" sz="1100" b="1" dirty="0">
+                <a:solidFill>
+                  <a:srgbClr val="FFFFFF"/>
                 </a:solidFill>
                 <a:latin typeface="Calibri" pitchFamily="34" charset="0"/>
                 <a:ea typeface="Calibri" pitchFamily="34" charset="-122"/>
                 <a:cs typeface="Calibri" pitchFamily="34" charset="-120"/>
               </a:rPr>
-              <a:t>Check (AI closed)</a:t>
-            </a:r>
-            <a:endParaRPr lang="en-US" sz="1500" dirty="0"/>
+              <a:t>1:15</a:t>
+            </a:r>
+            <a:endParaRPr lang="en-US" sz="1100" dirty="0"/>
           </a:p>
         </p:txBody>
       </p:sp>
@@ -2911,17 +3010,17 @@
         </p:nvSpPr>
         <p:spPr>
           <a:xfrm>
-            <a:off x="1051560" y="5824728"/>
-            <a:ext cx="10424160" cy="731520"/>
-          </a:xfrm>
-          <a:prstGeom prst="rect">
-            <a:avLst/>
-          </a:prstGeom>
-          <a:noFill/>
-          <a:ln/>
-        </p:spPr>
-        <p:txBody>
-          <a:bodyPr wrap="square" rtlCol="0" anchor="t">
+            <a:off x="1691640" y="3822192"/>
+            <a:ext cx="9646920" cy="566928"/>
+          </a:xfrm>
+          <a:prstGeom prst="rect">
+            <a:avLst/>
+          </a:prstGeom>
+          <a:noFill/>
+          <a:ln/>
+        </p:spPr>
+        <p:txBody>
+          <a:bodyPr wrap="square" rtlCol="0" anchor="ctr">
             <a:spAutoFit/>
           </a:bodyPr>
           <a:lstStyle/>
@@ -2930,7 +3029,7 @@
               <a:buNone/>
             </a:pPr>
             <a:r>
-              <a:rPr lang="en-US" sz="1400" dirty="0">
+              <a:rPr lang="en-US" sz="1250" dirty="0">
                 <a:solidFill>
                   <a:srgbClr val="1A1A1A"/>
                 </a:solidFill>
@@ -2938,9 +3037,111 @@
                 <a:ea typeface="Calibri" pitchFamily="34" charset="-122"/>
                 <a:cs typeface="Calibri" pitchFamily="34" charset="-120"/>
               </a:rPr>
-              <a:t>Explain it: read your classifier's top weights aloud, and name one input where it would fail and why. (Competencies 4, 5.)</a:t>
-            </a:r>
-            <a:endParaRPr lang="en-US" sz="1400" dirty="0"/>
+              <a:t>Group work in Colab, threes, one screen, rotating driver / reader / skeptic. The blank notebook (week03_modeling_TOGETHER) has stations, not answers: pick your two piles, build the features, fit it, judge it against the baseline, read its mind, break it with something from neither pile, then change ONE modelling decision (min_df, tf-idf, bigrams, C, class_weight) and fit again. Several models, side by side, is the point: does the accuracy move, and do the top words change more than the accuracy does?</a:t>
+            </a:r>
+            <a:endParaRPr lang="en-US" sz="1250" dirty="0"/>
+          </a:p>
+        </p:txBody>
+      </p:sp>
+      <p:sp>
+        <p:nvSpPr>
+          <p:cNvPr id="18" name="Shape 16"/>
+          <p:cNvSpPr/>
+          <p:nvPr/>
+        </p:nvSpPr>
+        <p:spPr>
+          <a:xfrm>
+            <a:off x="640080" y="4407408"/>
+            <a:ext cx="868680" cy="457200"/>
+          </a:xfrm>
+          <a:prstGeom prst="roundRect">
+            <a:avLst>
+              <a:gd name="adj" fmla="val 12000"/>
+            </a:avLst>
+          </a:prstGeom>
+          <a:solidFill>
+            <a:srgbClr val="7A3B2E"/>
+          </a:solidFill>
+          <a:ln/>
+        </p:spPr>
+      </p:sp>
+      <p:sp>
+        <p:nvSpPr>
+          <p:cNvPr id="19" name="Text 17"/>
+          <p:cNvSpPr/>
+          <p:nvPr/>
+        </p:nvSpPr>
+        <p:spPr>
+          <a:xfrm>
+            <a:off x="640080" y="4407408"/>
+            <a:ext cx="868680" cy="457200"/>
+          </a:xfrm>
+          <a:prstGeom prst="rect">
+            <a:avLst/>
+          </a:prstGeom>
+          <a:noFill/>
+          <a:ln/>
+        </p:spPr>
+        <p:txBody>
+          <a:bodyPr wrap="square" rtlCol="0" anchor="ctr"/>
+          <a:lstStyle/>
+          <a:p>
+            <a:pPr algn="ctr" indent="0" marL="0">
+              <a:buNone/>
+            </a:pPr>
+            <a:r>
+              <a:rPr lang="en-US" sz="1100" b="1" dirty="0">
+                <a:solidFill>
+                  <a:srgbClr val="FFFFFF"/>
+                </a:solidFill>
+                <a:latin typeface="Calibri" pitchFamily="34" charset="0"/>
+                <a:ea typeface="Calibri" pitchFamily="34" charset="-122"/>
+                <a:cs typeface="Calibri" pitchFamily="34" charset="-120"/>
+              </a:rPr>
+              <a:t>1:47</a:t>
+            </a:r>
+            <a:endParaRPr lang="en-US" sz="1100" dirty="0"/>
+          </a:p>
+        </p:txBody>
+      </p:sp>
+      <p:sp>
+        <p:nvSpPr>
+          <p:cNvPr id="20" name="Text 18"/>
+          <p:cNvSpPr/>
+          <p:nvPr/>
+        </p:nvSpPr>
+        <p:spPr>
+          <a:xfrm>
+            <a:off x="1691640" y="4389120"/>
+            <a:ext cx="9646920" cy="566928"/>
+          </a:xfrm>
+          <a:prstGeom prst="rect">
+            <a:avLst/>
+          </a:prstGeom>
+          <a:noFill/>
+          <a:ln/>
+        </p:spPr>
+        <p:txBody>
+          <a:bodyPr wrap="square" rtlCol="0" anchor="ctr">
+            <a:spAutoFit/>
+          </a:bodyPr>
+          <a:lstStyle/>
+          <a:p>
+            <a:pPr indent="0" marL="0">
+              <a:buNone/>
+            </a:pPr>
+            <a:r>
+              <a:rPr lang="en-US" sz="1250" dirty="0">
+                <a:solidFill>
+                  <a:srgbClr val="1A1A1A"/>
+                </a:solidFill>
+                <a:latin typeface="Calibri" pitchFamily="34" charset="0"/>
+                <a:ea typeface="Calibri" pitchFamily="34" charset="-122"/>
+                <a:cs typeface="Calibri" pitchFamily="34" charset="-120"/>
+              </a:rPr>
+              <a:t>Report-backs, ninety seconds a group: the pair you chose, baseline against best, your two word lists sorted into topic / register / habit, and the one caveat you would put in writing. Then the two things Week 4 needs, the methods menu in one slide (counting, classification, embeddings in Week 5, annotation in Week 7, plus the optional add-ons) and the corpus-existence rule, no proof no pitch. Gemini-free check and check-out.</a:t>
+            </a:r>
+            <a:endParaRPr lang="en-US" sz="1250" dirty="0"/>
           </a:p>
         </p:txBody>
       </p:sp>
@@ -2985,7 +3186,7 @@
         <p:spPr>
           <a:xfrm>
             <a:off x="640080" y="640080"/>
-            <a:ext cx="10058400" cy="320040"/>
+            <a:ext cx="10058400" cy="731520"/>
           </a:xfrm>
           <a:prstGeom prst="rect">
             <a:avLst/>
@@ -3001,7 +3202,66 @@
               <a:buNone/>
             </a:pPr>
             <a:r>
-              <a:rPr lang="en-US" sz="1300" b="1" spc="300" kern="0" dirty="0">
+              <a:rPr lang="en-US" sz="3000" b="1" dirty="0">
+                <a:solidFill>
+                  <a:srgbClr val="1A1A1A"/>
+                </a:solidFill>
+                <a:latin typeface="Cambria" pitchFamily="34" charset="0"/>
+                <a:ea typeface="Cambria" pitchFamily="34" charset="-122"/>
+                <a:cs typeface="Cambria" pitchFamily="34" charset="-120"/>
+              </a:rPr>
+              <a:t>Reading &amp; homework</a:t>
+            </a:r>
+            <a:endParaRPr lang="en-US" sz="3000" dirty="0"/>
+          </a:p>
+        </p:txBody>
+      </p:sp>
+      <p:sp>
+        <p:nvSpPr>
+          <p:cNvPr id="3" name="Shape 1"/>
+          <p:cNvSpPr/>
+          <p:nvPr/>
+        </p:nvSpPr>
+        <p:spPr>
+          <a:xfrm>
+            <a:off x="640080" y="1673352"/>
+            <a:ext cx="219456" cy="219456"/>
+          </a:xfrm>
+          <a:prstGeom prst="ellipse">
+            <a:avLst/>
+          </a:prstGeom>
+          <a:solidFill>
+            <a:srgbClr val="7A3B2E"/>
+          </a:solidFill>
+          <a:ln/>
+        </p:spPr>
+      </p:sp>
+      <p:sp>
+        <p:nvSpPr>
+          <p:cNvPr id="4" name="Text 2"/>
+          <p:cNvSpPr/>
+          <p:nvPr/>
+        </p:nvSpPr>
+        <p:spPr>
+          <a:xfrm>
+            <a:off x="1051560" y="1600200"/>
+            <a:ext cx="10424160" cy="365760"/>
+          </a:xfrm>
+          <a:prstGeom prst="rect">
+            <a:avLst/>
+          </a:prstGeom>
+          <a:noFill/>
+          <a:ln/>
+        </p:spPr>
+        <p:txBody>
+          <a:bodyPr wrap="square" rtlCol="0" anchor="ctr"/>
+          <a:lstStyle/>
+          <a:p>
+            <a:pPr indent="0" marL="0">
+              <a:buNone/>
+            </a:pPr>
+            <a:r>
+              <a:rPr lang="en-US" sz="1500" b="1" dirty="0">
                 <a:solidFill>
                   <a:srgbClr val="7A3B2E"/>
                 </a:solidFill>
@@ -3009,72 +3269,11 @@
                 <a:ea typeface="Calibri" pitchFamily="34" charset="-122"/>
                 <a:cs typeface="Calibri" pitchFamily="34" charset="-120"/>
               </a:rPr>
-              <a:t>HOW THIS WEEK CONNECTS</a:t>
-            </a:r>
-            <a:endParaRPr lang="en-US" sz="1300" dirty="0"/>
-          </a:p>
-        </p:txBody>
-      </p:sp>
-      <p:sp>
-        <p:nvSpPr>
-          <p:cNvPr id="3" name="Text 1"/>
-          <p:cNvSpPr/>
-          <p:nvPr/>
-        </p:nvSpPr>
-        <p:spPr>
-          <a:xfrm>
-            <a:off x="640080" y="987552"/>
-            <a:ext cx="10058400" cy="640080"/>
-          </a:xfrm>
-          <a:prstGeom prst="rect">
-            <a:avLst/>
-          </a:prstGeom>
-          <a:noFill/>
-          <a:ln/>
-        </p:spPr>
-        <p:txBody>
-          <a:bodyPr wrap="square" rtlCol="0" anchor="ctr"/>
-          <a:lstStyle/>
-          <a:p>
-            <a:pPr indent="0" marL="0">
-              <a:buNone/>
-            </a:pPr>
-            <a:r>
-              <a:rPr lang="en-US" sz="2800" b="1" dirty="0">
-                <a:solidFill>
-                  <a:srgbClr val="1A1A1A"/>
-                </a:solidFill>
-                <a:latin typeface="Cambria" pitchFamily="34" charset="0"/>
-                <a:ea typeface="Cambria" pitchFamily="34" charset="-122"/>
-                <a:cs typeface="Cambria" pitchFamily="34" charset="-120"/>
-              </a:rPr>
-              <a:t>The course's through-lines</a:t>
-            </a:r>
-            <a:endParaRPr lang="en-US" sz="2800" dirty="0"/>
-          </a:p>
-        </p:txBody>
-      </p:sp>
-      <p:sp>
-        <p:nvSpPr>
-          <p:cNvPr id="4" name="Shape 2"/>
-          <p:cNvSpPr/>
-          <p:nvPr/>
-        </p:nvSpPr>
-        <p:spPr>
-          <a:xfrm>
-            <a:off x="640080" y="2057400"/>
-            <a:ext cx="457200" cy="457200"/>
-          </a:xfrm>
-          <a:prstGeom prst="roundRect">
-            <a:avLst>
-              <a:gd name="adj" fmla="val 16000"/>
-            </a:avLst>
-          </a:prstGeom>
-          <a:solidFill>
-            <a:srgbClr val="7A3B2E"/>
-          </a:solidFill>
-          <a:ln/>
-        </p:spPr>
+              <a:t>Reading</a:t>
+            </a:r>
+            <a:endParaRPr lang="en-US" sz="1500" dirty="0"/>
+          </a:p>
+        </p:txBody>
       </p:sp>
       <p:sp>
         <p:nvSpPr>
@@ -3084,86 +3283,8 @@
         </p:nvSpPr>
         <p:spPr>
           <a:xfrm>
-            <a:off x="640080" y="2057400"/>
-            <a:ext cx="457200" cy="457200"/>
-          </a:xfrm>
-          <a:prstGeom prst="rect">
-            <a:avLst/>
-          </a:prstGeom>
-          <a:noFill/>
-          <a:ln/>
-        </p:spPr>
-        <p:txBody>
-          <a:bodyPr wrap="square" rtlCol="0" anchor="ctr"/>
-          <a:lstStyle/>
-          <a:p>
-            <a:pPr algn="ctr" indent="0" marL="0">
-              <a:buNone/>
-            </a:pPr>
-            <a:r>
-              <a:rPr lang="en-US" sz="2000" b="1" dirty="0">
-                <a:solidFill>
-                  <a:srgbClr val="FFFFFF"/>
-                </a:solidFill>
-                <a:latin typeface="Cambria" pitchFamily="34" charset="0"/>
-                <a:ea typeface="Cambria" pitchFamily="34" charset="-122"/>
-                <a:cs typeface="Cambria" pitchFamily="34" charset="-120"/>
-              </a:rPr>
-              <a:t>1</a:t>
-            </a:r>
-            <a:endParaRPr lang="en-US" sz="2000" dirty="0"/>
-          </a:p>
-        </p:txBody>
-      </p:sp>
-      <p:sp>
-        <p:nvSpPr>
-          <p:cNvPr id="6" name="Text 4"/>
-          <p:cNvSpPr/>
-          <p:nvPr/>
-        </p:nvSpPr>
-        <p:spPr>
-          <a:xfrm>
-            <a:off x="1371600" y="2020824"/>
-            <a:ext cx="10332720" cy="411480"/>
-          </a:xfrm>
-          <a:prstGeom prst="rect">
-            <a:avLst/>
-          </a:prstGeom>
-          <a:noFill/>
-          <a:ln/>
-        </p:spPr>
-        <p:txBody>
-          <a:bodyPr wrap="square" rtlCol="0" anchor="ctr"/>
-          <a:lstStyle/>
-          <a:p>
-            <a:pPr indent="0" marL="0">
-              <a:buNone/>
-            </a:pPr>
-            <a:r>
-              <a:rPr lang="en-US" sz="1900" b="1" dirty="0">
-                <a:solidFill>
-                  <a:srgbClr val="7A3B2E"/>
-                </a:solidFill>
-                <a:latin typeface="Cambria" pitchFamily="34" charset="0"/>
-                <a:ea typeface="Cambria" pitchFamily="34" charset="-122"/>
-                <a:cs typeface="Cambria" pitchFamily="34" charset="-120"/>
-              </a:rPr>
-              <a:t>The reader you can see</a:t>
-            </a:r>
-            <a:endParaRPr lang="en-US" sz="1900" dirty="0"/>
-          </a:p>
-        </p:txBody>
-      </p:sp>
-      <p:sp>
-        <p:nvSpPr>
-          <p:cNvPr id="7" name="Text 5"/>
-          <p:cNvSpPr/>
-          <p:nvPr/>
-        </p:nvSpPr>
-        <p:spPr>
-          <a:xfrm>
-            <a:off x="1371600" y="2441448"/>
-            <a:ext cx="10332720" cy="914400"/>
+            <a:off x="1051560" y="1984248"/>
+            <a:ext cx="10424160" cy="731520"/>
           </a:xfrm>
           <a:prstGeom prst="rect">
             <a:avLst/>
@@ -3178,13 +3299,10 @@
           <a:lstStyle/>
           <a:p>
             <a:pPr indent="0" marL="0">
-              <a:lnSpc>
-                <a:spcPct val="112000"/>
-              </a:lnSpc>
-              <a:buNone/>
-            </a:pPr>
-            <a:r>
-              <a:rPr lang="en-US" sz="1450" dirty="0">
+              <a:buNone/>
+            </a:pPr>
+            <a:r>
+              <a:rPr lang="en-US" sz="1400" dirty="0">
                 <a:solidFill>
                   <a:srgbClr val="1A1A1A"/>
                 </a:solidFill>
@@ -3192,27 +3310,25 @@
                 <a:ea typeface="Calibri" pitchFamily="34" charset="-122"/>
                 <a:cs typeface="Calibri" pitchFamily="34" charset="-120"/>
               </a:rPr>
-              <a:t>The transparent classifier: read its signed weights and see exactly what it learned. Week 7 introduces the opaque counterpart.</a:t>
-            </a:r>
-            <a:endParaRPr lang="en-US" sz="1450" dirty="0"/>
-          </a:p>
-        </p:txBody>
-      </p:sp>
-      <p:sp>
-        <p:nvSpPr>
-          <p:cNvPr id="8" name="Shape 6"/>
-          <p:cNvSpPr/>
-          <p:nvPr/>
-        </p:nvSpPr>
-        <p:spPr>
-          <a:xfrm>
-            <a:off x="640080" y="3520440"/>
-            <a:ext cx="457200" cy="457200"/>
-          </a:xfrm>
-          <a:prstGeom prst="roundRect">
-            <a:avLst>
-              <a:gd name="adj" fmla="val 16000"/>
-            </a:avLst>
+              <a:t>Underwood, The Life Cycles of Genres (2016), the article the session discusses: read the argument and the figures, skim the model tables</a:t>
+            </a:r>
+            <a:endParaRPr lang="en-US" sz="1400" dirty="0"/>
+          </a:p>
+        </p:txBody>
+      </p:sp>
+      <p:sp>
+        <p:nvSpPr>
+          <p:cNvPr id="6" name="Shape 4"/>
+          <p:cNvSpPr/>
+          <p:nvPr/>
+        </p:nvSpPr>
+        <p:spPr>
+          <a:xfrm>
+            <a:off x="640080" y="2633472"/>
+            <a:ext cx="219456" cy="219456"/>
+          </a:xfrm>
+          <a:prstGeom prst="ellipse">
+            <a:avLst/>
           </a:prstGeom>
           <a:solidFill>
             <a:srgbClr val="3F6F5F"/>
@@ -3222,14 +3338,14 @@
       </p:sp>
       <p:sp>
         <p:nvSpPr>
-          <p:cNvPr id="9" name="Text 7"/>
-          <p:cNvSpPr/>
-          <p:nvPr/>
-        </p:nvSpPr>
-        <p:spPr>
-          <a:xfrm>
-            <a:off x="640080" y="3520440"/>
-            <a:ext cx="457200" cy="457200"/>
+          <p:cNvPr id="7" name="Text 5"/>
+          <p:cNvSpPr/>
+          <p:nvPr/>
+        </p:nvSpPr>
+        <p:spPr>
+          <a:xfrm>
+            <a:off x="1051560" y="2560320"/>
+            <a:ext cx="10424160" cy="365760"/>
           </a:xfrm>
           <a:prstGeom prst="rect">
             <a:avLst/>
@@ -3241,73 +3357,34 @@
           <a:bodyPr wrap="square" rtlCol="0" anchor="ctr"/>
           <a:lstStyle/>
           <a:p>
-            <a:pPr algn="ctr" indent="0" marL="0">
-              <a:buNone/>
-            </a:pPr>
-            <a:r>
-              <a:rPr lang="en-US" sz="2000" b="1" dirty="0">
-                <a:solidFill>
-                  <a:srgbClr val="FFFFFF"/>
-                </a:solidFill>
-                <a:latin typeface="Cambria" pitchFamily="34" charset="0"/>
-                <a:ea typeface="Cambria" pitchFamily="34" charset="-122"/>
-                <a:cs typeface="Cambria" pitchFamily="34" charset="-120"/>
-              </a:rPr>
-              <a:t>2</a:t>
-            </a:r>
-            <a:endParaRPr lang="en-US" sz="2000" dirty="0"/>
-          </a:p>
-        </p:txBody>
-      </p:sp>
-      <p:sp>
-        <p:nvSpPr>
-          <p:cNvPr id="10" name="Text 8"/>
-          <p:cNvSpPr/>
-          <p:nvPr/>
-        </p:nvSpPr>
-        <p:spPr>
-          <a:xfrm>
-            <a:off x="1371600" y="3483864"/>
-            <a:ext cx="10332720" cy="411480"/>
-          </a:xfrm>
-          <a:prstGeom prst="rect">
-            <a:avLst/>
-          </a:prstGeom>
-          <a:noFill/>
-          <a:ln/>
-        </p:spPr>
-        <p:txBody>
-          <a:bodyPr wrap="square" rtlCol="0" anchor="ctr"/>
-          <a:lstStyle/>
-          <a:p>
             <a:pPr indent="0" marL="0">
               <a:buNone/>
             </a:pPr>
             <a:r>
-              <a:rPr lang="en-US" sz="1900" b="1" dirty="0">
+              <a:rPr lang="en-US" sz="1500" b="1" dirty="0">
                 <a:solidFill>
                   <a:srgbClr val="3F6F5F"/>
                 </a:solidFill>
-                <a:latin typeface="Cambria" pitchFamily="34" charset="0"/>
-                <a:ea typeface="Cambria" pitchFamily="34" charset="-122"/>
-                <a:cs typeface="Cambria" pitchFamily="34" charset="-120"/>
-              </a:rPr>
-              <a:t>Bias comes from the training set</a:t>
-            </a:r>
-            <a:endParaRPr lang="en-US" sz="1900" dirty="0"/>
-          </a:p>
-        </p:txBody>
-      </p:sp>
-      <p:sp>
-        <p:nvSpPr>
-          <p:cNvPr id="11" name="Text 9"/>
-          <p:cNvSpPr/>
-          <p:nvPr/>
-        </p:nvSpPr>
-        <p:spPr>
-          <a:xfrm>
-            <a:off x="1371600" y="3904488"/>
-            <a:ext cx="10332720" cy="914400"/>
+                <a:latin typeface="Calibri" pitchFamily="34" charset="0"/>
+                <a:ea typeface="Calibri" pitchFamily="34" charset="-122"/>
+                <a:cs typeface="Calibri" pitchFamily="34" charset="-120"/>
+              </a:rPr>
+              <a:t>Supplement</a:t>
+            </a:r>
+            <a:endParaRPr lang="en-US" sz="1500" dirty="0"/>
+          </a:p>
+        </p:txBody>
+      </p:sp>
+      <p:sp>
+        <p:nvSpPr>
+          <p:cNvPr id="8" name="Text 6"/>
+          <p:cNvSpPr/>
+          <p:nvPr/>
+        </p:nvSpPr>
+        <p:spPr>
+          <a:xfrm>
+            <a:off x="1051560" y="2944368"/>
+            <a:ext cx="10424160" cy="731520"/>
           </a:xfrm>
           <a:prstGeom prst="rect">
             <a:avLst/>
@@ -3322,13 +3399,10 @@
           <a:lstStyle/>
           <a:p>
             <a:pPr indent="0" marL="0">
-              <a:lnSpc>
-                <a:spcPct val="112000"/>
-              </a:lnSpc>
-              <a:buNone/>
-            </a:pPr>
-            <a:r>
-              <a:rPr lang="en-US" sz="1450" dirty="0">
+              <a:buNone/>
+            </a:pPr>
+            <a:r>
+              <a:rPr lang="en-US" sz="1400" dirty="0">
                 <a:solidFill>
                   <a:srgbClr val="1A1A1A"/>
                 </a:solidFill>
@@ -3336,27 +3410,25 @@
                 <a:ea typeface="Calibri" pitchFamily="34" charset="-122"/>
                 <a:cs typeface="Calibri" pitchFamily="34" charset="-120"/>
               </a:rPr>
-              <a:t>The Teachable Machine demonstration: a machine learns the prejudice of the data it is given.</a:t>
-            </a:r>
-            <a:endParaRPr lang="en-US" sz="1450" dirty="0"/>
-          </a:p>
-        </p:txBody>
-      </p:sp>
-      <p:sp>
-        <p:nvSpPr>
-          <p:cNvPr id="12" name="Shape 10"/>
-          <p:cNvSpPr/>
-          <p:nvPr/>
-        </p:nvSpPr>
-        <p:spPr>
-          <a:xfrm>
-            <a:off x="640080" y="4983480"/>
-            <a:ext cx="457200" cy="457200"/>
-          </a:xfrm>
-          <a:prstGeom prst="roundRect">
-            <a:avLst>
-              <a:gd name="adj" fmla="val 16000"/>
-            </a:avLst>
+              <a:t>Mullen, America's Public Bible (intro + a verse), the same tool as finished scholarship you can poke at; Robinson, Trump's tweets: the Android/iPhone split (2016), distinctive words unmasking who typed; Juola's Rowling unmasking</a:t>
+            </a:r>
+            <a:endParaRPr lang="en-US" sz="1400" dirty="0"/>
+          </a:p>
+        </p:txBody>
+      </p:sp>
+      <p:sp>
+        <p:nvSpPr>
+          <p:cNvPr id="9" name="Shape 7"/>
+          <p:cNvSpPr/>
+          <p:nvPr/>
+        </p:nvSpPr>
+        <p:spPr>
+          <a:xfrm>
+            <a:off x="640080" y="3593592"/>
+            <a:ext cx="219456" cy="219456"/>
+          </a:xfrm>
+          <a:prstGeom prst="ellipse">
+            <a:avLst/>
           </a:prstGeom>
           <a:solidFill>
             <a:srgbClr val="B9852F"/>
@@ -3366,14 +3438,14 @@
       </p:sp>
       <p:sp>
         <p:nvSpPr>
-          <p:cNvPr id="13" name="Text 11"/>
-          <p:cNvSpPr/>
-          <p:nvPr/>
-        </p:nvSpPr>
-        <p:spPr>
-          <a:xfrm>
-            <a:off x="640080" y="4983480"/>
-            <a:ext cx="457200" cy="457200"/>
+          <p:cNvPr id="10" name="Text 8"/>
+          <p:cNvSpPr/>
+          <p:nvPr/>
+        </p:nvSpPr>
+        <p:spPr>
+          <a:xfrm>
+            <a:off x="1051560" y="3520440"/>
+            <a:ext cx="10424160" cy="365760"/>
           </a:xfrm>
           <a:prstGeom prst="rect">
             <a:avLst/>
@@ -3385,73 +3457,34 @@
           <a:bodyPr wrap="square" rtlCol="0" anchor="ctr"/>
           <a:lstStyle/>
           <a:p>
-            <a:pPr algn="ctr" indent="0" marL="0">
-              <a:buNone/>
-            </a:pPr>
-            <a:r>
-              <a:rPr lang="en-US" sz="2000" b="1" dirty="0">
-                <a:solidFill>
-                  <a:srgbClr val="FFFFFF"/>
-                </a:solidFill>
-                <a:latin typeface="Cambria" pitchFamily="34" charset="0"/>
-                <a:ea typeface="Cambria" pitchFamily="34" charset="-122"/>
-                <a:cs typeface="Cambria" pitchFamily="34" charset="-120"/>
-              </a:rPr>
-              <a:t>3</a:t>
-            </a:r>
-            <a:endParaRPr lang="en-US" sz="2000" dirty="0"/>
-          </a:p>
-        </p:txBody>
-      </p:sp>
-      <p:sp>
-        <p:nvSpPr>
-          <p:cNvPr id="14" name="Text 12"/>
-          <p:cNvSpPr/>
-          <p:nvPr/>
-        </p:nvSpPr>
-        <p:spPr>
-          <a:xfrm>
-            <a:off x="1371600" y="4946904"/>
-            <a:ext cx="10332720" cy="411480"/>
-          </a:xfrm>
-          <a:prstGeom prst="rect">
-            <a:avLst/>
-          </a:prstGeom>
-          <a:noFill/>
-          <a:ln/>
-        </p:spPr>
-        <p:txBody>
-          <a:bodyPr wrap="square" rtlCol="0" anchor="ctr"/>
-          <a:lstStyle/>
-          <a:p>
             <a:pPr indent="0" marL="0">
               <a:buNone/>
             </a:pPr>
             <a:r>
-              <a:rPr lang="en-US" sz="1900" b="1" dirty="0">
+              <a:rPr lang="en-US" sz="1500" b="1" dirty="0">
                 <a:solidFill>
                   <a:srgbClr val="B9852F"/>
                 </a:solidFill>
-                <a:latin typeface="Cambria" pitchFamily="34" charset="0"/>
-                <a:ea typeface="Cambria" pitchFamily="34" charset="-122"/>
-                <a:cs typeface="Cambria" pitchFamily="34" charset="-120"/>
-              </a:rPr>
-              <a:t>Every choice is a choice</a:t>
-            </a:r>
-            <a:endParaRPr lang="en-US" sz="1900" dirty="0"/>
-          </a:p>
-        </p:txBody>
-      </p:sp>
-      <p:sp>
-        <p:nvSpPr>
-          <p:cNvPr id="15" name="Text 13"/>
-          <p:cNvSpPr/>
-          <p:nvPr/>
-        </p:nvSpPr>
-        <p:spPr>
-          <a:xfrm>
-            <a:off x="1371600" y="5367528"/>
-            <a:ext cx="10332720" cy="914400"/>
+                <a:latin typeface="Calibri" pitchFamily="34" charset="0"/>
+                <a:ea typeface="Calibri" pitchFamily="34" charset="-122"/>
+                <a:cs typeface="Calibri" pitchFamily="34" charset="-120"/>
+              </a:rPr>
+              <a:t>Deeper (optional)</a:t>
+            </a:r>
+            <a:endParaRPr lang="en-US" sz="1500" dirty="0"/>
+          </a:p>
+        </p:txBody>
+      </p:sp>
+      <p:sp>
+        <p:nvSpPr>
+          <p:cNvPr id="11" name="Text 9"/>
+          <p:cNvSpPr/>
+          <p:nvPr/>
+        </p:nvSpPr>
+        <p:spPr>
+          <a:xfrm>
+            <a:off x="1051560" y="3904488"/>
+            <a:ext cx="10424160" cy="731520"/>
           </a:xfrm>
           <a:prstGeom prst="rect">
             <a:avLst/>
@@ -3466,13 +3499,10 @@
           <a:lstStyle/>
           <a:p>
             <a:pPr indent="0" marL="0">
-              <a:lnSpc>
-                <a:spcPct val="112000"/>
-              </a:lnSpc>
-              <a:buNone/>
-            </a:pPr>
-            <a:r>
-              <a:rPr lang="en-US" sz="1450" dirty="0">
+              <a:buNone/>
+            </a:pPr>
+            <a:r>
+              <a:rPr lang="en-US" sz="1400" dirty="0">
                 <a:solidFill>
                   <a:srgbClr val="1A1A1A"/>
                 </a:solidFill>
@@ -3480,9 +3510,209 @@
                 <a:ea typeface="Calibri" pitchFamily="34" charset="-122"/>
                 <a:cs typeface="Calibri" pitchFamily="34" charset="-120"/>
               </a:rPr>
-              <a:t>What counts as a label, and which words you hand it, decide what it learns.</a:t>
-            </a:r>
-            <a:endParaRPr lang="en-US" sz="1450" dirty="0"/>
+              <a:t>Underwood, Distant Horizons (2019), chapter 2, the book-length version of today's article, with the Pynchon misread in context</a:t>
+            </a:r>
+            <a:endParaRPr lang="en-US" sz="1400" dirty="0"/>
+          </a:p>
+        </p:txBody>
+      </p:sp>
+      <p:sp>
+        <p:nvSpPr>
+          <p:cNvPr id="12" name="Shape 10"/>
+          <p:cNvSpPr/>
+          <p:nvPr/>
+        </p:nvSpPr>
+        <p:spPr>
+          <a:xfrm>
+            <a:off x="640080" y="4553712"/>
+            <a:ext cx="219456" cy="219456"/>
+          </a:xfrm>
+          <a:prstGeom prst="ellipse">
+            <a:avLst/>
+          </a:prstGeom>
+          <a:solidFill>
+            <a:srgbClr val="3F6F5F"/>
+          </a:solidFill>
+          <a:ln/>
+        </p:spPr>
+      </p:sp>
+      <p:sp>
+        <p:nvSpPr>
+          <p:cNvPr id="13" name="Text 11"/>
+          <p:cNvSpPr/>
+          <p:nvPr/>
+        </p:nvSpPr>
+        <p:spPr>
+          <a:xfrm>
+            <a:off x="1051560" y="4480560"/>
+            <a:ext cx="10424160" cy="365760"/>
+          </a:xfrm>
+          <a:prstGeom prst="rect">
+            <a:avLst/>
+          </a:prstGeom>
+          <a:noFill/>
+          <a:ln/>
+        </p:spPr>
+        <p:txBody>
+          <a:bodyPr wrap="square" rtlCol="0" anchor="ctr"/>
+          <a:lstStyle/>
+          <a:p>
+            <a:pPr indent="0" marL="0">
+              <a:buNone/>
+            </a:pPr>
+            <a:r>
+              <a:rPr lang="en-US" sz="1500" b="1" dirty="0">
+                <a:solidFill>
+                  <a:srgbClr val="3F6F5F"/>
+                </a:solidFill>
+                <a:latin typeface="Calibri" pitchFamily="34" charset="0"/>
+                <a:ea typeface="Calibri" pitchFamily="34" charset="-122"/>
+                <a:cs typeface="Calibri" pitchFamily="34" charset="-120"/>
+              </a:rPr>
+              <a:t>Sketch</a:t>
+            </a:r>
+            <a:endParaRPr lang="en-US" sz="1500" dirty="0"/>
+          </a:p>
+        </p:txBody>
+      </p:sp>
+      <p:sp>
+        <p:nvSpPr>
+          <p:cNvPr id="14" name="Text 12"/>
+          <p:cNvSpPr/>
+          <p:nvPr/>
+        </p:nvSpPr>
+        <p:spPr>
+          <a:xfrm>
+            <a:off x="1051560" y="4864608"/>
+            <a:ext cx="10424160" cy="731520"/>
+          </a:xfrm>
+          <a:prstGeom prst="rect">
+            <a:avLst/>
+          </a:prstGeom>
+          <a:noFill/>
+          <a:ln/>
+        </p:spPr>
+        <p:txBody>
+          <a:bodyPr wrap="square" rtlCol="0" anchor="t">
+            <a:spAutoFit/>
+          </a:bodyPr>
+          <a:lstStyle/>
+          <a:p>
+            <a:pPr indent="0" marL="0">
+              <a:buNone/>
+            </a:pPr>
+            <a:r>
+              <a:rPr lang="en-US" sz="1400" dirty="0">
+                <a:solidFill>
+                  <a:srgbClr val="1A1A1A"/>
+                </a:solidFill>
+                <a:latin typeface="Calibri" pitchFamily="34" charset="0"/>
+                <a:ea typeface="Calibri" pitchFamily="34" charset="-122"/>
+                <a:cs typeface="Calibri" pitchFamily="34" charset="-120"/>
+              </a:rPr>
+              <a:t>Take one of the group-work models to a labeled set you care about; screenshot its five most positive and negative words.</a:t>
+            </a:r>
+            <a:endParaRPr lang="en-US" sz="1400" dirty="0"/>
+          </a:p>
+        </p:txBody>
+      </p:sp>
+      <p:sp>
+        <p:nvSpPr>
+          <p:cNvPr id="15" name="Shape 13"/>
+          <p:cNvSpPr/>
+          <p:nvPr/>
+        </p:nvSpPr>
+        <p:spPr>
+          <a:xfrm>
+            <a:off x="640080" y="5513832"/>
+            <a:ext cx="219456" cy="219456"/>
+          </a:xfrm>
+          <a:prstGeom prst="ellipse">
+            <a:avLst/>
+          </a:prstGeom>
+          <a:solidFill>
+            <a:srgbClr val="7A3B2E"/>
+          </a:solidFill>
+          <a:ln/>
+        </p:spPr>
+      </p:sp>
+      <p:sp>
+        <p:nvSpPr>
+          <p:cNvPr id="16" name="Text 14"/>
+          <p:cNvSpPr/>
+          <p:nvPr/>
+        </p:nvSpPr>
+        <p:spPr>
+          <a:xfrm>
+            <a:off x="1051560" y="5440680"/>
+            <a:ext cx="10424160" cy="365760"/>
+          </a:xfrm>
+          <a:prstGeom prst="rect">
+            <a:avLst/>
+          </a:prstGeom>
+          <a:noFill/>
+          <a:ln/>
+        </p:spPr>
+        <p:txBody>
+          <a:bodyPr wrap="square" rtlCol="0" anchor="ctr"/>
+          <a:lstStyle/>
+          <a:p>
+            <a:pPr indent="0" marL="0">
+              <a:buNone/>
+            </a:pPr>
+            <a:r>
+              <a:rPr lang="en-US" sz="1500" b="1" dirty="0">
+                <a:solidFill>
+                  <a:srgbClr val="7A3B2E"/>
+                </a:solidFill>
+                <a:latin typeface="Calibri" pitchFamily="34" charset="0"/>
+                <a:ea typeface="Calibri" pitchFamily="34" charset="-122"/>
+                <a:cs typeface="Calibri" pitchFamily="34" charset="-120"/>
+              </a:rPr>
+              <a:t>Check (AI closed)</a:t>
+            </a:r>
+            <a:endParaRPr lang="en-US" sz="1500" dirty="0"/>
+          </a:p>
+        </p:txBody>
+      </p:sp>
+      <p:sp>
+        <p:nvSpPr>
+          <p:cNvPr id="17" name="Text 15"/>
+          <p:cNvSpPr/>
+          <p:nvPr/>
+        </p:nvSpPr>
+        <p:spPr>
+          <a:xfrm>
+            <a:off x="1051560" y="5824728"/>
+            <a:ext cx="10424160" cy="731520"/>
+          </a:xfrm>
+          <a:prstGeom prst="rect">
+            <a:avLst/>
+          </a:prstGeom>
+          <a:noFill/>
+          <a:ln/>
+        </p:spPr>
+        <p:txBody>
+          <a:bodyPr wrap="square" rtlCol="0" anchor="t">
+            <a:spAutoFit/>
+          </a:bodyPr>
+          <a:lstStyle/>
+          <a:p>
+            <a:pPr indent="0" marL="0">
+              <a:buNone/>
+            </a:pPr>
+            <a:r>
+              <a:rPr lang="en-US" sz="1400" dirty="0">
+                <a:solidFill>
+                  <a:srgbClr val="1A1A1A"/>
+                </a:solidFill>
+                <a:latin typeface="Calibri" pitchFamily="34" charset="0"/>
+                <a:ea typeface="Calibri" pitchFamily="34" charset="-122"/>
+                <a:cs typeface="Calibri" pitchFamily="34" charset="-120"/>
+              </a:rPr>
+              <a:t>Explain it: read your classifier's top weights aloud, and name one input where it would fail and why. (Competencies 4, 5.)</a:t>
+            </a:r>
+            <a:endParaRPr lang="en-US" sz="1400" dirty="0"/>
           </a:p>
         </p:txBody>
       </p:sp>
@@ -3497,6 +3727,548 @@
 <file path=ppt/slides/slide12.xml><?xml version="1.0" encoding="utf-8"?>
 <p:sld xmlns:a="http://schemas.openxmlformats.org/drawingml/2006/main" xmlns:r="http://schemas.openxmlformats.org/officeDocument/2006/relationships" xmlns:p="http://schemas.openxmlformats.org/presentationml/2006/main">
   <p:cSld name="Slide 12">
+    <p:bg>
+      <p:bgPr>
+        <a:solidFill>
+          <a:srgbClr val="FFFFFF"/>
+        </a:solidFill>
+      </p:bgPr>
+    </p:bg>
+    <p:spTree>
+      <p:nvGrpSpPr>
+        <p:cNvPr id="1" name=""/>
+        <p:cNvGrpSpPr/>
+        <p:nvPr/>
+      </p:nvGrpSpPr>
+      <p:grpSpPr>
+        <a:xfrm>
+          <a:off x="0" y="0"/>
+          <a:ext cx="0" cy="0"/>
+          <a:chOff x="0" y="0"/>
+          <a:chExt cx="0" cy="0"/>
+        </a:xfrm>
+      </p:grpSpPr>
+      <p:sp>
+        <p:nvSpPr>
+          <p:cNvPr id="2" name="Text 0"/>
+          <p:cNvSpPr/>
+          <p:nvPr/>
+        </p:nvSpPr>
+        <p:spPr>
+          <a:xfrm>
+            <a:off x="640080" y="640080"/>
+            <a:ext cx="10058400" cy="320040"/>
+          </a:xfrm>
+          <a:prstGeom prst="rect">
+            <a:avLst/>
+          </a:prstGeom>
+          <a:noFill/>
+          <a:ln/>
+        </p:spPr>
+        <p:txBody>
+          <a:bodyPr wrap="square" rtlCol="0" anchor="ctr"/>
+          <a:lstStyle/>
+          <a:p>
+            <a:pPr indent="0" marL="0">
+              <a:buNone/>
+            </a:pPr>
+            <a:r>
+              <a:rPr lang="en-US" sz="1300" b="1" spc="300" kern="0" dirty="0">
+                <a:solidFill>
+                  <a:srgbClr val="7A3B2E"/>
+                </a:solidFill>
+                <a:latin typeface="Calibri" pitchFamily="34" charset="0"/>
+                <a:ea typeface="Calibri" pitchFamily="34" charset="-122"/>
+                <a:cs typeface="Calibri" pitchFamily="34" charset="-120"/>
+              </a:rPr>
+              <a:t>HOW THIS WEEK CONNECTS</a:t>
+            </a:r>
+            <a:endParaRPr lang="en-US" sz="1300" dirty="0"/>
+          </a:p>
+        </p:txBody>
+      </p:sp>
+      <p:sp>
+        <p:nvSpPr>
+          <p:cNvPr id="3" name="Text 1"/>
+          <p:cNvSpPr/>
+          <p:nvPr/>
+        </p:nvSpPr>
+        <p:spPr>
+          <a:xfrm>
+            <a:off x="640080" y="987552"/>
+            <a:ext cx="10058400" cy="640080"/>
+          </a:xfrm>
+          <a:prstGeom prst="rect">
+            <a:avLst/>
+          </a:prstGeom>
+          <a:noFill/>
+          <a:ln/>
+        </p:spPr>
+        <p:txBody>
+          <a:bodyPr wrap="square" rtlCol="0" anchor="ctr"/>
+          <a:lstStyle/>
+          <a:p>
+            <a:pPr indent="0" marL="0">
+              <a:buNone/>
+            </a:pPr>
+            <a:r>
+              <a:rPr lang="en-US" sz="2800" b="1" dirty="0">
+                <a:solidFill>
+                  <a:srgbClr val="1A1A1A"/>
+                </a:solidFill>
+                <a:latin typeface="Cambria" pitchFamily="34" charset="0"/>
+                <a:ea typeface="Cambria" pitchFamily="34" charset="-122"/>
+                <a:cs typeface="Cambria" pitchFamily="34" charset="-120"/>
+              </a:rPr>
+              <a:t>The course's through-lines</a:t>
+            </a:r>
+            <a:endParaRPr lang="en-US" sz="2800" dirty="0"/>
+          </a:p>
+        </p:txBody>
+      </p:sp>
+      <p:sp>
+        <p:nvSpPr>
+          <p:cNvPr id="4" name="Shape 2"/>
+          <p:cNvSpPr/>
+          <p:nvPr/>
+        </p:nvSpPr>
+        <p:spPr>
+          <a:xfrm>
+            <a:off x="640080" y="2057400"/>
+            <a:ext cx="457200" cy="457200"/>
+          </a:xfrm>
+          <a:prstGeom prst="roundRect">
+            <a:avLst>
+              <a:gd name="adj" fmla="val 16000"/>
+            </a:avLst>
+          </a:prstGeom>
+          <a:solidFill>
+            <a:srgbClr val="7A3B2E"/>
+          </a:solidFill>
+          <a:ln/>
+        </p:spPr>
+      </p:sp>
+      <p:sp>
+        <p:nvSpPr>
+          <p:cNvPr id="5" name="Text 3"/>
+          <p:cNvSpPr/>
+          <p:nvPr/>
+        </p:nvSpPr>
+        <p:spPr>
+          <a:xfrm>
+            <a:off x="640080" y="2057400"/>
+            <a:ext cx="457200" cy="457200"/>
+          </a:xfrm>
+          <a:prstGeom prst="rect">
+            <a:avLst/>
+          </a:prstGeom>
+          <a:noFill/>
+          <a:ln/>
+        </p:spPr>
+        <p:txBody>
+          <a:bodyPr wrap="square" rtlCol="0" anchor="ctr"/>
+          <a:lstStyle/>
+          <a:p>
+            <a:pPr algn="ctr" indent="0" marL="0">
+              <a:buNone/>
+            </a:pPr>
+            <a:r>
+              <a:rPr lang="en-US" sz="2000" b="1" dirty="0">
+                <a:solidFill>
+                  <a:srgbClr val="FFFFFF"/>
+                </a:solidFill>
+                <a:latin typeface="Cambria" pitchFamily="34" charset="0"/>
+                <a:ea typeface="Cambria" pitchFamily="34" charset="-122"/>
+                <a:cs typeface="Cambria" pitchFamily="34" charset="-120"/>
+              </a:rPr>
+              <a:t>1</a:t>
+            </a:r>
+            <a:endParaRPr lang="en-US" sz="2000" dirty="0"/>
+          </a:p>
+        </p:txBody>
+      </p:sp>
+      <p:sp>
+        <p:nvSpPr>
+          <p:cNvPr id="6" name="Text 4"/>
+          <p:cNvSpPr/>
+          <p:nvPr/>
+        </p:nvSpPr>
+        <p:spPr>
+          <a:xfrm>
+            <a:off x="1371600" y="2020824"/>
+            <a:ext cx="10332720" cy="411480"/>
+          </a:xfrm>
+          <a:prstGeom prst="rect">
+            <a:avLst/>
+          </a:prstGeom>
+          <a:noFill/>
+          <a:ln/>
+        </p:spPr>
+        <p:txBody>
+          <a:bodyPr wrap="square" rtlCol="0" anchor="ctr"/>
+          <a:lstStyle/>
+          <a:p>
+            <a:pPr indent="0" marL="0">
+              <a:buNone/>
+            </a:pPr>
+            <a:r>
+              <a:rPr lang="en-US" sz="1900" b="1" dirty="0">
+                <a:solidFill>
+                  <a:srgbClr val="7A3B2E"/>
+                </a:solidFill>
+                <a:latin typeface="Cambria" pitchFamily="34" charset="0"/>
+                <a:ea typeface="Cambria" pitchFamily="34" charset="-122"/>
+                <a:cs typeface="Cambria" pitchFamily="34" charset="-120"/>
+              </a:rPr>
+              <a:t>The reader you can see</a:t>
+            </a:r>
+            <a:endParaRPr lang="en-US" sz="1900" dirty="0"/>
+          </a:p>
+        </p:txBody>
+      </p:sp>
+      <p:sp>
+        <p:nvSpPr>
+          <p:cNvPr id="7" name="Text 5"/>
+          <p:cNvSpPr/>
+          <p:nvPr/>
+        </p:nvSpPr>
+        <p:spPr>
+          <a:xfrm>
+            <a:off x="1371600" y="2441448"/>
+            <a:ext cx="10332720" cy="914400"/>
+          </a:xfrm>
+          <a:prstGeom prst="rect">
+            <a:avLst/>
+          </a:prstGeom>
+          <a:noFill/>
+          <a:ln/>
+        </p:spPr>
+        <p:txBody>
+          <a:bodyPr wrap="square" rtlCol="0" anchor="t">
+            <a:spAutoFit/>
+          </a:bodyPr>
+          <a:lstStyle/>
+          <a:p>
+            <a:pPr indent="0" marL="0">
+              <a:lnSpc>
+                <a:spcPct val="112000"/>
+              </a:lnSpc>
+              <a:buNone/>
+            </a:pPr>
+            <a:r>
+              <a:rPr lang="en-US" sz="1450" dirty="0">
+                <a:solidFill>
+                  <a:srgbClr val="1A1A1A"/>
+                </a:solidFill>
+                <a:latin typeface="Calibri" pitchFamily="34" charset="0"/>
+                <a:ea typeface="Calibri" pitchFamily="34" charset="-122"/>
+                <a:cs typeface="Calibri" pitchFamily="34" charset="-120"/>
+              </a:rPr>
+              <a:t>The transparent classifier: read its signed weights and see exactly what it learned. Week 7 introduces the opaque counterpart.</a:t>
+            </a:r>
+            <a:endParaRPr lang="en-US" sz="1450" dirty="0"/>
+          </a:p>
+        </p:txBody>
+      </p:sp>
+      <p:sp>
+        <p:nvSpPr>
+          <p:cNvPr id="8" name="Shape 6"/>
+          <p:cNvSpPr/>
+          <p:nvPr/>
+        </p:nvSpPr>
+        <p:spPr>
+          <a:xfrm>
+            <a:off x="640080" y="3520440"/>
+            <a:ext cx="457200" cy="457200"/>
+          </a:xfrm>
+          <a:prstGeom prst="roundRect">
+            <a:avLst>
+              <a:gd name="adj" fmla="val 16000"/>
+            </a:avLst>
+          </a:prstGeom>
+          <a:solidFill>
+            <a:srgbClr val="3F6F5F"/>
+          </a:solidFill>
+          <a:ln/>
+        </p:spPr>
+      </p:sp>
+      <p:sp>
+        <p:nvSpPr>
+          <p:cNvPr id="9" name="Text 7"/>
+          <p:cNvSpPr/>
+          <p:nvPr/>
+        </p:nvSpPr>
+        <p:spPr>
+          <a:xfrm>
+            <a:off x="640080" y="3520440"/>
+            <a:ext cx="457200" cy="457200"/>
+          </a:xfrm>
+          <a:prstGeom prst="rect">
+            <a:avLst/>
+          </a:prstGeom>
+          <a:noFill/>
+          <a:ln/>
+        </p:spPr>
+        <p:txBody>
+          <a:bodyPr wrap="square" rtlCol="0" anchor="ctr"/>
+          <a:lstStyle/>
+          <a:p>
+            <a:pPr algn="ctr" indent="0" marL="0">
+              <a:buNone/>
+            </a:pPr>
+            <a:r>
+              <a:rPr lang="en-US" sz="2000" b="1" dirty="0">
+                <a:solidFill>
+                  <a:srgbClr val="FFFFFF"/>
+                </a:solidFill>
+                <a:latin typeface="Cambria" pitchFamily="34" charset="0"/>
+                <a:ea typeface="Cambria" pitchFamily="34" charset="-122"/>
+                <a:cs typeface="Cambria" pitchFamily="34" charset="-120"/>
+              </a:rPr>
+              <a:t>2</a:t>
+            </a:r>
+            <a:endParaRPr lang="en-US" sz="2000" dirty="0"/>
+          </a:p>
+        </p:txBody>
+      </p:sp>
+      <p:sp>
+        <p:nvSpPr>
+          <p:cNvPr id="10" name="Text 8"/>
+          <p:cNvSpPr/>
+          <p:nvPr/>
+        </p:nvSpPr>
+        <p:spPr>
+          <a:xfrm>
+            <a:off x="1371600" y="3483864"/>
+            <a:ext cx="10332720" cy="411480"/>
+          </a:xfrm>
+          <a:prstGeom prst="rect">
+            <a:avLst/>
+          </a:prstGeom>
+          <a:noFill/>
+          <a:ln/>
+        </p:spPr>
+        <p:txBody>
+          <a:bodyPr wrap="square" rtlCol="0" anchor="ctr"/>
+          <a:lstStyle/>
+          <a:p>
+            <a:pPr indent="0" marL="0">
+              <a:buNone/>
+            </a:pPr>
+            <a:r>
+              <a:rPr lang="en-US" sz="1900" b="1" dirty="0">
+                <a:solidFill>
+                  <a:srgbClr val="3F6F5F"/>
+                </a:solidFill>
+                <a:latin typeface="Cambria" pitchFamily="34" charset="0"/>
+                <a:ea typeface="Cambria" pitchFamily="34" charset="-122"/>
+                <a:cs typeface="Cambria" pitchFamily="34" charset="-120"/>
+              </a:rPr>
+              <a:t>One model is a result, several are an argument</a:t>
+            </a:r>
+            <a:endParaRPr lang="en-US" sz="1900" dirty="0"/>
+          </a:p>
+        </p:txBody>
+      </p:sp>
+      <p:sp>
+        <p:nvSpPr>
+          <p:cNvPr id="11" name="Text 9"/>
+          <p:cNvSpPr/>
+          <p:nvPr/>
+        </p:nvSpPr>
+        <p:spPr>
+          <a:xfrm>
+            <a:off x="1371600" y="3904488"/>
+            <a:ext cx="10332720" cy="914400"/>
+          </a:xfrm>
+          <a:prstGeom prst="rect">
+            <a:avLst/>
+          </a:prstGeom>
+          <a:noFill/>
+          <a:ln/>
+        </p:spPr>
+        <p:txBody>
+          <a:bodyPr wrap="square" rtlCol="0" anchor="t">
+            <a:spAutoFit/>
+          </a:bodyPr>
+          <a:lstStyle/>
+          <a:p>
+            <a:pPr indent="0" marL="0">
+              <a:lnSpc>
+                <a:spcPct val="112000"/>
+              </a:lnSpc>
+              <a:buNone/>
+            </a:pPr>
+            <a:r>
+              <a:rPr lang="en-US" sz="1450" dirty="0">
+                <a:solidFill>
+                  <a:srgbClr val="1A1A1A"/>
+                </a:solidFill>
+                <a:latin typeface="Calibri" pitchFamily="34" charset="0"/>
+                <a:ea typeface="Calibri" pitchFamily="34" charset="-122"/>
+                <a:cs typeface="Calibri" pitchFamily="34" charset="-120"/>
+              </a:rPr>
+              <a:t>Change one decision at a time and refit. What moves, and what doesn't, is the finding.</a:t>
+            </a:r>
+            <a:endParaRPr lang="en-US" sz="1450" dirty="0"/>
+          </a:p>
+        </p:txBody>
+      </p:sp>
+      <p:sp>
+        <p:nvSpPr>
+          <p:cNvPr id="12" name="Shape 10"/>
+          <p:cNvSpPr/>
+          <p:nvPr/>
+        </p:nvSpPr>
+        <p:spPr>
+          <a:xfrm>
+            <a:off x="640080" y="4983480"/>
+            <a:ext cx="457200" cy="457200"/>
+          </a:xfrm>
+          <a:prstGeom prst="roundRect">
+            <a:avLst>
+              <a:gd name="adj" fmla="val 16000"/>
+            </a:avLst>
+          </a:prstGeom>
+          <a:solidFill>
+            <a:srgbClr val="B9852F"/>
+          </a:solidFill>
+          <a:ln/>
+        </p:spPr>
+      </p:sp>
+      <p:sp>
+        <p:nvSpPr>
+          <p:cNvPr id="13" name="Text 11"/>
+          <p:cNvSpPr/>
+          <p:nvPr/>
+        </p:nvSpPr>
+        <p:spPr>
+          <a:xfrm>
+            <a:off x="640080" y="4983480"/>
+            <a:ext cx="457200" cy="457200"/>
+          </a:xfrm>
+          <a:prstGeom prst="rect">
+            <a:avLst/>
+          </a:prstGeom>
+          <a:noFill/>
+          <a:ln/>
+        </p:spPr>
+        <p:txBody>
+          <a:bodyPr wrap="square" rtlCol="0" anchor="ctr"/>
+          <a:lstStyle/>
+          <a:p>
+            <a:pPr algn="ctr" indent="0" marL="0">
+              <a:buNone/>
+            </a:pPr>
+            <a:r>
+              <a:rPr lang="en-US" sz="2000" b="1" dirty="0">
+                <a:solidFill>
+                  <a:srgbClr val="FFFFFF"/>
+                </a:solidFill>
+                <a:latin typeface="Cambria" pitchFamily="34" charset="0"/>
+                <a:ea typeface="Cambria" pitchFamily="34" charset="-122"/>
+                <a:cs typeface="Cambria" pitchFamily="34" charset="-120"/>
+              </a:rPr>
+              <a:t>3</a:t>
+            </a:r>
+            <a:endParaRPr lang="en-US" sz="2000" dirty="0"/>
+          </a:p>
+        </p:txBody>
+      </p:sp>
+      <p:sp>
+        <p:nvSpPr>
+          <p:cNvPr id="14" name="Text 12"/>
+          <p:cNvSpPr/>
+          <p:nvPr/>
+        </p:nvSpPr>
+        <p:spPr>
+          <a:xfrm>
+            <a:off x="1371600" y="4946904"/>
+            <a:ext cx="10332720" cy="411480"/>
+          </a:xfrm>
+          <a:prstGeom prst="rect">
+            <a:avLst/>
+          </a:prstGeom>
+          <a:noFill/>
+          <a:ln/>
+        </p:spPr>
+        <p:txBody>
+          <a:bodyPr wrap="square" rtlCol="0" anchor="ctr"/>
+          <a:lstStyle/>
+          <a:p>
+            <a:pPr indent="0" marL="0">
+              <a:buNone/>
+            </a:pPr>
+            <a:r>
+              <a:rPr lang="en-US" sz="1900" b="1" dirty="0">
+                <a:solidFill>
+                  <a:srgbClr val="B9852F"/>
+                </a:solidFill>
+                <a:latin typeface="Cambria" pitchFamily="34" charset="0"/>
+                <a:ea typeface="Cambria" pitchFamily="34" charset="-122"/>
+                <a:cs typeface="Cambria" pitchFamily="34" charset="-120"/>
+              </a:rPr>
+              <a:t>Every choice is a choice</a:t>
+            </a:r>
+            <a:endParaRPr lang="en-US" sz="1900" dirty="0"/>
+          </a:p>
+        </p:txBody>
+      </p:sp>
+      <p:sp>
+        <p:nvSpPr>
+          <p:cNvPr id="15" name="Text 13"/>
+          <p:cNvSpPr/>
+          <p:nvPr/>
+        </p:nvSpPr>
+        <p:spPr>
+          <a:xfrm>
+            <a:off x="1371600" y="5367528"/>
+            <a:ext cx="10332720" cy="914400"/>
+          </a:xfrm>
+          <a:prstGeom prst="rect">
+            <a:avLst/>
+          </a:prstGeom>
+          <a:noFill/>
+          <a:ln/>
+        </p:spPr>
+        <p:txBody>
+          <a:bodyPr wrap="square" rtlCol="0" anchor="t">
+            <a:spAutoFit/>
+          </a:bodyPr>
+          <a:lstStyle/>
+          <a:p>
+            <a:pPr indent="0" marL="0">
+              <a:lnSpc>
+                <a:spcPct val="112000"/>
+              </a:lnSpc>
+              <a:buNone/>
+            </a:pPr>
+            <a:r>
+              <a:rPr lang="en-US" sz="1450" dirty="0">
+                <a:solidFill>
+                  <a:srgbClr val="1A1A1A"/>
+                </a:solidFill>
+                <a:latin typeface="Calibri" pitchFamily="34" charset="0"/>
+                <a:ea typeface="Calibri" pitchFamily="34" charset="-122"/>
+                <a:cs typeface="Calibri" pitchFamily="34" charset="-120"/>
+              </a:rPr>
+              <a:t>What counts as a label, which words you hand it, and what you compare the score against decide what it learns.</a:t>
+            </a:r>
+            <a:endParaRPr lang="en-US" sz="1450" dirty="0"/>
+          </a:p>
+        </p:txBody>
+      </p:sp>
+    </p:spTree>
+  </p:cSld>
+  <p:clrMapOvr>
+    <a:masterClrMapping/>
+  </p:clrMapOvr>
+</p:sld>
+</file>
+
+<file path=ppt/slides/slide13.xml><?xml version="1.0" encoding="utf-8"?>
+<p:sld xmlns:a="http://schemas.openxmlformats.org/drawingml/2006/main" xmlns:r="http://schemas.openxmlformats.org/officeDocument/2006/relationships" xmlns:p="http://schemas.openxmlformats.org/presentationml/2006/main">
+  <p:cSld name="Slide 13">
     <p:bg>
       <p:bgPr>
         <a:solidFill>
@@ -4148,7 +4920,7 @@
                 <a:ea typeface="Calibri" pitchFamily="34" charset="-122"/>
                 <a:cs typeface="Calibri" pitchFamily="34" charset="-120"/>
               </a:rPr>
-              <a:t>Ted Underwood's genre prediction (Distant Horizons, 2019): a logistic regression, the exact tool of today's lab, trained to recognize detective fiction and science fiction across a century of novels.</a:t>
+              <a:t>Ted Underwood's genre prediction (Distant Horizons, 2019; "The Life Cycles of Genres," 2016): a logistic regression, the exact tool of today's group work, trained to recognize detective fiction and science fiction across a century of novels.</a:t>
             </a:r>
             <a:endParaRPr lang="en-US" sz="1900" dirty="0"/>
           </a:p>
@@ -4456,7 +5228,7 @@
                 <a:ea typeface="Cambria" pitchFamily="34" charset="-122"/>
                 <a:cs typeface="Cambria" pitchFamily="34" charset="-120"/>
               </a:rPr>
-              <a:t>Underwood's classifier, in detail</a:t>
+              <a:t>Discussion: The Life Cycles of Genres</a:t>
             </a:r>
             <a:endParaRPr lang="en-US" sz="3000" dirty="0"/>
           </a:p>
@@ -4520,7 +5292,7 @@
                 <a:ea typeface="Calibri" pitchFamily="34" charset="-122"/>
                 <a:cs typeface="Calibri" pitchFamily="34" charset="-120"/>
               </a:rPr>
-              <a:t>A logistic regression, the exact tool of today's lab, trained on a century of novels to recognize detective fiction and science fiction.</a:t>
+              <a:t>You read the article. The room argues it, not the instructor. Four questions on the board, thirty-five minutes.</a:t>
             </a:r>
             <a:endParaRPr lang="en-US" sz="1650" dirty="0"/>
           </a:p>
@@ -4584,7 +5356,7 @@
                 <a:ea typeface="Calibri" pitchFamily="34" charset="-122"/>
                 <a:cs typeface="Calibri" pitchFamily="34" charset="-120"/>
               </a:rPr>
-              <a:t>Its most famous error is the lesson: it misreads Pynchon's The Crying of Lot 49, a novel critics call a detective-fiction spoof.</a:t>
+              <a:t>What did Underwood actually count, and who decided which novels were detective fiction?</a:t>
             </a:r>
             <a:endParaRPr lang="en-US" sz="1650" dirty="0"/>
           </a:p>
@@ -4648,7 +5420,7 @@
                 <a:ea typeface="Calibri" pitchFamily="34" charset="-122"/>
                 <a:cs typeface="Calibri" pitchFamily="34" charset="-120"/>
               </a:rPr>
-              <a:t>Genre boundaries are real but fuzzy, and the classifier's mistake is what shows it.</a:t>
+              <a:t>The Pynchon misread (The Crying of Lot 49, a detective-fiction spoof) is the best thing in the paper: genre boundaries are real but fuzzy, and the error is what shows it.</a:t>
             </a:r>
             <a:endParaRPr lang="en-US" sz="1650" dirty="0"/>
           </a:p>
@@ -4712,7 +5484,7 @@
                 <a:ea typeface="Calibri" pitchFamily="34" charset="-122"/>
                 <a:cs typeface="Calibri" pitchFamily="34" charset="-120"/>
               </a:rPr>
-              <a:t>Ask of every classifier, including yours: where does it fail, and what does the failure teach?</a:t>
+              <a:t>Carry this into the second hour: where would YOUR classifier fail, and what would the failure teach?</a:t>
             </a:r>
             <a:endParaRPr lang="en-US" sz="1650" dirty="0"/>
           </a:p>
@@ -4844,7 +5616,7 @@
                 <a:ea typeface="Cambria" pitchFamily="34" charset="-122"/>
                 <a:cs typeface="Cambria" pitchFamily="34" charset="-120"/>
               </a:rPr>
-              <a:t>A classifier is counting with weights</a:t>
+              <a:t>Modelling in practice, built live</a:t>
             </a:r>
             <a:endParaRPr lang="en-US" sz="3000" dirty="0"/>
           </a:p>
@@ -4908,7 +5680,7 @@
                 <a:ea typeface="Calibri" pitchFamily="34" charset="-122"/>
                 <a:cs typeface="Calibri" pitchFamily="34" charset="-120"/>
               </a:rPr>
-              <a:t>Every word casts a vote, for or against. The model adds the votes.</a:t>
+              <a:t>Features, weights, a fit, and a score you would believe. That is the whole object.</a:t>
             </a:r>
             <a:endParaRPr lang="en-US" sz="1650" dirty="0"/>
           </a:p>
@@ -4972,7 +5744,7 @@
                 <a:ea typeface="Calibri" pitchFamily="34" charset="-122"/>
                 <a:cs typeface="Calibri" pitchFamily="34" charset="-120"/>
               </a:rPr>
-              <a:t>Training means learning the weights from labeled examples.</a:t>
+              <a:t>Every word casts a vote, for or against; the model adds the votes and learns the weights from labeled examples.</a:t>
             </a:r>
             <a:endParaRPr lang="en-US" sz="1650" dirty="0"/>
           </a:p>
@@ -5036,7 +5808,7 @@
                 <a:ea typeface="Calibri" pitchFamily="34" charset="-122"/>
                 <a:cs typeface="Calibri" pitchFamily="34" charset="-120"/>
               </a:rPr>
-              <a:t>Read the signed weights: the most positive and most negative words are the model's mind on the table.</a:t>
+              <a:t>Held out or it doesn't count. Score against a baseline that always guesses the bigger pile, or the number means nothing.</a:t>
             </a:r>
             <a:endParaRPr lang="en-US" sz="1650" dirty="0"/>
           </a:p>
@@ -5100,7 +5872,7 @@
                 <a:ea typeface="Calibri" pitchFamily="34" charset="-122"/>
                 <a:cs typeface="Calibri" pitchFamily="34" charset="-120"/>
               </a:rPr>
-              <a:t>Spam filters have worked exactly this way for twenty years.</a:t>
+              <a:t>Read the signed weights: the most positive and most negative words are the model's mind on the table.</a:t>
             </a:r>
             <a:endParaRPr lang="en-US" sz="1650" dirty="0"/>
           </a:p>
@@ -5232,7 +6004,7 @@
                 <a:ea typeface="Cambria" pitchFamily="34" charset="-122"/>
                 <a:cs typeface="Cambria" pitchFamily="34" charset="-120"/>
               </a:rPr>
-              <a:t>The training set is the lesson</a:t>
+              <a:t>What goes wrong in practice</a:t>
             </a:r>
             <a:endParaRPr lang="en-US" sz="3000" dirty="0"/>
           </a:p>
@@ -5296,7 +6068,7 @@
                 <a:ea typeface="Calibri" pitchFamily="34" charset="-122"/>
                 <a:cs typeface="Calibri" pitchFamily="34" charset="-120"/>
               </a:rPr>
-              <a:t>Teachable Machine, live: a cat/dog model trained only on orange cats and brown dogs.</a:t>
+              <a:t>Scoring on the training rows: that measures memory, not reading.</a:t>
             </a:r>
             <a:endParaRPr lang="en-US" sz="1650" dirty="0"/>
           </a:p>
@@ -5360,7 +6132,7 @@
                 <a:ea typeface="Calibri" pitchFamily="34" charset="-122"/>
                 <a:cs typeface="Calibri" pitchFamily="34" charset="-120"/>
               </a:rPr>
-              <a:t>The room predicts what a black cat will do. Then watches it happen.</a:t>
+              <a:t>An imbalanced pair flattering itself, and a leaked giveaway feature you never meant to hand it.</a:t>
             </a:r>
             <a:endParaRPr lang="en-US" sz="1650" dirty="0"/>
           </a:p>
@@ -5424,7 +6196,7 @@
                 <a:ea typeface="Calibri" pitchFamily="34" charset="-122"/>
                 <a:cs typeface="Calibri" pitchFamily="34" charset="-120"/>
               </a:rPr>
-              <a:t>Bias is not a ghost in the machine. It is the training set, and you assembled it.</a:t>
+              <a:t>No 'neither' box: hand it Shakespeare and it answers confidently anyway.</a:t>
             </a:r>
             <a:endParaRPr lang="en-US" sz="1650" dirty="0"/>
           </a:p>
@@ -5488,7 +6260,7 @@
                 <a:ea typeface="Calibri" pitchFamily="34" charset="-122"/>
                 <a:cs typeface="Calibri" pitchFamily="34" charset="-120"/>
               </a:rPr>
-              <a:t>One connection to remember: today's classifier is one neuron; stack many and you have Week 7's model.</a:t>
+              <a:t>Teachable Machine, sixty seconds: orange cats and brown dogs. Bias is not a ghost in the machine, it is the training set, and you assembled it.</a:t>
             </a:r>
             <a:endParaRPr lang="en-US" sz="1650" dirty="0"/>
           </a:p>
@@ -5620,7 +6392,7 @@
                 <a:ea typeface="Cambria" pitchFamily="34" charset="-122"/>
                 <a:cs typeface="Cambria" pitchFamily="34" charset="-120"/>
               </a:rPr>
-              <a:t>The methods menu (before you commit)</a:t>
+              <a:t>Group work: your model, your call</a:t>
             </a:r>
             <a:endParaRPr lang="en-US" sz="3000" dirty="0"/>
           </a:p>
@@ -5655,7 +6427,7 @@
         <p:spPr>
           <a:xfrm>
             <a:off x="1097280" y="2240280"/>
-            <a:ext cx="10607040" cy="1051560"/>
+            <a:ext cx="10607040" cy="1017270"/>
           </a:xfrm>
           <a:prstGeom prst="rect">
             <a:avLst/>
@@ -5684,7 +6456,7 @@
                 <a:ea typeface="Calibri" pitchFamily="34" charset="-122"/>
                 <a:cs typeface="Calibri" pitchFamily="34" charset="-120"/>
               </a:rPr>
-              <a:t>Counting and keyness: differences and trends. Classification: sort and label at scale. Embeddings (W5): a map of meaning. Annotation (W7): the AI reads for you.</a:t>
+              <a:t>Threes, one screen, rotating driver / reader / skeptic. The notebook has stations, not answers.</a:t>
             </a:r>
             <a:endParaRPr lang="en-US" sz="1650" dirty="0"/>
           </a:p>
@@ -5698,7 +6470,7 @@
         </p:nvSpPr>
         <p:spPr>
           <a:xfrm>
-            <a:off x="640080" y="3383280"/>
+            <a:off x="640080" y="3348990"/>
             <a:ext cx="201168" cy="201168"/>
           </a:xfrm>
           <a:prstGeom prst="ellipse">
@@ -5718,8 +6490,8 @@
         </p:nvSpPr>
         <p:spPr>
           <a:xfrm>
-            <a:off x="1097280" y="3291840"/>
-            <a:ext cx="10607040" cy="1051560"/>
+            <a:off x="1097280" y="3257550"/>
+            <a:ext cx="10607040" cy="1017270"/>
           </a:xfrm>
           <a:prstGeom prst="rect">
             <a:avLst/>
@@ -5748,7 +6520,7 @@
                 <a:ea typeface="Calibri" pitchFamily="34" charset="-122"/>
                 <a:cs typeface="Calibri" pitchFamily="34" charset="-120"/>
               </a:rPr>
-              <a:t>Optional add-ons where they fit: character networks, sentiment arcs, CLIP image search, a fine-tuned ModernBERT.</a:t>
+              <a:t>Pick two piles, build features, fit, judge against the baseline, read the weights, break it.</a:t>
             </a:r>
             <a:endParaRPr lang="en-US" sz="1650" dirty="0"/>
           </a:p>
@@ -5762,7 +6534,7 @@
         </p:nvSpPr>
         <p:spPr>
           <a:xfrm>
-            <a:off x="640080" y="4434840"/>
+            <a:off x="640080" y="4366260"/>
             <a:ext cx="201168" cy="201168"/>
           </a:xfrm>
           <a:prstGeom prst="ellipse">
@@ -5782,8 +6554,8 @@
         </p:nvSpPr>
         <p:spPr>
           <a:xfrm>
-            <a:off x="1097280" y="4343400"/>
-            <a:ext cx="10607040" cy="1051560"/>
+            <a:off x="1097280" y="4274820"/>
+            <a:ext cx="10607040" cy="1017270"/>
           </a:xfrm>
           <a:prstGeom prst="rect">
             <a:avLst/>
@@ -5812,7 +6584,71 @@
                 <a:ea typeface="Calibri" pitchFamily="34" charset="-122"/>
                 <a:cs typeface="Calibri" pitchFamily="34" charset="-120"/>
               </a:rPr>
-              <a:t>The corpus-existence rule: bring a screenshot of 50 loadable rows of your data to Week 4. No proof, no pitch.</a:t>
+              <a:t>Then change ONE decision (min_df, tf-idf, bigrams, C, class_weight) and fit again: several models side by side is the point.</a:t>
+            </a:r>
+            <a:endParaRPr lang="en-US" sz="1650" dirty="0"/>
+          </a:p>
+        </p:txBody>
+      </p:sp>
+      <p:sp>
+        <p:nvSpPr>
+          <p:cNvPr id="11" name="Shape 9"/>
+          <p:cNvSpPr/>
+          <p:nvPr/>
+        </p:nvSpPr>
+        <p:spPr>
+          <a:xfrm>
+            <a:off x="640080" y="5383530"/>
+            <a:ext cx="201168" cy="201168"/>
+          </a:xfrm>
+          <a:prstGeom prst="ellipse">
+            <a:avLst/>
+          </a:prstGeom>
+          <a:solidFill>
+            <a:srgbClr val="7A3B2E"/>
+          </a:solidFill>
+          <a:ln/>
+        </p:spPr>
+      </p:sp>
+      <p:sp>
+        <p:nvSpPr>
+          <p:cNvPr id="12" name="Text 10"/>
+          <p:cNvSpPr/>
+          <p:nvPr/>
+        </p:nvSpPr>
+        <p:spPr>
+          <a:xfrm>
+            <a:off x="1097280" y="5292090"/>
+            <a:ext cx="10607040" cy="1017270"/>
+          </a:xfrm>
+          <a:prstGeom prst="rect">
+            <a:avLst/>
+          </a:prstGeom>
+          <a:noFill/>
+          <a:ln/>
+        </p:spPr>
+        <p:txBody>
+          <a:bodyPr wrap="square" rtlCol="0" anchor="t">
+            <a:spAutoFit/>
+          </a:bodyPr>
+          <a:lstStyle/>
+          <a:p>
+            <a:pPr indent="0" marL="0">
+              <a:lnSpc>
+                <a:spcPct val="112000"/>
+              </a:lnSpc>
+              <a:buNone/>
+            </a:pPr>
+            <a:r>
+              <a:rPr lang="en-US" sz="1650" dirty="0">
+                <a:solidFill>
+                  <a:srgbClr val="1A1A1A"/>
+                </a:solidFill>
+                <a:latin typeface="Calibri" pitchFamily="34" charset="0"/>
+                <a:ea typeface="Calibri" pitchFamily="34" charset="-122"/>
+                <a:cs typeface="Calibri" pitchFamily="34" charset="-120"/>
+              </a:rPr>
+              <a:t>Does the accuracy move, and do the top words change more than the accuracy does?</a:t>
             </a:r>
             <a:endParaRPr lang="en-US" sz="1650" dirty="0"/>
           </a:p>
@@ -5852,14 +6688,34 @@
       </p:grpSpPr>
       <p:sp>
         <p:nvSpPr>
-          <p:cNvPr id="2" name="Text 0"/>
-          <p:cNvSpPr/>
-          <p:nvPr/>
-        </p:nvSpPr>
-        <p:spPr>
-          <a:xfrm>
-            <a:off x="640080" y="731520"/>
-            <a:ext cx="10058400" cy="731520"/>
+          <p:cNvPr id="2" name="Shape 0"/>
+          <p:cNvSpPr/>
+          <p:nvPr/>
+        </p:nvSpPr>
+        <p:spPr>
+          <a:xfrm>
+            <a:off x="0" y="0"/>
+            <a:ext cx="164592" cy="6858000"/>
+          </a:xfrm>
+          <a:prstGeom prst="rect">
+            <a:avLst/>
+          </a:prstGeom>
+          <a:solidFill>
+            <a:srgbClr val="3F6F5F"/>
+          </a:solidFill>
+          <a:ln/>
+        </p:spPr>
+      </p:sp>
+      <p:sp>
+        <p:nvSpPr>
+          <p:cNvPr id="3" name="Text 1"/>
+          <p:cNvSpPr/>
+          <p:nvPr/>
+        </p:nvSpPr>
+        <p:spPr>
+          <a:xfrm>
+            <a:off x="640080" y="640080"/>
+            <a:ext cx="10058400" cy="320040"/>
           </a:xfrm>
           <a:prstGeom prst="rect">
             <a:avLst/>
@@ -5869,6 +6725,47 @@
         </p:spPr>
         <p:txBody>
           <a:bodyPr wrap="square" rtlCol="0" anchor="ctr"/>
+          <a:lstStyle/>
+          <a:p>
+            <a:pPr indent="0" marL="0">
+              <a:buNone/>
+            </a:pPr>
+            <a:r>
+              <a:rPr lang="en-US" sz="1200" b="1" spc="300" kern="0" dirty="0">
+                <a:solidFill>
+                  <a:srgbClr val="3F6F5F"/>
+                </a:solidFill>
+                <a:latin typeface="Calibri" pitchFamily="34" charset="0"/>
+                <a:ea typeface="Calibri" pitchFamily="34" charset="-122"/>
+                <a:cs typeface="Calibri" pitchFamily="34" charset="-120"/>
+              </a:rPr>
+              <a:t>WEEK 3 · KEY POINTS</a:t>
+            </a:r>
+            <a:endParaRPr lang="en-US" sz="1200" dirty="0"/>
+          </a:p>
+        </p:txBody>
+      </p:sp>
+      <p:sp>
+        <p:nvSpPr>
+          <p:cNvPr id="4" name="Text 2"/>
+          <p:cNvSpPr/>
+          <p:nvPr/>
+        </p:nvSpPr>
+        <p:spPr>
+          <a:xfrm>
+            <a:off x="640080" y="1005840"/>
+            <a:ext cx="10881360" cy="914400"/>
+          </a:xfrm>
+          <a:prstGeom prst="rect">
+            <a:avLst/>
+          </a:prstGeom>
+          <a:noFill/>
+          <a:ln/>
+        </p:spPr>
+        <p:txBody>
+          <a:bodyPr wrap="square" rtlCol="0" anchor="t">
+            <a:spAutoFit/>
+          </a:bodyPr>
           <a:lstStyle/>
           <a:p>
             <a:pPr indent="0" marL="0">
@@ -5883,7 +6780,7 @@
                 <a:ea typeface="Cambria" pitchFamily="34" charset="-122"/>
                 <a:cs typeface="Cambria" pitchFamily="34" charset="-120"/>
               </a:rPr>
-              <a:t>Three modes today</a:t>
+              <a:t>Report back, then Week 4</a:t>
             </a:r>
             <a:endParaRPr lang="en-US" sz="3000" dirty="0"/>
           </a:p>
@@ -5891,134 +6788,98 @@
       </p:sp>
       <p:sp>
         <p:nvSpPr>
-          <p:cNvPr id="3" name="Text 1"/>
-          <p:cNvSpPr/>
-          <p:nvPr/>
-        </p:nvSpPr>
-        <p:spPr>
-          <a:xfrm>
-            <a:off x="640080" y="1417320"/>
-            <a:ext cx="10058400" cy="365760"/>
-          </a:xfrm>
-          <a:prstGeom prst="rect">
-            <a:avLst/>
-          </a:prstGeom>
-          <a:noFill/>
-          <a:ln/>
-        </p:spPr>
-        <p:txBody>
-          <a:bodyPr wrap="square" rtlCol="0" anchor="ctr"/>
+          <p:cNvPr id="5" name="Shape 3"/>
+          <p:cNvSpPr/>
+          <p:nvPr/>
+        </p:nvSpPr>
+        <p:spPr>
+          <a:xfrm>
+            <a:off x="640080" y="2331720"/>
+            <a:ext cx="201168" cy="201168"/>
+          </a:xfrm>
+          <a:prstGeom prst="ellipse">
+            <a:avLst/>
+          </a:prstGeom>
+          <a:solidFill>
+            <a:srgbClr val="7A3B2E"/>
+          </a:solidFill>
+          <a:ln/>
+        </p:spPr>
+      </p:sp>
+      <p:sp>
+        <p:nvSpPr>
+          <p:cNvPr id="6" name="Text 4"/>
+          <p:cNvSpPr/>
+          <p:nvPr/>
+        </p:nvSpPr>
+        <p:spPr>
+          <a:xfrm>
+            <a:off x="1097280" y="2240280"/>
+            <a:ext cx="10607040" cy="1017270"/>
+          </a:xfrm>
+          <a:prstGeom prst="rect">
+            <a:avLst/>
+          </a:prstGeom>
+          <a:noFill/>
+          <a:ln/>
+        </p:spPr>
+        <p:txBody>
+          <a:bodyPr wrap="square" rtlCol="0" anchor="t">
+            <a:spAutoFit/>
+          </a:bodyPr>
           <a:lstStyle/>
           <a:p>
             <a:pPr indent="0" marL="0">
-              <a:buNone/>
-            </a:pPr>
-            <a:r>
-              <a:rPr lang="en-US" sz="1400" i="1" dirty="0">
-                <a:solidFill>
-                  <a:srgbClr val="6B6B63"/>
+              <a:lnSpc>
+                <a:spcPct val="112000"/>
+              </a:lnSpc>
+              <a:buNone/>
+            </a:pPr>
+            <a:r>
+              <a:rPr lang="en-US" sz="1650" dirty="0">
+                <a:solidFill>
+                  <a:srgbClr val="1A1A1A"/>
                 </a:solidFill>
                 <a:latin typeface="Calibri" pitchFamily="34" charset="0"/>
                 <a:ea typeface="Calibri" pitchFamily="34" charset="-122"/>
                 <a:cs typeface="Calibri" pitchFamily="34" charset="-120"/>
               </a:rPr>
-              <a:t>about a third of the session each</a:t>
-            </a:r>
-            <a:endParaRPr lang="en-US" sz="1400" dirty="0"/>
-          </a:p>
-        </p:txBody>
-      </p:sp>
-      <p:sp>
-        <p:nvSpPr>
-          <p:cNvPr id="4" name="Shape 2"/>
-          <p:cNvSpPr/>
-          <p:nvPr/>
-        </p:nvSpPr>
-        <p:spPr>
-          <a:xfrm>
-            <a:off x="640080" y="2194560"/>
-            <a:ext cx="3383280" cy="3291840"/>
-          </a:xfrm>
-          <a:prstGeom prst="roundRect">
-            <a:avLst>
-              <a:gd name="adj" fmla="val 3333"/>
-            </a:avLst>
-          </a:prstGeom>
-          <a:solidFill>
-            <a:srgbClr val="F4EEE8"/>
-          </a:solidFill>
-          <a:ln/>
-        </p:spPr>
-      </p:sp>
-      <p:sp>
-        <p:nvSpPr>
-          <p:cNvPr id="5" name="Shape 3"/>
-          <p:cNvSpPr/>
-          <p:nvPr/>
-        </p:nvSpPr>
-        <p:spPr>
-          <a:xfrm>
-            <a:off x="1051560" y="2606040"/>
-            <a:ext cx="548640" cy="548640"/>
+              <a:t>Ninety seconds a group: your pair, baseline vs. best, your two word lists, one caveat you would put in writing.</a:t>
+            </a:r>
+            <a:endParaRPr lang="en-US" sz="1650" dirty="0"/>
+          </a:p>
+        </p:txBody>
+      </p:sp>
+      <p:sp>
+        <p:nvSpPr>
+          <p:cNvPr id="7" name="Shape 5"/>
+          <p:cNvSpPr/>
+          <p:nvPr/>
+        </p:nvSpPr>
+        <p:spPr>
+          <a:xfrm>
+            <a:off x="640080" y="3348990"/>
+            <a:ext cx="201168" cy="201168"/>
           </a:xfrm>
           <a:prstGeom prst="ellipse">
             <a:avLst/>
           </a:prstGeom>
           <a:solidFill>
-            <a:srgbClr val="7A3B2E"/>
-          </a:solidFill>
-          <a:ln/>
-        </p:spPr>
-      </p:sp>
-      <p:sp>
-        <p:nvSpPr>
-          <p:cNvPr id="6" name="Text 4"/>
-          <p:cNvSpPr/>
-          <p:nvPr/>
-        </p:nvSpPr>
-        <p:spPr>
-          <a:xfrm>
-            <a:off x="1005840" y="3383280"/>
-            <a:ext cx="2651760" cy="548640"/>
-          </a:xfrm>
-          <a:prstGeom prst="rect">
-            <a:avLst/>
-          </a:prstGeom>
-          <a:noFill/>
-          <a:ln/>
-        </p:spPr>
-        <p:txBody>
-          <a:bodyPr wrap="square" rtlCol="0" anchor="ctr"/>
-          <a:lstStyle/>
-          <a:p>
-            <a:pPr indent="0" marL="0">
-              <a:buNone/>
-            </a:pPr>
-            <a:r>
-              <a:rPr lang="en-US" sz="2100" b="1" dirty="0">
-                <a:solidFill>
-                  <a:srgbClr val="1A1A1A"/>
-                </a:solidFill>
-                <a:latin typeface="Cambria" pitchFamily="34" charset="0"/>
-                <a:ea typeface="Cambria" pitchFamily="34" charset="-122"/>
-                <a:cs typeface="Cambria" pitchFamily="34" charset="-120"/>
-              </a:rPr>
-              <a:t>Lecture / demo</a:t>
-            </a:r>
-            <a:endParaRPr lang="en-US" sz="2100" dirty="0"/>
-          </a:p>
-        </p:txBody>
-      </p:sp>
-      <p:sp>
-        <p:nvSpPr>
-          <p:cNvPr id="7" name="Text 5"/>
-          <p:cNvSpPr/>
-          <p:nvPr/>
-        </p:nvSpPr>
-        <p:spPr>
-          <a:xfrm>
-            <a:off x="1005840" y="3977640"/>
-            <a:ext cx="2651760" cy="1371600"/>
+            <a:srgbClr val="3F6F5F"/>
+          </a:solidFill>
+          <a:ln/>
+        </p:spPr>
+      </p:sp>
+      <p:sp>
+        <p:nvSpPr>
+          <p:cNvPr id="8" name="Text 6"/>
+          <p:cNvSpPr/>
+          <p:nvPr/>
+        </p:nvSpPr>
+        <p:spPr>
+          <a:xfrm>
+            <a:off x="1097280" y="3257550"/>
+            <a:ext cx="10607040" cy="1017270"/>
           </a:xfrm>
           <a:prstGeom prst="rect">
             <a:avLst/>
@@ -6034,12 +6895,12 @@
           <a:p>
             <a:pPr indent="0" marL="0">
               <a:lnSpc>
-                <a:spcPct val="115000"/>
+                <a:spcPct val="112000"/>
               </a:lnSpc>
               <a:buNone/>
             </a:pPr>
             <a:r>
-              <a:rPr lang="en-US" sz="1500" dirty="0">
+              <a:rPr lang="en-US" sz="1650" dirty="0">
                 <a:solidFill>
                   <a:srgbClr val="1A1A1A"/>
                 </a:solidFill>
@@ -6047,33 +6908,11 @@
                 <a:ea typeface="Calibri" pitchFamily="34" charset="-122"/>
                 <a:cs typeface="Calibri" pitchFamily="34" charset="-120"/>
               </a:rPr>
-              <a:t>Classification. Train a reader and read what it learned</a:t>
-            </a:r>
-            <a:endParaRPr lang="en-US" sz="1500" dirty="0"/>
-          </a:p>
-        </p:txBody>
-      </p:sp>
-      <p:sp>
-        <p:nvSpPr>
-          <p:cNvPr id="8" name="Shape 6"/>
-          <p:cNvSpPr/>
-          <p:nvPr/>
-        </p:nvSpPr>
-        <p:spPr>
-          <a:xfrm>
-            <a:off x="4526280" y="2194560"/>
-            <a:ext cx="3383280" cy="3291840"/>
-          </a:xfrm>
-          <a:prstGeom prst="roundRect">
-            <a:avLst>
-              <a:gd name="adj" fmla="val 3333"/>
-            </a:avLst>
-          </a:prstGeom>
-          <a:solidFill>
-            <a:srgbClr val="F4EEE8"/>
-          </a:solidFill>
-          <a:ln/>
-        </p:spPr>
+              <a:t>Sort your top words into topic, register, and community habit. That sort is the finding; the accuracy is not.</a:t>
+            </a:r>
+            <a:endParaRPr lang="en-US" sz="1650" dirty="0"/>
+          </a:p>
+        </p:txBody>
       </p:sp>
       <p:sp>
         <p:nvSpPr>
@@ -6083,14 +6922,14 @@
         </p:nvSpPr>
         <p:spPr>
           <a:xfrm>
-            <a:off x="4937760" y="2606040"/>
-            <a:ext cx="548640" cy="548640"/>
+            <a:off x="640080" y="4366260"/>
+            <a:ext cx="201168" cy="201168"/>
           </a:xfrm>
           <a:prstGeom prst="ellipse">
             <a:avLst/>
           </a:prstGeom>
           <a:solidFill>
-            <a:srgbClr val="3F6F5F"/>
+            <a:srgbClr val="B9852F"/>
           </a:solidFill>
           <a:ln/>
         </p:spPr>
@@ -6103,47 +6942,8 @@
         </p:nvSpPr>
         <p:spPr>
           <a:xfrm>
-            <a:off x="4892040" y="3383280"/>
-            <a:ext cx="2651760" cy="548640"/>
-          </a:xfrm>
-          <a:prstGeom prst="rect">
-            <a:avLst/>
-          </a:prstGeom>
-          <a:noFill/>
-          <a:ln/>
-        </p:spPr>
-        <p:txBody>
-          <a:bodyPr wrap="square" rtlCol="0" anchor="ctr"/>
-          <a:lstStyle/>
-          <a:p>
-            <a:pPr indent="0" marL="0">
-              <a:buNone/>
-            </a:pPr>
-            <a:r>
-              <a:rPr lang="en-US" sz="2100" b="1" dirty="0">
-                <a:solidFill>
-                  <a:srgbClr val="1A1A1A"/>
-                </a:solidFill>
-                <a:latin typeface="Cambria" pitchFamily="34" charset="0"/>
-                <a:ea typeface="Cambria" pitchFamily="34" charset="-122"/>
-                <a:cs typeface="Cambria" pitchFamily="34" charset="-120"/>
-              </a:rPr>
-              <a:t>Workshop</a:t>
-            </a:r>
-            <a:endParaRPr lang="en-US" sz="2100" dirty="0"/>
-          </a:p>
-        </p:txBody>
-      </p:sp>
-      <p:sp>
-        <p:nvSpPr>
-          <p:cNvPr id="11" name="Text 9"/>
-          <p:cNvSpPr/>
-          <p:nvPr/>
-        </p:nvSpPr>
-        <p:spPr>
-          <a:xfrm>
-            <a:off x="4892040" y="3977640"/>
-            <a:ext cx="2651760" cy="1371600"/>
+            <a:off x="1097280" y="4274820"/>
+            <a:ext cx="10607040" cy="1017270"/>
           </a:xfrm>
           <a:prstGeom prst="rect">
             <a:avLst/>
@@ -6159,12 +6959,12 @@
           <a:p>
             <a:pPr indent="0" marL="0">
               <a:lnSpc>
-                <a:spcPct val="115000"/>
+                <a:spcPct val="112000"/>
               </a:lnSpc>
               <a:buNone/>
             </a:pPr>
             <a:r>
-              <a:rPr lang="en-US" sz="1500" dirty="0">
+              <a:rPr lang="en-US" sz="1650" dirty="0">
                 <a:solidFill>
                   <a:srgbClr val="1A1A1A"/>
                 </a:solidFill>
@@ -6172,103 +6972,42 @@
                 <a:ea typeface="Calibri" pitchFamily="34" charset="-122"/>
                 <a:cs typeface="Calibri" pitchFamily="34" charset="-120"/>
               </a:rPr>
-              <a:t>Build hands-on on your own data.</a:t>
-            </a:r>
-            <a:endParaRPr lang="en-US" sz="1500" dirty="0"/>
-          </a:p>
-        </p:txBody>
-      </p:sp>
-      <p:sp>
-        <p:nvSpPr>
-          <p:cNvPr id="12" name="Shape 10"/>
-          <p:cNvSpPr/>
-          <p:nvPr/>
-        </p:nvSpPr>
-        <p:spPr>
-          <a:xfrm>
-            <a:off x="8412480" y="2194560"/>
-            <a:ext cx="3383280" cy="3291840"/>
-          </a:xfrm>
-          <a:prstGeom prst="roundRect">
-            <a:avLst>
-              <a:gd name="adj" fmla="val 3333"/>
-            </a:avLst>
-          </a:prstGeom>
-          <a:solidFill>
-            <a:srgbClr val="F4EEE8"/>
-          </a:solidFill>
-          <a:ln/>
-        </p:spPr>
-      </p:sp>
-      <p:sp>
-        <p:nvSpPr>
-          <p:cNvPr id="13" name="Shape 11"/>
-          <p:cNvSpPr/>
-          <p:nvPr/>
-        </p:nvSpPr>
-        <p:spPr>
-          <a:xfrm>
-            <a:off x="8823960" y="2606040"/>
-            <a:ext cx="548640" cy="548640"/>
+              <a:t>The methods menu in one slide: counting, classification, embeddings (W5), annotation (W7), plus optional add-ons.</a:t>
+            </a:r>
+            <a:endParaRPr lang="en-US" sz="1650" dirty="0"/>
+          </a:p>
+        </p:txBody>
+      </p:sp>
+      <p:sp>
+        <p:nvSpPr>
+          <p:cNvPr id="11" name="Shape 9"/>
+          <p:cNvSpPr/>
+          <p:nvPr/>
+        </p:nvSpPr>
+        <p:spPr>
+          <a:xfrm>
+            <a:off x="640080" y="5383530"/>
+            <a:ext cx="201168" cy="201168"/>
           </a:xfrm>
           <a:prstGeom prst="ellipse">
             <a:avLst/>
           </a:prstGeom>
           <a:solidFill>
-            <a:srgbClr val="B9852F"/>
-          </a:solidFill>
-          <a:ln/>
-        </p:spPr>
-      </p:sp>
-      <p:sp>
-        <p:nvSpPr>
-          <p:cNvPr id="14" name="Text 12"/>
-          <p:cNvSpPr/>
-          <p:nvPr/>
-        </p:nvSpPr>
-        <p:spPr>
-          <a:xfrm>
-            <a:off x="8778240" y="3383280"/>
-            <a:ext cx="2651760" cy="548640"/>
-          </a:xfrm>
-          <a:prstGeom prst="rect">
-            <a:avLst/>
-          </a:prstGeom>
-          <a:noFill/>
-          <a:ln/>
-        </p:spPr>
-        <p:txBody>
-          <a:bodyPr wrap="square" rtlCol="0" anchor="ctr"/>
-          <a:lstStyle/>
-          <a:p>
-            <a:pPr indent="0" marL="0">
-              <a:buNone/>
-            </a:pPr>
-            <a:r>
-              <a:rPr lang="en-US" sz="2100" b="1" dirty="0">
-                <a:solidFill>
-                  <a:srgbClr val="1A1A1A"/>
-                </a:solidFill>
-                <a:latin typeface="Cambria" pitchFamily="34" charset="0"/>
-                <a:ea typeface="Cambria" pitchFamily="34" charset="-122"/>
-                <a:cs typeface="Cambria" pitchFamily="34" charset="-120"/>
-              </a:rPr>
-              <a:t>Discussion</a:t>
-            </a:r>
-            <a:endParaRPr lang="en-US" sz="2100" dirty="0"/>
-          </a:p>
-        </p:txBody>
-      </p:sp>
-      <p:sp>
-        <p:nvSpPr>
-          <p:cNvPr id="15" name="Text 13"/>
-          <p:cNvSpPr/>
-          <p:nvPr/>
-        </p:nvSpPr>
-        <p:spPr>
-          <a:xfrm>
-            <a:off x="8778240" y="3977640"/>
-            <a:ext cx="2651760" cy="1371600"/>
+            <a:srgbClr val="7A3B2E"/>
+          </a:solidFill>
+          <a:ln/>
+        </p:spPr>
+      </p:sp>
+      <p:sp>
+        <p:nvSpPr>
+          <p:cNvPr id="12" name="Text 10"/>
+          <p:cNvSpPr/>
+          <p:nvPr/>
+        </p:nvSpPr>
+        <p:spPr>
+          <a:xfrm>
+            <a:off x="1097280" y="5292090"/>
+            <a:ext cx="10607040" cy="1017270"/>
           </a:xfrm>
           <a:prstGeom prst="rect">
             <a:avLst/>
@@ -6284,12 +7023,12 @@
           <a:p>
             <a:pPr indent="0" marL="0">
               <a:lnSpc>
-                <a:spcPct val="115000"/>
+                <a:spcPct val="112000"/>
               </a:lnSpc>
               <a:buNone/>
             </a:pPr>
             <a:r>
-              <a:rPr lang="en-US" sz="1500" dirty="0">
+              <a:rPr lang="en-US" sz="1650" dirty="0">
                 <a:solidFill>
                   <a:srgbClr val="1A1A1A"/>
                 </a:solidFill>
@@ -6297,9 +7036,9 @@
                 <a:ea typeface="Calibri" pitchFamily="34" charset="-122"/>
                 <a:cs typeface="Calibri" pitchFamily="34" charset="-120"/>
               </a:rPr>
-              <a:t>Interrogate the study, debate it, or critique each other's work.</a:t>
-            </a:r>
-            <a:endParaRPr lang="en-US" sz="1500" dirty="0"/>
+              <a:t>The corpus-existence rule: bring a screenshot of 50 loadable rows of your data to Week 4. No proof, no pitch.</a:t>
+            </a:r>
+            <a:endParaRPr lang="en-US" sz="1650" dirty="0"/>
           </a:p>
         </p:txBody>
       </p:sp>
@@ -6343,7 +7082,7 @@
         </p:nvSpPr>
         <p:spPr>
           <a:xfrm>
-            <a:off x="640080" y="640080"/>
+            <a:off x="640080" y="731520"/>
             <a:ext cx="10058400" cy="731520"/>
           </a:xfrm>
           <a:prstGeom prst="rect">
@@ -6368,7 +7107,7 @@
                 <a:ea typeface="Cambria" pitchFamily="34" charset="-122"/>
                 <a:cs typeface="Cambria" pitchFamily="34" charset="-120"/>
               </a:rPr>
-              <a:t>The session</a:t>
+              <a:t>Three modes today</a:t>
             </a:r>
             <a:endParaRPr lang="en-US" sz="3000" dirty="0"/>
           </a:p>
@@ -6376,36 +7115,14 @@
       </p:sp>
       <p:sp>
         <p:nvSpPr>
-          <p:cNvPr id="3" name="Shape 1"/>
-          <p:cNvSpPr/>
-          <p:nvPr/>
-        </p:nvSpPr>
-        <p:spPr>
-          <a:xfrm>
-            <a:off x="640080" y="1572768"/>
-            <a:ext cx="868680" cy="388112"/>
-          </a:xfrm>
-          <a:prstGeom prst="roundRect">
-            <a:avLst>
-              <a:gd name="adj" fmla="val 14136"/>
-            </a:avLst>
-          </a:prstGeom>
-          <a:solidFill>
-            <a:srgbClr val="7A3B2E"/>
-          </a:solidFill>
-          <a:ln/>
-        </p:spPr>
-      </p:sp>
-      <p:sp>
-        <p:nvSpPr>
-          <p:cNvPr id="4" name="Text 2"/>
-          <p:cNvSpPr/>
-          <p:nvPr/>
-        </p:nvSpPr>
-        <p:spPr>
-          <a:xfrm>
-            <a:off x="640080" y="1572768"/>
-            <a:ext cx="868680" cy="388112"/>
+          <p:cNvPr id="3" name="Text 1"/>
+          <p:cNvSpPr/>
+          <p:nvPr/>
+        </p:nvSpPr>
+        <p:spPr>
+          <a:xfrm>
+            <a:off x="640080" y="1417320"/>
+            <a:ext cx="10058400" cy="365760"/>
           </a:xfrm>
           <a:prstGeom prst="rect">
             <a:avLst/>
@@ -6417,52 +7134,136 @@
           <a:bodyPr wrap="square" rtlCol="0" anchor="ctr"/>
           <a:lstStyle/>
           <a:p>
-            <a:pPr algn="ctr" indent="0" marL="0">
-              <a:buNone/>
-            </a:pPr>
-            <a:r>
-              <a:rPr lang="en-US" sz="1100" b="1" dirty="0">
-                <a:solidFill>
-                  <a:srgbClr val="FFFFFF"/>
+            <a:pPr indent="0" marL="0">
+              <a:buNone/>
+            </a:pPr>
+            <a:r>
+              <a:rPr lang="en-US" sz="1400" i="1" dirty="0">
+                <a:solidFill>
+                  <a:srgbClr val="6B6B63"/>
                 </a:solidFill>
                 <a:latin typeface="Calibri" pitchFamily="34" charset="0"/>
                 <a:ea typeface="Calibri" pitchFamily="34" charset="-122"/>
                 <a:cs typeface="Calibri" pitchFamily="34" charset="-120"/>
               </a:rPr>
-              <a:t>0:00</a:t>
-            </a:r>
-            <a:endParaRPr lang="en-US" sz="1100" dirty="0"/>
-          </a:p>
-        </p:txBody>
-      </p:sp>
-      <p:sp>
-        <p:nvSpPr>
-          <p:cNvPr id="5" name="Text 3"/>
-          <p:cNvSpPr/>
-          <p:nvPr/>
-        </p:nvSpPr>
-        <p:spPr>
-          <a:xfrm>
-            <a:off x="1691640" y="1554480"/>
-            <a:ext cx="9646920" cy="497840"/>
-          </a:xfrm>
-          <a:prstGeom prst="rect">
-            <a:avLst/>
-          </a:prstGeom>
-          <a:noFill/>
-          <a:ln/>
-        </p:spPr>
-        <p:txBody>
-          <a:bodyPr wrap="square" rtlCol="0" anchor="ctr">
+              <a:t>about a third of the session each</a:t>
+            </a:r>
+            <a:endParaRPr lang="en-US" sz="1400" dirty="0"/>
+          </a:p>
+        </p:txBody>
+      </p:sp>
+      <p:sp>
+        <p:nvSpPr>
+          <p:cNvPr id="4" name="Shape 2"/>
+          <p:cNvSpPr/>
+          <p:nvPr/>
+        </p:nvSpPr>
+        <p:spPr>
+          <a:xfrm>
+            <a:off x="640080" y="2194560"/>
+            <a:ext cx="3383280" cy="3291840"/>
+          </a:xfrm>
+          <a:prstGeom prst="roundRect">
+            <a:avLst>
+              <a:gd name="adj" fmla="val 3333"/>
+            </a:avLst>
+          </a:prstGeom>
+          <a:solidFill>
+            <a:srgbClr val="F4EEE8"/>
+          </a:solidFill>
+          <a:ln/>
+        </p:spPr>
+      </p:sp>
+      <p:sp>
+        <p:nvSpPr>
+          <p:cNvPr id="5" name="Shape 3"/>
+          <p:cNvSpPr/>
+          <p:nvPr/>
+        </p:nvSpPr>
+        <p:spPr>
+          <a:xfrm>
+            <a:off x="1051560" y="2606040"/>
+            <a:ext cx="548640" cy="548640"/>
+          </a:xfrm>
+          <a:prstGeom prst="ellipse">
+            <a:avLst/>
+          </a:prstGeom>
+          <a:solidFill>
+            <a:srgbClr val="7A3B2E"/>
+          </a:solidFill>
+          <a:ln/>
+        </p:spPr>
+      </p:sp>
+      <p:sp>
+        <p:nvSpPr>
+          <p:cNvPr id="6" name="Text 4"/>
+          <p:cNvSpPr/>
+          <p:nvPr/>
+        </p:nvSpPr>
+        <p:spPr>
+          <a:xfrm>
+            <a:off x="1005840" y="3383280"/>
+            <a:ext cx="2651760" cy="548640"/>
+          </a:xfrm>
+          <a:prstGeom prst="rect">
+            <a:avLst/>
+          </a:prstGeom>
+          <a:noFill/>
+          <a:ln/>
+        </p:spPr>
+        <p:txBody>
+          <a:bodyPr wrap="square" rtlCol="0" anchor="ctr"/>
+          <a:lstStyle/>
+          <a:p>
+            <a:pPr indent="0" marL="0">
+              <a:buNone/>
+            </a:pPr>
+            <a:r>
+              <a:rPr lang="en-US" sz="2100" b="1" dirty="0">
+                <a:solidFill>
+                  <a:srgbClr val="1A1A1A"/>
+                </a:solidFill>
+                <a:latin typeface="Cambria" pitchFamily="34" charset="0"/>
+                <a:ea typeface="Cambria" pitchFamily="34" charset="-122"/>
+                <a:cs typeface="Cambria" pitchFamily="34" charset="-120"/>
+              </a:rPr>
+              <a:t>Lecture / demo</a:t>
+            </a:r>
+            <a:endParaRPr lang="en-US" sz="2100" dirty="0"/>
+          </a:p>
+        </p:txBody>
+      </p:sp>
+      <p:sp>
+        <p:nvSpPr>
+          <p:cNvPr id="7" name="Text 5"/>
+          <p:cNvSpPr/>
+          <p:nvPr/>
+        </p:nvSpPr>
+        <p:spPr>
+          <a:xfrm>
+            <a:off x="1005840" y="3977640"/>
+            <a:ext cx="2651760" cy="1371600"/>
+          </a:xfrm>
+          <a:prstGeom prst="rect">
+            <a:avLst/>
+          </a:prstGeom>
+          <a:noFill/>
+          <a:ln/>
+        </p:spPr>
+        <p:txBody>
+          <a:bodyPr wrap="square" rtlCol="0" anchor="t">
             <a:spAutoFit/>
           </a:bodyPr>
           <a:lstStyle/>
           <a:p>
             <a:pPr indent="0" marL="0">
-              <a:buNone/>
-            </a:pPr>
-            <a:r>
-              <a:rPr lang="en-US" sz="1100" dirty="0">
+              <a:lnSpc>
+                <a:spcPct val="115000"/>
+              </a:lnSpc>
+              <a:buNone/>
+            </a:pPr>
+            <a:r>
+              <a:rPr lang="en-US" sz="1500" dirty="0">
                 <a:solidFill>
                   <a:srgbClr val="1A1A1A"/>
                 </a:solidFill>
@@ -6470,44 +7271,64 @@
                 <a:ea typeface="Calibri" pitchFamily="34" charset="-122"/>
                 <a:cs typeface="Calibri" pitchFamily="34" charset="-120"/>
               </a:rPr>
-              <a:t>Warm-up + Look at This: Underwood's genre prediction.</a:t>
-            </a:r>
-            <a:endParaRPr lang="en-US" sz="1100" dirty="0"/>
-          </a:p>
-        </p:txBody>
-      </p:sp>
-      <p:sp>
-        <p:nvSpPr>
-          <p:cNvPr id="6" name="Shape 4"/>
-          <p:cNvSpPr/>
-          <p:nvPr/>
-        </p:nvSpPr>
-        <p:spPr>
-          <a:xfrm>
-            <a:off x="640080" y="2070608"/>
-            <a:ext cx="868680" cy="388112"/>
+              <a:t>Modelling in practice. Fit a logistic regression, read it, break it</a:t>
+            </a:r>
+            <a:endParaRPr lang="en-US" sz="1500" dirty="0"/>
+          </a:p>
+        </p:txBody>
+      </p:sp>
+      <p:sp>
+        <p:nvSpPr>
+          <p:cNvPr id="8" name="Shape 6"/>
+          <p:cNvSpPr/>
+          <p:nvPr/>
+        </p:nvSpPr>
+        <p:spPr>
+          <a:xfrm>
+            <a:off x="4526280" y="2194560"/>
+            <a:ext cx="3383280" cy="3291840"/>
           </a:xfrm>
           <a:prstGeom prst="roundRect">
             <a:avLst>
-              <a:gd name="adj" fmla="val 14136"/>
+              <a:gd name="adj" fmla="val 3333"/>
             </a:avLst>
           </a:prstGeom>
           <a:solidFill>
-            <a:srgbClr val="7A3B2E"/>
-          </a:solidFill>
-          <a:ln/>
-        </p:spPr>
-      </p:sp>
-      <p:sp>
-        <p:nvSpPr>
-          <p:cNvPr id="7" name="Text 5"/>
-          <p:cNvSpPr/>
-          <p:nvPr/>
-        </p:nvSpPr>
-        <p:spPr>
-          <a:xfrm>
-            <a:off x="640080" y="2070608"/>
-            <a:ext cx="868680" cy="388112"/>
+            <a:srgbClr val="F4EEE8"/>
+          </a:solidFill>
+          <a:ln/>
+        </p:spPr>
+      </p:sp>
+      <p:sp>
+        <p:nvSpPr>
+          <p:cNvPr id="9" name="Shape 7"/>
+          <p:cNvSpPr/>
+          <p:nvPr/>
+        </p:nvSpPr>
+        <p:spPr>
+          <a:xfrm>
+            <a:off x="4937760" y="2606040"/>
+            <a:ext cx="548640" cy="548640"/>
+          </a:xfrm>
+          <a:prstGeom prst="ellipse">
+            <a:avLst/>
+          </a:prstGeom>
+          <a:solidFill>
+            <a:srgbClr val="3F6F5F"/>
+          </a:solidFill>
+          <a:ln/>
+        </p:spPr>
+      </p:sp>
+      <p:sp>
+        <p:nvSpPr>
+          <p:cNvPr id="10" name="Text 8"/>
+          <p:cNvSpPr/>
+          <p:nvPr/>
+        </p:nvSpPr>
+        <p:spPr>
+          <a:xfrm>
+            <a:off x="4892040" y="3383280"/>
+            <a:ext cx="2651760" cy="548640"/>
           </a:xfrm>
           <a:prstGeom prst="rect">
             <a:avLst/>
@@ -6519,52 +7340,180 @@
           <a:bodyPr wrap="square" rtlCol="0" anchor="ctr"/>
           <a:lstStyle/>
           <a:p>
-            <a:pPr algn="ctr" indent="0" marL="0">
-              <a:buNone/>
-            </a:pPr>
-            <a:r>
-              <a:rPr lang="en-US" sz="1100" b="1" dirty="0">
-                <a:solidFill>
-                  <a:srgbClr val="FFFFFF"/>
+            <a:pPr indent="0" marL="0">
+              <a:buNone/>
+            </a:pPr>
+            <a:r>
+              <a:rPr lang="en-US" sz="2100" b="1" dirty="0">
+                <a:solidFill>
+                  <a:srgbClr val="1A1A1A"/>
+                </a:solidFill>
+                <a:latin typeface="Cambria" pitchFamily="34" charset="0"/>
+                <a:ea typeface="Cambria" pitchFamily="34" charset="-122"/>
+                <a:cs typeface="Cambria" pitchFamily="34" charset="-120"/>
+              </a:rPr>
+              <a:t>Workshop</a:t>
+            </a:r>
+            <a:endParaRPr lang="en-US" sz="2100" dirty="0"/>
+          </a:p>
+        </p:txBody>
+      </p:sp>
+      <p:sp>
+        <p:nvSpPr>
+          <p:cNvPr id="11" name="Text 9"/>
+          <p:cNvSpPr/>
+          <p:nvPr/>
+        </p:nvSpPr>
+        <p:spPr>
+          <a:xfrm>
+            <a:off x="4892040" y="3977640"/>
+            <a:ext cx="2651760" cy="1371600"/>
+          </a:xfrm>
+          <a:prstGeom prst="rect">
+            <a:avLst/>
+          </a:prstGeom>
+          <a:noFill/>
+          <a:ln/>
+        </p:spPr>
+        <p:txBody>
+          <a:bodyPr wrap="square" rtlCol="0" anchor="t">
+            <a:spAutoFit/>
+          </a:bodyPr>
+          <a:lstStyle/>
+          <a:p>
+            <a:pPr indent="0" marL="0">
+              <a:lnSpc>
+                <a:spcPct val="115000"/>
+              </a:lnSpc>
+              <a:buNone/>
+            </a:pPr>
+            <a:r>
+              <a:rPr lang="en-US" sz="1500" dirty="0">
+                <a:solidFill>
+                  <a:srgbClr val="1A1A1A"/>
                 </a:solidFill>
                 <a:latin typeface="Calibri" pitchFamily="34" charset="0"/>
                 <a:ea typeface="Calibri" pitchFamily="34" charset="-122"/>
                 <a:cs typeface="Calibri" pitchFamily="34" charset="-120"/>
               </a:rPr>
-              <a:t>0:10</a:t>
-            </a:r>
-            <a:endParaRPr lang="en-US" sz="1100" dirty="0"/>
-          </a:p>
-        </p:txBody>
-      </p:sp>
-      <p:sp>
-        <p:nvSpPr>
-          <p:cNvPr id="8" name="Text 6"/>
-          <p:cNvSpPr/>
-          <p:nvPr/>
-        </p:nvSpPr>
-        <p:spPr>
-          <a:xfrm>
-            <a:off x="1691640" y="2052320"/>
-            <a:ext cx="9646920" cy="497840"/>
-          </a:xfrm>
-          <a:prstGeom prst="rect">
-            <a:avLst/>
-          </a:prstGeom>
-          <a:noFill/>
-          <a:ln/>
-        </p:spPr>
-        <p:txBody>
-          <a:bodyPr wrap="square" rtlCol="0" anchor="ctr">
+              <a:t>Build hands-on on your own data.</a:t>
+            </a:r>
+            <a:endParaRPr lang="en-US" sz="1500" dirty="0"/>
+          </a:p>
+        </p:txBody>
+      </p:sp>
+      <p:sp>
+        <p:nvSpPr>
+          <p:cNvPr id="12" name="Shape 10"/>
+          <p:cNvSpPr/>
+          <p:nvPr/>
+        </p:nvSpPr>
+        <p:spPr>
+          <a:xfrm>
+            <a:off x="8412480" y="2194560"/>
+            <a:ext cx="3383280" cy="3291840"/>
+          </a:xfrm>
+          <a:prstGeom prst="roundRect">
+            <a:avLst>
+              <a:gd name="adj" fmla="val 3333"/>
+            </a:avLst>
+          </a:prstGeom>
+          <a:solidFill>
+            <a:srgbClr val="F4EEE8"/>
+          </a:solidFill>
+          <a:ln/>
+        </p:spPr>
+      </p:sp>
+      <p:sp>
+        <p:nvSpPr>
+          <p:cNvPr id="13" name="Shape 11"/>
+          <p:cNvSpPr/>
+          <p:nvPr/>
+        </p:nvSpPr>
+        <p:spPr>
+          <a:xfrm>
+            <a:off x="8823960" y="2606040"/>
+            <a:ext cx="548640" cy="548640"/>
+          </a:xfrm>
+          <a:prstGeom prst="ellipse">
+            <a:avLst/>
+          </a:prstGeom>
+          <a:solidFill>
+            <a:srgbClr val="B9852F"/>
+          </a:solidFill>
+          <a:ln/>
+        </p:spPr>
+      </p:sp>
+      <p:sp>
+        <p:nvSpPr>
+          <p:cNvPr id="14" name="Text 12"/>
+          <p:cNvSpPr/>
+          <p:nvPr/>
+        </p:nvSpPr>
+        <p:spPr>
+          <a:xfrm>
+            <a:off x="8778240" y="3383280"/>
+            <a:ext cx="2651760" cy="548640"/>
+          </a:xfrm>
+          <a:prstGeom prst="rect">
+            <a:avLst/>
+          </a:prstGeom>
+          <a:noFill/>
+          <a:ln/>
+        </p:spPr>
+        <p:txBody>
+          <a:bodyPr wrap="square" rtlCol="0" anchor="ctr"/>
+          <a:lstStyle/>
+          <a:p>
+            <a:pPr indent="0" marL="0">
+              <a:buNone/>
+            </a:pPr>
+            <a:r>
+              <a:rPr lang="en-US" sz="2100" b="1" dirty="0">
+                <a:solidFill>
+                  <a:srgbClr val="1A1A1A"/>
+                </a:solidFill>
+                <a:latin typeface="Cambria" pitchFamily="34" charset="0"/>
+                <a:ea typeface="Cambria" pitchFamily="34" charset="-122"/>
+                <a:cs typeface="Cambria" pitchFamily="34" charset="-120"/>
+              </a:rPr>
+              <a:t>Discussion</a:t>
+            </a:r>
+            <a:endParaRPr lang="en-US" sz="2100" dirty="0"/>
+          </a:p>
+        </p:txBody>
+      </p:sp>
+      <p:sp>
+        <p:nvSpPr>
+          <p:cNvPr id="15" name="Text 13"/>
+          <p:cNvSpPr/>
+          <p:nvPr/>
+        </p:nvSpPr>
+        <p:spPr>
+          <a:xfrm>
+            <a:off x="8778240" y="3977640"/>
+            <a:ext cx="2651760" cy="1371600"/>
+          </a:xfrm>
+          <a:prstGeom prst="rect">
+            <a:avLst/>
+          </a:prstGeom>
+          <a:noFill/>
+          <a:ln/>
+        </p:spPr>
+        <p:txBody>
+          <a:bodyPr wrap="square" rtlCol="0" anchor="t">
             <a:spAutoFit/>
           </a:bodyPr>
           <a:lstStyle/>
           <a:p>
             <a:pPr indent="0" marL="0">
-              <a:buNone/>
-            </a:pPr>
-            <a:r>
-              <a:rPr lang="en-US" sz="1100" dirty="0">
+              <a:lnSpc>
+                <a:spcPct val="115000"/>
+              </a:lnSpc>
+              <a:buNone/>
+            </a:pPr>
+            <a:r>
+              <a:rPr lang="en-US" sz="1500" dirty="0">
                 <a:solidFill>
                   <a:srgbClr val="1A1A1A"/>
                 </a:solidFill>
@@ -6572,723 +7521,9 @@
                 <a:ea typeface="Calibri" pitchFamily="34" charset="-122"/>
                 <a:cs typeface="Calibri" pitchFamily="34" charset="-120"/>
               </a:rPr>
-              <a:t>Teachable Machine, instructor demo: a two-class image model trained live, then the reveal that it learned from only orange cats and brown dogs. The room predicts what a black cat will do, then sees it.</a:t>
-            </a:r>
-            <a:endParaRPr lang="en-US" sz="1100" dirty="0"/>
-          </a:p>
-        </p:txBody>
-      </p:sp>
-      <p:sp>
-        <p:nvSpPr>
-          <p:cNvPr id="9" name="Shape 7"/>
-          <p:cNvSpPr/>
-          <p:nvPr/>
-        </p:nvSpPr>
-        <p:spPr>
-          <a:xfrm>
-            <a:off x="640080" y="2568448"/>
-            <a:ext cx="868680" cy="388112"/>
-          </a:xfrm>
-          <a:prstGeom prst="roundRect">
-            <a:avLst>
-              <a:gd name="adj" fmla="val 14136"/>
-            </a:avLst>
-          </a:prstGeom>
-          <a:solidFill>
-            <a:srgbClr val="7A3B2E"/>
-          </a:solidFill>
-          <a:ln/>
-        </p:spPr>
-      </p:sp>
-      <p:sp>
-        <p:nvSpPr>
-          <p:cNvPr id="10" name="Text 8"/>
-          <p:cNvSpPr/>
-          <p:nvPr/>
-        </p:nvSpPr>
-        <p:spPr>
-          <a:xfrm>
-            <a:off x="640080" y="2568448"/>
-            <a:ext cx="868680" cy="388112"/>
-          </a:xfrm>
-          <a:prstGeom prst="rect">
-            <a:avLst/>
-          </a:prstGeom>
-          <a:noFill/>
-          <a:ln/>
-        </p:spPr>
-        <p:txBody>
-          <a:bodyPr wrap="square" rtlCol="0" anchor="ctr"/>
-          <a:lstStyle/>
-          <a:p>
-            <a:pPr algn="ctr" indent="0" marL="0">
-              <a:buNone/>
-            </a:pPr>
-            <a:r>
-              <a:rPr lang="en-US" sz="1100" b="1" dirty="0">
-                <a:solidFill>
-                  <a:srgbClr val="FFFFFF"/>
-                </a:solidFill>
-                <a:latin typeface="Calibri" pitchFamily="34" charset="0"/>
-                <a:ea typeface="Calibri" pitchFamily="34" charset="-122"/>
-                <a:cs typeface="Calibri" pitchFamily="34" charset="-120"/>
-              </a:rPr>
-              <a:t>0:22</a:t>
-            </a:r>
-            <a:endParaRPr lang="en-US" sz="1100" dirty="0"/>
-          </a:p>
-        </p:txBody>
-      </p:sp>
-      <p:sp>
-        <p:nvSpPr>
-          <p:cNvPr id="11" name="Text 9"/>
-          <p:cNvSpPr/>
-          <p:nvPr/>
-        </p:nvSpPr>
-        <p:spPr>
-          <a:xfrm>
-            <a:off x="1691640" y="2550160"/>
-            <a:ext cx="9646920" cy="497840"/>
-          </a:xfrm>
-          <a:prstGeom prst="rect">
-            <a:avLst/>
-          </a:prstGeom>
-          <a:noFill/>
-          <a:ln/>
-        </p:spPr>
-        <p:txBody>
-          <a:bodyPr wrap="square" rtlCol="0" anchor="ctr">
-            <a:spAutoFit/>
-          </a:bodyPr>
-          <a:lstStyle/>
-          <a:p>
-            <a:pPr indent="0" marL="0">
-              <a:buNone/>
-            </a:pPr>
-            <a:r>
-              <a:rPr lang="en-US" sz="1100" dirty="0">
-                <a:solidFill>
-                  <a:srgbClr val="1A1A1A"/>
-                </a:solidFill>
-                <a:latin typeface="Calibri" pitchFamily="34" charset="0"/>
-                <a:ea typeface="Calibri" pitchFamily="34" charset="-122"/>
-                <a:cs typeface="Calibri" pitchFamily="34" charset="-120"/>
-              </a:rPr>
-              <a:t>Counting with weights, the lab: each word casts a weighted vote; a logistic regression adds them up. Train it live on a hard pair, r/sandiego against r/SanDiegan, one city, two communities, then read the signed coefficients: the model's reasoning, laid out in full. Accuracy sits near 60 percent, and the words earning it are the discussion.</a:t>
-            </a:r>
-            <a:endParaRPr lang="en-US" sz="1100" dirty="0"/>
-          </a:p>
-        </p:txBody>
-      </p:sp>
-      <p:sp>
-        <p:nvSpPr>
-          <p:cNvPr id="12" name="Shape 10"/>
-          <p:cNvSpPr/>
-          <p:nvPr/>
-        </p:nvSpPr>
-        <p:spPr>
-          <a:xfrm>
-            <a:off x="640080" y="3066288"/>
-            <a:ext cx="868680" cy="388112"/>
-          </a:xfrm>
-          <a:prstGeom prst="roundRect">
-            <a:avLst>
-              <a:gd name="adj" fmla="val 14136"/>
-            </a:avLst>
-          </a:prstGeom>
-          <a:solidFill>
-            <a:srgbClr val="7A3B2E"/>
-          </a:solidFill>
-          <a:ln/>
-        </p:spPr>
-      </p:sp>
-      <p:sp>
-        <p:nvSpPr>
-          <p:cNvPr id="13" name="Text 11"/>
-          <p:cNvSpPr/>
-          <p:nvPr/>
-        </p:nvSpPr>
-        <p:spPr>
-          <a:xfrm>
-            <a:off x="640080" y="3066288"/>
-            <a:ext cx="868680" cy="388112"/>
-          </a:xfrm>
-          <a:prstGeom prst="rect">
-            <a:avLst/>
-          </a:prstGeom>
-          <a:noFill/>
-          <a:ln/>
-        </p:spPr>
-        <p:txBody>
-          <a:bodyPr wrap="square" rtlCol="0" anchor="ctr"/>
-          <a:lstStyle/>
-          <a:p>
-            <a:pPr algn="ctr" indent="0" marL="0">
-              <a:buNone/>
-            </a:pPr>
-            <a:r>
-              <a:rPr lang="en-US" sz="1100" b="1" dirty="0">
-                <a:solidFill>
-                  <a:srgbClr val="FFFFFF"/>
-                </a:solidFill>
-                <a:latin typeface="Calibri" pitchFamily="34" charset="0"/>
-                <a:ea typeface="Calibri" pitchFamily="34" charset="-122"/>
-                <a:cs typeface="Calibri" pitchFamily="34" charset="-120"/>
-              </a:rPr>
-              <a:t>0:52</a:t>
-            </a:r>
-            <a:endParaRPr lang="en-US" sz="1100" dirty="0"/>
-          </a:p>
-        </p:txBody>
-      </p:sp>
-      <p:sp>
-        <p:nvSpPr>
-          <p:cNvPr id="14" name="Text 12"/>
-          <p:cNvSpPr/>
-          <p:nvPr/>
-        </p:nvSpPr>
-        <p:spPr>
-          <a:xfrm>
-            <a:off x="1691640" y="3048000"/>
-            <a:ext cx="9646920" cy="497840"/>
-          </a:xfrm>
-          <a:prstGeom prst="rect">
-            <a:avLst/>
-          </a:prstGeom>
-          <a:noFill/>
-          <a:ln/>
-        </p:spPr>
-        <p:txBody>
-          <a:bodyPr wrap="square" rtlCol="0" anchor="ctr">
-            <a:spAutoFit/>
-          </a:bodyPr>
-          <a:lstStyle/>
-          <a:p>
-            <a:pPr indent="0" marL="0">
-              <a:buNone/>
-            </a:pPr>
-            <a:r>
-              <a:rPr lang="en-US" sz="1100" dirty="0">
-                <a:solidFill>
-                  <a:srgbClr val="1A1A1A"/>
-                </a:solidFill>
-                <a:latin typeface="Calibri" pitchFamily="34" charset="0"/>
-                <a:ea typeface="Calibri" pitchFamily="34" charset="-122"/>
-                <a:cs typeface="Calibri" pitchFamily="34" charset="-120"/>
-              </a:rPr>
-              <a:t>A short demonstration: the words that most predict "breakup song" or "this reviewer hated it."</a:t>
-            </a:r>
-            <a:endParaRPr lang="en-US" sz="1100" dirty="0"/>
-          </a:p>
-        </p:txBody>
-      </p:sp>
-      <p:sp>
-        <p:nvSpPr>
-          <p:cNvPr id="15" name="Shape 13"/>
-          <p:cNvSpPr/>
-          <p:nvPr/>
-        </p:nvSpPr>
-        <p:spPr>
-          <a:xfrm>
-            <a:off x="640080" y="3564128"/>
-            <a:ext cx="868680" cy="388112"/>
-          </a:xfrm>
-          <a:prstGeom prst="roundRect">
-            <a:avLst>
-              <a:gd name="adj" fmla="val 14136"/>
-            </a:avLst>
-          </a:prstGeom>
-          <a:solidFill>
-            <a:srgbClr val="7A3B2E"/>
-          </a:solidFill>
-          <a:ln/>
-        </p:spPr>
-      </p:sp>
-      <p:sp>
-        <p:nvSpPr>
-          <p:cNvPr id="16" name="Text 14"/>
-          <p:cNvSpPr/>
-          <p:nvPr/>
-        </p:nvSpPr>
-        <p:spPr>
-          <a:xfrm>
-            <a:off x="640080" y="3564128"/>
-            <a:ext cx="868680" cy="388112"/>
-          </a:xfrm>
-          <a:prstGeom prst="rect">
-            <a:avLst/>
-          </a:prstGeom>
-          <a:noFill/>
-          <a:ln/>
-        </p:spPr>
-        <p:txBody>
-          <a:bodyPr wrap="square" rtlCol="0" anchor="ctr"/>
-          <a:lstStyle/>
-          <a:p>
-            <a:pPr algn="ctr" indent="0" marL="0">
-              <a:buNone/>
-            </a:pPr>
-            <a:r>
-              <a:rPr lang="en-US" sz="1100" b="1" dirty="0">
-                <a:solidFill>
-                  <a:srgbClr val="FFFFFF"/>
-                </a:solidFill>
-                <a:latin typeface="Calibri" pitchFamily="34" charset="0"/>
-                <a:ea typeface="Calibri" pitchFamily="34" charset="-122"/>
-                <a:cs typeface="Calibri" pitchFamily="34" charset="-120"/>
-              </a:rPr>
-              <a:t>0:57</a:t>
-            </a:r>
-            <a:endParaRPr lang="en-US" sz="1100" dirty="0"/>
-          </a:p>
-        </p:txBody>
-      </p:sp>
-      <p:sp>
-        <p:nvSpPr>
-          <p:cNvPr id="17" name="Text 15"/>
-          <p:cNvSpPr/>
-          <p:nvPr/>
-        </p:nvSpPr>
-        <p:spPr>
-          <a:xfrm>
-            <a:off x="1691640" y="3545840"/>
-            <a:ext cx="9646920" cy="497840"/>
-          </a:xfrm>
-          <a:prstGeom prst="rect">
-            <a:avLst/>
-          </a:prstGeom>
-          <a:noFill/>
-          <a:ln/>
-        </p:spPr>
-        <p:txBody>
-          <a:bodyPr wrap="square" rtlCol="0" anchor="ctr">
-            <a:spAutoFit/>
-          </a:bodyPr>
-          <a:lstStyle/>
-          <a:p>
-            <a:pPr indent="0" marL="0">
-              <a:buNone/>
-            </a:pPr>
-            <a:r>
-              <a:rPr lang="en-US" sz="1100" dirty="0">
-                <a:solidFill>
-                  <a:srgbClr val="1A1A1A"/>
-                </a:solidFill>
-                <a:latin typeface="Calibri" pitchFamily="34" charset="0"/>
-                <a:ea typeface="Calibri" pitchFamily="34" charset="-122"/>
-                <a:cs typeface="Calibri" pitchFamily="34" charset="-120"/>
-              </a:rPr>
-              <a:t>One-line bridge: that classifier is a neuron; stack many for a neural net, which is what's inside the Week 7 model. A quick TensorFlow Playground glance.</a:t>
-            </a:r>
-            <a:endParaRPr lang="en-US" sz="1100" dirty="0"/>
-          </a:p>
-        </p:txBody>
-      </p:sp>
-      <p:sp>
-        <p:nvSpPr>
-          <p:cNvPr id="18" name="Shape 16"/>
-          <p:cNvSpPr/>
-          <p:nvPr/>
-        </p:nvSpPr>
-        <p:spPr>
-          <a:xfrm>
-            <a:off x="640080" y="4061968"/>
-            <a:ext cx="868680" cy="388112"/>
-          </a:xfrm>
-          <a:prstGeom prst="roundRect">
-            <a:avLst>
-              <a:gd name="adj" fmla="val 14136"/>
-            </a:avLst>
-          </a:prstGeom>
-          <a:solidFill>
-            <a:srgbClr val="7A3B2E"/>
-          </a:solidFill>
-          <a:ln/>
-        </p:spPr>
-      </p:sp>
-      <p:sp>
-        <p:nvSpPr>
-          <p:cNvPr id="19" name="Text 17"/>
-          <p:cNvSpPr/>
-          <p:nvPr/>
-        </p:nvSpPr>
-        <p:spPr>
-          <a:xfrm>
-            <a:off x="640080" y="4061968"/>
-            <a:ext cx="868680" cy="388112"/>
-          </a:xfrm>
-          <a:prstGeom prst="rect">
-            <a:avLst/>
-          </a:prstGeom>
-          <a:noFill/>
-          <a:ln/>
-        </p:spPr>
-        <p:txBody>
-          <a:bodyPr wrap="square" rtlCol="0" anchor="ctr"/>
-          <a:lstStyle/>
-          <a:p>
-            <a:pPr algn="ctr" indent="0" marL="0">
-              <a:buNone/>
-            </a:pPr>
-            <a:r>
-              <a:rPr lang="en-US" sz="1100" b="1" dirty="0">
-                <a:solidFill>
-                  <a:srgbClr val="FFFFFF"/>
-                </a:solidFill>
-                <a:latin typeface="Calibri" pitchFamily="34" charset="0"/>
-                <a:ea typeface="Calibri" pitchFamily="34" charset="-122"/>
-                <a:cs typeface="Calibri" pitchFamily="34" charset="-120"/>
-              </a:rPr>
-              <a:t>1:00</a:t>
-            </a:r>
-            <a:endParaRPr lang="en-US" sz="1100" dirty="0"/>
-          </a:p>
-        </p:txBody>
-      </p:sp>
-      <p:sp>
-        <p:nvSpPr>
-          <p:cNvPr id="20" name="Text 18"/>
-          <p:cNvSpPr/>
-          <p:nvPr/>
-        </p:nvSpPr>
-        <p:spPr>
-          <a:xfrm>
-            <a:off x="1691640" y="4043680"/>
-            <a:ext cx="9646920" cy="497840"/>
-          </a:xfrm>
-          <a:prstGeom prst="rect">
-            <a:avLst/>
-          </a:prstGeom>
-          <a:noFill/>
-          <a:ln/>
-        </p:spPr>
-        <p:txBody>
-          <a:bodyPr wrap="square" rtlCol="0" anchor="ctr">
-            <a:spAutoFit/>
-          </a:bodyPr>
-          <a:lstStyle/>
-          <a:p>
-            <a:pPr indent="0" marL="0">
-              <a:buNone/>
-            </a:pPr>
-            <a:r>
-              <a:rPr lang="en-US" sz="1100" dirty="0">
-                <a:solidFill>
-                  <a:srgbClr val="1A1A1A"/>
-                </a:solidFill>
-                <a:latin typeface="Calibri" pitchFamily="34" charset="0"/>
-                <a:ea typeface="Calibri" pitchFamily="34" charset="-122"/>
-                <a:cs typeface="Calibri" pitchFamily="34" charset="-120"/>
-              </a:rPr>
-              <a:t>Break</a:t>
-            </a:r>
-            <a:endParaRPr lang="en-US" sz="1100" dirty="0"/>
-          </a:p>
-        </p:txBody>
-      </p:sp>
-      <p:sp>
-        <p:nvSpPr>
-          <p:cNvPr id="21" name="Shape 19"/>
-          <p:cNvSpPr/>
-          <p:nvPr/>
-        </p:nvSpPr>
-        <p:spPr>
-          <a:xfrm>
-            <a:off x="640080" y="4559808"/>
-            <a:ext cx="868680" cy="388112"/>
-          </a:xfrm>
-          <a:prstGeom prst="roundRect">
-            <a:avLst>
-              <a:gd name="adj" fmla="val 14136"/>
-            </a:avLst>
-          </a:prstGeom>
-          <a:solidFill>
-            <a:srgbClr val="7A3B2E"/>
-          </a:solidFill>
-          <a:ln/>
-        </p:spPr>
-      </p:sp>
-      <p:sp>
-        <p:nvSpPr>
-          <p:cNvPr id="22" name="Text 20"/>
-          <p:cNvSpPr/>
-          <p:nvPr/>
-        </p:nvSpPr>
-        <p:spPr>
-          <a:xfrm>
-            <a:off x="640080" y="4559808"/>
-            <a:ext cx="868680" cy="388112"/>
-          </a:xfrm>
-          <a:prstGeom prst="rect">
-            <a:avLst/>
-          </a:prstGeom>
-          <a:noFill/>
-          <a:ln/>
-        </p:spPr>
-        <p:txBody>
-          <a:bodyPr wrap="square" rtlCol="0" anchor="ctr"/>
-          <a:lstStyle/>
-          <a:p>
-            <a:pPr algn="ctr" indent="0" marL="0">
-              <a:buNone/>
-            </a:pPr>
-            <a:r>
-              <a:rPr lang="en-US" sz="1100" b="1" dirty="0">
-                <a:solidFill>
-                  <a:srgbClr val="FFFFFF"/>
-                </a:solidFill>
-                <a:latin typeface="Calibri" pitchFamily="34" charset="0"/>
-                <a:ea typeface="Calibri" pitchFamily="34" charset="-122"/>
-                <a:cs typeface="Calibri" pitchFamily="34" charset="-120"/>
-              </a:rPr>
-              <a:t>1:10</a:t>
-            </a:r>
-            <a:endParaRPr lang="en-US" sz="1100" dirty="0"/>
-          </a:p>
-        </p:txBody>
-      </p:sp>
-      <p:sp>
-        <p:nvSpPr>
-          <p:cNvPr id="23" name="Text 21"/>
-          <p:cNvSpPr/>
-          <p:nvPr/>
-        </p:nvSpPr>
-        <p:spPr>
-          <a:xfrm>
-            <a:off x="1691640" y="4541520"/>
-            <a:ext cx="9646920" cy="497840"/>
-          </a:xfrm>
-          <a:prstGeom prst="rect">
-            <a:avLst/>
-          </a:prstGeom>
-          <a:noFill/>
-          <a:ln/>
-        </p:spPr>
-        <p:txBody>
-          <a:bodyPr wrap="square" rtlCol="0" anchor="ctr">
-            <a:spAutoFit/>
-          </a:bodyPr>
-          <a:lstStyle/>
-          <a:p>
-            <a:pPr indent="0" marL="0">
-              <a:buNone/>
-            </a:pPr>
-            <a:r>
-              <a:rPr lang="en-US" sz="1100" dirty="0">
-                <a:solidFill>
-                  <a:srgbClr val="1A1A1A"/>
-                </a:solidFill>
-                <a:latin typeface="Calibri" pitchFamily="34" charset="0"/>
-                <a:ea typeface="Calibri" pitchFamily="34" charset="-122"/>
-                <a:cs typeface="Calibri" pitchFamily="34" charset="-120"/>
-              </a:rPr>
-              <a:t>Methods menu preview, so Week 4's choice is informed: counting, classification, embeddings (Week 5), and optional approaches (character networks for fiction; sentiment arcs for story projects, Jockers's Syuzhet reproducible in Python, whose own smoothing controversy is the built-in lesson to doubt the shape; CLIP image search for visual projects; and, for the technically comfortable, fine-tuning a small open model, ModernBERT, on your own labels).</a:t>
-            </a:r>
-            <a:endParaRPr lang="en-US" sz="1100" dirty="0"/>
-          </a:p>
-        </p:txBody>
-      </p:sp>
-      <p:sp>
-        <p:nvSpPr>
-          <p:cNvPr id="24" name="Shape 22"/>
-          <p:cNvSpPr/>
-          <p:nvPr/>
-        </p:nvSpPr>
-        <p:spPr>
-          <a:xfrm>
-            <a:off x="640080" y="5057648"/>
-            <a:ext cx="868680" cy="388112"/>
-          </a:xfrm>
-          <a:prstGeom prst="roundRect">
-            <a:avLst>
-              <a:gd name="adj" fmla="val 14136"/>
-            </a:avLst>
-          </a:prstGeom>
-          <a:solidFill>
-            <a:srgbClr val="7A3B2E"/>
-          </a:solidFill>
-          <a:ln/>
-        </p:spPr>
-      </p:sp>
-      <p:sp>
-        <p:nvSpPr>
-          <p:cNvPr id="25" name="Text 23"/>
-          <p:cNvSpPr/>
-          <p:nvPr/>
-        </p:nvSpPr>
-        <p:spPr>
-          <a:xfrm>
-            <a:off x="640080" y="5057648"/>
-            <a:ext cx="868680" cy="388112"/>
-          </a:xfrm>
-          <a:prstGeom prst="rect">
-            <a:avLst/>
-          </a:prstGeom>
-          <a:noFill/>
-          <a:ln/>
-        </p:spPr>
-        <p:txBody>
-          <a:bodyPr wrap="square" rtlCol="0" anchor="ctr"/>
-          <a:lstStyle/>
-          <a:p>
-            <a:pPr algn="ctr" indent="0" marL="0">
-              <a:buNone/>
-            </a:pPr>
-            <a:r>
-              <a:rPr lang="en-US" sz="1100" b="1" dirty="0">
-                <a:solidFill>
-                  <a:srgbClr val="FFFFFF"/>
-                </a:solidFill>
-                <a:latin typeface="Calibri" pitchFamily="34" charset="0"/>
-                <a:ea typeface="Calibri" pitchFamily="34" charset="-122"/>
-                <a:cs typeface="Calibri" pitchFamily="34" charset="-120"/>
-              </a:rPr>
-              <a:t>1:25</a:t>
-            </a:r>
-            <a:endParaRPr lang="en-US" sz="1100" dirty="0"/>
-          </a:p>
-        </p:txBody>
-      </p:sp>
-      <p:sp>
-        <p:nvSpPr>
-          <p:cNvPr id="26" name="Text 24"/>
-          <p:cNvSpPr/>
-          <p:nvPr/>
-        </p:nvSpPr>
-        <p:spPr>
-          <a:xfrm>
-            <a:off x="1691640" y="5039360"/>
-            <a:ext cx="9646920" cy="497840"/>
-          </a:xfrm>
-          <a:prstGeom prst="rect">
-            <a:avLst/>
-          </a:prstGeom>
-          <a:noFill/>
-          <a:ln/>
-        </p:spPr>
-        <p:txBody>
-          <a:bodyPr wrap="square" rtlCol="0" anchor="ctr">
-            <a:spAutoFit/>
-          </a:bodyPr>
-          <a:lstStyle/>
-          <a:p>
-            <a:pPr indent="0" marL="0">
-              <a:buNone/>
-            </a:pPr>
-            <a:r>
-              <a:rPr lang="en-US" sz="1100" dirty="0">
-                <a:solidFill>
-                  <a:srgbClr val="1A1A1A"/>
-                </a:solidFill>
-                <a:latin typeface="Calibri" pitchFamily="34" charset="0"/>
-                <a:ea typeface="Calibri" pitchFamily="34" charset="-122"/>
-                <a:cs typeface="Calibri" pitchFamily="34" charset="-120"/>
-              </a:rPr>
-              <a:t>Pitch prep: what makes a tractable question, and the corpus-existence rule.</a:t>
-            </a:r>
-            <a:endParaRPr lang="en-US" sz="1100" dirty="0"/>
-          </a:p>
-        </p:txBody>
-      </p:sp>
-      <p:sp>
-        <p:nvSpPr>
-          <p:cNvPr id="27" name="Shape 25"/>
-          <p:cNvSpPr/>
-          <p:nvPr/>
-        </p:nvSpPr>
-        <p:spPr>
-          <a:xfrm>
-            <a:off x="640080" y="5555488"/>
-            <a:ext cx="868680" cy="388112"/>
-          </a:xfrm>
-          <a:prstGeom prst="roundRect">
-            <a:avLst>
-              <a:gd name="adj" fmla="val 14136"/>
-            </a:avLst>
-          </a:prstGeom>
-          <a:solidFill>
-            <a:srgbClr val="7A3B2E"/>
-          </a:solidFill>
-          <a:ln/>
-        </p:spPr>
-      </p:sp>
-      <p:sp>
-        <p:nvSpPr>
-          <p:cNvPr id="28" name="Text 26"/>
-          <p:cNvSpPr/>
-          <p:nvPr/>
-        </p:nvSpPr>
-        <p:spPr>
-          <a:xfrm>
-            <a:off x="640080" y="5555488"/>
-            <a:ext cx="868680" cy="388112"/>
-          </a:xfrm>
-          <a:prstGeom prst="rect">
-            <a:avLst/>
-          </a:prstGeom>
-          <a:noFill/>
-          <a:ln/>
-        </p:spPr>
-        <p:txBody>
-          <a:bodyPr wrap="square" rtlCol="0" anchor="ctr"/>
-          <a:lstStyle/>
-          <a:p>
-            <a:pPr algn="ctr" indent="0" marL="0">
-              <a:buNone/>
-            </a:pPr>
-            <a:r>
-              <a:rPr lang="en-US" sz="1100" b="1" dirty="0">
-                <a:solidFill>
-                  <a:srgbClr val="FFFFFF"/>
-                </a:solidFill>
-                <a:latin typeface="Calibri" pitchFamily="34" charset="0"/>
-                <a:ea typeface="Calibri" pitchFamily="34" charset="-122"/>
-                <a:cs typeface="Calibri" pitchFamily="34" charset="-120"/>
-              </a:rPr>
-              <a:t>1:45</a:t>
-            </a:r>
-            <a:endParaRPr lang="en-US" sz="1100" dirty="0"/>
-          </a:p>
-        </p:txBody>
-      </p:sp>
-      <p:sp>
-        <p:nvSpPr>
-          <p:cNvPr id="29" name="Text 27"/>
-          <p:cNvSpPr/>
-          <p:nvPr/>
-        </p:nvSpPr>
-        <p:spPr>
-          <a:xfrm>
-            <a:off x="1691640" y="5537200"/>
-            <a:ext cx="9646920" cy="497840"/>
-          </a:xfrm>
-          <a:prstGeom prst="rect">
-            <a:avLst/>
-          </a:prstGeom>
-          <a:noFill/>
-          <a:ln/>
-        </p:spPr>
-        <p:txBody>
-          <a:bodyPr wrap="square" rtlCol="0" anchor="ctr">
-            <a:spAutoFit/>
-          </a:bodyPr>
-          <a:lstStyle/>
-          <a:p>
-            <a:pPr indent="0" marL="0">
-              <a:buNone/>
-            </a:pPr>
-            <a:r>
-              <a:rPr lang="en-US" sz="1100" dirty="0">
-                <a:solidFill>
-                  <a:srgbClr val="1A1A1A"/>
-                </a:solidFill>
-                <a:latin typeface="Calibri" pitchFamily="34" charset="0"/>
-                <a:ea typeface="Calibri" pitchFamily="34" charset="-122"/>
-                <a:cs typeface="Calibri" pitchFamily="34" charset="-120"/>
-              </a:rPr>
-              <a:t>Gemini-free check and check-out.</a:t>
-            </a:r>
-            <a:endParaRPr lang="en-US" sz="1100" dirty="0"/>
+              <a:t>Interrogate the study, debate it, or critique each other's work.</a:t>
+            </a:r>
+            <a:endParaRPr lang="en-US" sz="1500" dirty="0"/>
           </a:p>
         </p:txBody>
       </p:sp>

--- a/slides/pptx/week-03.pptx
+++ b/slides/pptx/week-03.pptx
@@ -3037,7 +3037,7 @@
                 <a:ea typeface="Calibri" pitchFamily="34" charset="-122"/>
                 <a:cs typeface="Calibri" pitchFamily="34" charset="-120"/>
               </a:rPr>
-              <a:t>Group work in Colab, threes, one screen, rotating driver / reader / skeptic. The blank notebook (week03_modeling_TOGETHER) has stations, not answers: pick your two piles, build the features, fit it, judge it against the baseline, read its mind, break it with something from neither pile, then change ONE modelling decision (min_df, tf-idf, bigrams, C, class_weight) and fit again. Several models, side by side, is the point: does the accuracy move, and do the top words change more than the accuracy does?</a:t>
+              <a:t>Group work in Colab, threes, one screen, rotating driver / reader / skeptic. The notebook (week03_modeling_TOGETHER) is guided but blank, a worked six-sentence warm-up and then stations, not answers: pick your two piles, build the features, fit it, judge it against the baseline, read its mind, break it with something from neither pile, then change ONE modelling decision (min_df, tf-idf, bigrams, C, class_weight) and fit again. Several models, side by side, is the point: does the accuracy move, and do the top words change more than the accuracy does?</a:t>
             </a:r>
             <a:endParaRPr lang="en-US" sz="1250" dirty="0"/>
           </a:p>

--- a/slides/pptx/week-03.pptx
+++ b/slides/pptx/week-03.pptx
@@ -3037,7 +3037,7 @@
                 <a:ea typeface="Calibri" pitchFamily="34" charset="-122"/>
                 <a:cs typeface="Calibri" pitchFamily="34" charset="-120"/>
               </a:rPr>
-              <a:t>Group work in Colab, threes, one screen, rotating driver / reader / skeptic. The notebook (week03_modeling_TOGETHER) is guided but blank, a worked six-sentence warm-up and then stations, not answers: pick your two piles, build the features, fit it, judge it against the baseline, read its mind, break it with something from neither pile, then change ONE modelling decision (min_df, tf-idf, bigrams, C, class_weight) and fit again. Several models, side by side, is the point: does the accuracy move, and do the top words change more than the accuracy does?</a:t>
+              <a:t>Group work in Colab, threes, one screen, rotating driver / reader / skeptic. The notebook (week03_modeling_TOGETHER) is guided but blank, a worked six-sentence warm-up and then stations, not answers: pick your two piles, build the features, fit it, judge it against the baseline, read its mind, break it with something from neither pile. Then the workbench, where the plumbing is provided so the minutes go on choices: fit_model() sweeps min_df, tf-idf, bigrams, C, class_weight and stop words into one comparison table (sliders for the groups who prefer them), why() interrogates a single weight (which pile, how many documents, how many different people, the word in use), contributions() shows how any typed sentence was decided, and use_pair() swaps in two communities of your own so you can ask which findings survive a change of corpus rather than a change of model.</a:t>
             </a:r>
             <a:endParaRPr lang="en-US" sz="1250" dirty="0"/>
           </a:p>

--- a/slides/pptx/week-03.pptx
+++ b/slides/pptx/week-03.pptx
@@ -3037,7 +3037,7 @@
                 <a:ea typeface="Calibri" pitchFamily="34" charset="-122"/>
                 <a:cs typeface="Calibri" pitchFamily="34" charset="-120"/>
               </a:rPr>
-              <a:t>Group work in Colab, threes, one screen, rotating driver / reader / skeptic. The notebook (week03_modeling_TOGETHER) is guided but blank, a worked six-sentence warm-up and then stations, not answers: pick your two piles, build the features, fit it, judge it against the baseline, read its mind, break it with something from neither pile. Then the workbench, where the plumbing is provided so the minutes go on choices: fit_model() sweeps min_df, tf-idf, bigrams, C, class_weight and stop words into one comparison table (sliders for the groups who prefer them), why() interrogates a single weight (which pile, how many documents, how many different people, the word in use), contributions() shows how any typed sentence was decided, and use_pair() swaps in two communities of your own so you can ask which findings survive a change of corpus rather than a change of model.</a:t>
+              <a:t>Group work in Colab, threes, one screen, rotating driver / reader / skeptic. The notebook (week03_modeling_TOGETHER) is guided but blank, a worked six-sentence warm-up and then stations, not answers: pick your two piles, build the features, fit it, judge it against the baseline, read its mind, break it with something from neither pile. Then the workbench, where the plumbing is provided so the minutes go on choices: fit_model() sweeps min_df, tf-idf, bigrams, C, class_weight and stop words into one comparison table (sliders for the groups who prefer them), why() interrogates a single weight (which pile, how many documents, the word in use) so a group can strip out the giveaway place names and refit to see what is underneath, contributions() shows how any typed sentence was decided, and use_pair() swaps in two communities of your own so you can ask which findings survive a change of corpus rather than a change of model.</a:t>
             </a:r>
             <a:endParaRPr lang="en-US" sz="1250" dirty="0"/>
           </a:p>

--- a/slides/pptx/week-03.pptx
+++ b/slides/pptx/week-03.pptx
@@ -2833,7 +2833,7 @@
                 <a:ea typeface="Calibri" pitchFamily="34" charset="-122"/>
                 <a:cs typeface="Calibri" pitchFamily="34" charset="-120"/>
               </a:rPr>
-              <a:t>Lecture, modelling in practice: a model is features, weights, a fit, and a score you would believe. Built live on screen, mistakes included, in this order, turn text into a matrix, split off data the model never sees, fit it, compare the score against a baseline that always guesses the bigger pile, then read the signed weights. Then what goes wrong in practice: scoring on the training rows, an imbalanced pair flattering itself, a leaked giveaway feature, and the model with no "neither" box. Teachable Machine's orange cats and brown dogs is the sixty-second version of all of it; the bias is the training set, and you assembled it.</a:t>
+              <a:t>Lecture, modelling in practice: a model is features, weights, a fit, and a score you would believe. Built live on screen, mistakes included, in this order, turn text into a matrix, split off data the model never sees, fit it, compare the score against a baseline that always guesses the bigger pile, then read the signed weights. Then what goes wrong in practice: scoring on the training rows, an imbalanced pair flattering itself, a leaked giveaway feature, and the model with no "neither" box. Two browser tools carry the last five minutes: Quick, Draw! (a classifier guessing your doodle, so the room meets one it can play with) and Teachable Machine's orange cats and brown dogs, where the bias turns out to be the training set you assembled.</a:t>
             </a:r>
             <a:endParaRPr lang="en-US" sz="1250" dirty="0"/>
           </a:p>
